--- a/docs/notes/Slides/Mina_Progress_Slides_2026-10-22.pptx
+++ b/docs/notes/Slides/Mina_Progress_Slides_2026-10-22.pptx
@@ -4863,7 +4863,7 @@
                   <a:srgbClr val="615D59"/>
                 </a:solidFill>
               </a:rPr>
-              <a:t> IsoFormer's aggregator with memory-safe batching; the grid generalised so any Stage 1 encoder but DNABERT-2 can take any slot.</a:t>
+              <a:t> IsoFormer's aggregator with memory-safe batching; the grid generalized so any Stage 1 encoder but DNABERT-2 can take any slot.</a:t>
             </a:r>
             <a:endParaRPr lang="en-US" sz="1250" dirty="0"/>
           </a:p>
@@ -13171,7 +13171,7 @@
                   <a:schemeClr val="tx1"/>
                 </a:solidFill>
               </a:rPr>
-              <a:t>The published stability split is mostly memorisation: every model drops 0.2 on unseen sequences</a:t>
+              <a:t>The published stability split is mostly memorization: every model drops 0.2 on unseen sequences</a:t>
             </a:r>
             <a:endParaRPr lang="en-US" sz="2500" dirty="0"/>
           </a:p>

--- a/docs/notes/Slides/Mina_Progress_Slides_2026-10-22.pptx
+++ b/docs/notes/Slides/Mina_Progress_Slides_2026-10-22.pptx
@@ -15,9 +15,12 @@
     <p:sldId id="263" r:id="rId9"/>
     <p:sldId id="264" r:id="rId10"/>
     <p:sldId id="265" r:id="rId11"/>
+    <p:sldId id="266" r:id="rId12"/>
+    <p:sldId id="267" r:id="rId13"/>
+    <p:sldId id="268" r:id="rId14"/>
   </p:sldIdLst>
   <p:notesMasterIdLst>
-    <p:notesMasterId r:id="rId12"/>
+    <p:notesMasterId r:id="rId15"/>
   </p:notesMasterIdLst>
   <p:sldSz cx="12192000" cy="6858000"/>
   <p:notesSz cx="6858000" cy="12192000"/>
@@ -847,6 +850,308 @@
 </c:chartSpace>
 </file>
 
+<file path=ppt/charts/chart3.xml><?xml version="1.0" encoding="utf-8"?>
+<c:chartSpace xmlns:c="http://schemas.openxmlformats.org/drawingml/2006/chart" xmlns:a="http://schemas.openxmlformats.org/drawingml/2006/main" xmlns:r="http://schemas.openxmlformats.org/officeDocument/2006/relationships">
+  <c:date1904 val="0"/>
+  <c:roundedCorners val="1"/>
+  <c:chart>
+    <c:title>
+      <c:tx>
+        <c:rich>
+          <a:bodyPr/>
+          <a:lstStyle/>
+          <a:p>
+            <a:pPr>
+              <a:defRPr sz="1200" b="0" i="0" u="none" strike="noStrike">
+                <a:solidFill>
+                  <a:srgbClr val="31302E"/>
+                </a:solidFill>
+                <a:latin typeface="+mn-lt"/>
+              </a:defRPr>
+            </a:pPr>
+            <a:r>
+              <a:rPr sz="1200" b="0" i="0" u="none" strike="noStrike">
+                <a:solidFill>
+                  <a:srgbClr val="31302E"/>
+                </a:solidFill>
+                <a:latin typeface="+mn-lt"/>
+              </a:rPr>
+              <a:t>Probe Spearman on mRNA stability, published test split</a:t>
+            </a:r>
+          </a:p>
+        </c:rich>
+      </c:tx>
+      <c:layout/>
+      <c:overlay val="0"/>
+    </c:title>
+    <c:autoTitleDeleted val="0"/>
+    <c:plotArea>
+      <c:layout/>
+      <c:barChart>
+        <c:barDir val="col"/>
+        <c:grouping val="clustered"/>
+        <c:varyColors val="0"/>
+        <c:ser>
+          <c:idx val="0"/>
+          <c:order val="0"/>
+          <c:tx>
+            <c:strRef>
+              <c:f>Sheet1!$B$1</c:f>
+              <c:strCache>
+                <c:ptCount val="1"/>
+                <c:pt idx="0">
+                  <c:v>Probe Spearman</c:v>
+                </c:pt>
+              </c:strCache>
+            </c:strRef>
+          </c:tx>
+          <c:spPr>
+            <a:solidFill>
+              <a:srgbClr val="213183"/>
+            </a:solidFill>
+            <a:effectLst/>
+          </c:spPr>
+          <c:invertIfNegative val="0"/>
+          <c:dLbls>
+            <c:numFmt formatCode="0.000" sourceLinked="0"/>
+            <c:txPr>
+              <a:bodyPr/>
+              <a:lstStyle/>
+              <a:p>
+                <a:pPr>
+                  <a:defRPr b="0" i="0" strike="noStrike" sz="1000" u="none">
+                    <a:solidFill>
+                      <a:srgbClr val="31302E"/>
+                    </a:solidFill>
+                    <a:latin typeface="+mn-lt"/>
+                  </a:defRPr>
+                </a:pPr>
+              </a:p>
+            </c:txPr>
+            <c:showLegendKey val="0"/>
+            <c:showVal val="1"/>
+            <c:showCatName val="0"/>
+            <c:showSerName val="0"/>
+            <c:showPercent val="0"/>
+            <c:showBubbleSize val="0"/>
+            <c:showLeaderLines val="0"/>
+          </c:dLbls>
+          <c:cat>
+            <c:multiLvlStrRef>
+              <c:f>Sheet1!$A$2:$A$9</c:f>
+              <c:multiLvlStrCache>
+                <c:ptCount val="8"/>
+                <c:lvl>
+                  <c:pt idx="0">
+                    <c:v>Composition</c:v>
+                  </c:pt>
+                  <c:pt idx="1">
+                    <c:v>NT v2 100M</c:v>
+                  </c:pt>
+                  <c:pt idx="2">
+                    <c:v>RNA-FM</c:v>
+                  </c:pt>
+                  <c:pt idx="3">
+                    <c:v>ESM-2 8M</c:v>
+                  </c:pt>
+                  <c:pt idx="4">
+                    <c:v>BLF three fused</c:v>
+                  </c:pt>
+                  <c:pt idx="5">
+                    <c:v>LucaOne gene</c:v>
+                  </c:pt>
+                  <c:pt idx="6">
+                    <c:v>LucaOne protein</c:v>
+                  </c:pt>
+                  <c:pt idx="7">
+                    <c:v>LucaOne both</c:v>
+                  </c:pt>
+                </c:lvl>
+              </c:multiLvlStrCache>
+            </c:multiLvlStrRef>
+          </c:cat>
+          <c:val>
+            <c:numRef>
+              <c:f>Sheet1!$B$2:$B$9</c:f>
+              <c:numCache>
+                <c:formatCode>General</c:formatCode>
+                <c:ptCount val="8"/>
+                <c:pt idx="0">
+                  <c:v>0.283</c:v>
+                </c:pt>
+                <c:pt idx="1">
+                  <c:v>0.312</c:v>
+                </c:pt>
+                <c:pt idx="2">
+                  <c:v>0.308</c:v>
+                </c:pt>
+                <c:pt idx="3">
+                  <c:v>0.309</c:v>
+                </c:pt>
+                <c:pt idx="4">
+                  <c:v>0.39</c:v>
+                </c:pt>
+                <c:pt idx="5">
+                  <c:v>0.443</c:v>
+                </c:pt>
+                <c:pt idx="6">
+                  <c:v>0.401</c:v>
+                </c:pt>
+                <c:pt idx="7">
+                  <c:v>0.483</c:v>
+                </c:pt>
+              </c:numCache>
+            </c:numRef>
+          </c:val>
+        </c:ser>
+        <c:dLbls>
+          <c:numFmt formatCode="0.000" sourceLinked="0"/>
+          <c:txPr>
+            <a:bodyPr/>
+            <a:lstStyle/>
+            <a:p>
+              <a:pPr>
+                <a:defRPr b="0" i="0" strike="noStrike" sz="1000" u="none">
+                  <a:solidFill>
+                    <a:srgbClr val="31302E"/>
+                  </a:solidFill>
+                  <a:latin typeface="+mn-lt"/>
+                </a:defRPr>
+              </a:pPr>
+            </a:p>
+          </c:txPr>
+          <c:showLegendKey val="0"/>
+          <c:showVal val="1"/>
+          <c:showCatName val="0"/>
+          <c:showSerName val="0"/>
+          <c:showPercent val="0"/>
+          <c:showBubbleSize val="0"/>
+          <c:showLeaderLines val="0"/>
+        </c:dLbls>
+        <c:gapWidth val="50"/>
+        <c:overlap val="0"/>
+        <c:axId val="2094734554"/>
+        <c:axId val="2094734552"/>
+        <c:axId val="2094734556"/>
+      </c:barChart>
+      <c:catAx>
+        <c:axId val="2094734554"/>
+        <c:scaling>
+          <c:orientation val="minMax"/>
+        </c:scaling>
+        <c:delete val="0"/>
+        <c:axPos val="b"/>
+        <c:numFmt formatCode="General" sourceLinked="1"/>
+        <c:majorTickMark val="out"/>
+        <c:minorTickMark val="none"/>
+        <c:tickLblPos val="low"/>
+        <c:spPr>
+          <a:ln w="12700" cap="flat">
+            <a:solidFill>
+              <a:srgbClr val="888888"/>
+            </a:solidFill>
+            <a:prstDash val="solid"/>
+            <a:round/>
+          </a:ln>
+        </c:spPr>
+        <c:txPr>
+          <a:bodyPr/>
+          <a:lstStyle/>
+          <a:p>
+            <a:pPr>
+              <a:defRPr sz="1000" b="0" i="0" u="none" strike="noStrike">
+                <a:solidFill>
+                  <a:srgbClr val="31302E"/>
+                </a:solidFill>
+                <a:latin typeface="+mn-lt"/>
+              </a:defRPr>
+            </a:pPr>
+            <a:endParaRPr lang="en-US"/>
+          </a:p>
+        </c:txPr>
+        <c:crossAx val="2094734552"/>
+        <c:crosses val="autoZero"/>
+        <c:auto val="1"/>
+        <c:lblAlgn val="ctr"/>
+        <c:noMultiLvlLbl val="1"/>
+      </c:catAx>
+      <c:valAx>
+        <c:axId val="2094734552"/>
+        <c:scaling>
+          <c:orientation val="minMax"/>
+          <c:max val="0.55"/>
+          <c:min val="0"/>
+        </c:scaling>
+        <c:delete val="0"/>
+        <c:axPos val="l"/>
+        <c:majorGridlines>
+          <c:spPr>
+            <a:ln w="6350" cap="flat">
+              <a:solidFill>
+                <a:srgbClr val="E6E6E6"/>
+              </a:solidFill>
+              <a:prstDash val="solid"/>
+              <a:round/>
+            </a:ln>
+          </c:spPr>
+        </c:majorGridlines>
+        <c:numFmt formatCode="General" sourceLinked="0"/>
+        <c:majorTickMark val="out"/>
+        <c:minorTickMark val="none"/>
+        <c:tickLblPos val="nextTo"/>
+        <c:spPr>
+          <a:ln w="12700" cap="flat">
+            <a:solidFill>
+              <a:srgbClr val="888888"/>
+            </a:solidFill>
+            <a:prstDash val="solid"/>
+            <a:round/>
+          </a:ln>
+        </c:spPr>
+        <c:txPr>
+          <a:bodyPr/>
+          <a:lstStyle/>
+          <a:p>
+            <a:pPr>
+              <a:defRPr sz="1000" b="0" i="0" u="none" strike="noStrike">
+                <a:solidFill>
+                  <a:srgbClr val="615D59"/>
+                </a:solidFill>
+                <a:latin typeface="+mn-lt"/>
+              </a:defRPr>
+            </a:pPr>
+            <a:endParaRPr lang="en-US"/>
+          </a:p>
+        </c:txPr>
+        <c:crossAx val="2094734554"/>
+        <c:crosses val="autoZero"/>
+        <c:crossBetween val="between"/>
+        <c:majorUnit val="0.1"/>
+      </c:valAx>
+      <c:spPr>
+        <a:noFill/>
+        <a:ln>
+          <a:noFill/>
+        </a:ln>
+        <a:effectLst/>
+      </c:spPr>
+    </c:plotArea>
+    <c:plotVisOnly val="1"/>
+    <c:dispBlanksAs val="span"/>
+  </c:chart>
+  <c:spPr>
+    <a:noFill/>
+    <a:ln>
+      <a:noFill/>
+    </a:ln>
+    <a:effectLst/>
+  </c:spPr>
+  <c:externalData r:id="rId1">
+    <c:autoUpdate val="0"/>
+  </c:externalData>
+</c:chartSpace>
+</file>
+
 <file path=ppt/notesMasters/notesMaster1.xml><?xml version="1.0" encoding="utf-8"?>
 <p:notesMaster xmlns:a="http://schemas.openxmlformats.org/drawingml/2006/main" xmlns:r="http://schemas.openxmlformats.org/officeDocument/2006/relationships" xmlns:p="http://schemas.openxmlformats.org/presentationml/2006/main">
   <p:cSld>
@@ -1354,6 +1659,270 @@
             <a:fld id="{F7021451-1387-4CA6-816F-3879F97B5CBC}" type="slidenum">
               <a:rPr lang="en-US"/>
               <a:t>10</a:t>
+            </a:fld>
+            <a:endParaRPr lang="en-US"/>
+          </a:p>
+        </p:txBody>
+      </p:sp>
+    </p:spTree>
+    <p:extLst>
+      <p:ext uri="{BB962C8B-B14F-4D97-AF65-F5344CB8AC3E}">
+        <p14:creationId xmlns:p14="http://schemas.microsoft.com/office/powerpoint/2010/main" val="1024086991"/>
+      </p:ext>
+    </p:extLst>
+  </p:cSld>
+  <p:clrMapOvr>
+    <a:masterClrMapping/>
+  </p:clrMapOvr>
+</p:notes>
+</file>
+
+<file path=ppt/notesSlides/notesSlide11.xml><?xml version="1.0" encoding="utf-8"?>
+<p:notes xmlns:a="http://schemas.openxmlformats.org/drawingml/2006/main" xmlns:r="http://schemas.openxmlformats.org/officeDocument/2006/relationships" xmlns:p="http://schemas.openxmlformats.org/presentationml/2006/main">
+  <p:cSld>
+    <p:spTree>
+      <p:nvGrpSpPr>
+        <p:cNvPr id="1" name=""/>
+        <p:cNvGrpSpPr/>
+        <p:nvPr/>
+      </p:nvGrpSpPr>
+      <p:grpSpPr>
+        <a:xfrm>
+          <a:off x="0" y="0"/>
+          <a:ext cx="0" cy="0"/>
+          <a:chOff x="0" y="0"/>
+          <a:chExt cx="0" cy="0"/>
+        </a:xfrm>
+      </p:grpSpPr>
+      <p:sp>
+        <p:nvSpPr>
+          <p:cNvPr id="2" name="Slide Image Placeholder 1"/>
+          <p:cNvSpPr>
+            <a:spLocks noGrp="1" noRot="1" noChangeAspect="1"/>
+          </p:cNvSpPr>
+          <p:nvPr>
+            <p:ph type="sldImg"/>
+          </p:nvPr>
+        </p:nvSpPr>
+        <p:spPr/>
+      </p:sp>
+      <p:sp>
+        <p:nvSpPr>
+          <p:cNvPr id="3" name="Notes Placeholder 2"/>
+          <p:cNvSpPr>
+            <a:spLocks noGrp="1"/>
+          </p:cNvSpPr>
+          <p:nvPr>
+            <p:ph type="body" idx="1"/>
+          </p:nvPr>
+        </p:nvSpPr>
+        <p:spPr/>
+        <p:txBody>
+          <a:bodyPr/>
+          <a:lstStyle/>
+          <a:p>
+            <a:r>
+              <a:rPr lang="en-US" dirty="0"/>
+              <a:t/>
+            </a:r>
+            <a:endParaRPr lang="en-US" dirty="0"/>
+          </a:p>
+        </p:txBody>
+      </p:sp>
+      <p:sp>
+        <p:nvSpPr>
+          <p:cNvPr id="4" name="Slide Number Placeholder 3"/>
+          <p:cNvSpPr>
+            <a:spLocks noGrp="1"/>
+          </p:cNvSpPr>
+          <p:nvPr>
+            <p:ph type="sldNum" sz="quarter" idx="10"/>
+          </p:nvPr>
+        </p:nvSpPr>
+        <p:spPr/>
+        <p:txBody>
+          <a:bodyPr/>
+          <a:lstStyle/>
+          <a:p>
+            <a:fld id="{F7021451-1387-4CA6-816F-3879F97B5CBC}" type="slidenum">
+              <a:rPr lang="en-US"/>
+              <a:t>11</a:t>
+            </a:fld>
+            <a:endParaRPr lang="en-US"/>
+          </a:p>
+        </p:txBody>
+      </p:sp>
+    </p:spTree>
+    <p:extLst>
+      <p:ext uri="{BB962C8B-B14F-4D97-AF65-F5344CB8AC3E}">
+        <p14:creationId xmlns:p14="http://schemas.microsoft.com/office/powerpoint/2010/main" val="1024086991"/>
+      </p:ext>
+    </p:extLst>
+  </p:cSld>
+  <p:clrMapOvr>
+    <a:masterClrMapping/>
+  </p:clrMapOvr>
+</p:notes>
+</file>
+
+<file path=ppt/notesSlides/notesSlide12.xml><?xml version="1.0" encoding="utf-8"?>
+<p:notes xmlns:a="http://schemas.openxmlformats.org/drawingml/2006/main" xmlns:r="http://schemas.openxmlformats.org/officeDocument/2006/relationships" xmlns:p="http://schemas.openxmlformats.org/presentationml/2006/main">
+  <p:cSld>
+    <p:spTree>
+      <p:nvGrpSpPr>
+        <p:cNvPr id="1" name=""/>
+        <p:cNvGrpSpPr/>
+        <p:nvPr/>
+      </p:nvGrpSpPr>
+      <p:grpSpPr>
+        <a:xfrm>
+          <a:off x="0" y="0"/>
+          <a:ext cx="0" cy="0"/>
+          <a:chOff x="0" y="0"/>
+          <a:chExt cx="0" cy="0"/>
+        </a:xfrm>
+      </p:grpSpPr>
+      <p:sp>
+        <p:nvSpPr>
+          <p:cNvPr id="2" name="Slide Image Placeholder 1"/>
+          <p:cNvSpPr>
+            <a:spLocks noGrp="1" noRot="1" noChangeAspect="1"/>
+          </p:cNvSpPr>
+          <p:nvPr>
+            <p:ph type="sldImg"/>
+          </p:nvPr>
+        </p:nvSpPr>
+        <p:spPr/>
+      </p:sp>
+      <p:sp>
+        <p:nvSpPr>
+          <p:cNvPr id="3" name="Notes Placeholder 2"/>
+          <p:cNvSpPr>
+            <a:spLocks noGrp="1"/>
+          </p:cNvSpPr>
+          <p:nvPr>
+            <p:ph type="body" idx="1"/>
+          </p:nvPr>
+        </p:nvSpPr>
+        <p:spPr/>
+        <p:txBody>
+          <a:bodyPr/>
+          <a:lstStyle/>
+          <a:p>
+            <a:r>
+              <a:rPr lang="en-US" dirty="0"/>
+              <a:t/>
+            </a:r>
+            <a:endParaRPr lang="en-US" dirty="0"/>
+          </a:p>
+        </p:txBody>
+      </p:sp>
+      <p:sp>
+        <p:nvSpPr>
+          <p:cNvPr id="4" name="Slide Number Placeholder 3"/>
+          <p:cNvSpPr>
+            <a:spLocks noGrp="1"/>
+          </p:cNvSpPr>
+          <p:nvPr>
+            <p:ph type="sldNum" sz="quarter" idx="10"/>
+          </p:nvPr>
+        </p:nvSpPr>
+        <p:spPr/>
+        <p:txBody>
+          <a:bodyPr/>
+          <a:lstStyle/>
+          <a:p>
+            <a:fld id="{F7021451-1387-4CA6-816F-3879F97B5CBC}" type="slidenum">
+              <a:rPr lang="en-US"/>
+              <a:t>12</a:t>
+            </a:fld>
+            <a:endParaRPr lang="en-US"/>
+          </a:p>
+        </p:txBody>
+      </p:sp>
+    </p:spTree>
+    <p:extLst>
+      <p:ext uri="{BB962C8B-B14F-4D97-AF65-F5344CB8AC3E}">
+        <p14:creationId xmlns:p14="http://schemas.microsoft.com/office/powerpoint/2010/main" val="1024086991"/>
+      </p:ext>
+    </p:extLst>
+  </p:cSld>
+  <p:clrMapOvr>
+    <a:masterClrMapping/>
+  </p:clrMapOvr>
+</p:notes>
+</file>
+
+<file path=ppt/notesSlides/notesSlide13.xml><?xml version="1.0" encoding="utf-8"?>
+<p:notes xmlns:a="http://schemas.openxmlformats.org/drawingml/2006/main" xmlns:r="http://schemas.openxmlformats.org/officeDocument/2006/relationships" xmlns:p="http://schemas.openxmlformats.org/presentationml/2006/main">
+  <p:cSld>
+    <p:spTree>
+      <p:nvGrpSpPr>
+        <p:cNvPr id="1" name=""/>
+        <p:cNvGrpSpPr/>
+        <p:nvPr/>
+      </p:nvGrpSpPr>
+      <p:grpSpPr>
+        <a:xfrm>
+          <a:off x="0" y="0"/>
+          <a:ext cx="0" cy="0"/>
+          <a:chOff x="0" y="0"/>
+          <a:chExt cx="0" cy="0"/>
+        </a:xfrm>
+      </p:grpSpPr>
+      <p:sp>
+        <p:nvSpPr>
+          <p:cNvPr id="2" name="Slide Image Placeholder 1"/>
+          <p:cNvSpPr>
+            <a:spLocks noGrp="1" noRot="1" noChangeAspect="1"/>
+          </p:cNvSpPr>
+          <p:nvPr>
+            <p:ph type="sldImg"/>
+          </p:nvPr>
+        </p:nvSpPr>
+        <p:spPr/>
+      </p:sp>
+      <p:sp>
+        <p:nvSpPr>
+          <p:cNvPr id="3" name="Notes Placeholder 2"/>
+          <p:cNvSpPr>
+            <a:spLocks noGrp="1"/>
+          </p:cNvSpPr>
+          <p:nvPr>
+            <p:ph type="body" idx="1"/>
+          </p:nvPr>
+        </p:nvSpPr>
+        <p:spPr/>
+        <p:txBody>
+          <a:bodyPr/>
+          <a:lstStyle/>
+          <a:p>
+            <a:r>
+              <a:rPr lang="en-US" dirty="0"/>
+              <a:t/>
+            </a:r>
+            <a:endParaRPr lang="en-US" dirty="0"/>
+          </a:p>
+        </p:txBody>
+      </p:sp>
+      <p:sp>
+        <p:nvSpPr>
+          <p:cNvPr id="4" name="Slide Number Placeholder 3"/>
+          <p:cNvSpPr>
+            <a:spLocks noGrp="1"/>
+          </p:cNvSpPr>
+          <p:nvPr>
+            <p:ph type="sldNum" sz="quarter" idx="10"/>
+          </p:nvPr>
+        </p:nvSpPr>
+        <p:spPr/>
+        <p:txBody>
+          <a:bodyPr/>
+          <a:lstStyle/>
+          <a:p>
+            <a:fld id="{F7021451-1387-4CA6-816F-3879F97B5CBC}" type="slidenum">
+              <a:rPr lang="en-US"/>
+              <a:t>13</a:t>
             </a:fld>
             <a:endParaRPr lang="en-US"/>
           </a:p>
@@ -2844,7 +3413,7 @@
                   <a:schemeClr val="bg1"/>
                 </a:solidFill>
               </a:rPr>
-              <a:t>The research plan's baselines were built and run: BioLangFusion on four benchmarks, the mRFP control, and IsoFormer's aggregator on GTEx. The reproduction holds where it should; the paper's fusion gains hold on some tasks and not others.</a:t>
+              <a:t>Every item of the research plan now has results except the remaining encoder swaps. The reproduction holds where it should. The paper's fusion gains hold on fewer tasks than they appeared to, because a better single encoder closes the largest of them.</a:t>
             </a:r>
             <a:endParaRPr lang="en-US" sz="1600" dirty="0"/>
           </a:p>
@@ -2907,7 +3476,7 @@
                   <a:srgbClr val="31302E"/>
                 </a:solidFill>
               </a:rPr>
-              <a:t>Stage 3, round 1</a:t>
+              <a:t>Priorities 1, 2, 5</a:t>
             </a:r>
             <a:endParaRPr lang="en-US" sz="1200" dirty="0"/>
           </a:p>
@@ -2921,7 +3490,7 @@
                   <a:srgbClr val="31302E"/>
                 </a:solidFill>
               </a:rPr>
-              <a:t>built October 15 to 19</a:t>
+              <a:t>Phase A, four swaps of Phase B, LucaOne, mRFP</a:t>
             </a:r>
             <a:endParaRPr lang="en-US" sz="1200" dirty="0"/>
           </a:p>
@@ -2984,7 +3553,7 @@
                   <a:srgbClr val="31302E"/>
                 </a:solidFill>
               </a:rPr>
-              <a:t>Stage 4, round 1</a:t>
+              <a:t>Priorities 3 and 4</a:t>
             </a:r>
             <a:endParaRPr lang="en-US" sz="1200" dirty="0"/>
           </a:p>
@@ -2998,7 +3567,7 @@
                   <a:srgbClr val="31302E"/>
                 </a:solidFill>
               </a:rPr>
-              <a:t>mRFP and Phase A run, October 17 to 20</a:t>
+              <a:t>half-life and translation efficiency, gate passed</a:t>
             </a:r>
             <a:endParaRPr lang="en-US" sz="1200" dirty="0"/>
           </a:p>
@@ -3061,7 +3630,7 @@
                   <a:srgbClr val="31302E"/>
                 </a:solidFill>
               </a:rPr>
-              <a:t>Next</a:t>
+              <a:t>Left to run</a:t>
             </a:r>
             <a:endParaRPr lang="en-US" sz="1200" dirty="0"/>
           </a:p>
@@ -3075,7 +3644,7 @@
                   <a:srgbClr val="31302E"/>
                 </a:solidFill>
               </a:rPr>
-              <a:t>Phase B, the encoder swaps, built and waiting for a GPU</a:t>
+              <a:t>the other encoder swaps, and stability</a:t>
             </a:r>
             <a:endParaRPr lang="en-US" sz="1200" dirty="0"/>
           </a:p>
@@ -3092,6 +3661,4542 @@
 <file path=ppt/slides/slide10.xml><?xml version="1.0" encoding="utf-8"?>
 <p:sld xmlns:a="http://schemas.openxmlformats.org/drawingml/2006/main" xmlns:r="http://schemas.openxmlformats.org/officeDocument/2006/relationships" xmlns:p="http://schemas.openxmlformats.org/presentationml/2006/main">
   <p:cSld name="Slide 10">
+    <p:spTree>
+      <p:nvGrpSpPr>
+        <p:cNvPr id="1" name=""/>
+        <p:cNvGrpSpPr/>
+        <p:nvPr/>
+      </p:nvGrpSpPr>
+      <p:grpSpPr>
+        <a:xfrm>
+          <a:off x="0" y="0"/>
+          <a:ext cx="0" cy="0"/>
+          <a:chOff x="0" y="0"/>
+          <a:chExt cx="0" cy="0"/>
+        </a:xfrm>
+      </p:grpSpPr>
+      <p:sp>
+        <p:nvSpPr>
+          <p:cNvPr id="2" name="Text 0"/>
+          <p:cNvSpPr/>
+          <p:nvPr>
+            <p:ph idx="101" type="body" hasCustomPrompt="1"/>
+          </p:nvPr>
+        </p:nvSpPr>
+        <p:spPr>
+          <a:xfrm>
+            <a:off x="1005840" y="795528"/>
+            <a:ext cx="8229600" cy="274320"/>
+          </a:xfrm>
+          <a:prstGeom prst="rect">
+            <a:avLst/>
+          </a:prstGeom>
+          <a:noFill/>
+          <a:ln/>
+        </p:spPr>
+        <p:txBody>
+          <a:bodyPr wrap="square" lIns="0" tIns="0" rIns="0" bIns="0" rtlCol="0" anchor="ctr"/>
+          <a:lstStyle/>
+          <a:p>
+            <a:pPr indent="0" marL="0">
+              <a:buNone/>
+            </a:pPr>
+            <a:r>
+              <a:rPr lang="en-US" sz="1200" dirty="0">
+                <a:solidFill>
+                  <a:schemeClr val="accent2"/>
+                </a:solidFill>
+              </a:rPr>
+              <a:t>Priority 2 · LucaOne, one jointly pretrained model</a:t>
+            </a:r>
+            <a:endParaRPr lang="en-US" sz="1200" dirty="0"/>
+          </a:p>
+        </p:txBody>
+      </p:sp>
+      <p:sp>
+        <p:nvSpPr>
+          <p:cNvPr id="3" name="Text 0"/>
+          <p:cNvSpPr/>
+          <p:nvPr>
+            <p:ph idx="102" type="title" hasCustomPrompt="1"/>
+          </p:nvPr>
+        </p:nvSpPr>
+        <p:spPr>
+          <a:xfrm>
+            <a:off x="813816" y="1152144"/>
+            <a:ext cx="10881360" cy="822960"/>
+          </a:xfrm>
+          <a:prstGeom prst="rect">
+            <a:avLst/>
+          </a:prstGeom>
+          <a:noFill/>
+          <a:ln/>
+        </p:spPr>
+        <p:txBody>
+          <a:bodyPr wrap="square" lIns="0" tIns="0" rIns="0" bIns="0" rtlCol="0" anchor="t"/>
+          <a:lstStyle/>
+          <a:p>
+            <a:pPr algn="l" indent="0" marL="0">
+              <a:buNone/>
+            </a:pPr>
+            <a:r>
+              <a:rPr lang="en-US" sz="2500" b="1" dirty="0">
+                <a:solidFill>
+                  <a:schemeClr val="tx1"/>
+                </a:solidFill>
+              </a:rPr>
+              <a:t>On mRNA stability the jointly pretrained model beats all three separately pretrained encoders fused</a:t>
+            </a:r>
+            <a:endParaRPr lang="en-US" sz="2500" dirty="0"/>
+          </a:p>
+        </p:txBody>
+      </p:sp>
+      <p:sp>
+        <p:nvSpPr>
+          <p:cNvPr id="4" name="Text 0"/>
+          <p:cNvSpPr/>
+          <p:nvPr>
+            <p:ph idx="103" type="body" hasCustomPrompt="1"/>
+          </p:nvPr>
+        </p:nvSpPr>
+        <p:spPr>
+          <a:xfrm>
+            <a:off x="813816" y="5989320"/>
+            <a:ext cx="10881360" cy="502920"/>
+          </a:xfrm>
+          <a:prstGeom prst="rect">
+            <a:avLst/>
+          </a:prstGeom>
+          <a:noFill/>
+          <a:ln/>
+        </p:spPr>
+        <p:txBody>
+          <a:bodyPr wrap="square" lIns="0" tIns="0" rIns="0" bIns="0" rtlCol="0" anchor="t"/>
+          <a:lstStyle/>
+          <a:p>
+            <a:pPr indent="0" marL="0">
+              <a:buNone/>
+            </a:pPr>
+            <a:r>
+              <a:rPr lang="en-US" sz="1150" dirty="0">
+                <a:solidFill>
+                  <a:schemeClr val="accent2"/>
+                </a:solidFill>
+              </a:rPr>
+              <a:t>Ridge probe on frozen pooled vectors, identical for every row, on the benchmark's published split. LucaOne is 1.8B parameters against 108M for the three BioLangFusion encoders combined, so this compares representations, not matched budgets.</a:t>
+            </a:r>
+            <a:endParaRPr lang="en-US" sz="1150" dirty="0"/>
+          </a:p>
+        </p:txBody>
+      </p:sp>
+      <p:sp>
+        <p:nvSpPr>
+          <p:cNvPr id="5" name="chart card"/>
+          <p:cNvSpPr/>
+          <p:nvPr/>
+        </p:nvSpPr>
+        <p:spPr>
+          <a:xfrm>
+            <a:off x="813816" y="2029968"/>
+            <a:ext cx="7589520" cy="3794760"/>
+          </a:xfrm>
+          <a:prstGeom prst="roundRect">
+            <a:avLst>
+              <a:gd name="adj" fmla="val 1446"/>
+            </a:avLst>
+          </a:prstGeom>
+          <a:solidFill>
+            <a:srgbClr val="FFFFFF"/>
+          </a:solidFill>
+          <a:ln w="9525">
+            <a:solidFill>
+              <a:srgbClr val="E6E6E6"/>
+            </a:solidFill>
+            <a:prstDash val="solid"/>
+          </a:ln>
+        </p:spPr>
+      </p:sp>
+      <p:graphicFrame>
+        <p:nvGraphicFramePr>
+          <p:cNvPr id="6" name="lucaone chart" descr=""/>
+          <p:cNvGraphicFramePr/>
+          <p:nvPr/>
+        </p:nvGraphicFramePr>
+        <p:xfrm>
+          <a:off x="914400" y="2121408"/>
+          <a:ext cx="7406640" cy="3611880"/>
+        </p:xfrm>
+        <a:graphic xmlns:a="http://schemas.openxmlformats.org/drawingml/2006/main">
+          <a:graphicData uri="http://schemas.openxmlformats.org/drawingml/2006/chart">
+            <c:chart xmlns:c="http://schemas.openxmlformats.org/drawingml/2006/chart" r:id="rId1"/>
+          </a:graphicData>
+        </a:graphic>
+      </p:graphicFrame>
+      <p:sp>
+        <p:nvSpPr>
+          <p:cNvPr id="7" name="stat card"/>
+          <p:cNvSpPr/>
+          <p:nvPr/>
+        </p:nvSpPr>
+        <p:spPr>
+          <a:xfrm>
+            <a:off x="8641080" y="2029968"/>
+            <a:ext cx="2743200" cy="1783080"/>
+          </a:xfrm>
+          <a:prstGeom prst="roundRect">
+            <a:avLst>
+              <a:gd name="adj" fmla="val 3077"/>
+            </a:avLst>
+          </a:prstGeom>
+          <a:solidFill>
+            <a:srgbClr val="213183"/>
+          </a:solidFill>
+          <a:ln w="9525">
+            <a:solidFill>
+              <a:srgbClr val="213183"/>
+            </a:solidFill>
+            <a:prstDash val="solid"/>
+          </a:ln>
+        </p:spPr>
+      </p:sp>
+      <p:sp>
+        <p:nvSpPr>
+          <p:cNvPr id="8" name="stat value"/>
+          <p:cNvSpPr txBox="1"/>
+          <p:nvPr/>
+        </p:nvSpPr>
+        <p:spPr>
+          <a:xfrm>
+            <a:off x="8842248" y="2212848"/>
+            <a:ext cx="2340864" cy="457200"/>
+          </a:xfrm>
+          <a:prstGeom prst="rect">
+            <a:avLst/>
+          </a:prstGeom>
+          <a:noFill/>
+          <a:ln/>
+        </p:spPr>
+        <p:txBody>
+          <a:bodyPr wrap="square" lIns="0" tIns="0" rIns="0" bIns="0" rtlCol="0" anchor="ctr"/>
+          <a:lstStyle/>
+          <a:p>
+            <a:pPr indent="0" marL="0">
+              <a:buNone/>
+            </a:pPr>
+            <a:r>
+              <a:rPr lang="en-US" sz="2400" b="1" dirty="0">
+                <a:solidFill>
+                  <a:srgbClr val="FFFFFF"/>
+                </a:solidFill>
+              </a:rPr>
+              <a:t>+0.092</a:t>
+            </a:r>
+            <a:endParaRPr lang="en-US" sz="2400" dirty="0"/>
+          </a:p>
+        </p:txBody>
+      </p:sp>
+      <p:sp>
+        <p:nvSpPr>
+          <p:cNvPr id="9" name="stat label"/>
+          <p:cNvSpPr txBox="1"/>
+          <p:nvPr/>
+        </p:nvSpPr>
+        <p:spPr>
+          <a:xfrm>
+            <a:off x="8842248" y="2688336"/>
+            <a:ext cx="2340864" cy="1005840"/>
+          </a:xfrm>
+          <a:prstGeom prst="rect">
+            <a:avLst/>
+          </a:prstGeom>
+          <a:noFill/>
+          <a:ln/>
+        </p:spPr>
+        <p:txBody>
+          <a:bodyPr wrap="square" lIns="0" tIns="0" rIns="0" bIns="0" rtlCol="0" anchor="t"/>
+          <a:lstStyle/>
+          <a:p>
+            <a:pPr indent="0" marL="0">
+              <a:buNone/>
+            </a:pPr>
+            <a:r>
+              <a:rPr lang="en-US" sz="1150" dirty="0">
+                <a:solidFill>
+                  <a:srgbClr val="FFFFFF"/>
+                </a:solidFill>
+              </a:rPr>
+              <a:t>LucaOne's two streams over the three BioLangFusion encoders concatenated, [+0.066, +0.120]: resolved. Over the best single encoder, +0.170.</a:t>
+            </a:r>
+            <a:endParaRPr lang="en-US" sz="1150" dirty="0"/>
+          </a:p>
+        </p:txBody>
+      </p:sp>
+      <p:sp>
+        <p:nvSpPr>
+          <p:cNvPr id="10" name="stat card"/>
+          <p:cNvSpPr/>
+          <p:nvPr/>
+        </p:nvSpPr>
+        <p:spPr>
+          <a:xfrm>
+            <a:off x="8641080" y="3995928"/>
+            <a:ext cx="2743200" cy="1783080"/>
+          </a:xfrm>
+          <a:prstGeom prst="roundRect">
+            <a:avLst>
+              <a:gd name="adj" fmla="val 3077"/>
+            </a:avLst>
+          </a:prstGeom>
+          <a:solidFill>
+            <a:srgbClr val="FFFFFF"/>
+          </a:solidFill>
+          <a:ln w="9525">
+            <a:solidFill>
+              <a:srgbClr val="E6E6E6"/>
+            </a:solidFill>
+            <a:prstDash val="solid"/>
+          </a:ln>
+        </p:spPr>
+      </p:sp>
+      <p:sp>
+        <p:nvSpPr>
+          <p:cNvPr id="11" name="stat value"/>
+          <p:cNvSpPr txBox="1"/>
+          <p:nvPr/>
+        </p:nvSpPr>
+        <p:spPr>
+          <a:xfrm>
+            <a:off x="8842248" y="4178808"/>
+            <a:ext cx="2340864" cy="457200"/>
+          </a:xfrm>
+          <a:prstGeom prst="rect">
+            <a:avLst/>
+          </a:prstGeom>
+          <a:noFill/>
+          <a:ln/>
+        </p:spPr>
+        <p:txBody>
+          <a:bodyPr wrap="square" lIns="0" tIns="0" rIns="0" bIns="0" rtlCol="0" anchor="ctr"/>
+          <a:lstStyle/>
+          <a:p>
+            <a:pPr indent="0" marL="0">
+              <a:buNone/>
+            </a:pPr>
+            <a:r>
+              <a:rPr lang="en-US" sz="2400" b="1" dirty="0">
+                <a:solidFill>
+                  <a:srgbClr val="31302E"/>
+                </a:solidFill>
+              </a:rPr>
+              <a:t>One caveat</a:t>
+            </a:r>
+            <a:endParaRPr lang="en-US" sz="2400" dirty="0"/>
+          </a:p>
+        </p:txBody>
+      </p:sp>
+      <p:sp>
+        <p:nvSpPr>
+          <p:cNvPr id="12" name="stat label"/>
+          <p:cNvSpPr txBox="1"/>
+          <p:nvPr/>
+        </p:nvSpPr>
+        <p:spPr>
+          <a:xfrm>
+            <a:off x="8842248" y="4654296"/>
+            <a:ext cx="2340864" cy="1005840"/>
+          </a:xfrm>
+          <a:prstGeom prst="rect">
+            <a:avLst/>
+          </a:prstGeom>
+          <a:noFill/>
+          <a:ln/>
+        </p:spPr>
+        <p:txBody>
+          <a:bodyPr wrap="square" lIns="0" tIns="0" rIns="0" bIns="0" rtlCol="0" anchor="t"/>
+          <a:lstStyle/>
+          <a:p>
+            <a:pPr indent="0" marL="0">
+              <a:buNone/>
+            </a:pPr>
+            <a:r>
+              <a:rPr lang="en-US" sz="1150" dirty="0">
+                <a:solidFill>
+                  <a:srgbClr val="615D59"/>
+                </a:solidFill>
+              </a:rPr>
+              <a:t>This is the published stability split, the one with repeated sequences. Grouping them in the bootstrap does not remove the overlap with training, so read it beside the leak slide.</a:t>
+            </a:r>
+            <a:endParaRPr lang="en-US" sz="1150" dirty="0"/>
+          </a:p>
+        </p:txBody>
+      </p:sp>
+    </p:spTree>
+  </p:cSld>
+  <p:clrMapOvr>
+    <a:masterClrMapping/>
+  </p:clrMapOvr>
+</p:sld>
+</file>
+
+<file path=ppt/slides/slide11.xml><?xml version="1.0" encoding="utf-8"?>
+<p:sld xmlns:a="http://schemas.openxmlformats.org/drawingml/2006/main" xmlns:r="http://schemas.openxmlformats.org/officeDocument/2006/relationships" xmlns:p="http://schemas.openxmlformats.org/presentationml/2006/main">
+  <p:cSld name="Slide 11">
+    <p:spTree>
+      <p:nvGrpSpPr>
+        <p:cNvPr id="1" name=""/>
+        <p:cNvGrpSpPr/>
+        <p:nvPr/>
+      </p:nvGrpSpPr>
+      <p:grpSpPr>
+        <a:xfrm>
+          <a:off x="0" y="0"/>
+          <a:ext cx="0" cy="0"/>
+          <a:chOff x="0" y="0"/>
+          <a:chExt cx="0" cy="0"/>
+        </a:xfrm>
+      </p:grpSpPr>
+      <p:sp>
+        <p:nvSpPr>
+          <p:cNvPr id="2" name="Text 0"/>
+          <p:cNvSpPr/>
+          <p:nvPr>
+            <p:ph idx="101" type="body" hasCustomPrompt="1"/>
+          </p:nvPr>
+        </p:nvSpPr>
+        <p:spPr>
+          <a:xfrm>
+            <a:off x="1005840" y="795528"/>
+            <a:ext cx="8229600" cy="274320"/>
+          </a:xfrm>
+          <a:prstGeom prst="rect">
+            <a:avLst/>
+          </a:prstGeom>
+          <a:noFill/>
+          <a:ln/>
+        </p:spPr>
+        <p:txBody>
+          <a:bodyPr wrap="square" lIns="0" tIns="0" rIns="0" bIns="0" rtlCol="0" anchor="ctr"/>
+          <a:lstStyle/>
+          <a:p>
+            <a:pPr indent="0" marL="0">
+              <a:buNone/>
+            </a:pPr>
+            <a:r>
+              <a:rPr lang="en-US" sz="1200" dirty="0">
+                <a:solidFill>
+                  <a:schemeClr val="accent2"/>
+                </a:solidFill>
+              </a:rPr>
+              <a:t>Priorities 3 and 4 · full transcripts</a:t>
+            </a:r>
+            <a:endParaRPr lang="en-US" sz="1200" dirty="0"/>
+          </a:p>
+        </p:txBody>
+      </p:sp>
+      <p:sp>
+        <p:nvSpPr>
+          <p:cNvPr id="3" name="Text 0"/>
+          <p:cNvSpPr/>
+          <p:nvPr>
+            <p:ph idx="102" type="title" hasCustomPrompt="1"/>
+          </p:nvPr>
+        </p:nvSpPr>
+        <p:spPr>
+          <a:xfrm>
+            <a:off x="813816" y="1152144"/>
+            <a:ext cx="10881360" cy="822960"/>
+          </a:xfrm>
+          <a:prstGeom prst="rect">
+            <a:avLst/>
+          </a:prstGeom>
+          <a:noFill/>
+          <a:ln/>
+        </p:spPr>
+        <p:txBody>
+          <a:bodyPr wrap="square" lIns="0" tIns="0" rIns="0" bIns="0" rtlCol="0" anchor="t"/>
+          <a:lstStyle/>
+          <a:p>
+            <a:pPr algn="l" indent="0" marL="0">
+              <a:buNone/>
+            </a:pPr>
+            <a:r>
+              <a:rPr lang="en-US" sz="2500" b="1" dirty="0">
+                <a:solidFill>
+                  <a:schemeClr val="tx1"/>
+                </a:solidFill>
+              </a:rPr>
+              <a:t>Outside the coding sequence there is real signal, and fusing it with the protein helps on both tasks</a:t>
+            </a:r>
+            <a:endParaRPr lang="en-US" sz="2500" dirty="0"/>
+          </a:p>
+        </p:txBody>
+      </p:sp>
+      <p:sp>
+        <p:nvSpPr>
+          <p:cNvPr id="4" name="Text 0"/>
+          <p:cNvSpPr/>
+          <p:nvPr>
+            <p:ph idx="103" type="body" hasCustomPrompt="1"/>
+          </p:nvPr>
+        </p:nvSpPr>
+        <p:spPr>
+          <a:xfrm>
+            <a:off x="813816" y="5989320"/>
+            <a:ext cx="10881360" cy="502920"/>
+          </a:xfrm>
+          <a:prstGeom prst="rect">
+            <a:avLst/>
+          </a:prstGeom>
+          <a:noFill/>
+          <a:ln/>
+        </p:spPr>
+        <p:txBody>
+          <a:bodyPr wrap="square" lIns="0" tIns="0" rIns="0" bIns="0" rtlCol="0" anchor="t"/>
+          <a:lstStyle/>
+          <a:p>
+            <a:pPr indent="0" marL="0">
+              <a:buNone/>
+            </a:pPr>
+            <a:r>
+              <a:rPr lang="en-US" sz="1150" dirty="0">
+                <a:solidFill>
+                  <a:schemeClr val="accent2"/>
+                </a:solidFill>
+              </a:rPr>
+              <a:t>Human only; mouse is embedded and not yet scored. Frozen encoders, windowed pooling, ridge probes, nine gene-grouped splits. The gate passed on all four primary datasets before any of this ran.</a:t>
+            </a:r>
+            <a:endParaRPr lang="en-US" sz="1150" dirty="0"/>
+          </a:p>
+        </p:txBody>
+      </p:sp>
+      <p:graphicFrame>
+        <p:nvGraphicFramePr>
+          <p:cNvPr id="12" name="halflife table"/>
+          <p:cNvGraphicFramePr>
+            <a:graphicFrameLocks noGrp="1"/>
+          </p:cNvGraphicFramePr>
+          <p:nvPr>
+            <p:extLst>
+              <p:ext uri="{D42A27DB-BD31-4B8C-83A1-F6EECF244321}">
+                <p14:modId xmlns:p14="http://schemas.microsoft.com/office/powerpoint/2010/main" val="1579011935"/>
+              </p:ext>
+            </p:extLst>
+          </p:nvPr>
+        </p:nvGraphicFramePr>
+        <p:xfrm>
+          <a:off x="813816" y="2029968"/>
+          <a:ext cx="7589520" cy="914400"/>
+        </p:xfrm>
+        <a:graphic>
+          <a:graphicData uri="http://schemas.openxmlformats.org/drawingml/2006/table">
+            <a:tbl>
+              <a:tblPr/>
+              <a:tblGrid>
+                <a:gridCol w="3749040"/>
+                <a:gridCol w="1920240"/>
+                <a:gridCol w="1920240"/>
+              </a:tblGrid>
+              <a:tr h="329184">
+                <a:tc>
+                  <a:txBody>
+                    <a:bodyPr/>
+                    <a:lstStyle/>
+                    <a:p>
+                      <a:pPr algn="l" indent="0" marL="0">
+                        <a:buNone/>
+                      </a:pPr>
+                      <a:r>
+                        <a:rPr lang="en-US" sz="1150" b="1" dirty="0">
+                          <a:solidFill>
+                            <a:srgbClr val="31302E"/>
+                          </a:solidFill>
+                          <a:latin typeface="Inter" pitchFamily="34" charset="0"/>
+                          <a:ea typeface="Inter" pitchFamily="34" charset="-122"/>
+                          <a:cs typeface="Inter" pitchFamily="34" charset="-120"/>
+                        </a:rPr>
+                        <a:t>Representation</a:t>
+                      </a:r>
+                      <a:endParaRPr lang="en-US" sz="1150" dirty="0">
+                        <a:latin typeface="Inter" charset="0"/>
+                        <a:ea typeface="Inter" charset="0"/>
+                        <a:cs typeface="Inter" charset="0"/>
+                      </a:endParaRPr>
+                    </a:p>
+                  </a:txBody>
+                  <a:tcPr marL="73152" marR="73152" marT="36576" marB="36576" anchor="ctr">
+                    <a:lnL w="6350" cap="flat" cmpd="sng" algn="ctr">
+                      <a:solidFill>
+                        <a:srgbClr val="E6E6E6"/>
+                      </a:solidFill>
+                      <a:prstDash val="solid"/>
+                      <a:round/>
+                      <a:headEnd type="none" w="med" len="med"/>
+                      <a:tailEnd type="none" w="med" len="med"/>
+                    </a:lnL>
+                    <a:lnR w="6350" cap="flat" cmpd="sng" algn="ctr">
+                      <a:solidFill>
+                        <a:srgbClr val="E6E6E6"/>
+                      </a:solidFill>
+                      <a:prstDash val="solid"/>
+                      <a:round/>
+                      <a:headEnd type="none" w="med" len="med"/>
+                      <a:tailEnd type="none" w="med" len="med"/>
+                    </a:lnR>
+                    <a:lnT w="6350" cap="flat" cmpd="sng" algn="ctr">
+                      <a:solidFill>
+                        <a:srgbClr val="E6E6E6"/>
+                      </a:solidFill>
+                      <a:prstDash val="solid"/>
+                      <a:round/>
+                      <a:headEnd type="none" w="med" len="med"/>
+                      <a:tailEnd type="none" w="med" len="med"/>
+                    </a:lnT>
+                    <a:lnB w="6350" cap="flat" cmpd="sng" algn="ctr">
+                      <a:solidFill>
+                        <a:srgbClr val="E6E6E6"/>
+                      </a:solidFill>
+                      <a:prstDash val="solid"/>
+                      <a:round/>
+                      <a:headEnd type="none" w="med" len="med"/>
+                      <a:tailEnd type="none" w="med" len="med"/>
+                    </a:lnB>
+                    <a:solidFill>
+                      <a:srgbClr val="F0F0EE"/>
+                    </a:solidFill>
+                  </a:tcPr>
+                </a:tc>
+                <a:tc>
+                  <a:txBody>
+                    <a:bodyPr/>
+                    <a:lstStyle/>
+                    <a:p>
+                      <a:pPr algn="ctr" indent="0" marL="0">
+                        <a:buNone/>
+                      </a:pPr>
+                      <a:r>
+                        <a:rPr lang="en-US" sz="1150" b="1" dirty="0">
+                          <a:solidFill>
+                            <a:srgbClr val="31302E"/>
+                          </a:solidFill>
+                          <a:latin typeface="Inter" pitchFamily="34" charset="0"/>
+                          <a:ea typeface="Inter" pitchFamily="34" charset="-122"/>
+                          <a:cs typeface="Inter" pitchFamily="34" charset="-120"/>
+                        </a:rPr>
+                        <a:t>Half-life (r)</a:t>
+                      </a:r>
+                      <a:endParaRPr lang="en-US" sz="1150" dirty="0">
+                        <a:latin typeface="Inter" charset="0"/>
+                        <a:ea typeface="Inter" charset="0"/>
+                        <a:cs typeface="Inter" charset="0"/>
+                      </a:endParaRPr>
+                    </a:p>
+                  </a:txBody>
+                  <a:tcPr marL="73152" marR="73152" marT="36576" marB="36576" anchor="ctr">
+                    <a:lnL w="6350" cap="flat" cmpd="sng" algn="ctr">
+                      <a:solidFill>
+                        <a:srgbClr val="E6E6E6"/>
+                      </a:solidFill>
+                      <a:prstDash val="solid"/>
+                      <a:round/>
+                      <a:headEnd type="none" w="med" len="med"/>
+                      <a:tailEnd type="none" w="med" len="med"/>
+                    </a:lnL>
+                    <a:lnR w="6350" cap="flat" cmpd="sng" algn="ctr">
+                      <a:solidFill>
+                        <a:srgbClr val="E6E6E6"/>
+                      </a:solidFill>
+                      <a:prstDash val="solid"/>
+                      <a:round/>
+                      <a:headEnd type="none" w="med" len="med"/>
+                      <a:tailEnd type="none" w="med" len="med"/>
+                    </a:lnR>
+                    <a:lnT w="6350" cap="flat" cmpd="sng" algn="ctr">
+                      <a:solidFill>
+                        <a:srgbClr val="E6E6E6"/>
+                      </a:solidFill>
+                      <a:prstDash val="solid"/>
+                      <a:round/>
+                      <a:headEnd type="none" w="med" len="med"/>
+                      <a:tailEnd type="none" w="med" len="med"/>
+                    </a:lnT>
+                    <a:lnB w="6350" cap="flat" cmpd="sng" algn="ctr">
+                      <a:solidFill>
+                        <a:srgbClr val="E6E6E6"/>
+                      </a:solidFill>
+                      <a:prstDash val="solid"/>
+                      <a:round/>
+                      <a:headEnd type="none" w="med" len="med"/>
+                      <a:tailEnd type="none" w="med" len="med"/>
+                    </a:lnB>
+                    <a:solidFill>
+                      <a:srgbClr val="F0F0EE"/>
+                    </a:solidFill>
+                  </a:tcPr>
+                </a:tc>
+                <a:tc>
+                  <a:txBody>
+                    <a:bodyPr/>
+                    <a:lstStyle/>
+                    <a:p>
+                      <a:pPr algn="ctr" indent="0" marL="0">
+                        <a:buNone/>
+                      </a:pPr>
+                      <a:r>
+                        <a:rPr lang="en-US" sz="1150" b="1" dirty="0">
+                          <a:solidFill>
+                            <a:srgbClr val="31302E"/>
+                          </a:solidFill>
+                          <a:latin typeface="Inter" pitchFamily="34" charset="0"/>
+                          <a:ea typeface="Inter" pitchFamily="34" charset="-122"/>
+                          <a:cs typeface="Inter" pitchFamily="34" charset="-120"/>
+                        </a:rPr>
+                        <a:t>Translation efficiency (r)</a:t>
+                      </a:r>
+                      <a:endParaRPr lang="en-US" sz="1150" dirty="0">
+                        <a:latin typeface="Inter" charset="0"/>
+                        <a:ea typeface="Inter" charset="0"/>
+                        <a:cs typeface="Inter" charset="0"/>
+                      </a:endParaRPr>
+                    </a:p>
+                  </a:txBody>
+                  <a:tcPr marL="73152" marR="73152" marT="36576" marB="36576" anchor="ctr">
+                    <a:lnL w="6350" cap="flat" cmpd="sng" algn="ctr">
+                      <a:solidFill>
+                        <a:srgbClr val="E6E6E6"/>
+                      </a:solidFill>
+                      <a:prstDash val="solid"/>
+                      <a:round/>
+                      <a:headEnd type="none" w="med" len="med"/>
+                      <a:tailEnd type="none" w="med" len="med"/>
+                    </a:lnL>
+                    <a:lnR w="6350" cap="flat" cmpd="sng" algn="ctr">
+                      <a:solidFill>
+                        <a:srgbClr val="E6E6E6"/>
+                      </a:solidFill>
+                      <a:prstDash val="solid"/>
+                      <a:round/>
+                      <a:headEnd type="none" w="med" len="med"/>
+                      <a:tailEnd type="none" w="med" len="med"/>
+                    </a:lnR>
+                    <a:lnT w="6350" cap="flat" cmpd="sng" algn="ctr">
+                      <a:solidFill>
+                        <a:srgbClr val="E6E6E6"/>
+                      </a:solidFill>
+                      <a:prstDash val="solid"/>
+                      <a:round/>
+                      <a:headEnd type="none" w="med" len="med"/>
+                      <a:tailEnd type="none" w="med" len="med"/>
+                    </a:lnT>
+                    <a:lnB w="6350" cap="flat" cmpd="sng" algn="ctr">
+                      <a:solidFill>
+                        <a:srgbClr val="E6E6E6"/>
+                      </a:solidFill>
+                      <a:prstDash val="solid"/>
+                      <a:round/>
+                      <a:headEnd type="none" w="med" len="med"/>
+                      <a:tailEnd type="none" w="med" len="med"/>
+                    </a:lnB>
+                    <a:solidFill>
+                      <a:srgbClr val="F0F0EE"/>
+                    </a:solidFill>
+                  </a:tcPr>
+                </a:tc>
+              </a:tr>
+              <a:tr h="329184">
+                <a:tc>
+                  <a:txBody>
+                    <a:bodyPr/>
+                    <a:lstStyle/>
+                    <a:p>
+                      <a:pPr algn="l" indent="0" marL="0">
+                        <a:buNone/>
+                      </a:pPr>
+                      <a:r>
+                        <a:rPr lang="en-US" sz="1150" dirty="0">
+                          <a:solidFill>
+                            <a:srgbClr val="31302E"/>
+                          </a:solidFill>
+                          <a:latin typeface="Inter" pitchFamily="34" charset="0"/>
+                          <a:ea typeface="Inter" pitchFamily="34" charset="-122"/>
+                          <a:cs typeface="Inter" pitchFamily="34" charset="-120"/>
+                        </a:rPr>
+                        <a:t>Composition of the coding sequence</a:t>
+                      </a:r>
+                      <a:endParaRPr lang="en-US" sz="1150" dirty="0">
+                        <a:latin typeface="Inter" charset="0"/>
+                        <a:ea typeface="Inter" charset="0"/>
+                        <a:cs typeface="Inter" charset="0"/>
+                      </a:endParaRPr>
+                    </a:p>
+                  </a:txBody>
+                  <a:tcPr marL="73152" marR="73152" marT="36576" marB="36576" anchor="ctr">
+                    <a:lnL w="6350" cap="flat" cmpd="sng" algn="ctr">
+                      <a:solidFill>
+                        <a:srgbClr val="E6E6E6"/>
+                      </a:solidFill>
+                      <a:prstDash val="solid"/>
+                      <a:round/>
+                      <a:headEnd type="none" w="med" len="med"/>
+                      <a:tailEnd type="none" w="med" len="med"/>
+                    </a:lnL>
+                    <a:lnR w="6350" cap="flat" cmpd="sng" algn="ctr">
+                      <a:solidFill>
+                        <a:srgbClr val="E6E6E6"/>
+                      </a:solidFill>
+                      <a:prstDash val="solid"/>
+                      <a:round/>
+                      <a:headEnd type="none" w="med" len="med"/>
+                      <a:tailEnd type="none" w="med" len="med"/>
+                    </a:lnR>
+                    <a:lnT w="6350" cap="flat" cmpd="sng" algn="ctr">
+                      <a:solidFill>
+                        <a:srgbClr val="E6E6E6"/>
+                      </a:solidFill>
+                      <a:prstDash val="solid"/>
+                      <a:round/>
+                      <a:headEnd type="none" w="med" len="med"/>
+                      <a:tailEnd type="none" w="med" len="med"/>
+                    </a:lnT>
+                    <a:lnB w="6350" cap="flat" cmpd="sng" algn="ctr">
+                      <a:solidFill>
+                        <a:srgbClr val="E6E6E6"/>
+                      </a:solidFill>
+                      <a:prstDash val="solid"/>
+                      <a:round/>
+                      <a:headEnd type="none" w="med" len="med"/>
+                      <a:tailEnd type="none" w="med" len="med"/>
+                    </a:lnB>
+                    <a:solidFill>
+                      <a:srgbClr val="FFFFFF"/>
+                    </a:solidFill>
+                  </a:tcPr>
+                </a:tc>
+                <a:tc>
+                  <a:txBody>
+                    <a:bodyPr/>
+                    <a:lstStyle/>
+                    <a:p>
+                      <a:pPr algn="ctr" indent="0" marL="0">
+                        <a:buNone/>
+                      </a:pPr>
+                      <a:r>
+                        <a:rPr lang="en-US" sz="1150" dirty="0">
+                          <a:solidFill>
+                            <a:srgbClr val="31302E"/>
+                          </a:solidFill>
+                          <a:latin typeface="Inter" pitchFamily="34" charset="0"/>
+                          <a:ea typeface="Inter" pitchFamily="34" charset="-122"/>
+                          <a:cs typeface="Inter" pitchFamily="34" charset="-120"/>
+                        </a:rPr>
+                        <a:t>0.487</a:t>
+                      </a:r>
+                      <a:endParaRPr lang="en-US" sz="1150" dirty="0">
+                        <a:latin typeface="Inter" charset="0"/>
+                        <a:ea typeface="Inter" charset="0"/>
+                        <a:cs typeface="Inter" charset="0"/>
+                      </a:endParaRPr>
+                    </a:p>
+                  </a:txBody>
+                  <a:tcPr marL="73152" marR="73152" marT="36576" marB="36576" anchor="ctr">
+                    <a:lnL w="6350" cap="flat" cmpd="sng" algn="ctr">
+                      <a:solidFill>
+                        <a:srgbClr val="E6E6E6"/>
+                      </a:solidFill>
+                      <a:prstDash val="solid"/>
+                      <a:round/>
+                      <a:headEnd type="none" w="med" len="med"/>
+                      <a:tailEnd type="none" w="med" len="med"/>
+                    </a:lnL>
+                    <a:lnR w="6350" cap="flat" cmpd="sng" algn="ctr">
+                      <a:solidFill>
+                        <a:srgbClr val="E6E6E6"/>
+                      </a:solidFill>
+                      <a:prstDash val="solid"/>
+                      <a:round/>
+                      <a:headEnd type="none" w="med" len="med"/>
+                      <a:tailEnd type="none" w="med" len="med"/>
+                    </a:lnR>
+                    <a:lnT w="6350" cap="flat" cmpd="sng" algn="ctr">
+                      <a:solidFill>
+                        <a:srgbClr val="E6E6E6"/>
+                      </a:solidFill>
+                      <a:prstDash val="solid"/>
+                      <a:round/>
+                      <a:headEnd type="none" w="med" len="med"/>
+                      <a:tailEnd type="none" w="med" len="med"/>
+                    </a:lnT>
+                    <a:lnB w="6350" cap="flat" cmpd="sng" algn="ctr">
+                      <a:solidFill>
+                        <a:srgbClr val="E6E6E6"/>
+                      </a:solidFill>
+                      <a:prstDash val="solid"/>
+                      <a:round/>
+                      <a:headEnd type="none" w="med" len="med"/>
+                      <a:tailEnd type="none" w="med" len="med"/>
+                    </a:lnB>
+                    <a:solidFill>
+                      <a:srgbClr val="FFFFFF"/>
+                    </a:solidFill>
+                  </a:tcPr>
+                </a:tc>
+                <a:tc>
+                  <a:txBody>
+                    <a:bodyPr/>
+                    <a:lstStyle/>
+                    <a:p>
+                      <a:pPr algn="ctr" indent="0" marL="0">
+                        <a:buNone/>
+                      </a:pPr>
+                      <a:r>
+                        <a:rPr lang="en-US" sz="1150" dirty="0">
+                          <a:solidFill>
+                            <a:srgbClr val="31302E"/>
+                          </a:solidFill>
+                          <a:latin typeface="Inter" pitchFamily="34" charset="0"/>
+                          <a:ea typeface="Inter" pitchFamily="34" charset="-122"/>
+                          <a:cs typeface="Inter" pitchFamily="34" charset="-120"/>
+                        </a:rPr>
+                        <a:t>0.683</a:t>
+                      </a:r>
+                      <a:endParaRPr lang="en-US" sz="1150" dirty="0">
+                        <a:latin typeface="Inter" charset="0"/>
+                        <a:ea typeface="Inter" charset="0"/>
+                        <a:cs typeface="Inter" charset="0"/>
+                      </a:endParaRPr>
+                    </a:p>
+                  </a:txBody>
+                  <a:tcPr marL="73152" marR="73152" marT="36576" marB="36576" anchor="ctr">
+                    <a:lnL w="6350" cap="flat" cmpd="sng" algn="ctr">
+                      <a:solidFill>
+                        <a:srgbClr val="E6E6E6"/>
+                      </a:solidFill>
+                      <a:prstDash val="solid"/>
+                      <a:round/>
+                      <a:headEnd type="none" w="med" len="med"/>
+                      <a:tailEnd type="none" w="med" len="med"/>
+                    </a:lnL>
+                    <a:lnR w="6350" cap="flat" cmpd="sng" algn="ctr">
+                      <a:solidFill>
+                        <a:srgbClr val="E6E6E6"/>
+                      </a:solidFill>
+                      <a:prstDash val="solid"/>
+                      <a:round/>
+                      <a:headEnd type="none" w="med" len="med"/>
+                      <a:tailEnd type="none" w="med" len="med"/>
+                    </a:lnR>
+                    <a:lnT w="6350" cap="flat" cmpd="sng" algn="ctr">
+                      <a:solidFill>
+                        <a:srgbClr val="E6E6E6"/>
+                      </a:solidFill>
+                      <a:prstDash val="solid"/>
+                      <a:round/>
+                      <a:headEnd type="none" w="med" len="med"/>
+                      <a:tailEnd type="none" w="med" len="med"/>
+                    </a:lnT>
+                    <a:lnB w="6350" cap="flat" cmpd="sng" algn="ctr">
+                      <a:solidFill>
+                        <a:srgbClr val="E6E6E6"/>
+                      </a:solidFill>
+                      <a:prstDash val="solid"/>
+                      <a:round/>
+                      <a:headEnd type="none" w="med" len="med"/>
+                      <a:tailEnd type="none" w="med" len="med"/>
+                    </a:lnB>
+                    <a:solidFill>
+                      <a:srgbClr val="FFFFFF"/>
+                    </a:solidFill>
+                  </a:tcPr>
+                </a:tc>
+              </a:tr>
+              <a:tr h="329184">
+                <a:tc>
+                  <a:txBody>
+                    <a:bodyPr/>
+                    <a:lstStyle/>
+                    <a:p>
+                      <a:pPr algn="l" indent="0" marL="0">
+                        <a:buNone/>
+                      </a:pPr>
+                      <a:r>
+                        <a:rPr lang="en-US" sz="1150" dirty="0">
+                          <a:solidFill>
+                            <a:srgbClr val="31302E"/>
+                          </a:solidFill>
+                          <a:latin typeface="Inter" pitchFamily="34" charset="0"/>
+                          <a:ea typeface="Inter" pitchFamily="34" charset="-122"/>
+                          <a:cs typeface="Inter" pitchFamily="34" charset="-120"/>
+                        </a:rPr>
+                        <a:t>Composition of the whole transcript</a:t>
+                      </a:r>
+                      <a:endParaRPr lang="en-US" sz="1150" dirty="0">
+                        <a:latin typeface="Inter" charset="0"/>
+                        <a:ea typeface="Inter" charset="0"/>
+                        <a:cs typeface="Inter" charset="0"/>
+                      </a:endParaRPr>
+                    </a:p>
+                  </a:txBody>
+                  <a:tcPr marL="73152" marR="73152" marT="36576" marB="36576" anchor="ctr">
+                    <a:lnL w="6350" cap="flat" cmpd="sng" algn="ctr">
+                      <a:solidFill>
+                        <a:srgbClr val="E6E6E6"/>
+                      </a:solidFill>
+                      <a:prstDash val="solid"/>
+                      <a:round/>
+                      <a:headEnd type="none" w="med" len="med"/>
+                      <a:tailEnd type="none" w="med" len="med"/>
+                    </a:lnL>
+                    <a:lnR w="6350" cap="flat" cmpd="sng" algn="ctr">
+                      <a:solidFill>
+                        <a:srgbClr val="E6E6E6"/>
+                      </a:solidFill>
+                      <a:prstDash val="solid"/>
+                      <a:round/>
+                      <a:headEnd type="none" w="med" len="med"/>
+                      <a:tailEnd type="none" w="med" len="med"/>
+                    </a:lnR>
+                    <a:lnT w="6350" cap="flat" cmpd="sng" algn="ctr">
+                      <a:solidFill>
+                        <a:srgbClr val="E6E6E6"/>
+                      </a:solidFill>
+                      <a:prstDash val="solid"/>
+                      <a:round/>
+                      <a:headEnd type="none" w="med" len="med"/>
+                      <a:tailEnd type="none" w="med" len="med"/>
+                    </a:lnT>
+                    <a:lnB w="6350" cap="flat" cmpd="sng" algn="ctr">
+                      <a:solidFill>
+                        <a:srgbClr val="E6E6E6"/>
+                      </a:solidFill>
+                      <a:prstDash val="solid"/>
+                      <a:round/>
+                      <a:headEnd type="none" w="med" len="med"/>
+                      <a:tailEnd type="none" w="med" len="med"/>
+                    </a:lnB>
+                    <a:solidFill>
+                      <a:srgbClr val="FFFFFF"/>
+                    </a:solidFill>
+                  </a:tcPr>
+                </a:tc>
+                <a:tc>
+                  <a:txBody>
+                    <a:bodyPr/>
+                    <a:lstStyle/>
+                    <a:p>
+                      <a:pPr algn="ctr" indent="0" marL="0">
+                        <a:buNone/>
+                      </a:pPr>
+                      <a:r>
+                        <a:rPr lang="en-US" sz="1150" dirty="0">
+                          <a:solidFill>
+                            <a:srgbClr val="31302E"/>
+                          </a:solidFill>
+                          <a:latin typeface="Inter" pitchFamily="34" charset="0"/>
+                          <a:ea typeface="Inter" pitchFamily="34" charset="-122"/>
+                          <a:cs typeface="Inter" pitchFamily="34" charset="-120"/>
+                        </a:rPr>
+                        <a:t>0.542</a:t>
+                      </a:r>
+                      <a:endParaRPr lang="en-US" sz="1150" dirty="0">
+                        <a:latin typeface="Inter" charset="0"/>
+                        <a:ea typeface="Inter" charset="0"/>
+                        <a:cs typeface="Inter" charset="0"/>
+                      </a:endParaRPr>
+                    </a:p>
+                  </a:txBody>
+                  <a:tcPr marL="73152" marR="73152" marT="36576" marB="36576" anchor="ctr">
+                    <a:lnL w="6350" cap="flat" cmpd="sng" algn="ctr">
+                      <a:solidFill>
+                        <a:srgbClr val="E6E6E6"/>
+                      </a:solidFill>
+                      <a:prstDash val="solid"/>
+                      <a:round/>
+                      <a:headEnd type="none" w="med" len="med"/>
+                      <a:tailEnd type="none" w="med" len="med"/>
+                    </a:lnL>
+                    <a:lnR w="6350" cap="flat" cmpd="sng" algn="ctr">
+                      <a:solidFill>
+                        <a:srgbClr val="E6E6E6"/>
+                      </a:solidFill>
+                      <a:prstDash val="solid"/>
+                      <a:round/>
+                      <a:headEnd type="none" w="med" len="med"/>
+                      <a:tailEnd type="none" w="med" len="med"/>
+                    </a:lnR>
+                    <a:lnT w="6350" cap="flat" cmpd="sng" algn="ctr">
+                      <a:solidFill>
+                        <a:srgbClr val="E6E6E6"/>
+                      </a:solidFill>
+                      <a:prstDash val="solid"/>
+                      <a:round/>
+                      <a:headEnd type="none" w="med" len="med"/>
+                      <a:tailEnd type="none" w="med" len="med"/>
+                    </a:lnT>
+                    <a:lnB w="6350" cap="flat" cmpd="sng" algn="ctr">
+                      <a:solidFill>
+                        <a:srgbClr val="E6E6E6"/>
+                      </a:solidFill>
+                      <a:prstDash val="solid"/>
+                      <a:round/>
+                      <a:headEnd type="none" w="med" len="med"/>
+                      <a:tailEnd type="none" w="med" len="med"/>
+                    </a:lnB>
+                    <a:solidFill>
+                      <a:srgbClr val="FFFFFF"/>
+                    </a:solidFill>
+                  </a:tcPr>
+                </a:tc>
+                <a:tc>
+                  <a:txBody>
+                    <a:bodyPr/>
+                    <a:lstStyle/>
+                    <a:p>
+                      <a:pPr algn="ctr" indent="0" marL="0">
+                        <a:buNone/>
+                      </a:pPr>
+                      <a:r>
+                        <a:rPr lang="en-US" sz="1150" dirty="0">
+                          <a:solidFill>
+                            <a:srgbClr val="31302E"/>
+                          </a:solidFill>
+                          <a:latin typeface="Inter" pitchFamily="34" charset="0"/>
+                          <a:ea typeface="Inter" pitchFamily="34" charset="-122"/>
+                          <a:cs typeface="Inter" pitchFamily="34" charset="-120"/>
+                        </a:rPr>
+                        <a:t>0.702</a:t>
+                      </a:r>
+                      <a:endParaRPr lang="en-US" sz="1150" dirty="0">
+                        <a:latin typeface="Inter" charset="0"/>
+                        <a:ea typeface="Inter" charset="0"/>
+                        <a:cs typeface="Inter" charset="0"/>
+                      </a:endParaRPr>
+                    </a:p>
+                  </a:txBody>
+                  <a:tcPr marL="73152" marR="73152" marT="36576" marB="36576" anchor="ctr">
+                    <a:lnL w="6350" cap="flat" cmpd="sng" algn="ctr">
+                      <a:solidFill>
+                        <a:srgbClr val="E6E6E6"/>
+                      </a:solidFill>
+                      <a:prstDash val="solid"/>
+                      <a:round/>
+                      <a:headEnd type="none" w="med" len="med"/>
+                      <a:tailEnd type="none" w="med" len="med"/>
+                    </a:lnL>
+                    <a:lnR w="6350" cap="flat" cmpd="sng" algn="ctr">
+                      <a:solidFill>
+                        <a:srgbClr val="E6E6E6"/>
+                      </a:solidFill>
+                      <a:prstDash val="solid"/>
+                      <a:round/>
+                      <a:headEnd type="none" w="med" len="med"/>
+                      <a:tailEnd type="none" w="med" len="med"/>
+                    </a:lnR>
+                    <a:lnT w="6350" cap="flat" cmpd="sng" algn="ctr">
+                      <a:solidFill>
+                        <a:srgbClr val="E6E6E6"/>
+                      </a:solidFill>
+                      <a:prstDash val="solid"/>
+                      <a:round/>
+                      <a:headEnd type="none" w="med" len="med"/>
+                      <a:tailEnd type="none" w="med" len="med"/>
+                    </a:lnT>
+                    <a:lnB w="6350" cap="flat" cmpd="sng" algn="ctr">
+                      <a:solidFill>
+                        <a:srgbClr val="E6E6E6"/>
+                      </a:solidFill>
+                      <a:prstDash val="solid"/>
+                      <a:round/>
+                      <a:headEnd type="none" w="med" len="med"/>
+                      <a:tailEnd type="none" w="med" len="med"/>
+                    </a:lnB>
+                    <a:solidFill>
+                      <a:srgbClr val="FFFFFF"/>
+                    </a:solidFill>
+                  </a:tcPr>
+                </a:tc>
+              </a:tr>
+              <a:tr h="329184">
+                <a:tc>
+                  <a:txBody>
+                    <a:bodyPr/>
+                    <a:lstStyle/>
+                    <a:p>
+                      <a:pPr algn="l" indent="0" marL="0">
+                        <a:buNone/>
+                      </a:pPr>
+                      <a:r>
+                        <a:rPr lang="en-US" sz="1150" dirty="0">
+                          <a:solidFill>
+                            <a:srgbClr val="31302E"/>
+                          </a:solidFill>
+                          <a:latin typeface="Inter" pitchFamily="34" charset="0"/>
+                          <a:ea typeface="Inter" pitchFamily="34" charset="-122"/>
+                          <a:cs typeface="Inter" pitchFamily="34" charset="-120"/>
+                        </a:rPr>
+                        <a:t>5' UTR, RNA encoder</a:t>
+                      </a:r>
+                      <a:endParaRPr lang="en-US" sz="1150" dirty="0">
+                        <a:latin typeface="Inter" charset="0"/>
+                        <a:ea typeface="Inter" charset="0"/>
+                        <a:cs typeface="Inter" charset="0"/>
+                      </a:endParaRPr>
+                    </a:p>
+                  </a:txBody>
+                  <a:tcPr marL="73152" marR="73152" marT="36576" marB="36576" anchor="ctr">
+                    <a:lnL w="6350" cap="flat" cmpd="sng" algn="ctr">
+                      <a:solidFill>
+                        <a:srgbClr val="E6E6E6"/>
+                      </a:solidFill>
+                      <a:prstDash val="solid"/>
+                      <a:round/>
+                      <a:headEnd type="none" w="med" len="med"/>
+                      <a:tailEnd type="none" w="med" len="med"/>
+                    </a:lnL>
+                    <a:lnR w="6350" cap="flat" cmpd="sng" algn="ctr">
+                      <a:solidFill>
+                        <a:srgbClr val="E6E6E6"/>
+                      </a:solidFill>
+                      <a:prstDash val="solid"/>
+                      <a:round/>
+                      <a:headEnd type="none" w="med" len="med"/>
+                      <a:tailEnd type="none" w="med" len="med"/>
+                    </a:lnR>
+                    <a:lnT w="6350" cap="flat" cmpd="sng" algn="ctr">
+                      <a:solidFill>
+                        <a:srgbClr val="E6E6E6"/>
+                      </a:solidFill>
+                      <a:prstDash val="solid"/>
+                      <a:round/>
+                      <a:headEnd type="none" w="med" len="med"/>
+                      <a:tailEnd type="none" w="med" len="med"/>
+                    </a:lnT>
+                    <a:lnB w="6350" cap="flat" cmpd="sng" algn="ctr">
+                      <a:solidFill>
+                        <a:srgbClr val="E6E6E6"/>
+                      </a:solidFill>
+                      <a:prstDash val="solid"/>
+                      <a:round/>
+                      <a:headEnd type="none" w="med" len="med"/>
+                      <a:tailEnd type="none" w="med" len="med"/>
+                    </a:lnB>
+                    <a:solidFill>
+                      <a:srgbClr val="FFFFFF"/>
+                    </a:solidFill>
+                  </a:tcPr>
+                </a:tc>
+                <a:tc>
+                  <a:txBody>
+                    <a:bodyPr/>
+                    <a:lstStyle/>
+                    <a:p>
+                      <a:pPr algn="ctr" indent="0" marL="0">
+                        <a:buNone/>
+                      </a:pPr>
+                      <a:r>
+                        <a:rPr lang="en-US" sz="1150" dirty="0">
+                          <a:solidFill>
+                            <a:srgbClr val="31302E"/>
+                          </a:solidFill>
+                          <a:latin typeface="Inter" pitchFamily="34" charset="0"/>
+                          <a:ea typeface="Inter" pitchFamily="34" charset="-122"/>
+                          <a:cs typeface="Inter" pitchFamily="34" charset="-120"/>
+                        </a:rPr>
+                        <a:t>0.178</a:t>
+                      </a:r>
+                      <a:endParaRPr lang="en-US" sz="1150" dirty="0">
+                        <a:latin typeface="Inter" charset="0"/>
+                        <a:ea typeface="Inter" charset="0"/>
+                        <a:cs typeface="Inter" charset="0"/>
+                      </a:endParaRPr>
+                    </a:p>
+                  </a:txBody>
+                  <a:tcPr marL="73152" marR="73152" marT="36576" marB="36576" anchor="ctr">
+                    <a:lnL w="6350" cap="flat" cmpd="sng" algn="ctr">
+                      <a:solidFill>
+                        <a:srgbClr val="E6E6E6"/>
+                      </a:solidFill>
+                      <a:prstDash val="solid"/>
+                      <a:round/>
+                      <a:headEnd type="none" w="med" len="med"/>
+                      <a:tailEnd type="none" w="med" len="med"/>
+                    </a:lnL>
+                    <a:lnR w="6350" cap="flat" cmpd="sng" algn="ctr">
+                      <a:solidFill>
+                        <a:srgbClr val="E6E6E6"/>
+                      </a:solidFill>
+                      <a:prstDash val="solid"/>
+                      <a:round/>
+                      <a:headEnd type="none" w="med" len="med"/>
+                      <a:tailEnd type="none" w="med" len="med"/>
+                    </a:lnR>
+                    <a:lnT w="6350" cap="flat" cmpd="sng" algn="ctr">
+                      <a:solidFill>
+                        <a:srgbClr val="E6E6E6"/>
+                      </a:solidFill>
+                      <a:prstDash val="solid"/>
+                      <a:round/>
+                      <a:headEnd type="none" w="med" len="med"/>
+                      <a:tailEnd type="none" w="med" len="med"/>
+                    </a:lnT>
+                    <a:lnB w="6350" cap="flat" cmpd="sng" algn="ctr">
+                      <a:solidFill>
+                        <a:srgbClr val="E6E6E6"/>
+                      </a:solidFill>
+                      <a:prstDash val="solid"/>
+                      <a:round/>
+                      <a:headEnd type="none" w="med" len="med"/>
+                      <a:tailEnd type="none" w="med" len="med"/>
+                    </a:lnB>
+                    <a:solidFill>
+                      <a:srgbClr val="FFFFFF"/>
+                    </a:solidFill>
+                  </a:tcPr>
+                </a:tc>
+                <a:tc>
+                  <a:txBody>
+                    <a:bodyPr/>
+                    <a:lstStyle/>
+                    <a:p>
+                      <a:pPr algn="ctr" indent="0" marL="0">
+                        <a:buNone/>
+                      </a:pPr>
+                      <a:r>
+                        <a:rPr lang="en-US" sz="1150" dirty="0">
+                          <a:solidFill>
+                            <a:srgbClr val="31302E"/>
+                          </a:solidFill>
+                          <a:latin typeface="Inter" pitchFamily="34" charset="0"/>
+                          <a:ea typeface="Inter" pitchFamily="34" charset="-122"/>
+                          <a:cs typeface="Inter" pitchFamily="34" charset="-120"/>
+                        </a:rPr>
+                        <a:t>0.433</a:t>
+                      </a:r>
+                      <a:endParaRPr lang="en-US" sz="1150" dirty="0">
+                        <a:latin typeface="Inter" charset="0"/>
+                        <a:ea typeface="Inter" charset="0"/>
+                        <a:cs typeface="Inter" charset="0"/>
+                      </a:endParaRPr>
+                    </a:p>
+                  </a:txBody>
+                  <a:tcPr marL="73152" marR="73152" marT="36576" marB="36576" anchor="ctr">
+                    <a:lnL w="6350" cap="flat" cmpd="sng" algn="ctr">
+                      <a:solidFill>
+                        <a:srgbClr val="E6E6E6"/>
+                      </a:solidFill>
+                      <a:prstDash val="solid"/>
+                      <a:round/>
+                      <a:headEnd type="none" w="med" len="med"/>
+                      <a:tailEnd type="none" w="med" len="med"/>
+                    </a:lnL>
+                    <a:lnR w="6350" cap="flat" cmpd="sng" algn="ctr">
+                      <a:solidFill>
+                        <a:srgbClr val="E6E6E6"/>
+                      </a:solidFill>
+                      <a:prstDash val="solid"/>
+                      <a:round/>
+                      <a:headEnd type="none" w="med" len="med"/>
+                      <a:tailEnd type="none" w="med" len="med"/>
+                    </a:lnR>
+                    <a:lnT w="6350" cap="flat" cmpd="sng" algn="ctr">
+                      <a:solidFill>
+                        <a:srgbClr val="E6E6E6"/>
+                      </a:solidFill>
+                      <a:prstDash val="solid"/>
+                      <a:round/>
+                      <a:headEnd type="none" w="med" len="med"/>
+                      <a:tailEnd type="none" w="med" len="med"/>
+                    </a:lnT>
+                    <a:lnB w="6350" cap="flat" cmpd="sng" algn="ctr">
+                      <a:solidFill>
+                        <a:srgbClr val="E6E6E6"/>
+                      </a:solidFill>
+                      <a:prstDash val="solid"/>
+                      <a:round/>
+                      <a:headEnd type="none" w="med" len="med"/>
+                      <a:tailEnd type="none" w="med" len="med"/>
+                    </a:lnB>
+                    <a:solidFill>
+                      <a:srgbClr val="FFFFFF"/>
+                    </a:solidFill>
+                  </a:tcPr>
+                </a:tc>
+              </a:tr>
+              <a:tr h="329184">
+                <a:tc>
+                  <a:txBody>
+                    <a:bodyPr/>
+                    <a:lstStyle/>
+                    <a:p>
+                      <a:pPr algn="l" indent="0" marL="0">
+                        <a:buNone/>
+                      </a:pPr>
+                      <a:r>
+                        <a:rPr lang="en-US" sz="1150" dirty="0">
+                          <a:solidFill>
+                            <a:srgbClr val="31302E"/>
+                          </a:solidFill>
+                          <a:latin typeface="Inter" pitchFamily="34" charset="0"/>
+                          <a:ea typeface="Inter" pitchFamily="34" charset="-122"/>
+                          <a:cs typeface="Inter" pitchFamily="34" charset="-120"/>
+                        </a:rPr>
+                        <a:t>Coding sequence, RNA encoder</a:t>
+                      </a:r>
+                      <a:endParaRPr lang="en-US" sz="1150" dirty="0">
+                        <a:latin typeface="Inter" charset="0"/>
+                        <a:ea typeface="Inter" charset="0"/>
+                        <a:cs typeface="Inter" charset="0"/>
+                      </a:endParaRPr>
+                    </a:p>
+                  </a:txBody>
+                  <a:tcPr marL="73152" marR="73152" marT="36576" marB="36576" anchor="ctr">
+                    <a:lnL w="6350" cap="flat" cmpd="sng" algn="ctr">
+                      <a:solidFill>
+                        <a:srgbClr val="E6E6E6"/>
+                      </a:solidFill>
+                      <a:prstDash val="solid"/>
+                      <a:round/>
+                      <a:headEnd type="none" w="med" len="med"/>
+                      <a:tailEnd type="none" w="med" len="med"/>
+                    </a:lnL>
+                    <a:lnR w="6350" cap="flat" cmpd="sng" algn="ctr">
+                      <a:solidFill>
+                        <a:srgbClr val="E6E6E6"/>
+                      </a:solidFill>
+                      <a:prstDash val="solid"/>
+                      <a:round/>
+                      <a:headEnd type="none" w="med" len="med"/>
+                      <a:tailEnd type="none" w="med" len="med"/>
+                    </a:lnR>
+                    <a:lnT w="6350" cap="flat" cmpd="sng" algn="ctr">
+                      <a:solidFill>
+                        <a:srgbClr val="E6E6E6"/>
+                      </a:solidFill>
+                      <a:prstDash val="solid"/>
+                      <a:round/>
+                      <a:headEnd type="none" w="med" len="med"/>
+                      <a:tailEnd type="none" w="med" len="med"/>
+                    </a:lnT>
+                    <a:lnB w="6350" cap="flat" cmpd="sng" algn="ctr">
+                      <a:solidFill>
+                        <a:srgbClr val="E6E6E6"/>
+                      </a:solidFill>
+                      <a:prstDash val="solid"/>
+                      <a:round/>
+                      <a:headEnd type="none" w="med" len="med"/>
+                      <a:tailEnd type="none" w="med" len="med"/>
+                    </a:lnB>
+                    <a:solidFill>
+                      <a:srgbClr val="FFFFFF"/>
+                    </a:solidFill>
+                  </a:tcPr>
+                </a:tc>
+                <a:tc>
+                  <a:txBody>
+                    <a:bodyPr/>
+                    <a:lstStyle/>
+                    <a:p>
+                      <a:pPr algn="ctr" indent="0" marL="0">
+                        <a:buNone/>
+                      </a:pPr>
+                      <a:r>
+                        <a:rPr lang="en-US" sz="1150" dirty="0">
+                          <a:solidFill>
+                            <a:srgbClr val="31302E"/>
+                          </a:solidFill>
+                          <a:latin typeface="Inter" pitchFamily="34" charset="0"/>
+                          <a:ea typeface="Inter" pitchFamily="34" charset="-122"/>
+                          <a:cs typeface="Inter" pitchFamily="34" charset="-120"/>
+                        </a:rPr>
+                        <a:t>0.473</a:t>
+                      </a:r>
+                      <a:endParaRPr lang="en-US" sz="1150" dirty="0">
+                        <a:latin typeface="Inter" charset="0"/>
+                        <a:ea typeface="Inter" charset="0"/>
+                        <a:cs typeface="Inter" charset="0"/>
+                      </a:endParaRPr>
+                    </a:p>
+                  </a:txBody>
+                  <a:tcPr marL="73152" marR="73152" marT="36576" marB="36576" anchor="ctr">
+                    <a:lnL w="6350" cap="flat" cmpd="sng" algn="ctr">
+                      <a:solidFill>
+                        <a:srgbClr val="E6E6E6"/>
+                      </a:solidFill>
+                      <a:prstDash val="solid"/>
+                      <a:round/>
+                      <a:headEnd type="none" w="med" len="med"/>
+                      <a:tailEnd type="none" w="med" len="med"/>
+                    </a:lnL>
+                    <a:lnR w="6350" cap="flat" cmpd="sng" algn="ctr">
+                      <a:solidFill>
+                        <a:srgbClr val="E6E6E6"/>
+                      </a:solidFill>
+                      <a:prstDash val="solid"/>
+                      <a:round/>
+                      <a:headEnd type="none" w="med" len="med"/>
+                      <a:tailEnd type="none" w="med" len="med"/>
+                    </a:lnR>
+                    <a:lnT w="6350" cap="flat" cmpd="sng" algn="ctr">
+                      <a:solidFill>
+                        <a:srgbClr val="E6E6E6"/>
+                      </a:solidFill>
+                      <a:prstDash val="solid"/>
+                      <a:round/>
+                      <a:headEnd type="none" w="med" len="med"/>
+                      <a:tailEnd type="none" w="med" len="med"/>
+                    </a:lnT>
+                    <a:lnB w="6350" cap="flat" cmpd="sng" algn="ctr">
+                      <a:solidFill>
+                        <a:srgbClr val="E6E6E6"/>
+                      </a:solidFill>
+                      <a:prstDash val="solid"/>
+                      <a:round/>
+                      <a:headEnd type="none" w="med" len="med"/>
+                      <a:tailEnd type="none" w="med" len="med"/>
+                    </a:lnB>
+                    <a:solidFill>
+                      <a:srgbClr val="FFFFFF"/>
+                    </a:solidFill>
+                  </a:tcPr>
+                </a:tc>
+                <a:tc>
+                  <a:txBody>
+                    <a:bodyPr/>
+                    <a:lstStyle/>
+                    <a:p>
+                      <a:pPr algn="ctr" indent="0" marL="0">
+                        <a:buNone/>
+                      </a:pPr>
+                      <a:r>
+                        <a:rPr lang="en-US" sz="1150" dirty="0">
+                          <a:solidFill>
+                            <a:srgbClr val="31302E"/>
+                          </a:solidFill>
+                          <a:latin typeface="Inter" pitchFamily="34" charset="0"/>
+                          <a:ea typeface="Inter" pitchFamily="34" charset="-122"/>
+                          <a:cs typeface="Inter" pitchFamily="34" charset="-120"/>
+                        </a:rPr>
+                        <a:t>0.630</a:t>
+                      </a:r>
+                      <a:endParaRPr lang="en-US" sz="1150" dirty="0">
+                        <a:latin typeface="Inter" charset="0"/>
+                        <a:ea typeface="Inter" charset="0"/>
+                        <a:cs typeface="Inter" charset="0"/>
+                      </a:endParaRPr>
+                    </a:p>
+                  </a:txBody>
+                  <a:tcPr marL="73152" marR="73152" marT="36576" marB="36576" anchor="ctr">
+                    <a:lnL w="6350" cap="flat" cmpd="sng" algn="ctr">
+                      <a:solidFill>
+                        <a:srgbClr val="E6E6E6"/>
+                      </a:solidFill>
+                      <a:prstDash val="solid"/>
+                      <a:round/>
+                      <a:headEnd type="none" w="med" len="med"/>
+                      <a:tailEnd type="none" w="med" len="med"/>
+                    </a:lnL>
+                    <a:lnR w="6350" cap="flat" cmpd="sng" algn="ctr">
+                      <a:solidFill>
+                        <a:srgbClr val="E6E6E6"/>
+                      </a:solidFill>
+                      <a:prstDash val="solid"/>
+                      <a:round/>
+                      <a:headEnd type="none" w="med" len="med"/>
+                      <a:tailEnd type="none" w="med" len="med"/>
+                    </a:lnR>
+                    <a:lnT w="6350" cap="flat" cmpd="sng" algn="ctr">
+                      <a:solidFill>
+                        <a:srgbClr val="E6E6E6"/>
+                      </a:solidFill>
+                      <a:prstDash val="solid"/>
+                      <a:round/>
+                      <a:headEnd type="none" w="med" len="med"/>
+                      <a:tailEnd type="none" w="med" len="med"/>
+                    </a:lnT>
+                    <a:lnB w="6350" cap="flat" cmpd="sng" algn="ctr">
+                      <a:solidFill>
+                        <a:srgbClr val="E6E6E6"/>
+                      </a:solidFill>
+                      <a:prstDash val="solid"/>
+                      <a:round/>
+                      <a:headEnd type="none" w="med" len="med"/>
+                      <a:tailEnd type="none" w="med" len="med"/>
+                    </a:lnB>
+                    <a:solidFill>
+                      <a:srgbClr val="FFFFFF"/>
+                    </a:solidFill>
+                  </a:tcPr>
+                </a:tc>
+              </a:tr>
+              <a:tr h="329184">
+                <a:tc>
+                  <a:txBody>
+                    <a:bodyPr/>
+                    <a:lstStyle/>
+                    <a:p>
+                      <a:pPr algn="l" indent="0" marL="0">
+                        <a:buNone/>
+                      </a:pPr>
+                      <a:r>
+                        <a:rPr lang="en-US" sz="1150" dirty="0">
+                          <a:solidFill>
+                            <a:srgbClr val="31302E"/>
+                          </a:solidFill>
+                          <a:latin typeface="Inter" pitchFamily="34" charset="0"/>
+                          <a:ea typeface="Inter" pitchFamily="34" charset="-122"/>
+                          <a:cs typeface="Inter" pitchFamily="34" charset="-120"/>
+                        </a:rPr>
+                        <a:t>Full transcript, RNA encoder</a:t>
+                      </a:r>
+                      <a:endParaRPr lang="en-US" sz="1150" dirty="0">
+                        <a:latin typeface="Inter" charset="0"/>
+                        <a:ea typeface="Inter" charset="0"/>
+                        <a:cs typeface="Inter" charset="0"/>
+                      </a:endParaRPr>
+                    </a:p>
+                  </a:txBody>
+                  <a:tcPr marL="73152" marR="73152" marT="36576" marB="36576" anchor="ctr">
+                    <a:lnL w="6350" cap="flat" cmpd="sng" algn="ctr">
+                      <a:solidFill>
+                        <a:srgbClr val="E6E6E6"/>
+                      </a:solidFill>
+                      <a:prstDash val="solid"/>
+                      <a:round/>
+                      <a:headEnd type="none" w="med" len="med"/>
+                      <a:tailEnd type="none" w="med" len="med"/>
+                    </a:lnL>
+                    <a:lnR w="6350" cap="flat" cmpd="sng" algn="ctr">
+                      <a:solidFill>
+                        <a:srgbClr val="E6E6E6"/>
+                      </a:solidFill>
+                      <a:prstDash val="solid"/>
+                      <a:round/>
+                      <a:headEnd type="none" w="med" len="med"/>
+                      <a:tailEnd type="none" w="med" len="med"/>
+                    </a:lnR>
+                    <a:lnT w="6350" cap="flat" cmpd="sng" algn="ctr">
+                      <a:solidFill>
+                        <a:srgbClr val="E6E6E6"/>
+                      </a:solidFill>
+                      <a:prstDash val="solid"/>
+                      <a:round/>
+                      <a:headEnd type="none" w="med" len="med"/>
+                      <a:tailEnd type="none" w="med" len="med"/>
+                    </a:lnT>
+                    <a:lnB w="6350" cap="flat" cmpd="sng" algn="ctr">
+                      <a:solidFill>
+                        <a:srgbClr val="E6E6E6"/>
+                      </a:solidFill>
+                      <a:prstDash val="solid"/>
+                      <a:round/>
+                      <a:headEnd type="none" w="med" len="med"/>
+                      <a:tailEnd type="none" w="med" len="med"/>
+                    </a:lnB>
+                    <a:solidFill>
+                      <a:srgbClr val="FFFFFF"/>
+                    </a:solidFill>
+                  </a:tcPr>
+                </a:tc>
+                <a:tc>
+                  <a:txBody>
+                    <a:bodyPr/>
+                    <a:lstStyle/>
+                    <a:p>
+                      <a:pPr algn="ctr" indent="0" marL="0">
+                        <a:buNone/>
+                      </a:pPr>
+                      <a:r>
+                        <a:rPr lang="en-US" sz="1150" dirty="0">
+                          <a:solidFill>
+                            <a:srgbClr val="31302E"/>
+                          </a:solidFill>
+                          <a:latin typeface="Inter" pitchFamily="34" charset="0"/>
+                          <a:ea typeface="Inter" pitchFamily="34" charset="-122"/>
+                          <a:cs typeface="Inter" pitchFamily="34" charset="-120"/>
+                        </a:rPr>
+                        <a:t>0.512</a:t>
+                      </a:r>
+                      <a:endParaRPr lang="en-US" sz="1150" dirty="0">
+                        <a:latin typeface="Inter" charset="0"/>
+                        <a:ea typeface="Inter" charset="0"/>
+                        <a:cs typeface="Inter" charset="0"/>
+                      </a:endParaRPr>
+                    </a:p>
+                  </a:txBody>
+                  <a:tcPr marL="73152" marR="73152" marT="36576" marB="36576" anchor="ctr">
+                    <a:lnL w="6350" cap="flat" cmpd="sng" algn="ctr">
+                      <a:solidFill>
+                        <a:srgbClr val="E6E6E6"/>
+                      </a:solidFill>
+                      <a:prstDash val="solid"/>
+                      <a:round/>
+                      <a:headEnd type="none" w="med" len="med"/>
+                      <a:tailEnd type="none" w="med" len="med"/>
+                    </a:lnL>
+                    <a:lnR w="6350" cap="flat" cmpd="sng" algn="ctr">
+                      <a:solidFill>
+                        <a:srgbClr val="E6E6E6"/>
+                      </a:solidFill>
+                      <a:prstDash val="solid"/>
+                      <a:round/>
+                      <a:headEnd type="none" w="med" len="med"/>
+                      <a:tailEnd type="none" w="med" len="med"/>
+                    </a:lnR>
+                    <a:lnT w="6350" cap="flat" cmpd="sng" algn="ctr">
+                      <a:solidFill>
+                        <a:srgbClr val="E6E6E6"/>
+                      </a:solidFill>
+                      <a:prstDash val="solid"/>
+                      <a:round/>
+                      <a:headEnd type="none" w="med" len="med"/>
+                      <a:tailEnd type="none" w="med" len="med"/>
+                    </a:lnT>
+                    <a:lnB w="6350" cap="flat" cmpd="sng" algn="ctr">
+                      <a:solidFill>
+                        <a:srgbClr val="E6E6E6"/>
+                      </a:solidFill>
+                      <a:prstDash val="solid"/>
+                      <a:round/>
+                      <a:headEnd type="none" w="med" len="med"/>
+                      <a:tailEnd type="none" w="med" len="med"/>
+                    </a:lnB>
+                    <a:solidFill>
+                      <a:srgbClr val="FFFFFF"/>
+                    </a:solidFill>
+                  </a:tcPr>
+                </a:tc>
+                <a:tc>
+                  <a:txBody>
+                    <a:bodyPr/>
+                    <a:lstStyle/>
+                    <a:p>
+                      <a:pPr algn="ctr" indent="0" marL="0">
+                        <a:buNone/>
+                      </a:pPr>
+                      <a:r>
+                        <a:rPr lang="en-US" sz="1150" dirty="0">
+                          <a:solidFill>
+                            <a:srgbClr val="31302E"/>
+                          </a:solidFill>
+                          <a:latin typeface="Inter" pitchFamily="34" charset="0"/>
+                          <a:ea typeface="Inter" pitchFamily="34" charset="-122"/>
+                          <a:cs typeface="Inter" pitchFamily="34" charset="-120"/>
+                        </a:rPr>
+                        <a:t>0.610</a:t>
+                      </a:r>
+                      <a:endParaRPr lang="en-US" sz="1150" dirty="0">
+                        <a:latin typeface="Inter" charset="0"/>
+                        <a:ea typeface="Inter" charset="0"/>
+                        <a:cs typeface="Inter" charset="0"/>
+                      </a:endParaRPr>
+                    </a:p>
+                  </a:txBody>
+                  <a:tcPr marL="73152" marR="73152" marT="36576" marB="36576" anchor="ctr">
+                    <a:lnL w="6350" cap="flat" cmpd="sng" algn="ctr">
+                      <a:solidFill>
+                        <a:srgbClr val="E6E6E6"/>
+                      </a:solidFill>
+                      <a:prstDash val="solid"/>
+                      <a:round/>
+                      <a:headEnd type="none" w="med" len="med"/>
+                      <a:tailEnd type="none" w="med" len="med"/>
+                    </a:lnL>
+                    <a:lnR w="6350" cap="flat" cmpd="sng" algn="ctr">
+                      <a:solidFill>
+                        <a:srgbClr val="E6E6E6"/>
+                      </a:solidFill>
+                      <a:prstDash val="solid"/>
+                      <a:round/>
+                      <a:headEnd type="none" w="med" len="med"/>
+                      <a:tailEnd type="none" w="med" len="med"/>
+                    </a:lnR>
+                    <a:lnT w="6350" cap="flat" cmpd="sng" algn="ctr">
+                      <a:solidFill>
+                        <a:srgbClr val="E6E6E6"/>
+                      </a:solidFill>
+                      <a:prstDash val="solid"/>
+                      <a:round/>
+                      <a:headEnd type="none" w="med" len="med"/>
+                      <a:tailEnd type="none" w="med" len="med"/>
+                    </a:lnT>
+                    <a:lnB w="6350" cap="flat" cmpd="sng" algn="ctr">
+                      <a:solidFill>
+                        <a:srgbClr val="E6E6E6"/>
+                      </a:solidFill>
+                      <a:prstDash val="solid"/>
+                      <a:round/>
+                      <a:headEnd type="none" w="med" len="med"/>
+                      <a:tailEnd type="none" w="med" len="med"/>
+                    </a:lnB>
+                    <a:solidFill>
+                      <a:srgbClr val="FFFFFF"/>
+                    </a:solidFill>
+                  </a:tcPr>
+                </a:tc>
+              </a:tr>
+              <a:tr h="329184">
+                <a:tc>
+                  <a:txBody>
+                    <a:bodyPr/>
+                    <a:lstStyle/>
+                    <a:p>
+                      <a:pPr algn="l" indent="0" marL="0">
+                        <a:buNone/>
+                      </a:pPr>
+                      <a:r>
+                        <a:rPr lang="en-US" sz="1150" dirty="0">
+                          <a:solidFill>
+                            <a:srgbClr val="31302E"/>
+                          </a:solidFill>
+                          <a:latin typeface="Inter" pitchFamily="34" charset="0"/>
+                          <a:ea typeface="Inter" pitchFamily="34" charset="-122"/>
+                          <a:cs typeface="Inter" pitchFamily="34" charset="-120"/>
+                        </a:rPr>
+                        <a:t>Protein of the coding sequence</a:t>
+                      </a:r>
+                      <a:endParaRPr lang="en-US" sz="1150" dirty="0">
+                        <a:latin typeface="Inter" charset="0"/>
+                        <a:ea typeface="Inter" charset="0"/>
+                        <a:cs typeface="Inter" charset="0"/>
+                      </a:endParaRPr>
+                    </a:p>
+                  </a:txBody>
+                  <a:tcPr marL="73152" marR="73152" marT="36576" marB="36576" anchor="ctr">
+                    <a:lnL w="6350" cap="flat" cmpd="sng" algn="ctr">
+                      <a:solidFill>
+                        <a:srgbClr val="E6E6E6"/>
+                      </a:solidFill>
+                      <a:prstDash val="solid"/>
+                      <a:round/>
+                      <a:headEnd type="none" w="med" len="med"/>
+                      <a:tailEnd type="none" w="med" len="med"/>
+                    </a:lnL>
+                    <a:lnR w="6350" cap="flat" cmpd="sng" algn="ctr">
+                      <a:solidFill>
+                        <a:srgbClr val="E6E6E6"/>
+                      </a:solidFill>
+                      <a:prstDash val="solid"/>
+                      <a:round/>
+                      <a:headEnd type="none" w="med" len="med"/>
+                      <a:tailEnd type="none" w="med" len="med"/>
+                    </a:lnR>
+                    <a:lnT w="6350" cap="flat" cmpd="sng" algn="ctr">
+                      <a:solidFill>
+                        <a:srgbClr val="E6E6E6"/>
+                      </a:solidFill>
+                      <a:prstDash val="solid"/>
+                      <a:round/>
+                      <a:headEnd type="none" w="med" len="med"/>
+                      <a:tailEnd type="none" w="med" len="med"/>
+                    </a:lnT>
+                    <a:lnB w="6350" cap="flat" cmpd="sng" algn="ctr">
+                      <a:solidFill>
+                        <a:srgbClr val="E6E6E6"/>
+                      </a:solidFill>
+                      <a:prstDash val="solid"/>
+                      <a:round/>
+                      <a:headEnd type="none" w="med" len="med"/>
+                      <a:tailEnd type="none" w="med" len="med"/>
+                    </a:lnB>
+                    <a:solidFill>
+                      <a:srgbClr val="FFFFFF"/>
+                    </a:solidFill>
+                  </a:tcPr>
+                </a:tc>
+                <a:tc>
+                  <a:txBody>
+                    <a:bodyPr/>
+                    <a:lstStyle/>
+                    <a:p>
+                      <a:pPr algn="ctr" indent="0" marL="0">
+                        <a:buNone/>
+                      </a:pPr>
+                      <a:r>
+                        <a:rPr lang="en-US" sz="1150" dirty="0">
+                          <a:solidFill>
+                            <a:srgbClr val="31302E"/>
+                          </a:solidFill>
+                          <a:latin typeface="Inter" pitchFamily="34" charset="0"/>
+                          <a:ea typeface="Inter" pitchFamily="34" charset="-122"/>
+                          <a:cs typeface="Inter" pitchFamily="34" charset="-120"/>
+                        </a:rPr>
+                        <a:t>0.552</a:t>
+                      </a:r>
+                      <a:endParaRPr lang="en-US" sz="1150" dirty="0">
+                        <a:latin typeface="Inter" charset="0"/>
+                        <a:ea typeface="Inter" charset="0"/>
+                        <a:cs typeface="Inter" charset="0"/>
+                      </a:endParaRPr>
+                    </a:p>
+                  </a:txBody>
+                  <a:tcPr marL="73152" marR="73152" marT="36576" marB="36576" anchor="ctr">
+                    <a:lnL w="6350" cap="flat" cmpd="sng" algn="ctr">
+                      <a:solidFill>
+                        <a:srgbClr val="E6E6E6"/>
+                      </a:solidFill>
+                      <a:prstDash val="solid"/>
+                      <a:round/>
+                      <a:headEnd type="none" w="med" len="med"/>
+                      <a:tailEnd type="none" w="med" len="med"/>
+                    </a:lnL>
+                    <a:lnR w="6350" cap="flat" cmpd="sng" algn="ctr">
+                      <a:solidFill>
+                        <a:srgbClr val="E6E6E6"/>
+                      </a:solidFill>
+                      <a:prstDash val="solid"/>
+                      <a:round/>
+                      <a:headEnd type="none" w="med" len="med"/>
+                      <a:tailEnd type="none" w="med" len="med"/>
+                    </a:lnR>
+                    <a:lnT w="6350" cap="flat" cmpd="sng" algn="ctr">
+                      <a:solidFill>
+                        <a:srgbClr val="E6E6E6"/>
+                      </a:solidFill>
+                      <a:prstDash val="solid"/>
+                      <a:round/>
+                      <a:headEnd type="none" w="med" len="med"/>
+                      <a:tailEnd type="none" w="med" len="med"/>
+                    </a:lnT>
+                    <a:lnB w="6350" cap="flat" cmpd="sng" algn="ctr">
+                      <a:solidFill>
+                        <a:srgbClr val="E6E6E6"/>
+                      </a:solidFill>
+                      <a:prstDash val="solid"/>
+                      <a:round/>
+                      <a:headEnd type="none" w="med" len="med"/>
+                      <a:tailEnd type="none" w="med" len="med"/>
+                    </a:lnB>
+                    <a:solidFill>
+                      <a:srgbClr val="FFFFFF"/>
+                    </a:solidFill>
+                  </a:tcPr>
+                </a:tc>
+                <a:tc>
+                  <a:txBody>
+                    <a:bodyPr/>
+                    <a:lstStyle/>
+                    <a:p>
+                      <a:pPr algn="ctr" indent="0" marL="0">
+                        <a:buNone/>
+                      </a:pPr>
+                      <a:r>
+                        <a:rPr lang="en-US" sz="1150" dirty="0">
+                          <a:solidFill>
+                            <a:srgbClr val="31302E"/>
+                          </a:solidFill>
+                          <a:latin typeface="Inter" pitchFamily="34" charset="0"/>
+                          <a:ea typeface="Inter" pitchFamily="34" charset="-122"/>
+                          <a:cs typeface="Inter" pitchFamily="34" charset="-120"/>
+                        </a:rPr>
+                        <a:t>0.682</a:t>
+                      </a:r>
+                      <a:endParaRPr lang="en-US" sz="1150" dirty="0">
+                        <a:latin typeface="Inter" charset="0"/>
+                        <a:ea typeface="Inter" charset="0"/>
+                        <a:cs typeface="Inter" charset="0"/>
+                      </a:endParaRPr>
+                    </a:p>
+                  </a:txBody>
+                  <a:tcPr marL="73152" marR="73152" marT="36576" marB="36576" anchor="ctr">
+                    <a:lnL w="6350" cap="flat" cmpd="sng" algn="ctr">
+                      <a:solidFill>
+                        <a:srgbClr val="E6E6E6"/>
+                      </a:solidFill>
+                      <a:prstDash val="solid"/>
+                      <a:round/>
+                      <a:headEnd type="none" w="med" len="med"/>
+                      <a:tailEnd type="none" w="med" len="med"/>
+                    </a:lnL>
+                    <a:lnR w="6350" cap="flat" cmpd="sng" algn="ctr">
+                      <a:solidFill>
+                        <a:srgbClr val="E6E6E6"/>
+                      </a:solidFill>
+                      <a:prstDash val="solid"/>
+                      <a:round/>
+                      <a:headEnd type="none" w="med" len="med"/>
+                      <a:tailEnd type="none" w="med" len="med"/>
+                    </a:lnR>
+                    <a:lnT w="6350" cap="flat" cmpd="sng" algn="ctr">
+                      <a:solidFill>
+                        <a:srgbClr val="E6E6E6"/>
+                      </a:solidFill>
+                      <a:prstDash val="solid"/>
+                      <a:round/>
+                      <a:headEnd type="none" w="med" len="med"/>
+                      <a:tailEnd type="none" w="med" len="med"/>
+                    </a:lnT>
+                    <a:lnB w="6350" cap="flat" cmpd="sng" algn="ctr">
+                      <a:solidFill>
+                        <a:srgbClr val="E6E6E6"/>
+                      </a:solidFill>
+                      <a:prstDash val="solid"/>
+                      <a:round/>
+                      <a:headEnd type="none" w="med" len="med"/>
+                      <a:tailEnd type="none" w="med" len="med"/>
+                    </a:lnB>
+                    <a:solidFill>
+                      <a:srgbClr val="FFFFFF"/>
+                    </a:solidFill>
+                  </a:tcPr>
+                </a:tc>
+              </a:tr>
+              <a:tr h="329184">
+                <a:tc>
+                  <a:txBody>
+                    <a:bodyPr/>
+                    <a:lstStyle/>
+                    <a:p>
+                      <a:pPr algn="l" indent="0" marL="0">
+                        <a:buNone/>
+                      </a:pPr>
+                      <a:r>
+                        <a:rPr lang="en-US" sz="1150" dirty="0">
+                          <a:solidFill>
+                            <a:srgbClr val="31302E"/>
+                          </a:solidFill>
+                          <a:latin typeface="Inter" pitchFamily="34" charset="0"/>
+                          <a:ea typeface="Inter" pitchFamily="34" charset="-122"/>
+                          <a:cs typeface="Inter" pitchFamily="34" charset="-120"/>
+                        </a:rPr>
+                        <a:t>Full transcript + protein</a:t>
+                      </a:r>
+                      <a:endParaRPr lang="en-US" sz="1150" dirty="0">
+                        <a:latin typeface="Inter" charset="0"/>
+                        <a:ea typeface="Inter" charset="0"/>
+                        <a:cs typeface="Inter" charset="0"/>
+                      </a:endParaRPr>
+                    </a:p>
+                  </a:txBody>
+                  <a:tcPr marL="73152" marR="73152" marT="36576" marB="36576" anchor="ctr">
+                    <a:lnL w="6350" cap="flat" cmpd="sng" algn="ctr">
+                      <a:solidFill>
+                        <a:srgbClr val="E6E6E6"/>
+                      </a:solidFill>
+                      <a:prstDash val="solid"/>
+                      <a:round/>
+                      <a:headEnd type="none" w="med" len="med"/>
+                      <a:tailEnd type="none" w="med" len="med"/>
+                    </a:lnL>
+                    <a:lnR w="6350" cap="flat" cmpd="sng" algn="ctr">
+                      <a:solidFill>
+                        <a:srgbClr val="E6E6E6"/>
+                      </a:solidFill>
+                      <a:prstDash val="solid"/>
+                      <a:round/>
+                      <a:headEnd type="none" w="med" len="med"/>
+                      <a:tailEnd type="none" w="med" len="med"/>
+                    </a:lnR>
+                    <a:lnT w="6350" cap="flat" cmpd="sng" algn="ctr">
+                      <a:solidFill>
+                        <a:srgbClr val="E6E6E6"/>
+                      </a:solidFill>
+                      <a:prstDash val="solid"/>
+                      <a:round/>
+                      <a:headEnd type="none" w="med" len="med"/>
+                      <a:tailEnd type="none" w="med" len="med"/>
+                    </a:lnT>
+                    <a:lnB w="6350" cap="flat" cmpd="sng" algn="ctr">
+                      <a:solidFill>
+                        <a:srgbClr val="E6E6E6"/>
+                      </a:solidFill>
+                      <a:prstDash val="solid"/>
+                      <a:round/>
+                      <a:headEnd type="none" w="med" len="med"/>
+                      <a:tailEnd type="none" w="med" len="med"/>
+                    </a:lnB>
+                    <a:solidFill>
+                      <a:srgbClr val="FFFFFF"/>
+                    </a:solidFill>
+                  </a:tcPr>
+                </a:tc>
+                <a:tc>
+                  <a:txBody>
+                    <a:bodyPr/>
+                    <a:lstStyle/>
+                    <a:p>
+                      <a:pPr algn="ctr" indent="0" marL="0">
+                        <a:buNone/>
+                      </a:pPr>
+                      <a:r>
+                        <a:rPr lang="en-US" sz="1150" dirty="0">
+                          <a:solidFill>
+                            <a:srgbClr val="31302E"/>
+                          </a:solidFill>
+                          <a:latin typeface="Inter" pitchFamily="34" charset="0"/>
+                          <a:ea typeface="Inter" pitchFamily="34" charset="-122"/>
+                          <a:cs typeface="Inter" pitchFamily="34" charset="-120"/>
+                        </a:rPr>
+                        <a:t>0.606</a:t>
+                      </a:r>
+                      <a:endParaRPr lang="en-US" sz="1150" dirty="0">
+                        <a:latin typeface="Inter" charset="0"/>
+                        <a:ea typeface="Inter" charset="0"/>
+                        <a:cs typeface="Inter" charset="0"/>
+                      </a:endParaRPr>
+                    </a:p>
+                  </a:txBody>
+                  <a:tcPr marL="73152" marR="73152" marT="36576" marB="36576" anchor="ctr">
+                    <a:lnL w="6350" cap="flat" cmpd="sng" algn="ctr">
+                      <a:solidFill>
+                        <a:srgbClr val="E6E6E6"/>
+                      </a:solidFill>
+                      <a:prstDash val="solid"/>
+                      <a:round/>
+                      <a:headEnd type="none" w="med" len="med"/>
+                      <a:tailEnd type="none" w="med" len="med"/>
+                    </a:lnL>
+                    <a:lnR w="6350" cap="flat" cmpd="sng" algn="ctr">
+                      <a:solidFill>
+                        <a:srgbClr val="E6E6E6"/>
+                      </a:solidFill>
+                      <a:prstDash val="solid"/>
+                      <a:round/>
+                      <a:headEnd type="none" w="med" len="med"/>
+                      <a:tailEnd type="none" w="med" len="med"/>
+                    </a:lnR>
+                    <a:lnT w="6350" cap="flat" cmpd="sng" algn="ctr">
+                      <a:solidFill>
+                        <a:srgbClr val="E6E6E6"/>
+                      </a:solidFill>
+                      <a:prstDash val="solid"/>
+                      <a:round/>
+                      <a:headEnd type="none" w="med" len="med"/>
+                      <a:tailEnd type="none" w="med" len="med"/>
+                    </a:lnT>
+                    <a:lnB w="6350" cap="flat" cmpd="sng" algn="ctr">
+                      <a:solidFill>
+                        <a:srgbClr val="E6E6E6"/>
+                      </a:solidFill>
+                      <a:prstDash val="solid"/>
+                      <a:round/>
+                      <a:headEnd type="none" w="med" len="med"/>
+                      <a:tailEnd type="none" w="med" len="med"/>
+                    </a:lnB>
+                    <a:solidFill>
+                      <a:srgbClr val="FFFFFF"/>
+                    </a:solidFill>
+                  </a:tcPr>
+                </a:tc>
+                <a:tc>
+                  <a:txBody>
+                    <a:bodyPr/>
+                    <a:lstStyle/>
+                    <a:p>
+                      <a:pPr algn="ctr" indent="0" marL="0">
+                        <a:buNone/>
+                      </a:pPr>
+                      <a:r>
+                        <a:rPr lang="en-US" sz="1150" dirty="0">
+                          <a:solidFill>
+                            <a:srgbClr val="31302E"/>
+                          </a:solidFill>
+                          <a:latin typeface="Inter" pitchFamily="34" charset="0"/>
+                          <a:ea typeface="Inter" pitchFamily="34" charset="-122"/>
+                          <a:cs typeface="Inter" pitchFamily="34" charset="-120"/>
+                        </a:rPr>
+                        <a:t>0.712</a:t>
+                      </a:r>
+                      <a:endParaRPr lang="en-US" sz="1150" dirty="0">
+                        <a:latin typeface="Inter" charset="0"/>
+                        <a:ea typeface="Inter" charset="0"/>
+                        <a:cs typeface="Inter" charset="0"/>
+                      </a:endParaRPr>
+                    </a:p>
+                  </a:txBody>
+                  <a:tcPr marL="73152" marR="73152" marT="36576" marB="36576" anchor="ctr">
+                    <a:lnL w="6350" cap="flat" cmpd="sng" algn="ctr">
+                      <a:solidFill>
+                        <a:srgbClr val="E6E6E6"/>
+                      </a:solidFill>
+                      <a:prstDash val="solid"/>
+                      <a:round/>
+                      <a:headEnd type="none" w="med" len="med"/>
+                      <a:tailEnd type="none" w="med" len="med"/>
+                    </a:lnL>
+                    <a:lnR w="6350" cap="flat" cmpd="sng" algn="ctr">
+                      <a:solidFill>
+                        <a:srgbClr val="E6E6E6"/>
+                      </a:solidFill>
+                      <a:prstDash val="solid"/>
+                      <a:round/>
+                      <a:headEnd type="none" w="med" len="med"/>
+                      <a:tailEnd type="none" w="med" len="med"/>
+                    </a:lnR>
+                    <a:lnT w="6350" cap="flat" cmpd="sng" algn="ctr">
+                      <a:solidFill>
+                        <a:srgbClr val="E6E6E6"/>
+                      </a:solidFill>
+                      <a:prstDash val="solid"/>
+                      <a:round/>
+                      <a:headEnd type="none" w="med" len="med"/>
+                      <a:tailEnd type="none" w="med" len="med"/>
+                    </a:lnT>
+                    <a:lnB w="6350" cap="flat" cmpd="sng" algn="ctr">
+                      <a:solidFill>
+                        <a:srgbClr val="E6E6E6"/>
+                      </a:solidFill>
+                      <a:prstDash val="solid"/>
+                      <a:round/>
+                      <a:headEnd type="none" w="med" len="med"/>
+                      <a:tailEnd type="none" w="med" len="med"/>
+                    </a:lnB>
+                    <a:solidFill>
+                      <a:srgbClr val="FFFFFF"/>
+                    </a:solidFill>
+                  </a:tcPr>
+                </a:tc>
+              </a:tr>
+              <a:tr h="329184">
+                <a:tc>
+                  <a:txBody>
+                    <a:bodyPr/>
+                    <a:lstStyle/>
+                    <a:p>
+                      <a:pPr algn="l" indent="0" marL="0">
+                        <a:buNone/>
+                      </a:pPr>
+                      <a:r>
+                        <a:rPr lang="en-US" sz="1150" dirty="0">
+                          <a:solidFill>
+                            <a:srgbClr val="31302E"/>
+                          </a:solidFill>
+                          <a:latin typeface="Inter" pitchFamily="34" charset="0"/>
+                          <a:ea typeface="Inter" pitchFamily="34" charset="-122"/>
+                          <a:cs typeface="Inter" pitchFamily="34" charset="-120"/>
+                        </a:rPr>
+                        <a:t>Three encoders fused</a:t>
+                      </a:r>
+                      <a:endParaRPr lang="en-US" sz="1150" dirty="0">
+                        <a:latin typeface="Inter" charset="0"/>
+                        <a:ea typeface="Inter" charset="0"/>
+                        <a:cs typeface="Inter" charset="0"/>
+                      </a:endParaRPr>
+                    </a:p>
+                  </a:txBody>
+                  <a:tcPr marL="73152" marR="73152" marT="36576" marB="36576" anchor="ctr">
+                    <a:lnL w="6350" cap="flat" cmpd="sng" algn="ctr">
+                      <a:solidFill>
+                        <a:srgbClr val="E6E6E6"/>
+                      </a:solidFill>
+                      <a:prstDash val="solid"/>
+                      <a:round/>
+                      <a:headEnd type="none" w="med" len="med"/>
+                      <a:tailEnd type="none" w="med" len="med"/>
+                    </a:lnL>
+                    <a:lnR w="6350" cap="flat" cmpd="sng" algn="ctr">
+                      <a:solidFill>
+                        <a:srgbClr val="E6E6E6"/>
+                      </a:solidFill>
+                      <a:prstDash val="solid"/>
+                      <a:round/>
+                      <a:headEnd type="none" w="med" len="med"/>
+                      <a:tailEnd type="none" w="med" len="med"/>
+                    </a:lnR>
+                    <a:lnT w="6350" cap="flat" cmpd="sng" algn="ctr">
+                      <a:solidFill>
+                        <a:srgbClr val="E6E6E6"/>
+                      </a:solidFill>
+                      <a:prstDash val="solid"/>
+                      <a:round/>
+                      <a:headEnd type="none" w="med" len="med"/>
+                      <a:tailEnd type="none" w="med" len="med"/>
+                    </a:lnT>
+                    <a:lnB w="6350" cap="flat" cmpd="sng" algn="ctr">
+                      <a:solidFill>
+                        <a:srgbClr val="E6E6E6"/>
+                      </a:solidFill>
+                      <a:prstDash val="solid"/>
+                      <a:round/>
+                      <a:headEnd type="none" w="med" len="med"/>
+                      <a:tailEnd type="none" w="med" len="med"/>
+                    </a:lnB>
+                    <a:solidFill>
+                      <a:srgbClr val="FFFFFF"/>
+                    </a:solidFill>
+                  </a:tcPr>
+                </a:tc>
+                <a:tc>
+                  <a:txBody>
+                    <a:bodyPr/>
+                    <a:lstStyle/>
+                    <a:p>
+                      <a:pPr algn="ctr" indent="0" marL="0">
+                        <a:buNone/>
+                      </a:pPr>
+                      <a:r>
+                        <a:rPr lang="en-US" sz="1150" dirty="0">
+                          <a:solidFill>
+                            <a:srgbClr val="31302E"/>
+                          </a:solidFill>
+                          <a:latin typeface="Inter" pitchFamily="34" charset="0"/>
+                          <a:ea typeface="Inter" pitchFamily="34" charset="-122"/>
+                          <a:cs typeface="Inter" pitchFamily="34" charset="-120"/>
+                        </a:rPr>
+                        <a:t>0.602</a:t>
+                      </a:r>
+                      <a:endParaRPr lang="en-US" sz="1150" dirty="0">
+                        <a:latin typeface="Inter" charset="0"/>
+                        <a:ea typeface="Inter" charset="0"/>
+                        <a:cs typeface="Inter" charset="0"/>
+                      </a:endParaRPr>
+                    </a:p>
+                  </a:txBody>
+                  <a:tcPr marL="73152" marR="73152" marT="36576" marB="36576" anchor="ctr">
+                    <a:lnL w="6350" cap="flat" cmpd="sng" algn="ctr">
+                      <a:solidFill>
+                        <a:srgbClr val="E6E6E6"/>
+                      </a:solidFill>
+                      <a:prstDash val="solid"/>
+                      <a:round/>
+                      <a:headEnd type="none" w="med" len="med"/>
+                      <a:tailEnd type="none" w="med" len="med"/>
+                    </a:lnL>
+                    <a:lnR w="6350" cap="flat" cmpd="sng" algn="ctr">
+                      <a:solidFill>
+                        <a:srgbClr val="E6E6E6"/>
+                      </a:solidFill>
+                      <a:prstDash val="solid"/>
+                      <a:round/>
+                      <a:headEnd type="none" w="med" len="med"/>
+                      <a:tailEnd type="none" w="med" len="med"/>
+                    </a:lnR>
+                    <a:lnT w="6350" cap="flat" cmpd="sng" algn="ctr">
+                      <a:solidFill>
+                        <a:srgbClr val="E6E6E6"/>
+                      </a:solidFill>
+                      <a:prstDash val="solid"/>
+                      <a:round/>
+                      <a:headEnd type="none" w="med" len="med"/>
+                      <a:tailEnd type="none" w="med" len="med"/>
+                    </a:lnT>
+                    <a:lnB w="6350" cap="flat" cmpd="sng" algn="ctr">
+                      <a:solidFill>
+                        <a:srgbClr val="E6E6E6"/>
+                      </a:solidFill>
+                      <a:prstDash val="solid"/>
+                      <a:round/>
+                      <a:headEnd type="none" w="med" len="med"/>
+                      <a:tailEnd type="none" w="med" len="med"/>
+                    </a:lnB>
+                    <a:solidFill>
+                      <a:srgbClr val="FFFFFF"/>
+                    </a:solidFill>
+                  </a:tcPr>
+                </a:tc>
+                <a:tc>
+                  <a:txBody>
+                    <a:bodyPr/>
+                    <a:lstStyle/>
+                    <a:p>
+                      <a:pPr algn="ctr" indent="0" marL="0">
+                        <a:buNone/>
+                      </a:pPr>
+                      <a:r>
+                        <a:rPr lang="en-US" sz="1150" dirty="0">
+                          <a:solidFill>
+                            <a:srgbClr val="31302E"/>
+                          </a:solidFill>
+                          <a:latin typeface="Inter" pitchFamily="34" charset="0"/>
+                          <a:ea typeface="Inter" pitchFamily="34" charset="-122"/>
+                          <a:cs typeface="Inter" pitchFamily="34" charset="-120"/>
+                        </a:rPr>
+                        <a:t>0.713</a:t>
+                      </a:r>
+                      <a:endParaRPr lang="en-US" sz="1150" dirty="0">
+                        <a:latin typeface="Inter" charset="0"/>
+                        <a:ea typeface="Inter" charset="0"/>
+                        <a:cs typeface="Inter" charset="0"/>
+                      </a:endParaRPr>
+                    </a:p>
+                  </a:txBody>
+                  <a:tcPr marL="73152" marR="73152" marT="36576" marB="36576" anchor="ctr">
+                    <a:lnL w="6350" cap="flat" cmpd="sng" algn="ctr">
+                      <a:solidFill>
+                        <a:srgbClr val="E6E6E6"/>
+                      </a:solidFill>
+                      <a:prstDash val="solid"/>
+                      <a:round/>
+                      <a:headEnd type="none" w="med" len="med"/>
+                      <a:tailEnd type="none" w="med" len="med"/>
+                    </a:lnL>
+                    <a:lnR w="6350" cap="flat" cmpd="sng" algn="ctr">
+                      <a:solidFill>
+                        <a:srgbClr val="E6E6E6"/>
+                      </a:solidFill>
+                      <a:prstDash val="solid"/>
+                      <a:round/>
+                      <a:headEnd type="none" w="med" len="med"/>
+                      <a:tailEnd type="none" w="med" len="med"/>
+                    </a:lnR>
+                    <a:lnT w="6350" cap="flat" cmpd="sng" algn="ctr">
+                      <a:solidFill>
+                        <a:srgbClr val="E6E6E6"/>
+                      </a:solidFill>
+                      <a:prstDash val="solid"/>
+                      <a:round/>
+                      <a:headEnd type="none" w="med" len="med"/>
+                      <a:tailEnd type="none" w="med" len="med"/>
+                    </a:lnT>
+                    <a:lnB w="6350" cap="flat" cmpd="sng" algn="ctr">
+                      <a:solidFill>
+                        <a:srgbClr val="E6E6E6"/>
+                      </a:solidFill>
+                      <a:prstDash val="solid"/>
+                      <a:round/>
+                      <a:headEnd type="none" w="med" len="med"/>
+                      <a:tailEnd type="none" w="med" len="med"/>
+                    </a:lnB>
+                    <a:solidFill>
+                      <a:srgbClr val="FFFFFF"/>
+                    </a:solidFill>
+                  </a:tcPr>
+                </a:tc>
+              </a:tr>
+            </a:tbl>
+          </a:graphicData>
+        </a:graphic>
+      </p:graphicFrame>
+      <p:sp>
+        <p:nvSpPr>
+          <p:cNvPr id="6" name="halflife reading"/>
+          <p:cNvSpPr txBox="1"/>
+          <p:nvPr/>
+        </p:nvSpPr>
+        <p:spPr>
+          <a:xfrm>
+            <a:off x="813816" y="5120640"/>
+            <a:ext cx="7589520" cy="731520"/>
+          </a:xfrm>
+          <a:prstGeom prst="rect">
+            <a:avLst/>
+          </a:prstGeom>
+          <a:noFill/>
+          <a:ln/>
+        </p:spPr>
+        <p:txBody>
+          <a:bodyPr wrap="square" lIns="0" tIns="0" rIns="0" bIns="0" rtlCol="0" anchor="t"/>
+          <a:lstStyle/>
+          <a:p>
+            <a:pPr indent="0" marL="0">
+              <a:buNone/>
+            </a:pPr>
+            <a:r>
+              <a:rPr lang="en-US" sz="1250" b="1" dirty="0">
+                <a:solidFill>
+                  <a:srgbClr val="31302E"/>
+                </a:solidFill>
+              </a:rPr>
+              <a:t>The protein encoder is the best single representation on both tasks</a:t>
+            </a:r>
+            <a:pPr indent="0" marL="0">
+              <a:buNone/>
+            </a:pPr>
+            <a:r>
+              <a:rPr lang="en-US" sz="1250" dirty="0">
+                <a:solidFill>
+                  <a:srgbClr val="615D59"/>
+                </a:solidFill>
+              </a:rPr>
+              <a:t>, which is not what a transcript-level task would predict. Fusing it with the full transcript gains +0.053 on half-life and +0.030 on translation efficiency. Note what the composition row says: counted features of the whole transcript already reach 0.542 and 0.702, so an encoder has to clear that, not zero.</a:t>
+            </a:r>
+            <a:endParaRPr lang="en-US" sz="1250" dirty="0"/>
+          </a:p>
+        </p:txBody>
+      </p:sp>
+      <p:sp>
+        <p:nvSpPr>
+          <p:cNvPr id="7" name="stat card"/>
+          <p:cNvSpPr/>
+          <p:nvPr/>
+        </p:nvSpPr>
+        <p:spPr>
+          <a:xfrm>
+            <a:off x="8641080" y="2029968"/>
+            <a:ext cx="2743200" cy="1783080"/>
+          </a:xfrm>
+          <a:prstGeom prst="roundRect">
+            <a:avLst>
+              <a:gd name="adj" fmla="val 3077"/>
+            </a:avLst>
+          </a:prstGeom>
+          <a:solidFill>
+            <a:srgbClr val="213183"/>
+          </a:solidFill>
+          <a:ln w="9525">
+            <a:solidFill>
+              <a:srgbClr val="213183"/>
+            </a:solidFill>
+            <a:prstDash val="solid"/>
+          </a:ln>
+        </p:spPr>
+      </p:sp>
+      <p:sp>
+        <p:nvSpPr>
+          <p:cNvPr id="8" name="stat value"/>
+          <p:cNvSpPr txBox="1"/>
+          <p:nvPr/>
+        </p:nvSpPr>
+        <p:spPr>
+          <a:xfrm>
+            <a:off x="8842248" y="2212848"/>
+            <a:ext cx="2340864" cy="457200"/>
+          </a:xfrm>
+          <a:prstGeom prst="rect">
+            <a:avLst/>
+          </a:prstGeom>
+          <a:noFill/>
+          <a:ln/>
+        </p:spPr>
+        <p:txBody>
+          <a:bodyPr wrap="square" lIns="0" tIns="0" rIns="0" bIns="0" rtlCol="0" anchor="ctr"/>
+          <a:lstStyle/>
+          <a:p>
+            <a:pPr indent="0" marL="0">
+              <a:buNone/>
+            </a:pPr>
+            <a:r>
+              <a:rPr lang="en-US" sz="2400" b="1" dirty="0">
+                <a:solidFill>
+                  <a:srgbClr val="FFFFFF"/>
+                </a:solidFill>
+              </a:rPr>
+              <a:t>+0.053</a:t>
+            </a:r>
+            <a:endParaRPr lang="en-US" sz="2400" dirty="0"/>
+          </a:p>
+        </p:txBody>
+      </p:sp>
+      <p:sp>
+        <p:nvSpPr>
+          <p:cNvPr id="9" name="stat label"/>
+          <p:cNvSpPr txBox="1"/>
+          <p:nvPr/>
+        </p:nvSpPr>
+        <p:spPr>
+          <a:xfrm>
+            <a:off x="8842248" y="2688336"/>
+            <a:ext cx="2340864" cy="1005840"/>
+          </a:xfrm>
+          <a:prstGeom prst="rect">
+            <a:avLst/>
+          </a:prstGeom>
+          <a:noFill/>
+          <a:ln/>
+        </p:spPr>
+        <p:txBody>
+          <a:bodyPr wrap="square" lIns="0" tIns="0" rIns="0" bIns="0" rtlCol="0" anchor="t"/>
+          <a:lstStyle/>
+          <a:p>
+            <a:pPr indent="0" marL="0">
+              <a:buNone/>
+            </a:pPr>
+            <a:r>
+              <a:rPr lang="en-US" sz="1150" dirty="0">
+                <a:solidFill>
+                  <a:srgbClr val="FFFFFF"/>
+                </a:solidFill>
+              </a:rPr>
+              <a:t>Full transcript with protein over the best single encoder on half-life; +0.030 on translation efficiency.</a:t>
+            </a:r>
+            <a:endParaRPr lang="en-US" sz="1150" dirty="0"/>
+          </a:p>
+        </p:txBody>
+      </p:sp>
+      <p:sp>
+        <p:nvSpPr>
+          <p:cNvPr id="10" name="stat card"/>
+          <p:cNvSpPr/>
+          <p:nvPr/>
+        </p:nvSpPr>
+        <p:spPr>
+          <a:xfrm>
+            <a:off x="8641080" y="3995928"/>
+            <a:ext cx="2743200" cy="1783080"/>
+          </a:xfrm>
+          <a:prstGeom prst="roundRect">
+            <a:avLst>
+              <a:gd name="adj" fmla="val 3077"/>
+            </a:avLst>
+          </a:prstGeom>
+          <a:solidFill>
+            <a:srgbClr val="FFFFFF"/>
+          </a:solidFill>
+          <a:ln w="9525">
+            <a:solidFill>
+              <a:srgbClr val="E6E6E6"/>
+            </a:solidFill>
+            <a:prstDash val="solid"/>
+          </a:ln>
+        </p:spPr>
+      </p:sp>
+      <p:sp>
+        <p:nvSpPr>
+          <p:cNvPr id="11" name="stat value"/>
+          <p:cNvSpPr txBox="1"/>
+          <p:nvPr/>
+        </p:nvSpPr>
+        <p:spPr>
+          <a:xfrm>
+            <a:off x="8842248" y="4178808"/>
+            <a:ext cx="2340864" cy="457200"/>
+          </a:xfrm>
+          <a:prstGeom prst="rect">
+            <a:avLst/>
+          </a:prstGeom>
+          <a:noFill/>
+          <a:ln/>
+        </p:spPr>
+        <p:txBody>
+          <a:bodyPr wrap="square" lIns="0" tIns="0" rIns="0" bIns="0" rtlCol="0" anchor="ctr"/>
+          <a:lstStyle/>
+          <a:p>
+            <a:pPr indent="0" marL="0">
+              <a:buNone/>
+            </a:pPr>
+            <a:r>
+              <a:rPr lang="en-US" sz="2400" b="1" dirty="0">
+                <a:solidFill>
+                  <a:srgbClr val="31302E"/>
+                </a:solidFill>
+              </a:rPr>
+              <a:t>Not yet proof</a:t>
+            </a:r>
+            <a:endParaRPr lang="en-US" sz="2400" dirty="0"/>
+          </a:p>
+        </p:txBody>
+      </p:sp>
+      <p:sp>
+        <p:nvSpPr>
+          <p:cNvPr id="12" name="stat label"/>
+          <p:cNvSpPr txBox="1"/>
+          <p:nvPr/>
+        </p:nvSpPr>
+        <p:spPr>
+          <a:xfrm>
+            <a:off x="8842248" y="4654296"/>
+            <a:ext cx="2340864" cy="1005840"/>
+          </a:xfrm>
+          <a:prstGeom prst="rect">
+            <a:avLst/>
+          </a:prstGeom>
+          <a:noFill/>
+          <a:ln/>
+        </p:spPr>
+        <p:txBody>
+          <a:bodyPr wrap="square" lIns="0" tIns="0" rIns="0" bIns="0" rtlCol="0" anchor="t"/>
+          <a:lstStyle/>
+          <a:p>
+            <a:pPr indent="0" marL="0">
+              <a:buNone/>
+            </a:pPr>
+            <a:r>
+              <a:rPr lang="en-US" sz="1150" dirty="0">
+                <a:solidFill>
+                  <a:srgbClr val="615D59"/>
+                </a:solidFill>
+              </a:rPr>
+              <a:t>Mean and standard error over nine splits, with no per-split predictions retained, so these are not paired intervals. The two fused rows are within each other's error.</a:t>
+            </a:r>
+            <a:endParaRPr lang="en-US" sz="1150" dirty="0"/>
+          </a:p>
+        </p:txBody>
+      </p:sp>
+    </p:spTree>
+  </p:cSld>
+  <p:clrMapOvr>
+    <a:masterClrMapping/>
+  </p:clrMapOvr>
+</p:sld>
+</file>
+
+<file path=ppt/slides/slide12.xml><?xml version="1.0" encoding="utf-8"?>
+<p:sld xmlns:a="http://schemas.openxmlformats.org/drawingml/2006/main" xmlns:r="http://schemas.openxmlformats.org/officeDocument/2006/relationships" xmlns:p="http://schemas.openxmlformats.org/presentationml/2006/main">
+  <p:cSld name="Slide 12">
+    <p:spTree>
+      <p:nvGrpSpPr>
+        <p:cNvPr id="1" name=""/>
+        <p:cNvGrpSpPr/>
+        <p:nvPr/>
+      </p:nvGrpSpPr>
+      <p:grpSpPr>
+        <a:xfrm>
+          <a:off x="0" y="0"/>
+          <a:ext cx="0" cy="0"/>
+          <a:chOff x="0" y="0"/>
+          <a:chExt cx="0" cy="0"/>
+        </a:xfrm>
+      </p:grpSpPr>
+      <p:sp>
+        <p:nvSpPr>
+          <p:cNvPr id="2" name="Text 0"/>
+          <p:cNvSpPr/>
+          <p:nvPr>
+            <p:ph idx="101" type="body" hasCustomPrompt="1"/>
+          </p:nvPr>
+        </p:nvSpPr>
+        <p:spPr>
+          <a:xfrm>
+            <a:off x="1005840" y="795528"/>
+            <a:ext cx="8229600" cy="274320"/>
+          </a:xfrm>
+          <a:prstGeom prst="rect">
+            <a:avLst/>
+          </a:prstGeom>
+          <a:noFill/>
+          <a:ln/>
+        </p:spPr>
+        <p:txBody>
+          <a:bodyPr wrap="square" lIns="0" tIns="0" rIns="0" bIns="0" rtlCol="0" anchor="ctr"/>
+          <a:lstStyle/>
+          <a:p>
+            <a:pPr indent="0" marL="0">
+              <a:buNone/>
+            </a:pPr>
+            <a:r>
+              <a:rPr lang="en-US" sz="1200" dirty="0">
+                <a:solidFill>
+                  <a:schemeClr val="accent2"/>
+                </a:solidFill>
+              </a:rPr>
+              <a:t>Baseline · IsoFormer on GTEx (Gantt 44)</a:t>
+            </a:r>
+            <a:endParaRPr lang="en-US" sz="1200" dirty="0"/>
+          </a:p>
+        </p:txBody>
+      </p:sp>
+      <p:sp>
+        <p:nvSpPr>
+          <p:cNvPr id="3" name="Text 0"/>
+          <p:cNvSpPr/>
+          <p:nvPr>
+            <p:ph idx="102" type="title" hasCustomPrompt="1"/>
+          </p:nvPr>
+        </p:nvSpPr>
+        <p:spPr>
+          <a:xfrm>
+            <a:off x="813816" y="1152144"/>
+            <a:ext cx="10881360" cy="822960"/>
+          </a:xfrm>
+          <a:prstGeom prst="rect">
+            <a:avLst/>
+          </a:prstGeom>
+          <a:noFill/>
+          <a:ln/>
+        </p:spPr>
+        <p:txBody>
+          <a:bodyPr wrap="square" lIns="0" tIns="0" rIns="0" bIns="0" rtlCol="0" anchor="t"/>
+          <a:lstStyle/>
+          <a:p>
+            <a:pPr algn="l" indent="0" marL="0">
+              <a:buNone/>
+            </a:pPr>
+            <a:r>
+              <a:rPr lang="en-US" sz="2500" b="1" dirty="0">
+                <a:solidFill>
+                  <a:schemeClr val="tx1"/>
+                </a:solidFill>
+              </a:rPr>
+              <a:t>On physically distinct molecules, with no codon grid, fusion wins clearly</a:t>
+            </a:r>
+            <a:endParaRPr lang="en-US" sz="2500" dirty="0"/>
+          </a:p>
+        </p:txBody>
+      </p:sp>
+      <p:sp>
+        <p:nvSpPr>
+          <p:cNvPr id="4" name="Text 0"/>
+          <p:cNvSpPr/>
+          <p:nvPr>
+            <p:ph idx="103" type="body" hasCustomPrompt="1"/>
+          </p:nvPr>
+        </p:nvSpPr>
+        <p:spPr>
+          <a:xfrm>
+            <a:off x="813816" y="5989320"/>
+            <a:ext cx="10881360" cy="502920"/>
+          </a:xfrm>
+          <a:prstGeom prst="rect">
+            <a:avLst/>
+          </a:prstGeom>
+          <a:noFill/>
+          <a:ln/>
+        </p:spPr>
+        <p:txBody>
+          <a:bodyPr wrap="square" lIns="0" tIns="0" rIns="0" bIns="0" rtlCol="0" anchor="t"/>
+          <a:lstStyle/>
+          <a:p>
+            <a:pPr indent="0" marL="0">
+              <a:buNone/>
+            </a:pPr>
+            <a:r>
+              <a:rPr lang="en-US" sz="1150" dirty="0">
+                <a:solidFill>
+                  <a:schemeClr val="accent2"/>
+                </a:solidFill>
+              </a:rPr>
+              <a:t>IsoFormer's six-row modality ablation on the 2,000-transcript GTEx pilot, split by gene, Spearman over thirty tissues, one seed. IsoFormer fine-tunes its encoders and we freeze them, so the gap to its absolute values is what freezing costs.</a:t>
+            </a:r>
+            <a:endParaRPr lang="en-US" sz="1150" dirty="0"/>
+          </a:p>
+        </p:txBody>
+      </p:sp>
+      <p:graphicFrame>
+        <p:nvGraphicFramePr>
+          <p:cNvPr id="13" name="isoformer table"/>
+          <p:cNvGraphicFramePr>
+            <a:graphicFrameLocks noGrp="1"/>
+          </p:cNvGraphicFramePr>
+          <p:nvPr>
+            <p:extLst>
+              <p:ext uri="{D42A27DB-BD31-4B8C-83A1-F6EECF244321}">
+                <p14:modId xmlns:p14="http://schemas.microsoft.com/office/powerpoint/2010/main" val="1579011935"/>
+              </p:ext>
+            </p:extLst>
+          </p:nvPr>
+        </p:nvGraphicFramePr>
+        <p:xfrm>
+          <a:off x="813816" y="2029968"/>
+          <a:ext cx="4937760" cy="914400"/>
+        </p:xfrm>
+        <a:graphic>
+          <a:graphicData uri="http://schemas.openxmlformats.org/drawingml/2006/table">
+            <a:tbl>
+              <a:tblPr/>
+              <a:tblGrid>
+                <a:gridCol w="2011680"/>
+                <a:gridCol w="1463040"/>
+                <a:gridCol w="1463040"/>
+              </a:tblGrid>
+              <a:tr h="365760">
+                <a:tc>
+                  <a:txBody>
+                    <a:bodyPr/>
+                    <a:lstStyle/>
+                    <a:p>
+                      <a:pPr algn="l" indent="0" marL="0">
+                        <a:buNone/>
+                      </a:pPr>
+                      <a:r>
+                        <a:rPr lang="en-US" sz="1150" b="1" dirty="0">
+                          <a:solidFill>
+                            <a:srgbClr val="31302E"/>
+                          </a:solidFill>
+                          <a:latin typeface="Inter" pitchFamily="34" charset="0"/>
+                          <a:ea typeface="Inter" pitchFamily="34" charset="-122"/>
+                          <a:cs typeface="Inter" pitchFamily="34" charset="-120"/>
+                        </a:rPr>
+                        <a:t>Modalities</a:t>
+                      </a:r>
+                      <a:endParaRPr lang="en-US" sz="1150" dirty="0">
+                        <a:latin typeface="Inter" charset="0"/>
+                        <a:ea typeface="Inter" charset="0"/>
+                        <a:cs typeface="Inter" charset="0"/>
+                      </a:endParaRPr>
+                    </a:p>
+                  </a:txBody>
+                  <a:tcPr marL="73152" marR="73152" marT="36576" marB="36576" anchor="ctr">
+                    <a:lnL w="6350" cap="flat" cmpd="sng" algn="ctr">
+                      <a:solidFill>
+                        <a:srgbClr val="E6E6E6"/>
+                      </a:solidFill>
+                      <a:prstDash val="solid"/>
+                      <a:round/>
+                      <a:headEnd type="none" w="med" len="med"/>
+                      <a:tailEnd type="none" w="med" len="med"/>
+                    </a:lnL>
+                    <a:lnR w="6350" cap="flat" cmpd="sng" algn="ctr">
+                      <a:solidFill>
+                        <a:srgbClr val="E6E6E6"/>
+                      </a:solidFill>
+                      <a:prstDash val="solid"/>
+                      <a:round/>
+                      <a:headEnd type="none" w="med" len="med"/>
+                      <a:tailEnd type="none" w="med" len="med"/>
+                    </a:lnR>
+                    <a:lnT w="6350" cap="flat" cmpd="sng" algn="ctr">
+                      <a:solidFill>
+                        <a:srgbClr val="E6E6E6"/>
+                      </a:solidFill>
+                      <a:prstDash val="solid"/>
+                      <a:round/>
+                      <a:headEnd type="none" w="med" len="med"/>
+                      <a:tailEnd type="none" w="med" len="med"/>
+                    </a:lnT>
+                    <a:lnB w="6350" cap="flat" cmpd="sng" algn="ctr">
+                      <a:solidFill>
+                        <a:srgbClr val="E6E6E6"/>
+                      </a:solidFill>
+                      <a:prstDash val="solid"/>
+                      <a:round/>
+                      <a:headEnd type="none" w="med" len="med"/>
+                      <a:tailEnd type="none" w="med" len="med"/>
+                    </a:lnB>
+                    <a:solidFill>
+                      <a:srgbClr val="F0F0EE"/>
+                    </a:solidFill>
+                  </a:tcPr>
+                </a:tc>
+                <a:tc>
+                  <a:txBody>
+                    <a:bodyPr/>
+                    <a:lstStyle/>
+                    <a:p>
+                      <a:pPr algn="ctr" indent="0" marL="0">
+                        <a:buNone/>
+                      </a:pPr>
+                      <a:r>
+                        <a:rPr lang="en-US" sz="1150" b="1" dirty="0">
+                          <a:solidFill>
+                            <a:srgbClr val="31302E"/>
+                          </a:solidFill>
+                          <a:latin typeface="Inter" pitchFamily="34" charset="0"/>
+                          <a:ea typeface="Inter" pitchFamily="34" charset="-122"/>
+                          <a:cs typeface="Inter" pitchFamily="34" charset="-120"/>
+                        </a:rPr>
+                        <a:t>Ours, frozen</a:t>
+                      </a:r>
+                      <a:endParaRPr lang="en-US" sz="1150" dirty="0">
+                        <a:latin typeface="Inter" charset="0"/>
+                        <a:ea typeface="Inter" charset="0"/>
+                        <a:cs typeface="Inter" charset="0"/>
+                      </a:endParaRPr>
+                    </a:p>
+                  </a:txBody>
+                  <a:tcPr marL="73152" marR="73152" marT="36576" marB="36576" anchor="ctr">
+                    <a:lnL w="6350" cap="flat" cmpd="sng" algn="ctr">
+                      <a:solidFill>
+                        <a:srgbClr val="E6E6E6"/>
+                      </a:solidFill>
+                      <a:prstDash val="solid"/>
+                      <a:round/>
+                      <a:headEnd type="none" w="med" len="med"/>
+                      <a:tailEnd type="none" w="med" len="med"/>
+                    </a:lnL>
+                    <a:lnR w="6350" cap="flat" cmpd="sng" algn="ctr">
+                      <a:solidFill>
+                        <a:srgbClr val="E6E6E6"/>
+                      </a:solidFill>
+                      <a:prstDash val="solid"/>
+                      <a:round/>
+                      <a:headEnd type="none" w="med" len="med"/>
+                      <a:tailEnd type="none" w="med" len="med"/>
+                    </a:lnR>
+                    <a:lnT w="6350" cap="flat" cmpd="sng" algn="ctr">
+                      <a:solidFill>
+                        <a:srgbClr val="E6E6E6"/>
+                      </a:solidFill>
+                      <a:prstDash val="solid"/>
+                      <a:round/>
+                      <a:headEnd type="none" w="med" len="med"/>
+                      <a:tailEnd type="none" w="med" len="med"/>
+                    </a:lnT>
+                    <a:lnB w="6350" cap="flat" cmpd="sng" algn="ctr">
+                      <a:solidFill>
+                        <a:srgbClr val="E6E6E6"/>
+                      </a:solidFill>
+                      <a:prstDash val="solid"/>
+                      <a:round/>
+                      <a:headEnd type="none" w="med" len="med"/>
+                      <a:tailEnd type="none" w="med" len="med"/>
+                    </a:lnB>
+                    <a:solidFill>
+                      <a:srgbClr val="F0F0EE"/>
+                    </a:solidFill>
+                  </a:tcPr>
+                </a:tc>
+                <a:tc>
+                  <a:txBody>
+                    <a:bodyPr/>
+                    <a:lstStyle/>
+                    <a:p>
+                      <a:pPr algn="ctr" indent="0" marL="0">
+                        <a:buNone/>
+                      </a:pPr>
+                      <a:r>
+                        <a:rPr lang="en-US" sz="1150" b="1" dirty="0">
+                          <a:solidFill>
+                            <a:srgbClr val="31302E"/>
+                          </a:solidFill>
+                          <a:latin typeface="Inter" pitchFamily="34" charset="0"/>
+                          <a:ea typeface="Inter" pitchFamily="34" charset="-122"/>
+                          <a:cs typeface="Inter" pitchFamily="34" charset="-120"/>
+                        </a:rPr>
+                        <a:t>IsoFormer, fine-tuned</a:t>
+                      </a:r>
+                      <a:endParaRPr lang="en-US" sz="1150" dirty="0">
+                        <a:latin typeface="Inter" charset="0"/>
+                        <a:ea typeface="Inter" charset="0"/>
+                        <a:cs typeface="Inter" charset="0"/>
+                      </a:endParaRPr>
+                    </a:p>
+                  </a:txBody>
+                  <a:tcPr marL="73152" marR="73152" marT="36576" marB="36576" anchor="ctr">
+                    <a:lnL w="6350" cap="flat" cmpd="sng" algn="ctr">
+                      <a:solidFill>
+                        <a:srgbClr val="E6E6E6"/>
+                      </a:solidFill>
+                      <a:prstDash val="solid"/>
+                      <a:round/>
+                      <a:headEnd type="none" w="med" len="med"/>
+                      <a:tailEnd type="none" w="med" len="med"/>
+                    </a:lnL>
+                    <a:lnR w="6350" cap="flat" cmpd="sng" algn="ctr">
+                      <a:solidFill>
+                        <a:srgbClr val="E6E6E6"/>
+                      </a:solidFill>
+                      <a:prstDash val="solid"/>
+                      <a:round/>
+                      <a:headEnd type="none" w="med" len="med"/>
+                      <a:tailEnd type="none" w="med" len="med"/>
+                    </a:lnR>
+                    <a:lnT w="6350" cap="flat" cmpd="sng" algn="ctr">
+                      <a:solidFill>
+                        <a:srgbClr val="E6E6E6"/>
+                      </a:solidFill>
+                      <a:prstDash val="solid"/>
+                      <a:round/>
+                      <a:headEnd type="none" w="med" len="med"/>
+                      <a:tailEnd type="none" w="med" len="med"/>
+                    </a:lnT>
+                    <a:lnB w="6350" cap="flat" cmpd="sng" algn="ctr">
+                      <a:solidFill>
+                        <a:srgbClr val="E6E6E6"/>
+                      </a:solidFill>
+                      <a:prstDash val="solid"/>
+                      <a:round/>
+                      <a:headEnd type="none" w="med" len="med"/>
+                      <a:tailEnd type="none" w="med" len="med"/>
+                    </a:lnB>
+                    <a:solidFill>
+                      <a:srgbClr val="F0F0EE"/>
+                    </a:solidFill>
+                  </a:tcPr>
+                </a:tc>
+              </a:tr>
+              <a:tr h="365760">
+                <a:tc>
+                  <a:txBody>
+                    <a:bodyPr/>
+                    <a:lstStyle/>
+                    <a:p>
+                      <a:pPr algn="l" indent="0" marL="0">
+                        <a:buNone/>
+                      </a:pPr>
+                      <a:r>
+                        <a:rPr lang="en-US" sz="1150" dirty="0">
+                          <a:solidFill>
+                            <a:srgbClr val="31302E"/>
+                          </a:solidFill>
+                          <a:latin typeface="Inter" pitchFamily="34" charset="0"/>
+                          <a:ea typeface="Inter" pitchFamily="34" charset="-122"/>
+                          <a:cs typeface="Inter" pitchFamily="34" charset="-120"/>
+                        </a:rPr>
+                        <a:t>DNA</a:t>
+                      </a:r>
+                      <a:endParaRPr lang="en-US" sz="1150" dirty="0">
+                        <a:latin typeface="Inter" charset="0"/>
+                        <a:ea typeface="Inter" charset="0"/>
+                        <a:cs typeface="Inter" charset="0"/>
+                      </a:endParaRPr>
+                    </a:p>
+                  </a:txBody>
+                  <a:tcPr marL="73152" marR="73152" marT="36576" marB="36576" anchor="ctr">
+                    <a:lnL w="6350" cap="flat" cmpd="sng" algn="ctr">
+                      <a:solidFill>
+                        <a:srgbClr val="E6E6E6"/>
+                      </a:solidFill>
+                      <a:prstDash val="solid"/>
+                      <a:round/>
+                      <a:headEnd type="none" w="med" len="med"/>
+                      <a:tailEnd type="none" w="med" len="med"/>
+                    </a:lnL>
+                    <a:lnR w="6350" cap="flat" cmpd="sng" algn="ctr">
+                      <a:solidFill>
+                        <a:srgbClr val="E6E6E6"/>
+                      </a:solidFill>
+                      <a:prstDash val="solid"/>
+                      <a:round/>
+                      <a:headEnd type="none" w="med" len="med"/>
+                      <a:tailEnd type="none" w="med" len="med"/>
+                    </a:lnR>
+                    <a:lnT w="6350" cap="flat" cmpd="sng" algn="ctr">
+                      <a:solidFill>
+                        <a:srgbClr val="E6E6E6"/>
+                      </a:solidFill>
+                      <a:prstDash val="solid"/>
+                      <a:round/>
+                      <a:headEnd type="none" w="med" len="med"/>
+                      <a:tailEnd type="none" w="med" len="med"/>
+                    </a:lnT>
+                    <a:lnB w="6350" cap="flat" cmpd="sng" algn="ctr">
+                      <a:solidFill>
+                        <a:srgbClr val="E6E6E6"/>
+                      </a:solidFill>
+                      <a:prstDash val="solid"/>
+                      <a:round/>
+                      <a:headEnd type="none" w="med" len="med"/>
+                      <a:tailEnd type="none" w="med" len="med"/>
+                    </a:lnB>
+                    <a:solidFill>
+                      <a:srgbClr val="FFFFFF"/>
+                    </a:solidFill>
+                  </a:tcPr>
+                </a:tc>
+                <a:tc>
+                  <a:txBody>
+                    <a:bodyPr/>
+                    <a:lstStyle/>
+                    <a:p>
+                      <a:pPr algn="ctr" indent="0" marL="0">
+                        <a:buNone/>
+                      </a:pPr>
+                      <a:r>
+                        <a:rPr lang="en-US" sz="1150" dirty="0">
+                          <a:solidFill>
+                            <a:srgbClr val="31302E"/>
+                          </a:solidFill>
+                          <a:latin typeface="Inter" pitchFamily="34" charset="0"/>
+                          <a:ea typeface="Inter" pitchFamily="34" charset="-122"/>
+                          <a:cs typeface="Inter" pitchFamily="34" charset="-120"/>
+                        </a:rPr>
+                        <a:t>0.199</a:t>
+                      </a:r>
+                      <a:endParaRPr lang="en-US" sz="1150" dirty="0">
+                        <a:latin typeface="Inter" charset="0"/>
+                        <a:ea typeface="Inter" charset="0"/>
+                        <a:cs typeface="Inter" charset="0"/>
+                      </a:endParaRPr>
+                    </a:p>
+                  </a:txBody>
+                  <a:tcPr marL="73152" marR="73152" marT="36576" marB="36576" anchor="ctr">
+                    <a:lnL w="6350" cap="flat" cmpd="sng" algn="ctr">
+                      <a:solidFill>
+                        <a:srgbClr val="E6E6E6"/>
+                      </a:solidFill>
+                      <a:prstDash val="solid"/>
+                      <a:round/>
+                      <a:headEnd type="none" w="med" len="med"/>
+                      <a:tailEnd type="none" w="med" len="med"/>
+                    </a:lnL>
+                    <a:lnR w="6350" cap="flat" cmpd="sng" algn="ctr">
+                      <a:solidFill>
+                        <a:srgbClr val="E6E6E6"/>
+                      </a:solidFill>
+                      <a:prstDash val="solid"/>
+                      <a:round/>
+                      <a:headEnd type="none" w="med" len="med"/>
+                      <a:tailEnd type="none" w="med" len="med"/>
+                    </a:lnR>
+                    <a:lnT w="6350" cap="flat" cmpd="sng" algn="ctr">
+                      <a:solidFill>
+                        <a:srgbClr val="E6E6E6"/>
+                      </a:solidFill>
+                      <a:prstDash val="solid"/>
+                      <a:round/>
+                      <a:headEnd type="none" w="med" len="med"/>
+                      <a:tailEnd type="none" w="med" len="med"/>
+                    </a:lnT>
+                    <a:lnB w="6350" cap="flat" cmpd="sng" algn="ctr">
+                      <a:solidFill>
+                        <a:srgbClr val="E6E6E6"/>
+                      </a:solidFill>
+                      <a:prstDash val="solid"/>
+                      <a:round/>
+                      <a:headEnd type="none" w="med" len="med"/>
+                      <a:tailEnd type="none" w="med" len="med"/>
+                    </a:lnB>
+                    <a:solidFill>
+                      <a:srgbClr val="FFFFFF"/>
+                    </a:solidFill>
+                  </a:tcPr>
+                </a:tc>
+                <a:tc>
+                  <a:txBody>
+                    <a:bodyPr/>
+                    <a:lstStyle/>
+                    <a:p>
+                      <a:pPr algn="ctr" indent="0" marL="0">
+                        <a:buNone/>
+                      </a:pPr>
+                      <a:r>
+                        <a:rPr lang="en-US" sz="1150" dirty="0">
+                          <a:solidFill>
+                            <a:srgbClr val="31302E"/>
+                          </a:solidFill>
+                          <a:latin typeface="Inter" pitchFamily="34" charset="0"/>
+                          <a:ea typeface="Inter" pitchFamily="34" charset="-122"/>
+                          <a:cs typeface="Inter" pitchFamily="34" charset="-120"/>
+                        </a:rPr>
+                        <a:t>0.43</a:t>
+                      </a:r>
+                      <a:endParaRPr lang="en-US" sz="1150" dirty="0">
+                        <a:latin typeface="Inter" charset="0"/>
+                        <a:ea typeface="Inter" charset="0"/>
+                        <a:cs typeface="Inter" charset="0"/>
+                      </a:endParaRPr>
+                    </a:p>
+                  </a:txBody>
+                  <a:tcPr marL="73152" marR="73152" marT="36576" marB="36576" anchor="ctr">
+                    <a:lnL w="6350" cap="flat" cmpd="sng" algn="ctr">
+                      <a:solidFill>
+                        <a:srgbClr val="E6E6E6"/>
+                      </a:solidFill>
+                      <a:prstDash val="solid"/>
+                      <a:round/>
+                      <a:headEnd type="none" w="med" len="med"/>
+                      <a:tailEnd type="none" w="med" len="med"/>
+                    </a:lnL>
+                    <a:lnR w="6350" cap="flat" cmpd="sng" algn="ctr">
+                      <a:solidFill>
+                        <a:srgbClr val="E6E6E6"/>
+                      </a:solidFill>
+                      <a:prstDash val="solid"/>
+                      <a:round/>
+                      <a:headEnd type="none" w="med" len="med"/>
+                      <a:tailEnd type="none" w="med" len="med"/>
+                    </a:lnR>
+                    <a:lnT w="6350" cap="flat" cmpd="sng" algn="ctr">
+                      <a:solidFill>
+                        <a:srgbClr val="E6E6E6"/>
+                      </a:solidFill>
+                      <a:prstDash val="solid"/>
+                      <a:round/>
+                      <a:headEnd type="none" w="med" len="med"/>
+                      <a:tailEnd type="none" w="med" len="med"/>
+                    </a:lnT>
+                    <a:lnB w="6350" cap="flat" cmpd="sng" algn="ctr">
+                      <a:solidFill>
+                        <a:srgbClr val="E6E6E6"/>
+                      </a:solidFill>
+                      <a:prstDash val="solid"/>
+                      <a:round/>
+                      <a:headEnd type="none" w="med" len="med"/>
+                      <a:tailEnd type="none" w="med" len="med"/>
+                    </a:lnB>
+                    <a:solidFill>
+                      <a:srgbClr val="FFFFFF"/>
+                    </a:solidFill>
+                  </a:tcPr>
+                </a:tc>
+              </a:tr>
+              <a:tr h="365760">
+                <a:tc>
+                  <a:txBody>
+                    <a:bodyPr/>
+                    <a:lstStyle/>
+                    <a:p>
+                      <a:pPr algn="l" indent="0" marL="0">
+                        <a:buNone/>
+                      </a:pPr>
+                      <a:r>
+                        <a:rPr lang="en-US" sz="1150" dirty="0">
+                          <a:solidFill>
+                            <a:srgbClr val="31302E"/>
+                          </a:solidFill>
+                          <a:latin typeface="Inter" pitchFamily="34" charset="0"/>
+                          <a:ea typeface="Inter" pitchFamily="34" charset="-122"/>
+                          <a:cs typeface="Inter" pitchFamily="34" charset="-120"/>
+                        </a:rPr>
+                        <a:t>RNA</a:t>
+                      </a:r>
+                      <a:endParaRPr lang="en-US" sz="1150" dirty="0">
+                        <a:latin typeface="Inter" charset="0"/>
+                        <a:ea typeface="Inter" charset="0"/>
+                        <a:cs typeface="Inter" charset="0"/>
+                      </a:endParaRPr>
+                    </a:p>
+                  </a:txBody>
+                  <a:tcPr marL="73152" marR="73152" marT="36576" marB="36576" anchor="ctr">
+                    <a:lnL w="6350" cap="flat" cmpd="sng" algn="ctr">
+                      <a:solidFill>
+                        <a:srgbClr val="E6E6E6"/>
+                      </a:solidFill>
+                      <a:prstDash val="solid"/>
+                      <a:round/>
+                      <a:headEnd type="none" w="med" len="med"/>
+                      <a:tailEnd type="none" w="med" len="med"/>
+                    </a:lnL>
+                    <a:lnR w="6350" cap="flat" cmpd="sng" algn="ctr">
+                      <a:solidFill>
+                        <a:srgbClr val="E6E6E6"/>
+                      </a:solidFill>
+                      <a:prstDash val="solid"/>
+                      <a:round/>
+                      <a:headEnd type="none" w="med" len="med"/>
+                      <a:tailEnd type="none" w="med" len="med"/>
+                    </a:lnR>
+                    <a:lnT w="6350" cap="flat" cmpd="sng" algn="ctr">
+                      <a:solidFill>
+                        <a:srgbClr val="E6E6E6"/>
+                      </a:solidFill>
+                      <a:prstDash val="solid"/>
+                      <a:round/>
+                      <a:headEnd type="none" w="med" len="med"/>
+                      <a:tailEnd type="none" w="med" len="med"/>
+                    </a:lnT>
+                    <a:lnB w="6350" cap="flat" cmpd="sng" algn="ctr">
+                      <a:solidFill>
+                        <a:srgbClr val="E6E6E6"/>
+                      </a:solidFill>
+                      <a:prstDash val="solid"/>
+                      <a:round/>
+                      <a:headEnd type="none" w="med" len="med"/>
+                      <a:tailEnd type="none" w="med" len="med"/>
+                    </a:lnB>
+                    <a:solidFill>
+                      <a:srgbClr val="FFFFFF"/>
+                    </a:solidFill>
+                  </a:tcPr>
+                </a:tc>
+                <a:tc>
+                  <a:txBody>
+                    <a:bodyPr/>
+                    <a:lstStyle/>
+                    <a:p>
+                      <a:pPr algn="ctr" indent="0" marL="0">
+                        <a:buNone/>
+                      </a:pPr>
+                      <a:r>
+                        <a:rPr lang="en-US" sz="1150" dirty="0">
+                          <a:solidFill>
+                            <a:srgbClr val="31302E"/>
+                          </a:solidFill>
+                          <a:latin typeface="Inter" pitchFamily="34" charset="0"/>
+                          <a:ea typeface="Inter" pitchFamily="34" charset="-122"/>
+                          <a:cs typeface="Inter" pitchFamily="34" charset="-120"/>
+                        </a:rPr>
+                        <a:t>0.452</a:t>
+                      </a:r>
+                      <a:endParaRPr lang="en-US" sz="1150" dirty="0">
+                        <a:latin typeface="Inter" charset="0"/>
+                        <a:ea typeface="Inter" charset="0"/>
+                        <a:cs typeface="Inter" charset="0"/>
+                      </a:endParaRPr>
+                    </a:p>
+                  </a:txBody>
+                  <a:tcPr marL="73152" marR="73152" marT="36576" marB="36576" anchor="ctr">
+                    <a:lnL w="6350" cap="flat" cmpd="sng" algn="ctr">
+                      <a:solidFill>
+                        <a:srgbClr val="E6E6E6"/>
+                      </a:solidFill>
+                      <a:prstDash val="solid"/>
+                      <a:round/>
+                      <a:headEnd type="none" w="med" len="med"/>
+                      <a:tailEnd type="none" w="med" len="med"/>
+                    </a:lnL>
+                    <a:lnR w="6350" cap="flat" cmpd="sng" algn="ctr">
+                      <a:solidFill>
+                        <a:srgbClr val="E6E6E6"/>
+                      </a:solidFill>
+                      <a:prstDash val="solid"/>
+                      <a:round/>
+                      <a:headEnd type="none" w="med" len="med"/>
+                      <a:tailEnd type="none" w="med" len="med"/>
+                    </a:lnR>
+                    <a:lnT w="6350" cap="flat" cmpd="sng" algn="ctr">
+                      <a:solidFill>
+                        <a:srgbClr val="E6E6E6"/>
+                      </a:solidFill>
+                      <a:prstDash val="solid"/>
+                      <a:round/>
+                      <a:headEnd type="none" w="med" len="med"/>
+                      <a:tailEnd type="none" w="med" len="med"/>
+                    </a:lnT>
+                    <a:lnB w="6350" cap="flat" cmpd="sng" algn="ctr">
+                      <a:solidFill>
+                        <a:srgbClr val="E6E6E6"/>
+                      </a:solidFill>
+                      <a:prstDash val="solid"/>
+                      <a:round/>
+                      <a:headEnd type="none" w="med" len="med"/>
+                      <a:tailEnd type="none" w="med" len="med"/>
+                    </a:lnB>
+                    <a:solidFill>
+                      <a:srgbClr val="FFFFFF"/>
+                    </a:solidFill>
+                  </a:tcPr>
+                </a:tc>
+                <a:tc>
+                  <a:txBody>
+                    <a:bodyPr/>
+                    <a:lstStyle/>
+                    <a:p>
+                      <a:pPr algn="ctr" indent="0" marL="0">
+                        <a:buNone/>
+                      </a:pPr>
+                      <a:r>
+                        <a:rPr lang="en-US" sz="1150" dirty="0">
+                          <a:solidFill>
+                            <a:srgbClr val="31302E"/>
+                          </a:solidFill>
+                          <a:latin typeface="Inter" pitchFamily="34" charset="0"/>
+                          <a:ea typeface="Inter" pitchFamily="34" charset="-122"/>
+                          <a:cs typeface="Inter" pitchFamily="34" charset="-120"/>
+                        </a:rPr>
+                        <a:t>0.61</a:t>
+                      </a:r>
+                      <a:endParaRPr lang="en-US" sz="1150" dirty="0">
+                        <a:latin typeface="Inter" charset="0"/>
+                        <a:ea typeface="Inter" charset="0"/>
+                        <a:cs typeface="Inter" charset="0"/>
+                      </a:endParaRPr>
+                    </a:p>
+                  </a:txBody>
+                  <a:tcPr marL="73152" marR="73152" marT="36576" marB="36576" anchor="ctr">
+                    <a:lnL w="6350" cap="flat" cmpd="sng" algn="ctr">
+                      <a:solidFill>
+                        <a:srgbClr val="E6E6E6"/>
+                      </a:solidFill>
+                      <a:prstDash val="solid"/>
+                      <a:round/>
+                      <a:headEnd type="none" w="med" len="med"/>
+                      <a:tailEnd type="none" w="med" len="med"/>
+                    </a:lnL>
+                    <a:lnR w="6350" cap="flat" cmpd="sng" algn="ctr">
+                      <a:solidFill>
+                        <a:srgbClr val="E6E6E6"/>
+                      </a:solidFill>
+                      <a:prstDash val="solid"/>
+                      <a:round/>
+                      <a:headEnd type="none" w="med" len="med"/>
+                      <a:tailEnd type="none" w="med" len="med"/>
+                    </a:lnR>
+                    <a:lnT w="6350" cap="flat" cmpd="sng" algn="ctr">
+                      <a:solidFill>
+                        <a:srgbClr val="E6E6E6"/>
+                      </a:solidFill>
+                      <a:prstDash val="solid"/>
+                      <a:round/>
+                      <a:headEnd type="none" w="med" len="med"/>
+                      <a:tailEnd type="none" w="med" len="med"/>
+                    </a:lnT>
+                    <a:lnB w="6350" cap="flat" cmpd="sng" algn="ctr">
+                      <a:solidFill>
+                        <a:srgbClr val="E6E6E6"/>
+                      </a:solidFill>
+                      <a:prstDash val="solid"/>
+                      <a:round/>
+                      <a:headEnd type="none" w="med" len="med"/>
+                      <a:tailEnd type="none" w="med" len="med"/>
+                    </a:lnB>
+                    <a:solidFill>
+                      <a:srgbClr val="FFFFFF"/>
+                    </a:solidFill>
+                  </a:tcPr>
+                </a:tc>
+              </a:tr>
+              <a:tr h="365760">
+                <a:tc>
+                  <a:txBody>
+                    <a:bodyPr/>
+                    <a:lstStyle/>
+                    <a:p>
+                      <a:pPr algn="l" indent="0" marL="0">
+                        <a:buNone/>
+                      </a:pPr>
+                      <a:r>
+                        <a:rPr lang="en-US" sz="1150" dirty="0">
+                          <a:solidFill>
+                            <a:srgbClr val="31302E"/>
+                          </a:solidFill>
+                          <a:latin typeface="Inter" pitchFamily="34" charset="0"/>
+                          <a:ea typeface="Inter" pitchFamily="34" charset="-122"/>
+                          <a:cs typeface="Inter" pitchFamily="34" charset="-120"/>
+                        </a:rPr>
+                        <a:t>Protein</a:t>
+                      </a:r>
+                      <a:endParaRPr lang="en-US" sz="1150" dirty="0">
+                        <a:latin typeface="Inter" charset="0"/>
+                        <a:ea typeface="Inter" charset="0"/>
+                        <a:cs typeface="Inter" charset="0"/>
+                      </a:endParaRPr>
+                    </a:p>
+                  </a:txBody>
+                  <a:tcPr marL="73152" marR="73152" marT="36576" marB="36576" anchor="ctr">
+                    <a:lnL w="6350" cap="flat" cmpd="sng" algn="ctr">
+                      <a:solidFill>
+                        <a:srgbClr val="E6E6E6"/>
+                      </a:solidFill>
+                      <a:prstDash val="solid"/>
+                      <a:round/>
+                      <a:headEnd type="none" w="med" len="med"/>
+                      <a:tailEnd type="none" w="med" len="med"/>
+                    </a:lnL>
+                    <a:lnR w="6350" cap="flat" cmpd="sng" algn="ctr">
+                      <a:solidFill>
+                        <a:srgbClr val="E6E6E6"/>
+                      </a:solidFill>
+                      <a:prstDash val="solid"/>
+                      <a:round/>
+                      <a:headEnd type="none" w="med" len="med"/>
+                      <a:tailEnd type="none" w="med" len="med"/>
+                    </a:lnR>
+                    <a:lnT w="6350" cap="flat" cmpd="sng" algn="ctr">
+                      <a:solidFill>
+                        <a:srgbClr val="E6E6E6"/>
+                      </a:solidFill>
+                      <a:prstDash val="solid"/>
+                      <a:round/>
+                      <a:headEnd type="none" w="med" len="med"/>
+                      <a:tailEnd type="none" w="med" len="med"/>
+                    </a:lnT>
+                    <a:lnB w="6350" cap="flat" cmpd="sng" algn="ctr">
+                      <a:solidFill>
+                        <a:srgbClr val="E6E6E6"/>
+                      </a:solidFill>
+                      <a:prstDash val="solid"/>
+                      <a:round/>
+                      <a:headEnd type="none" w="med" len="med"/>
+                      <a:tailEnd type="none" w="med" len="med"/>
+                    </a:lnB>
+                    <a:solidFill>
+                      <a:srgbClr val="FFFFFF"/>
+                    </a:solidFill>
+                  </a:tcPr>
+                </a:tc>
+                <a:tc>
+                  <a:txBody>
+                    <a:bodyPr/>
+                    <a:lstStyle/>
+                    <a:p>
+                      <a:pPr algn="ctr" indent="0" marL="0">
+                        <a:buNone/>
+                      </a:pPr>
+                      <a:r>
+                        <a:rPr lang="en-US" sz="1150" dirty="0">
+                          <a:solidFill>
+                            <a:srgbClr val="31302E"/>
+                          </a:solidFill>
+                          <a:latin typeface="Inter" pitchFamily="34" charset="0"/>
+                          <a:ea typeface="Inter" pitchFamily="34" charset="-122"/>
+                          <a:cs typeface="Inter" pitchFamily="34" charset="-120"/>
+                        </a:rPr>
+                        <a:t>0.160</a:t>
+                      </a:r>
+                      <a:endParaRPr lang="en-US" sz="1150" dirty="0">
+                        <a:latin typeface="Inter" charset="0"/>
+                        <a:ea typeface="Inter" charset="0"/>
+                        <a:cs typeface="Inter" charset="0"/>
+                      </a:endParaRPr>
+                    </a:p>
+                  </a:txBody>
+                  <a:tcPr marL="73152" marR="73152" marT="36576" marB="36576" anchor="ctr">
+                    <a:lnL w="6350" cap="flat" cmpd="sng" algn="ctr">
+                      <a:solidFill>
+                        <a:srgbClr val="E6E6E6"/>
+                      </a:solidFill>
+                      <a:prstDash val="solid"/>
+                      <a:round/>
+                      <a:headEnd type="none" w="med" len="med"/>
+                      <a:tailEnd type="none" w="med" len="med"/>
+                    </a:lnL>
+                    <a:lnR w="6350" cap="flat" cmpd="sng" algn="ctr">
+                      <a:solidFill>
+                        <a:srgbClr val="E6E6E6"/>
+                      </a:solidFill>
+                      <a:prstDash val="solid"/>
+                      <a:round/>
+                      <a:headEnd type="none" w="med" len="med"/>
+                      <a:tailEnd type="none" w="med" len="med"/>
+                    </a:lnR>
+                    <a:lnT w="6350" cap="flat" cmpd="sng" algn="ctr">
+                      <a:solidFill>
+                        <a:srgbClr val="E6E6E6"/>
+                      </a:solidFill>
+                      <a:prstDash val="solid"/>
+                      <a:round/>
+                      <a:headEnd type="none" w="med" len="med"/>
+                      <a:tailEnd type="none" w="med" len="med"/>
+                    </a:lnT>
+                    <a:lnB w="6350" cap="flat" cmpd="sng" algn="ctr">
+                      <a:solidFill>
+                        <a:srgbClr val="E6E6E6"/>
+                      </a:solidFill>
+                      <a:prstDash val="solid"/>
+                      <a:round/>
+                      <a:headEnd type="none" w="med" len="med"/>
+                      <a:tailEnd type="none" w="med" len="med"/>
+                    </a:lnB>
+                    <a:solidFill>
+                      <a:srgbClr val="FFFFFF"/>
+                    </a:solidFill>
+                  </a:tcPr>
+                </a:tc>
+                <a:tc>
+                  <a:txBody>
+                    <a:bodyPr/>
+                    <a:lstStyle/>
+                    <a:p>
+                      <a:pPr algn="ctr" indent="0" marL="0">
+                        <a:buNone/>
+                      </a:pPr>
+                      <a:r>
+                        <a:rPr lang="en-US" sz="1150" dirty="0">
+                          <a:solidFill>
+                            <a:srgbClr val="31302E"/>
+                          </a:solidFill>
+                          <a:latin typeface="Inter" pitchFamily="34" charset="0"/>
+                          <a:ea typeface="Inter" pitchFamily="34" charset="-122"/>
+                          <a:cs typeface="Inter" pitchFamily="34" charset="-120"/>
+                        </a:rPr>
+                        <a:t>0.46</a:t>
+                      </a:r>
+                      <a:endParaRPr lang="en-US" sz="1150" dirty="0">
+                        <a:latin typeface="Inter" charset="0"/>
+                        <a:ea typeface="Inter" charset="0"/>
+                        <a:cs typeface="Inter" charset="0"/>
+                      </a:endParaRPr>
+                    </a:p>
+                  </a:txBody>
+                  <a:tcPr marL="73152" marR="73152" marT="36576" marB="36576" anchor="ctr">
+                    <a:lnL w="6350" cap="flat" cmpd="sng" algn="ctr">
+                      <a:solidFill>
+                        <a:srgbClr val="E6E6E6"/>
+                      </a:solidFill>
+                      <a:prstDash val="solid"/>
+                      <a:round/>
+                      <a:headEnd type="none" w="med" len="med"/>
+                      <a:tailEnd type="none" w="med" len="med"/>
+                    </a:lnL>
+                    <a:lnR w="6350" cap="flat" cmpd="sng" algn="ctr">
+                      <a:solidFill>
+                        <a:srgbClr val="E6E6E6"/>
+                      </a:solidFill>
+                      <a:prstDash val="solid"/>
+                      <a:round/>
+                      <a:headEnd type="none" w="med" len="med"/>
+                      <a:tailEnd type="none" w="med" len="med"/>
+                    </a:lnR>
+                    <a:lnT w="6350" cap="flat" cmpd="sng" algn="ctr">
+                      <a:solidFill>
+                        <a:srgbClr val="E6E6E6"/>
+                      </a:solidFill>
+                      <a:prstDash val="solid"/>
+                      <a:round/>
+                      <a:headEnd type="none" w="med" len="med"/>
+                      <a:tailEnd type="none" w="med" len="med"/>
+                    </a:lnT>
+                    <a:lnB w="6350" cap="flat" cmpd="sng" algn="ctr">
+                      <a:solidFill>
+                        <a:srgbClr val="E6E6E6"/>
+                      </a:solidFill>
+                      <a:prstDash val="solid"/>
+                      <a:round/>
+                      <a:headEnd type="none" w="med" len="med"/>
+                      <a:tailEnd type="none" w="med" len="med"/>
+                    </a:lnB>
+                    <a:solidFill>
+                      <a:srgbClr val="FFFFFF"/>
+                    </a:solidFill>
+                  </a:tcPr>
+                </a:tc>
+              </a:tr>
+              <a:tr h="365760">
+                <a:tc>
+                  <a:txBody>
+                    <a:bodyPr/>
+                    <a:lstStyle/>
+                    <a:p>
+                      <a:pPr algn="l" indent="0" marL="0">
+                        <a:buNone/>
+                      </a:pPr>
+                      <a:r>
+                        <a:rPr lang="en-US" sz="1150" dirty="0">
+                          <a:solidFill>
+                            <a:srgbClr val="31302E"/>
+                          </a:solidFill>
+                          <a:latin typeface="Inter" pitchFamily="34" charset="0"/>
+                          <a:ea typeface="Inter" pitchFamily="34" charset="-122"/>
+                          <a:cs typeface="Inter" pitchFamily="34" charset="-120"/>
+                        </a:rPr>
+                        <a:t>DNA + protein</a:t>
+                      </a:r>
+                      <a:endParaRPr lang="en-US" sz="1150" dirty="0">
+                        <a:latin typeface="Inter" charset="0"/>
+                        <a:ea typeface="Inter" charset="0"/>
+                        <a:cs typeface="Inter" charset="0"/>
+                      </a:endParaRPr>
+                    </a:p>
+                  </a:txBody>
+                  <a:tcPr marL="73152" marR="73152" marT="36576" marB="36576" anchor="ctr">
+                    <a:lnL w="6350" cap="flat" cmpd="sng" algn="ctr">
+                      <a:solidFill>
+                        <a:srgbClr val="E6E6E6"/>
+                      </a:solidFill>
+                      <a:prstDash val="solid"/>
+                      <a:round/>
+                      <a:headEnd type="none" w="med" len="med"/>
+                      <a:tailEnd type="none" w="med" len="med"/>
+                    </a:lnL>
+                    <a:lnR w="6350" cap="flat" cmpd="sng" algn="ctr">
+                      <a:solidFill>
+                        <a:srgbClr val="E6E6E6"/>
+                      </a:solidFill>
+                      <a:prstDash val="solid"/>
+                      <a:round/>
+                      <a:headEnd type="none" w="med" len="med"/>
+                      <a:tailEnd type="none" w="med" len="med"/>
+                    </a:lnR>
+                    <a:lnT w="6350" cap="flat" cmpd="sng" algn="ctr">
+                      <a:solidFill>
+                        <a:srgbClr val="E6E6E6"/>
+                      </a:solidFill>
+                      <a:prstDash val="solid"/>
+                      <a:round/>
+                      <a:headEnd type="none" w="med" len="med"/>
+                      <a:tailEnd type="none" w="med" len="med"/>
+                    </a:lnT>
+                    <a:lnB w="6350" cap="flat" cmpd="sng" algn="ctr">
+                      <a:solidFill>
+                        <a:srgbClr val="E6E6E6"/>
+                      </a:solidFill>
+                      <a:prstDash val="solid"/>
+                      <a:round/>
+                      <a:headEnd type="none" w="med" len="med"/>
+                      <a:tailEnd type="none" w="med" len="med"/>
+                    </a:lnB>
+                    <a:solidFill>
+                      <a:srgbClr val="FFFFFF"/>
+                    </a:solidFill>
+                  </a:tcPr>
+                </a:tc>
+                <a:tc>
+                  <a:txBody>
+                    <a:bodyPr/>
+                    <a:lstStyle/>
+                    <a:p>
+                      <a:pPr algn="ctr" indent="0" marL="0">
+                        <a:buNone/>
+                      </a:pPr>
+                      <a:r>
+                        <a:rPr lang="en-US" sz="1150" dirty="0">
+                          <a:solidFill>
+                            <a:srgbClr val="31302E"/>
+                          </a:solidFill>
+                          <a:latin typeface="Inter" pitchFamily="34" charset="0"/>
+                          <a:ea typeface="Inter" pitchFamily="34" charset="-122"/>
+                          <a:cs typeface="Inter" pitchFamily="34" charset="-120"/>
+                        </a:rPr>
+                        <a:t>0.439</a:t>
+                      </a:r>
+                      <a:endParaRPr lang="en-US" sz="1150" dirty="0">
+                        <a:latin typeface="Inter" charset="0"/>
+                        <a:ea typeface="Inter" charset="0"/>
+                        <a:cs typeface="Inter" charset="0"/>
+                      </a:endParaRPr>
+                    </a:p>
+                  </a:txBody>
+                  <a:tcPr marL="73152" marR="73152" marT="36576" marB="36576" anchor="ctr">
+                    <a:lnL w="6350" cap="flat" cmpd="sng" algn="ctr">
+                      <a:solidFill>
+                        <a:srgbClr val="E6E6E6"/>
+                      </a:solidFill>
+                      <a:prstDash val="solid"/>
+                      <a:round/>
+                      <a:headEnd type="none" w="med" len="med"/>
+                      <a:tailEnd type="none" w="med" len="med"/>
+                    </a:lnL>
+                    <a:lnR w="6350" cap="flat" cmpd="sng" algn="ctr">
+                      <a:solidFill>
+                        <a:srgbClr val="E6E6E6"/>
+                      </a:solidFill>
+                      <a:prstDash val="solid"/>
+                      <a:round/>
+                      <a:headEnd type="none" w="med" len="med"/>
+                      <a:tailEnd type="none" w="med" len="med"/>
+                    </a:lnR>
+                    <a:lnT w="6350" cap="flat" cmpd="sng" algn="ctr">
+                      <a:solidFill>
+                        <a:srgbClr val="E6E6E6"/>
+                      </a:solidFill>
+                      <a:prstDash val="solid"/>
+                      <a:round/>
+                      <a:headEnd type="none" w="med" len="med"/>
+                      <a:tailEnd type="none" w="med" len="med"/>
+                    </a:lnT>
+                    <a:lnB w="6350" cap="flat" cmpd="sng" algn="ctr">
+                      <a:solidFill>
+                        <a:srgbClr val="E6E6E6"/>
+                      </a:solidFill>
+                      <a:prstDash val="solid"/>
+                      <a:round/>
+                      <a:headEnd type="none" w="med" len="med"/>
+                      <a:tailEnd type="none" w="med" len="med"/>
+                    </a:lnB>
+                    <a:solidFill>
+                      <a:srgbClr val="FFFFFF"/>
+                    </a:solidFill>
+                  </a:tcPr>
+                </a:tc>
+                <a:tc>
+                  <a:txBody>
+                    <a:bodyPr/>
+                    <a:lstStyle/>
+                    <a:p>
+                      <a:pPr algn="ctr" indent="0" marL="0">
+                        <a:buNone/>
+                      </a:pPr>
+                      <a:r>
+                        <a:rPr lang="en-US" sz="1150" dirty="0">
+                          <a:solidFill>
+                            <a:srgbClr val="31302E"/>
+                          </a:solidFill>
+                          <a:latin typeface="Inter" pitchFamily="34" charset="0"/>
+                          <a:ea typeface="Inter" pitchFamily="34" charset="-122"/>
+                          <a:cs typeface="Inter" pitchFamily="34" charset="-120"/>
+                        </a:rPr>
+                        <a:t>0.52</a:t>
+                      </a:r>
+                      <a:endParaRPr lang="en-US" sz="1150" dirty="0">
+                        <a:latin typeface="Inter" charset="0"/>
+                        <a:ea typeface="Inter" charset="0"/>
+                        <a:cs typeface="Inter" charset="0"/>
+                      </a:endParaRPr>
+                    </a:p>
+                  </a:txBody>
+                  <a:tcPr marL="73152" marR="73152" marT="36576" marB="36576" anchor="ctr">
+                    <a:lnL w="6350" cap="flat" cmpd="sng" algn="ctr">
+                      <a:solidFill>
+                        <a:srgbClr val="E6E6E6"/>
+                      </a:solidFill>
+                      <a:prstDash val="solid"/>
+                      <a:round/>
+                      <a:headEnd type="none" w="med" len="med"/>
+                      <a:tailEnd type="none" w="med" len="med"/>
+                    </a:lnL>
+                    <a:lnR w="6350" cap="flat" cmpd="sng" algn="ctr">
+                      <a:solidFill>
+                        <a:srgbClr val="E6E6E6"/>
+                      </a:solidFill>
+                      <a:prstDash val="solid"/>
+                      <a:round/>
+                      <a:headEnd type="none" w="med" len="med"/>
+                      <a:tailEnd type="none" w="med" len="med"/>
+                    </a:lnR>
+                    <a:lnT w="6350" cap="flat" cmpd="sng" algn="ctr">
+                      <a:solidFill>
+                        <a:srgbClr val="E6E6E6"/>
+                      </a:solidFill>
+                      <a:prstDash val="solid"/>
+                      <a:round/>
+                      <a:headEnd type="none" w="med" len="med"/>
+                      <a:tailEnd type="none" w="med" len="med"/>
+                    </a:lnT>
+                    <a:lnB w="6350" cap="flat" cmpd="sng" algn="ctr">
+                      <a:solidFill>
+                        <a:srgbClr val="E6E6E6"/>
+                      </a:solidFill>
+                      <a:prstDash val="solid"/>
+                      <a:round/>
+                      <a:headEnd type="none" w="med" len="med"/>
+                      <a:tailEnd type="none" w="med" len="med"/>
+                    </a:lnB>
+                    <a:solidFill>
+                      <a:srgbClr val="FFFFFF"/>
+                    </a:solidFill>
+                  </a:tcPr>
+                </a:tc>
+              </a:tr>
+              <a:tr h="365760">
+                <a:tc>
+                  <a:txBody>
+                    <a:bodyPr/>
+                    <a:lstStyle/>
+                    <a:p>
+                      <a:pPr algn="l" indent="0" marL="0">
+                        <a:buNone/>
+                      </a:pPr>
+                      <a:r>
+                        <a:rPr lang="en-US" sz="1150" dirty="0">
+                          <a:solidFill>
+                            <a:srgbClr val="31302E"/>
+                          </a:solidFill>
+                          <a:latin typeface="Inter" pitchFamily="34" charset="0"/>
+                          <a:ea typeface="Inter" pitchFamily="34" charset="-122"/>
+                          <a:cs typeface="Inter" pitchFamily="34" charset="-120"/>
+                        </a:rPr>
+                        <a:t>DNA + RNA</a:t>
+                      </a:r>
+                      <a:endParaRPr lang="en-US" sz="1150" dirty="0">
+                        <a:latin typeface="Inter" charset="0"/>
+                        <a:ea typeface="Inter" charset="0"/>
+                        <a:cs typeface="Inter" charset="0"/>
+                      </a:endParaRPr>
+                    </a:p>
+                  </a:txBody>
+                  <a:tcPr marL="73152" marR="73152" marT="36576" marB="36576" anchor="ctr">
+                    <a:lnL w="6350" cap="flat" cmpd="sng" algn="ctr">
+                      <a:solidFill>
+                        <a:srgbClr val="E6E6E6"/>
+                      </a:solidFill>
+                      <a:prstDash val="solid"/>
+                      <a:round/>
+                      <a:headEnd type="none" w="med" len="med"/>
+                      <a:tailEnd type="none" w="med" len="med"/>
+                    </a:lnL>
+                    <a:lnR w="6350" cap="flat" cmpd="sng" algn="ctr">
+                      <a:solidFill>
+                        <a:srgbClr val="E6E6E6"/>
+                      </a:solidFill>
+                      <a:prstDash val="solid"/>
+                      <a:round/>
+                      <a:headEnd type="none" w="med" len="med"/>
+                      <a:tailEnd type="none" w="med" len="med"/>
+                    </a:lnR>
+                    <a:lnT w="6350" cap="flat" cmpd="sng" algn="ctr">
+                      <a:solidFill>
+                        <a:srgbClr val="E6E6E6"/>
+                      </a:solidFill>
+                      <a:prstDash val="solid"/>
+                      <a:round/>
+                      <a:headEnd type="none" w="med" len="med"/>
+                      <a:tailEnd type="none" w="med" len="med"/>
+                    </a:lnT>
+                    <a:lnB w="6350" cap="flat" cmpd="sng" algn="ctr">
+                      <a:solidFill>
+                        <a:srgbClr val="E6E6E6"/>
+                      </a:solidFill>
+                      <a:prstDash val="solid"/>
+                      <a:round/>
+                      <a:headEnd type="none" w="med" len="med"/>
+                      <a:tailEnd type="none" w="med" len="med"/>
+                    </a:lnB>
+                    <a:solidFill>
+                      <a:srgbClr val="FFFFFF"/>
+                    </a:solidFill>
+                  </a:tcPr>
+                </a:tc>
+                <a:tc>
+                  <a:txBody>
+                    <a:bodyPr/>
+                    <a:lstStyle/>
+                    <a:p>
+                      <a:pPr algn="ctr" indent="0" marL="0">
+                        <a:buNone/>
+                      </a:pPr>
+                      <a:r>
+                        <a:rPr lang="en-US" sz="1150" dirty="0">
+                          <a:solidFill>
+                            <a:srgbClr val="31302E"/>
+                          </a:solidFill>
+                          <a:latin typeface="Inter" pitchFamily="34" charset="0"/>
+                          <a:ea typeface="Inter" pitchFamily="34" charset="-122"/>
+                          <a:cs typeface="Inter" pitchFamily="34" charset="-120"/>
+                        </a:rPr>
+                        <a:t>0.507</a:t>
+                      </a:r>
+                      <a:endParaRPr lang="en-US" sz="1150" dirty="0">
+                        <a:latin typeface="Inter" charset="0"/>
+                        <a:ea typeface="Inter" charset="0"/>
+                        <a:cs typeface="Inter" charset="0"/>
+                      </a:endParaRPr>
+                    </a:p>
+                  </a:txBody>
+                  <a:tcPr marL="73152" marR="73152" marT="36576" marB="36576" anchor="ctr">
+                    <a:lnL w="6350" cap="flat" cmpd="sng" algn="ctr">
+                      <a:solidFill>
+                        <a:srgbClr val="E6E6E6"/>
+                      </a:solidFill>
+                      <a:prstDash val="solid"/>
+                      <a:round/>
+                      <a:headEnd type="none" w="med" len="med"/>
+                      <a:tailEnd type="none" w="med" len="med"/>
+                    </a:lnL>
+                    <a:lnR w="6350" cap="flat" cmpd="sng" algn="ctr">
+                      <a:solidFill>
+                        <a:srgbClr val="E6E6E6"/>
+                      </a:solidFill>
+                      <a:prstDash val="solid"/>
+                      <a:round/>
+                      <a:headEnd type="none" w="med" len="med"/>
+                      <a:tailEnd type="none" w="med" len="med"/>
+                    </a:lnR>
+                    <a:lnT w="6350" cap="flat" cmpd="sng" algn="ctr">
+                      <a:solidFill>
+                        <a:srgbClr val="E6E6E6"/>
+                      </a:solidFill>
+                      <a:prstDash val="solid"/>
+                      <a:round/>
+                      <a:headEnd type="none" w="med" len="med"/>
+                      <a:tailEnd type="none" w="med" len="med"/>
+                    </a:lnT>
+                    <a:lnB w="6350" cap="flat" cmpd="sng" algn="ctr">
+                      <a:solidFill>
+                        <a:srgbClr val="E6E6E6"/>
+                      </a:solidFill>
+                      <a:prstDash val="solid"/>
+                      <a:round/>
+                      <a:headEnd type="none" w="med" len="med"/>
+                      <a:tailEnd type="none" w="med" len="med"/>
+                    </a:lnB>
+                    <a:solidFill>
+                      <a:srgbClr val="FFFFFF"/>
+                    </a:solidFill>
+                  </a:tcPr>
+                </a:tc>
+                <a:tc>
+                  <a:txBody>
+                    <a:bodyPr/>
+                    <a:lstStyle/>
+                    <a:p>
+                      <a:pPr algn="ctr" indent="0" marL="0">
+                        <a:buNone/>
+                      </a:pPr>
+                      <a:r>
+                        <a:rPr lang="en-US" sz="1150" dirty="0">
+                          <a:solidFill>
+                            <a:srgbClr val="31302E"/>
+                          </a:solidFill>
+                          <a:latin typeface="Inter" pitchFamily="34" charset="0"/>
+                          <a:ea typeface="Inter" pitchFamily="34" charset="-122"/>
+                          <a:cs typeface="Inter" pitchFamily="34" charset="-120"/>
+                        </a:rPr>
+                        <a:t>0.64</a:t>
+                      </a:r>
+                      <a:endParaRPr lang="en-US" sz="1150" dirty="0">
+                        <a:latin typeface="Inter" charset="0"/>
+                        <a:ea typeface="Inter" charset="0"/>
+                        <a:cs typeface="Inter" charset="0"/>
+                      </a:endParaRPr>
+                    </a:p>
+                  </a:txBody>
+                  <a:tcPr marL="73152" marR="73152" marT="36576" marB="36576" anchor="ctr">
+                    <a:lnL w="6350" cap="flat" cmpd="sng" algn="ctr">
+                      <a:solidFill>
+                        <a:srgbClr val="E6E6E6"/>
+                      </a:solidFill>
+                      <a:prstDash val="solid"/>
+                      <a:round/>
+                      <a:headEnd type="none" w="med" len="med"/>
+                      <a:tailEnd type="none" w="med" len="med"/>
+                    </a:lnL>
+                    <a:lnR w="6350" cap="flat" cmpd="sng" algn="ctr">
+                      <a:solidFill>
+                        <a:srgbClr val="E6E6E6"/>
+                      </a:solidFill>
+                      <a:prstDash val="solid"/>
+                      <a:round/>
+                      <a:headEnd type="none" w="med" len="med"/>
+                      <a:tailEnd type="none" w="med" len="med"/>
+                    </a:lnR>
+                    <a:lnT w="6350" cap="flat" cmpd="sng" algn="ctr">
+                      <a:solidFill>
+                        <a:srgbClr val="E6E6E6"/>
+                      </a:solidFill>
+                      <a:prstDash val="solid"/>
+                      <a:round/>
+                      <a:headEnd type="none" w="med" len="med"/>
+                      <a:tailEnd type="none" w="med" len="med"/>
+                    </a:lnT>
+                    <a:lnB w="6350" cap="flat" cmpd="sng" algn="ctr">
+                      <a:solidFill>
+                        <a:srgbClr val="E6E6E6"/>
+                      </a:solidFill>
+                      <a:prstDash val="solid"/>
+                      <a:round/>
+                      <a:headEnd type="none" w="med" len="med"/>
+                      <a:tailEnd type="none" w="med" len="med"/>
+                    </a:lnB>
+                    <a:solidFill>
+                      <a:srgbClr val="FFFFFF"/>
+                    </a:solidFill>
+                  </a:tcPr>
+                </a:tc>
+              </a:tr>
+              <a:tr h="365760">
+                <a:tc>
+                  <a:txBody>
+                    <a:bodyPr/>
+                    <a:lstStyle/>
+                    <a:p>
+                      <a:pPr algn="l" indent="0" marL="0">
+                        <a:buNone/>
+                      </a:pPr>
+                      <a:r>
+                        <a:rPr lang="en-US" sz="1150" dirty="0">
+                          <a:solidFill>
+                            <a:srgbClr val="31302E"/>
+                          </a:solidFill>
+                          <a:latin typeface="Inter" pitchFamily="34" charset="0"/>
+                          <a:ea typeface="Inter" pitchFamily="34" charset="-122"/>
+                          <a:cs typeface="Inter" pitchFamily="34" charset="-120"/>
+                        </a:rPr>
+                        <a:t>DNA + RNA + protein</a:t>
+                      </a:r>
+                      <a:endParaRPr lang="en-US" sz="1150" dirty="0">
+                        <a:latin typeface="Inter" charset="0"/>
+                        <a:ea typeface="Inter" charset="0"/>
+                        <a:cs typeface="Inter" charset="0"/>
+                      </a:endParaRPr>
+                    </a:p>
+                  </a:txBody>
+                  <a:tcPr marL="73152" marR="73152" marT="36576" marB="36576" anchor="ctr">
+                    <a:lnL w="6350" cap="flat" cmpd="sng" algn="ctr">
+                      <a:solidFill>
+                        <a:srgbClr val="E6E6E6"/>
+                      </a:solidFill>
+                      <a:prstDash val="solid"/>
+                      <a:round/>
+                      <a:headEnd type="none" w="med" len="med"/>
+                      <a:tailEnd type="none" w="med" len="med"/>
+                    </a:lnL>
+                    <a:lnR w="6350" cap="flat" cmpd="sng" algn="ctr">
+                      <a:solidFill>
+                        <a:srgbClr val="E6E6E6"/>
+                      </a:solidFill>
+                      <a:prstDash val="solid"/>
+                      <a:round/>
+                      <a:headEnd type="none" w="med" len="med"/>
+                      <a:tailEnd type="none" w="med" len="med"/>
+                    </a:lnR>
+                    <a:lnT w="6350" cap="flat" cmpd="sng" algn="ctr">
+                      <a:solidFill>
+                        <a:srgbClr val="E6E6E6"/>
+                      </a:solidFill>
+                      <a:prstDash val="solid"/>
+                      <a:round/>
+                      <a:headEnd type="none" w="med" len="med"/>
+                      <a:tailEnd type="none" w="med" len="med"/>
+                    </a:lnT>
+                    <a:lnB w="6350" cap="flat" cmpd="sng" algn="ctr">
+                      <a:solidFill>
+                        <a:srgbClr val="E6E6E6"/>
+                      </a:solidFill>
+                      <a:prstDash val="solid"/>
+                      <a:round/>
+                      <a:headEnd type="none" w="med" len="med"/>
+                      <a:tailEnd type="none" w="med" len="med"/>
+                    </a:lnB>
+                    <a:solidFill>
+                      <a:srgbClr val="FFFFFF"/>
+                    </a:solidFill>
+                  </a:tcPr>
+                </a:tc>
+                <a:tc>
+                  <a:txBody>
+                    <a:bodyPr/>
+                    <a:lstStyle/>
+                    <a:p>
+                      <a:pPr algn="ctr" indent="0" marL="0">
+                        <a:buNone/>
+                      </a:pPr>
+                      <a:r>
+                        <a:rPr lang="en-US" sz="1150" dirty="0">
+                          <a:solidFill>
+                            <a:srgbClr val="31302E"/>
+                          </a:solidFill>
+                          <a:latin typeface="Inter" pitchFamily="34" charset="0"/>
+                          <a:ea typeface="Inter" pitchFamily="34" charset="-122"/>
+                          <a:cs typeface="Inter" pitchFamily="34" charset="-120"/>
+                        </a:rPr>
+                        <a:t>0.499</a:t>
+                      </a:r>
+                      <a:endParaRPr lang="en-US" sz="1150" dirty="0">
+                        <a:latin typeface="Inter" charset="0"/>
+                        <a:ea typeface="Inter" charset="0"/>
+                        <a:cs typeface="Inter" charset="0"/>
+                      </a:endParaRPr>
+                    </a:p>
+                  </a:txBody>
+                  <a:tcPr marL="73152" marR="73152" marT="36576" marB="36576" anchor="ctr">
+                    <a:lnL w="6350" cap="flat" cmpd="sng" algn="ctr">
+                      <a:solidFill>
+                        <a:srgbClr val="E6E6E6"/>
+                      </a:solidFill>
+                      <a:prstDash val="solid"/>
+                      <a:round/>
+                      <a:headEnd type="none" w="med" len="med"/>
+                      <a:tailEnd type="none" w="med" len="med"/>
+                    </a:lnL>
+                    <a:lnR w="6350" cap="flat" cmpd="sng" algn="ctr">
+                      <a:solidFill>
+                        <a:srgbClr val="E6E6E6"/>
+                      </a:solidFill>
+                      <a:prstDash val="solid"/>
+                      <a:round/>
+                      <a:headEnd type="none" w="med" len="med"/>
+                      <a:tailEnd type="none" w="med" len="med"/>
+                    </a:lnR>
+                    <a:lnT w="6350" cap="flat" cmpd="sng" algn="ctr">
+                      <a:solidFill>
+                        <a:srgbClr val="E6E6E6"/>
+                      </a:solidFill>
+                      <a:prstDash val="solid"/>
+                      <a:round/>
+                      <a:headEnd type="none" w="med" len="med"/>
+                      <a:tailEnd type="none" w="med" len="med"/>
+                    </a:lnT>
+                    <a:lnB w="6350" cap="flat" cmpd="sng" algn="ctr">
+                      <a:solidFill>
+                        <a:srgbClr val="E6E6E6"/>
+                      </a:solidFill>
+                      <a:prstDash val="solid"/>
+                      <a:round/>
+                      <a:headEnd type="none" w="med" len="med"/>
+                      <a:tailEnd type="none" w="med" len="med"/>
+                    </a:lnB>
+                    <a:solidFill>
+                      <a:srgbClr val="FFFFFF"/>
+                    </a:solidFill>
+                  </a:tcPr>
+                </a:tc>
+                <a:tc>
+                  <a:txBody>
+                    <a:bodyPr/>
+                    <a:lstStyle/>
+                    <a:p>
+                      <a:pPr algn="ctr" indent="0" marL="0">
+                        <a:buNone/>
+                      </a:pPr>
+                      <a:r>
+                        <a:rPr lang="en-US" sz="1150" dirty="0">
+                          <a:solidFill>
+                            <a:srgbClr val="31302E"/>
+                          </a:solidFill>
+                          <a:latin typeface="Inter" pitchFamily="34" charset="0"/>
+                          <a:ea typeface="Inter" pitchFamily="34" charset="-122"/>
+                          <a:cs typeface="Inter" pitchFamily="34" charset="-120"/>
+                        </a:rPr>
+                        <a:t>0.65</a:t>
+                      </a:r>
+                      <a:endParaRPr lang="en-US" sz="1150" dirty="0">
+                        <a:latin typeface="Inter" charset="0"/>
+                        <a:ea typeface="Inter" charset="0"/>
+                        <a:cs typeface="Inter" charset="0"/>
+                      </a:endParaRPr>
+                    </a:p>
+                  </a:txBody>
+                  <a:tcPr marL="73152" marR="73152" marT="36576" marB="36576" anchor="ctr">
+                    <a:lnL w="6350" cap="flat" cmpd="sng" algn="ctr">
+                      <a:solidFill>
+                        <a:srgbClr val="E6E6E6"/>
+                      </a:solidFill>
+                      <a:prstDash val="solid"/>
+                      <a:round/>
+                      <a:headEnd type="none" w="med" len="med"/>
+                      <a:tailEnd type="none" w="med" len="med"/>
+                    </a:lnL>
+                    <a:lnR w="6350" cap="flat" cmpd="sng" algn="ctr">
+                      <a:solidFill>
+                        <a:srgbClr val="E6E6E6"/>
+                      </a:solidFill>
+                      <a:prstDash val="solid"/>
+                      <a:round/>
+                      <a:headEnd type="none" w="med" len="med"/>
+                      <a:tailEnd type="none" w="med" len="med"/>
+                    </a:lnR>
+                    <a:lnT w="6350" cap="flat" cmpd="sng" algn="ctr">
+                      <a:solidFill>
+                        <a:srgbClr val="E6E6E6"/>
+                      </a:solidFill>
+                      <a:prstDash val="solid"/>
+                      <a:round/>
+                      <a:headEnd type="none" w="med" len="med"/>
+                      <a:tailEnd type="none" w="med" len="med"/>
+                    </a:lnT>
+                    <a:lnB w="6350" cap="flat" cmpd="sng" algn="ctr">
+                      <a:solidFill>
+                        <a:srgbClr val="E6E6E6"/>
+                      </a:solidFill>
+                      <a:prstDash val="solid"/>
+                      <a:round/>
+                      <a:headEnd type="none" w="med" len="med"/>
+                      <a:tailEnd type="none" w="med" len="med"/>
+                    </a:lnB>
+                    <a:solidFill>
+                      <a:srgbClr val="FFFFFF"/>
+                    </a:solidFill>
+                  </a:tcPr>
+                </a:tc>
+              </a:tr>
+            </a:tbl>
+          </a:graphicData>
+        </a:graphic>
+      </p:graphicFrame>
+      <p:sp>
+        <p:nvSpPr>
+          <p:cNvPr id="6" name="contrast card"/>
+          <p:cNvSpPr/>
+          <p:nvPr/>
+        </p:nvSpPr>
+        <p:spPr>
+          <a:xfrm>
+            <a:off x="5989320" y="2029968"/>
+            <a:ext cx="2423160" cy="3794760"/>
+          </a:xfrm>
+          <a:prstGeom prst="roundRect">
+            <a:avLst>
+              <a:gd name="adj" fmla="val 2264"/>
+            </a:avLst>
+          </a:prstGeom>
+          <a:solidFill>
+            <a:srgbClr val="FFFFFF"/>
+          </a:solidFill>
+          <a:ln w="9525">
+            <a:solidFill>
+              <a:srgbClr val="E6E6E6"/>
+            </a:solidFill>
+            <a:prstDash val="solid"/>
+          </a:ln>
+        </p:spPr>
+      </p:sp>
+      <p:sp>
+        <p:nvSpPr>
+          <p:cNvPr id="7" name="contrast text"/>
+          <p:cNvSpPr txBox="1"/>
+          <p:nvPr/>
+        </p:nvSpPr>
+        <p:spPr>
+          <a:xfrm>
+            <a:off x="6172200" y="2194560"/>
+            <a:ext cx="2103120" cy="3520440"/>
+          </a:xfrm>
+          <a:prstGeom prst="rect">
+            <a:avLst/>
+          </a:prstGeom>
+          <a:noFill/>
+          <a:ln/>
+        </p:spPr>
+        <p:txBody>
+          <a:bodyPr wrap="square" lIns="0" tIns="0" rIns="0" bIns="0" rtlCol="0" anchor="t"/>
+          <a:lstStyle/>
+          <a:p>
+            <a:pPr indent="0" marL="0">
+              <a:buNone/>
+            </a:pPr>
+            <a:r>
+              <a:rPr lang="en-US" sz="1200" b="1" dirty="0">
+                <a:solidFill>
+                  <a:srgbClr val="31302E"/>
+                </a:solidFill>
+              </a:rPr>
+              <a:t>Why this one is different</a:t>
+            </a:r>
+            <a:endParaRPr lang="en-US" sz="1200" dirty="0"/>
+          </a:p>
+          <a:p>
+            <a:pPr indent="0" marL="0">
+              <a:buNone/>
+            </a:pPr>
+            <a:r>
+              <a:rPr lang="en-US" sz="1200" dirty="0">
+                <a:solidFill>
+                  <a:srgbClr val="615D59"/>
+                </a:solidFill>
+              </a:rPr>
+              <a:t>Every benchmark where fusion failed gives all three encoders the same coding sequence, so the modalities are three readings of one molecule. GTEx gives them a genomic window, a transcript and a protein: three different molecules, no shared grid, and the largest resolved gain in the project. Stage 1 found alignment lowest exactly here.</a:t>
+            </a:r>
+            <a:endParaRPr lang="en-US" sz="1200" dirty="0"/>
+          </a:p>
+        </p:txBody>
+      </p:sp>
+      <p:sp>
+        <p:nvSpPr>
+          <p:cNvPr id="8" name="stat card"/>
+          <p:cNvSpPr/>
+          <p:nvPr/>
+        </p:nvSpPr>
+        <p:spPr>
+          <a:xfrm>
+            <a:off x="8641080" y="2029968"/>
+            <a:ext cx="2743200" cy="1783080"/>
+          </a:xfrm>
+          <a:prstGeom prst="roundRect">
+            <a:avLst>
+              <a:gd name="adj" fmla="val 3077"/>
+            </a:avLst>
+          </a:prstGeom>
+          <a:solidFill>
+            <a:srgbClr val="213183"/>
+          </a:solidFill>
+          <a:ln w="9525">
+            <a:solidFill>
+              <a:srgbClr val="213183"/>
+            </a:solidFill>
+            <a:prstDash val="solid"/>
+          </a:ln>
+        </p:spPr>
+      </p:sp>
+      <p:sp>
+        <p:nvSpPr>
+          <p:cNvPr id="9" name="stat value"/>
+          <p:cNvSpPr txBox="1"/>
+          <p:nvPr/>
+        </p:nvSpPr>
+        <p:spPr>
+          <a:xfrm>
+            <a:off x="8842248" y="2212848"/>
+            <a:ext cx="2340864" cy="457200"/>
+          </a:xfrm>
+          <a:prstGeom prst="rect">
+            <a:avLst/>
+          </a:prstGeom>
+          <a:noFill/>
+          <a:ln/>
+        </p:spPr>
+        <p:txBody>
+          <a:bodyPr wrap="square" lIns="0" tIns="0" rIns="0" bIns="0" rtlCol="0" anchor="ctr"/>
+          <a:lstStyle/>
+          <a:p>
+            <a:pPr indent="0" marL="0">
+              <a:buNone/>
+            </a:pPr>
+            <a:r>
+              <a:rPr lang="en-US" sz="2400" b="1" dirty="0">
+                <a:solidFill>
+                  <a:srgbClr val="FFFFFF"/>
+                </a:solidFill>
+              </a:rPr>
+              <a:t>+0.047</a:t>
+            </a:r>
+            <a:endParaRPr lang="en-US" sz="2400" dirty="0"/>
+          </a:p>
+        </p:txBody>
+      </p:sp>
+      <p:sp>
+        <p:nvSpPr>
+          <p:cNvPr id="10" name="stat label"/>
+          <p:cNvSpPr txBox="1"/>
+          <p:nvPr/>
+        </p:nvSpPr>
+        <p:spPr>
+          <a:xfrm>
+            <a:off x="8842248" y="2688336"/>
+            <a:ext cx="2340864" cy="1005840"/>
+          </a:xfrm>
+          <a:prstGeom prst="rect">
+            <a:avLst/>
+          </a:prstGeom>
+          <a:noFill/>
+          <a:ln/>
+        </p:spPr>
+        <p:txBody>
+          <a:bodyPr wrap="square" lIns="0" tIns="0" rIns="0" bIns="0" rtlCol="0" anchor="t"/>
+          <a:lstStyle/>
+          <a:p>
+            <a:pPr indent="0" marL="0">
+              <a:buNone/>
+            </a:pPr>
+            <a:r>
+              <a:rPr lang="en-US" sz="1150" dirty="0">
+                <a:solidFill>
+                  <a:srgbClr val="FFFFFF"/>
+                </a:solidFill>
+              </a:rPr>
+              <a:t>All three modalities minus RNA alone, [+0.027, +0.069]: resolved. DNA with RNA minus RNA alone +0.055 [+0.032, +0.078]. Protein adds nothing measurable.</a:t>
+            </a:r>
+            <a:endParaRPr lang="en-US" sz="1150" dirty="0"/>
+          </a:p>
+        </p:txBody>
+      </p:sp>
+      <p:sp>
+        <p:nvSpPr>
+          <p:cNvPr id="11" name="stat card"/>
+          <p:cNvSpPr/>
+          <p:nvPr/>
+        </p:nvSpPr>
+        <p:spPr>
+          <a:xfrm>
+            <a:off x="8641080" y="3995928"/>
+            <a:ext cx="2743200" cy="1783080"/>
+          </a:xfrm>
+          <a:prstGeom prst="roundRect">
+            <a:avLst>
+              <a:gd name="adj" fmla="val 3077"/>
+            </a:avLst>
+          </a:prstGeom>
+          <a:solidFill>
+            <a:srgbClr val="FFFFFF"/>
+          </a:solidFill>
+          <a:ln w="9525">
+            <a:solidFill>
+              <a:srgbClr val="E6E6E6"/>
+            </a:solidFill>
+            <a:prstDash val="solid"/>
+          </a:ln>
+        </p:spPr>
+      </p:sp>
+      <p:sp>
+        <p:nvSpPr>
+          <p:cNvPr id="12" name="stat value"/>
+          <p:cNvSpPr txBox="1"/>
+          <p:nvPr/>
+        </p:nvSpPr>
+        <p:spPr>
+          <a:xfrm>
+            <a:off x="8842248" y="4178808"/>
+            <a:ext cx="2340864" cy="457200"/>
+          </a:xfrm>
+          <a:prstGeom prst="rect">
+            <a:avLst/>
+          </a:prstGeom>
+          <a:noFill/>
+          <a:ln/>
+        </p:spPr>
+        <p:txBody>
+          <a:bodyPr wrap="square" lIns="0" tIns="0" rIns="0" bIns="0" rtlCol="0" anchor="ctr"/>
+          <a:lstStyle/>
+          <a:p>
+            <a:pPr indent="0" marL="0">
+              <a:buNone/>
+            </a:pPr>
+            <a:r>
+              <a:rPr lang="en-US" sz="2400" b="1" dirty="0">
+                <a:solidFill>
+                  <a:srgbClr val="31302E"/>
+                </a:solidFill>
+              </a:rPr>
+              <a:t>3 of 4</a:t>
+            </a:r>
+            <a:endParaRPr lang="en-US" sz="2400" dirty="0"/>
+          </a:p>
+        </p:txBody>
+      </p:sp>
+      <p:sp>
+        <p:nvSpPr>
+          <p:cNvPr id="13" name="stat label"/>
+          <p:cNvSpPr txBox="1"/>
+          <p:nvPr/>
+        </p:nvSpPr>
+        <p:spPr>
+          <a:xfrm>
+            <a:off x="8842248" y="4654296"/>
+            <a:ext cx="2340864" cy="1005840"/>
+          </a:xfrm>
+          <a:prstGeom prst="rect">
+            <a:avLst/>
+          </a:prstGeom>
+          <a:noFill/>
+          <a:ln/>
+        </p:spPr>
+        <p:txBody>
+          <a:bodyPr wrap="square" lIns="0" tIns="0" rIns="0" bIns="0" rtlCol="0" anchor="t"/>
+          <a:lstStyle/>
+          <a:p>
+            <a:pPr indent="0" marL="0">
+              <a:buNone/>
+            </a:pPr>
+            <a:r>
+              <a:rPr lang="en-US" sz="1150" dirty="0">
+                <a:solidFill>
+                  <a:srgbClr val="615D59"/>
+                </a:solidFill>
+              </a:rPr>
+              <a:t>of the paper's orderings reproduce: RNA is the strongest single modality, all three beat the best single one, DNA with RNA beats DNA with protein.</a:t>
+            </a:r>
+            <a:endParaRPr lang="en-US" sz="1150" dirty="0"/>
+          </a:p>
+        </p:txBody>
+      </p:sp>
+    </p:spTree>
+  </p:cSld>
+  <p:clrMapOvr>
+    <a:masterClrMapping/>
+  </p:clrMapOvr>
+</p:sld>
+</file>
+
+<file path=ppt/slides/slide13.xml><?xml version="1.0" encoding="utf-8"?>
+<p:sld xmlns:a="http://schemas.openxmlformats.org/drawingml/2006/main" xmlns:r="http://schemas.openxmlformats.org/officeDocument/2006/relationships" xmlns:p="http://schemas.openxmlformats.org/presentationml/2006/main">
+  <p:cSld name="Slide 13">
     <p:spTree>
       <p:nvGrpSpPr>
         <p:cNvPr id="1" name=""/>
@@ -3176,7 +8281,7 @@
                   <a:schemeClr val="tx1"/>
                 </a:solidFill>
               </a:rPr>
-              <a:t>The reproduction is faithful, the paper's fusion gains are task-dependent, and the next runs are queued</a:t>
+              <a:t>The reproduction is faithful; the paper's fusion gains mostly do not survive a stronger single encoder</a:t>
             </a:r>
             <a:endParaRPr lang="en-US" sz="2500" dirty="0"/>
           </a:p>
@@ -3214,7 +8319,7 @@
                   <a:schemeClr val="accent2"/>
                 </a:solidFill>
               </a:rPr>
-              <a:t>Open checks, in order: the gated head at 1,280 channels on CoV-Vac and E. coli; the sequence-grouped stability re-split with seeds; the grid ablation for E. coli's concatenation; LucaOne on stability; the half-life and translation-efficiency gate.</a:t>
+              <a:t>Open, in order: the remaining four swaps and stability; the gated head at 1,280 channels; the sequence-grouped stability re-split; seeds on the swaps that matter; the mouse half-life and translation-efficiency scores.</a:t>
             </a:r>
             <a:endParaRPr lang="en-US" sz="1150" dirty="0"/>
           </a:p>
@@ -3317,7 +8422,7 @@
                   <a:srgbClr val="31302E"/>
                 </a:solidFill>
               </a:rPr>
-              <a:t>The build is right. Single encoders within 0.01 of the paper, cross-attention within 0.01 (half a point on E. coli) of its published value on all four benchmarks.</a:t>
+              <a:t>The build is right. Single encoders within 0.01 of the paper, cross-attention within 0.01 of its published value on all four benchmarks.</a:t>
             </a:r>
             <a:endParaRPr lang="en-US" sz="1200" dirty="0"/>
           </a:p>
@@ -3335,7 +8440,7 @@
                   <a:srgbClr val="31302E"/>
                 </a:solidFill>
               </a:rPr>
-              <a:t>A single well-chosen encoder is a much stronger baseline than the paper makes it look, and the paper reports no error bars that would show which of its gains resolve.</a:t>
+              <a:t>The encoder matters more than the fusion. Swapping one encoder moved E. coli by 8 points, and the fusion gain it was compensating for disappeared.</a:t>
             </a:r>
             <a:endParaRPr lang="en-US" sz="1200" dirty="0"/>
           </a:p>
@@ -3353,7 +8458,7 @@
                   <a:srgbClr val="31302E"/>
                 </a:solidFill>
               </a:rPr>
-              <a:t>The gated head is a selector, not a mixer; its weights are not the interpretability readout the paper presents.</a:t>
+              <a:t>Fusion still wins where the modalities are different molecules: GTEx, +0.047 resolved, and the full-transcript tasks, +0.053 and +0.030.</a:t>
             </a:r>
             <a:endParaRPr lang="en-US" sz="1200" dirty="0"/>
           </a:p>
@@ -3371,7 +8476,7 @@
                   <a:srgbClr val="31302E"/>
                 </a:solidFill>
               </a:rPr>
-              <a:t>The stability benchmark overstates every model by about 0.2 through repeated sequences, and may hide a real fusion gain.</a:t>
+              <a:t>One jointly pretrained model beats three fused ones on stability, +0.092 resolved, though on the leaky split.</a:t>
             </a:r>
             <a:endParaRPr lang="en-US" sz="1200" dirty="0"/>
           </a:p>
@@ -3389,7 +8494,7 @@
                   <a:srgbClr val="31302E"/>
                 </a:solidFill>
               </a:rPr>
-              <a:t>Codon-level RNA encoders, above all mRNA-FM, carry the most synonymous-codon information: what Stage 1 said the codon-with-protein pairs should fuse. Phase B tests it.</a:t>
+              <a:t>The gated head is a selector, not a mixer, and the paper reports no error bars that would show which of its gains resolve.</a:t>
             </a:r>
             <a:endParaRPr lang="en-US" sz="1200" dirty="0"/>
           </a:p>
@@ -3492,6 +8597,24 @@
                   <a:srgbClr val="FFFFFF"/>
                 </a:solidFill>
               </a:rPr>
+              <a:t>The headline finding: a better encoder beat the fusion it was feeding. Does that become the project's result, with the method test asking which encoder to pick rather than whether to fuse?</a:t>
+            </a:r>
+            <a:endParaRPr lang="en-US" sz="1200" dirty="0"/>
+          </a:p>
+          <a:p>
+            <a:pPr marL="152400" indent="-152400">
+              <a:spcAft>
+                <a:spcPts val="600"/>
+              </a:spcAft>
+              <a:buSzPct val="100000"/>
+              <a:buChar char="•"/>
+            </a:pPr>
+            <a:r>
+              <a:rPr lang="en-US" sz="1200" dirty="0">
+                <a:solidFill>
+                  <a:srgbClr val="FFFFFF"/>
+                </a:solidFill>
+              </a:rPr>
               <a:t>Ab1: the fifth benchmark is Yazdani-Jahromi et al. (UCF) and not public. Can it be obtained?</a:t>
             </a:r>
             <a:endParaRPr lang="en-US" sz="1200" dirty="0"/>
@@ -3510,7 +8633,7 @@
                   <a:srgbClr val="FFFFFF"/>
                 </a:solidFill>
               </a:rPr>
-              <a:t>Is seeds plus a paired bootstrap the reporting standard for everything that follows?</a:t>
+              <a:t>Is seeds plus a paired bootstrap the reporting standard for everything that follows? The swaps are one seed so far.</a:t>
             </a:r>
             <a:endParaRPr lang="en-US" sz="1200" dirty="0"/>
           </a:p>
@@ -3528,7 +8651,7 @@
                   <a:srgbClr val="FFFFFF"/>
                 </a:solidFill>
               </a:rPr>
-              <a:t>Does the alignment framing (agreement on what the central dogma shares, beyond composition, nothing imposed on the rest) match what the plan means?</a:t>
+              <a:t>Does the alignment framing (agreement on what the central dogma shares, beyond composition) match what the plan means?</a:t>
             </a:r>
             <a:endParaRPr lang="en-US" sz="1200" dirty="0"/>
           </a:p>
@@ -3546,25 +8669,7 @@
                   <a:srgbClr val="FFFFFF"/>
                 </a:solidFill>
               </a:rPr>
-              <a:t>GPU access: Coupled Mamba needs CUDA, and stability took 19 hours on a laptop. Chase has a desktop GPU; is the cluster available too?</a:t>
-            </a:r>
-            <a:endParaRPr lang="en-US" sz="1200" dirty="0"/>
-          </a:p>
-          <a:p>
-            <a:pPr marL="152400" indent="-152400">
-              <a:spcAft>
-                <a:spcPts val="600"/>
-              </a:spcAft>
-              <a:buSzPct val="100000"/>
-              <a:buChar char="•"/>
-            </a:pPr>
-            <a:r>
-              <a:rPr lang="en-US" sz="1200" dirty="0">
-                <a:solidFill>
-                  <a:srgbClr val="FFFFFF"/>
-                </a:solidFill>
-              </a:rPr>
-              <a:t>LucaOne: is a stability-only baseline worth 1.8 billion parameters of inference?</a:t>
+              <a:t>GPU access: Coupled Mamba needs CUDA. Chase has a desktop GPU; is the cluster available too?</a:t>
             </a:r>
             <a:endParaRPr lang="en-US" sz="1200" dirty="0"/>
           </a:p>
@@ -4369,7 +9474,7 @@
                   <a:srgbClr val="615D59"/>
                 </a:solidFill>
               </a:rPr>
-              <a:t>27 hours on a laptop. Singles and cross-attention reproduce; the gated head does not; fusion wins on E. coli, loses on CoV-Vac, ties on stability.</a:t>
+              <a:t>27 hours on a laptop. Singles and cross-attention reproduce; the gated head does not; fusion appeared to win on E. coli, which Phase B then revised.</a:t>
             </a:r>
             <a:endParaRPr lang="en-US" sz="1200" dirty="0"/>
           </a:p>
@@ -4430,7 +9535,7 @@
                   <a:srgbClr val="31302E"/>
                 </a:solidFill>
               </a:rPr>
-              <a:t>Oct 19</a:t>
+              <a:t>Oct 21 to 22</a:t>
             </a:r>
             <a:endParaRPr lang="en-US" sz="1200" dirty="0"/>
           </a:p>
@@ -4466,7 +9571,7 @@
                   <a:srgbClr val="31302E"/>
                 </a:solidFill>
               </a:rPr>
-              <a:t>Phase B built  </a:t>
+              <a:t>Phase B, LucaOne, half-life and TE run  </a:t>
             </a:r>
             <a:pPr indent="0" marL="0">
               <a:buNone/>
@@ -4477,7 +9582,7 @@
                   <a:srgbClr val="615D59"/>
                 </a:solidFill>
               </a:rPr>
-              <a:t>Eight encoder swaps, one at a time, each beside Stage 1's alignment for the pairs it creates. Waiting for a GPU night.</a:t>
+              <a:t>Four encoder swaps on a GPU, LucaOne frozen on stability, and the human half-life and translation-efficiency probes. The swaps change what Phase A's E. coli result meant.</a:t>
             </a:r>
             <a:endParaRPr lang="en-US" sz="1200" dirty="0"/>
           </a:p>
@@ -9528,7 +14633,7 @@
                           <a:ea typeface="Inter" pitchFamily="34" charset="-122"/>
                           <a:cs typeface="Inter" pitchFamily="34" charset="-120"/>
                         </a:rPr>
-                        <a:t>fusion wins, every head</a:t>
+                        <a:t>fusion won here, until Phase B changed the single encoder</a:t>
                       </a:r>
                       <a:endParaRPr lang="en-US" sz="1150" dirty="0">
                         <a:latin typeface="Inter" charset="0"/>
@@ -10463,7 +15568,7 @@
                   <a:srgbClr val="31302E"/>
                 </a:solidFill>
               </a:rPr>
-              <a:t>2 wins, 2 ties</a:t>
+              <a:t>See next slide</a:t>
             </a:r>
             <a:endParaRPr lang="en-US" sz="2400" dirty="0"/>
           </a:p>
@@ -10499,7 +15604,7 @@
                   <a:srgbClr val="615D59"/>
                 </a:solidFill>
               </a:rPr>
-              <a:t>Fusion beats the best single encoder on E. coli and on GTEx; the best single encoder wins or ties on fungal and CoV-Vac.</a:t>
+              <a:t>This is the table as Phase A left it. Phase B swapped one encoder and the E. coli row did not survive it.</a:t>
             </a:r>
             <a:endParaRPr lang="en-US" sz="1150" dirty="0"/>
           </a:p>
@@ -10562,7 +15667,7 @@
                   <a:srgbClr val="FFFFFF"/>
                 </a:solidFill>
               </a:rPr>
-              <a:t>Two and two</a:t>
+              <a:t>The question</a:t>
             </a:r>
             <a:endParaRPr lang="en-US" sz="2400" dirty="0"/>
           </a:p>
@@ -10598,7 +15703,7 @@
                   <a:srgbClr val="FFFFFF"/>
                 </a:solidFill>
               </a:rPr>
-              <a:t>Two positive and two negative cases is what the method test needs: can the Stage 1 alignment measurements say in advance which tasks gain from fusion?</a:t>
+              <a:t>Not whether fusion beats the encoders the paper happened to pick, but whether it beats the best encoder available for the task.</a:t>
             </a:r>
             <a:endParaRPr lang="en-US" sz="1150" dirty="0"/>
           </a:p>
@@ -13893,7 +18998,7 @@
                   <a:schemeClr val="accent2"/>
                 </a:solidFill>
               </a:rPr>
-              <a:t>Baselines · IsoFormer on GTEx (Gantt 44) and LucaOne (plan item 2)</a:t>
+              <a:t>Priority 1, Phase B · one encoder swapped at a time</a:t>
             </a:r>
             <a:endParaRPr lang="en-US" sz="1200" dirty="0"/>
           </a:p>
@@ -13931,7 +19036,7 @@
                   <a:schemeClr val="tx1"/>
                 </a:solidFill>
               </a:rPr>
-              <a:t>With frozen encoders, IsoFormer's fusion beats the best single modality; LucaOne cannot read GTEx</a:t>
+              <a:t>A better RNA encoder raises the single-encoder score by 8 points and erases the fusion gain</a:t>
             </a:r>
             <a:endParaRPr lang="en-US" sz="2500" dirty="0"/>
           </a:p>
@@ -13969,7 +19074,7 @@
                   <a:schemeClr val="accent2"/>
                 </a:solidFill>
               </a:rPr>
-              <a:t>IsoFormer's six-row modality ablation on the 2,000-transcript GTEx pilot, split by gene, Spearman over thirty tissues, one seed. IsoFormer fine-tunes its encoders and we freeze them, so the gap to its absolute values is what freezing costs.</a:t>
+              <a:t>Seed 0, Equation 1's convolution, 100 channels, everything else held at Phase A's settings. Paired bootstrap on the same test rows; run on Chase's GPU and scored independently twice. Four of the eight swaps; the rest follow.</a:t>
             </a:r>
             <a:endParaRPr lang="en-US" sz="1150" dirty="0"/>
           </a:p>
@@ -13977,7 +19082,7 @@
       </p:sp>
       <p:graphicFrame>
         <p:nvGraphicFramePr>
-          <p:cNvPr id="10" name="isoformer table"/>
+          <p:cNvPr id="10" name="swap table"/>
           <p:cNvGraphicFramePr>
             <a:graphicFrameLocks noGrp="1"/>
           </p:cNvGraphicFramePr>
@@ -13991,18 +19096,20 @@
         </p:nvGraphicFramePr>
         <p:xfrm>
           <a:off x="813816" y="2029968"/>
-          <a:ext cx="4937760" cy="914400"/>
+          <a:ext cx="7589520" cy="914400"/>
         </p:xfrm>
         <a:graphic>
           <a:graphicData uri="http://schemas.openxmlformats.org/drawingml/2006/table">
             <a:tbl>
               <a:tblPr/>
               <a:tblGrid>
-                <a:gridCol w="2011680"/>
-                <a:gridCol w="1463040"/>
-                <a:gridCol w="1463040"/>
+                <a:gridCol w="2377440"/>
+                <a:gridCol w="1371600"/>
+                <a:gridCol w="1280160"/>
+                <a:gridCol w="1371600"/>
+                <a:gridCol w="1188720"/>
               </a:tblGrid>
-              <a:tr h="365760">
+              <a:tr h="347472">
                 <a:tc>
                   <a:txBody>
                     <a:bodyPr/>
@@ -14020,7 +19127,7 @@
                           <a:ea typeface="Inter" pitchFamily="34" charset="-122"/>
                           <a:cs typeface="Inter" pitchFamily="34" charset="-120"/>
                         </a:rPr>
-                        <a:t>Modalities</a:t>
+                        <a:t>Encoder in the RNA slot</a:t>
                       </a:r>
                       <a:endParaRPr lang="en-US" sz="1150" dirty="0">
                         <a:latin typeface="Inter" charset="0"/>
@@ -14088,7 +19195,7 @@
                           <a:ea typeface="Inter" pitchFamily="34" charset="-122"/>
                           <a:cs typeface="Inter" pitchFamily="34" charset="-120"/>
                         </a:rPr>
-                        <a:t>Ours, frozen</a:t>
+                        <a:t>CoV-Vac: alone</a:t>
                       </a:r>
                       <a:endParaRPr lang="en-US" sz="1150" dirty="0">
                         <a:latin typeface="Inter" charset="0"/>
@@ -14156,7 +19263,7 @@
                           <a:ea typeface="Inter" pitchFamily="34" charset="-122"/>
                           <a:cs typeface="Inter" pitchFamily="34" charset="-120"/>
                         </a:rPr>
-                        <a:t>IsoFormer, fine-tuned</a:t>
+                        <a:t>concat</a:t>
                       </a:r>
                       <a:endParaRPr lang="en-US" sz="1150" dirty="0">
                         <a:latin typeface="Inter" charset="0"/>
@@ -14207,8 +19314,144 @@
                     </a:solidFill>
                   </a:tcPr>
                 </a:tc>
+                <a:tc>
+                  <a:txBody>
+                    <a:bodyPr/>
+                    <a:lstStyle/>
+                    <a:p>
+                      <a:pPr algn="ctr" indent="0" marL="0">
+                        <a:buNone/>
+                      </a:pPr>
+                      <a:r>
+                        <a:rPr lang="en-US" sz="1150" b="1" dirty="0">
+                          <a:solidFill>
+                            <a:srgbClr val="31302E"/>
+                          </a:solidFill>
+                          <a:latin typeface="Inter" pitchFamily="34" charset="0"/>
+                          <a:ea typeface="Inter" pitchFamily="34" charset="-122"/>
+                          <a:cs typeface="Inter" pitchFamily="34" charset="-120"/>
+                        </a:rPr>
+                        <a:t>E. coli: alone</a:t>
+                      </a:r>
+                      <a:endParaRPr lang="en-US" sz="1150" dirty="0">
+                        <a:latin typeface="Inter" charset="0"/>
+                        <a:ea typeface="Inter" charset="0"/>
+                        <a:cs typeface="Inter" charset="0"/>
+                      </a:endParaRPr>
+                    </a:p>
+                  </a:txBody>
+                  <a:tcPr marL="73152" marR="73152" marT="36576" marB="36576" anchor="ctr">
+                    <a:lnL w="6350" cap="flat" cmpd="sng" algn="ctr">
+                      <a:solidFill>
+                        <a:srgbClr val="E6E6E6"/>
+                      </a:solidFill>
+                      <a:prstDash val="solid"/>
+                      <a:round/>
+                      <a:headEnd type="none" w="med" len="med"/>
+                      <a:tailEnd type="none" w="med" len="med"/>
+                    </a:lnL>
+                    <a:lnR w="6350" cap="flat" cmpd="sng" algn="ctr">
+                      <a:solidFill>
+                        <a:srgbClr val="E6E6E6"/>
+                      </a:solidFill>
+                      <a:prstDash val="solid"/>
+                      <a:round/>
+                      <a:headEnd type="none" w="med" len="med"/>
+                      <a:tailEnd type="none" w="med" len="med"/>
+                    </a:lnR>
+                    <a:lnT w="6350" cap="flat" cmpd="sng" algn="ctr">
+                      <a:solidFill>
+                        <a:srgbClr val="E6E6E6"/>
+                      </a:solidFill>
+                      <a:prstDash val="solid"/>
+                      <a:round/>
+                      <a:headEnd type="none" w="med" len="med"/>
+                      <a:tailEnd type="none" w="med" len="med"/>
+                    </a:lnT>
+                    <a:lnB w="6350" cap="flat" cmpd="sng" algn="ctr">
+                      <a:solidFill>
+                        <a:srgbClr val="E6E6E6"/>
+                      </a:solidFill>
+                      <a:prstDash val="solid"/>
+                      <a:round/>
+                      <a:headEnd type="none" w="med" len="med"/>
+                      <a:tailEnd type="none" w="med" len="med"/>
+                    </a:lnB>
+                    <a:solidFill>
+                      <a:srgbClr val="F0F0EE"/>
+                    </a:solidFill>
+                  </a:tcPr>
+                </a:tc>
+                <a:tc>
+                  <a:txBody>
+                    <a:bodyPr/>
+                    <a:lstStyle/>
+                    <a:p>
+                      <a:pPr algn="ctr" indent="0" marL="0">
+                        <a:buNone/>
+                      </a:pPr>
+                      <a:r>
+                        <a:rPr lang="en-US" sz="1150" b="1" dirty="0">
+                          <a:solidFill>
+                            <a:srgbClr val="31302E"/>
+                          </a:solidFill>
+                          <a:latin typeface="Inter" pitchFamily="34" charset="0"/>
+                          <a:ea typeface="Inter" pitchFamily="34" charset="-122"/>
+                          <a:cs typeface="Inter" pitchFamily="34" charset="-120"/>
+                        </a:rPr>
+                        <a:t>concat</a:t>
+                      </a:r>
+                      <a:endParaRPr lang="en-US" sz="1150" dirty="0">
+                        <a:latin typeface="Inter" charset="0"/>
+                        <a:ea typeface="Inter" charset="0"/>
+                        <a:cs typeface="Inter" charset="0"/>
+                      </a:endParaRPr>
+                    </a:p>
+                  </a:txBody>
+                  <a:tcPr marL="73152" marR="73152" marT="36576" marB="36576" anchor="ctr">
+                    <a:lnL w="6350" cap="flat" cmpd="sng" algn="ctr">
+                      <a:solidFill>
+                        <a:srgbClr val="E6E6E6"/>
+                      </a:solidFill>
+                      <a:prstDash val="solid"/>
+                      <a:round/>
+                      <a:headEnd type="none" w="med" len="med"/>
+                      <a:tailEnd type="none" w="med" len="med"/>
+                    </a:lnL>
+                    <a:lnR w="6350" cap="flat" cmpd="sng" algn="ctr">
+                      <a:solidFill>
+                        <a:srgbClr val="E6E6E6"/>
+                      </a:solidFill>
+                      <a:prstDash val="solid"/>
+                      <a:round/>
+                      <a:headEnd type="none" w="med" len="med"/>
+                      <a:tailEnd type="none" w="med" len="med"/>
+                    </a:lnR>
+                    <a:lnT w="6350" cap="flat" cmpd="sng" algn="ctr">
+                      <a:solidFill>
+                        <a:srgbClr val="E6E6E6"/>
+                      </a:solidFill>
+                      <a:prstDash val="solid"/>
+                      <a:round/>
+                      <a:headEnd type="none" w="med" len="med"/>
+                      <a:tailEnd type="none" w="med" len="med"/>
+                    </a:lnT>
+                    <a:lnB w="6350" cap="flat" cmpd="sng" algn="ctr">
+                      <a:solidFill>
+                        <a:srgbClr val="E6E6E6"/>
+                      </a:solidFill>
+                      <a:prstDash val="solid"/>
+                      <a:round/>
+                      <a:headEnd type="none" w="med" len="med"/>
+                      <a:tailEnd type="none" w="med" len="med"/>
+                    </a:lnB>
+                    <a:solidFill>
+                      <a:srgbClr val="F0F0EE"/>
+                    </a:solidFill>
+                  </a:tcPr>
+                </a:tc>
               </a:tr>
-              <a:tr h="365760">
+              <a:tr h="347472">
                 <a:tc>
                   <a:txBody>
                     <a:bodyPr/>
@@ -14226,7 +19469,7 @@
                           <a:ea typeface="Inter" pitchFamily="34" charset="-122"/>
                           <a:cs typeface="Inter" pitchFamily="34" charset="-120"/>
                         </a:rPr>
-                        <a:t>DNA</a:t>
+                        <a:t>RNA-FM (the paper's own)</a:t>
                       </a:r>
                       <a:endParaRPr lang="en-US" sz="1150" dirty="0">
                         <a:latin typeface="Inter" charset="0"/>
@@ -14294,7 +19537,7 @@
                           <a:ea typeface="Inter" pitchFamily="34" charset="-122"/>
                           <a:cs typeface="Inter" pitchFamily="34" charset="-120"/>
                         </a:rPr>
-                        <a:t>0.199</a:t>
+                        <a:t>0.833</a:t>
                       </a:r>
                       <a:endParaRPr lang="en-US" sz="1150" dirty="0">
                         <a:latin typeface="Inter" charset="0"/>
@@ -14362,77 +19605,7 @@
                           <a:ea typeface="Inter" pitchFamily="34" charset="-122"/>
                           <a:cs typeface="Inter" pitchFamily="34" charset="-120"/>
                         </a:rPr>
-                        <a:t>0.43</a:t>
-                      </a:r>
-                      <a:endParaRPr lang="en-US" sz="1150" dirty="0">
-                        <a:latin typeface="Inter" charset="0"/>
-                        <a:ea typeface="Inter" charset="0"/>
-                        <a:cs typeface="Inter" charset="0"/>
-                      </a:endParaRPr>
-                    </a:p>
-                  </a:txBody>
-                  <a:tcPr marL="73152" marR="73152" marT="36576" marB="36576" anchor="ctr">
-                    <a:lnL w="6350" cap="flat" cmpd="sng" algn="ctr">
-                      <a:solidFill>
-                        <a:srgbClr val="E6E6E6"/>
-                      </a:solidFill>
-                      <a:prstDash val="solid"/>
-                      <a:round/>
-                      <a:headEnd type="none" w="med" len="med"/>
-                      <a:tailEnd type="none" w="med" len="med"/>
-                    </a:lnL>
-                    <a:lnR w="6350" cap="flat" cmpd="sng" algn="ctr">
-                      <a:solidFill>
-                        <a:srgbClr val="E6E6E6"/>
-                      </a:solidFill>
-                      <a:prstDash val="solid"/>
-                      <a:round/>
-                      <a:headEnd type="none" w="med" len="med"/>
-                      <a:tailEnd type="none" w="med" len="med"/>
-                    </a:lnR>
-                    <a:lnT w="6350" cap="flat" cmpd="sng" algn="ctr">
-                      <a:solidFill>
-                        <a:srgbClr val="E6E6E6"/>
-                      </a:solidFill>
-                      <a:prstDash val="solid"/>
-                      <a:round/>
-                      <a:headEnd type="none" w="med" len="med"/>
-                      <a:tailEnd type="none" w="med" len="med"/>
-                    </a:lnT>
-                    <a:lnB w="6350" cap="flat" cmpd="sng" algn="ctr">
-                      <a:solidFill>
-                        <a:srgbClr val="E6E6E6"/>
-                      </a:solidFill>
-                      <a:prstDash val="solid"/>
-                      <a:round/>
-                      <a:headEnd type="none" w="med" len="med"/>
-                      <a:tailEnd type="none" w="med" len="med"/>
-                    </a:lnB>
-                    <a:solidFill>
-                      <a:srgbClr val="FFFFFF"/>
-                    </a:solidFill>
-                  </a:tcPr>
-                </a:tc>
-              </a:tr>
-              <a:tr h="365760">
-                <a:tc>
-                  <a:txBody>
-                    <a:bodyPr/>
-                    <a:lstStyle/>
-                    <a:p>
-                      <a:pPr algn="l" indent="0" marL="0">
-                        <a:buNone/>
-                      </a:pPr>
-                      <a:r>
-                        <a:rPr lang="en-US" sz="1150" dirty="0">
-                          <a:solidFill>
-                            <a:srgbClr val="31302E"/>
-                          </a:solidFill>
-                          <a:latin typeface="Inter" pitchFamily="34" charset="0"/>
-                          <a:ea typeface="Inter" pitchFamily="34" charset="-122"/>
-                          <a:cs typeface="Inter" pitchFamily="34" charset="-120"/>
-                        </a:rPr>
-                        <a:t>RNA</a:t>
+                        <a:t>0.801</a:t>
                       </a:r>
                       <a:endParaRPr lang="en-US" sz="1150" dirty="0">
                         <a:latin typeface="Inter" charset="0"/>
@@ -14500,7 +19673,7 @@
                           <a:ea typeface="Inter" pitchFamily="34" charset="-122"/>
                           <a:cs typeface="Inter" pitchFamily="34" charset="-120"/>
                         </a:rPr>
-                        <a:t>0.452</a:t>
+                        <a:t>50.7</a:t>
                       </a:r>
                       <a:endParaRPr lang="en-US" sz="1150" dirty="0">
                         <a:latin typeface="Inter" charset="0"/>
@@ -14568,7 +19741,7 @@
                           <a:ea typeface="Inter" pitchFamily="34" charset="-122"/>
                           <a:cs typeface="Inter" pitchFamily="34" charset="-120"/>
                         </a:rPr>
-                        <a:t>0.61</a:t>
+                        <a:t>60.7</a:t>
                       </a:r>
                       <a:endParaRPr lang="en-US" sz="1150" dirty="0">
                         <a:latin typeface="Inter" charset="0"/>
@@ -14620,7 +19793,7 @@
                   </a:tcPr>
                 </a:tc>
               </a:tr>
-              <a:tr h="365760">
+              <a:tr h="347472">
                 <a:tc>
                   <a:txBody>
                     <a:bodyPr/>
@@ -14638,7 +19811,7 @@
                           <a:ea typeface="Inter" pitchFamily="34" charset="-122"/>
                           <a:cs typeface="Inter" pitchFamily="34" charset="-120"/>
                         </a:rPr>
-                        <a:t>Protein</a:t>
+                        <a:t>mRNA-FM</a:t>
                       </a:r>
                       <a:endParaRPr lang="en-US" sz="1150" dirty="0">
                         <a:latin typeface="Inter" charset="0"/>
@@ -14706,7 +19879,7 @@
                           <a:ea typeface="Inter" pitchFamily="34" charset="-122"/>
                           <a:cs typeface="Inter" pitchFamily="34" charset="-120"/>
                         </a:rPr>
-                        <a:t>0.160</a:t>
+                        <a:t>0.812</a:t>
                       </a:r>
                       <a:endParaRPr lang="en-US" sz="1150" dirty="0">
                         <a:latin typeface="Inter" charset="0"/>
@@ -14774,77 +19947,7 @@
                           <a:ea typeface="Inter" pitchFamily="34" charset="-122"/>
                           <a:cs typeface="Inter" pitchFamily="34" charset="-120"/>
                         </a:rPr>
-                        <a:t>0.46</a:t>
-                      </a:r>
-                      <a:endParaRPr lang="en-US" sz="1150" dirty="0">
-                        <a:latin typeface="Inter" charset="0"/>
-                        <a:ea typeface="Inter" charset="0"/>
-                        <a:cs typeface="Inter" charset="0"/>
-                      </a:endParaRPr>
-                    </a:p>
-                  </a:txBody>
-                  <a:tcPr marL="73152" marR="73152" marT="36576" marB="36576" anchor="ctr">
-                    <a:lnL w="6350" cap="flat" cmpd="sng" algn="ctr">
-                      <a:solidFill>
-                        <a:srgbClr val="E6E6E6"/>
-                      </a:solidFill>
-                      <a:prstDash val="solid"/>
-                      <a:round/>
-                      <a:headEnd type="none" w="med" len="med"/>
-                      <a:tailEnd type="none" w="med" len="med"/>
-                    </a:lnL>
-                    <a:lnR w="6350" cap="flat" cmpd="sng" algn="ctr">
-                      <a:solidFill>
-                        <a:srgbClr val="E6E6E6"/>
-                      </a:solidFill>
-                      <a:prstDash val="solid"/>
-                      <a:round/>
-                      <a:headEnd type="none" w="med" len="med"/>
-                      <a:tailEnd type="none" w="med" len="med"/>
-                    </a:lnR>
-                    <a:lnT w="6350" cap="flat" cmpd="sng" algn="ctr">
-                      <a:solidFill>
-                        <a:srgbClr val="E6E6E6"/>
-                      </a:solidFill>
-                      <a:prstDash val="solid"/>
-                      <a:round/>
-                      <a:headEnd type="none" w="med" len="med"/>
-                      <a:tailEnd type="none" w="med" len="med"/>
-                    </a:lnT>
-                    <a:lnB w="6350" cap="flat" cmpd="sng" algn="ctr">
-                      <a:solidFill>
-                        <a:srgbClr val="E6E6E6"/>
-                      </a:solidFill>
-                      <a:prstDash val="solid"/>
-                      <a:round/>
-                      <a:headEnd type="none" w="med" len="med"/>
-                      <a:tailEnd type="none" w="med" len="med"/>
-                    </a:lnB>
-                    <a:solidFill>
-                      <a:srgbClr val="FFFFFF"/>
-                    </a:solidFill>
-                  </a:tcPr>
-                </a:tc>
-              </a:tr>
-              <a:tr h="365760">
-                <a:tc>
-                  <a:txBody>
-                    <a:bodyPr/>
-                    <a:lstStyle/>
-                    <a:p>
-                      <a:pPr algn="l" indent="0" marL="0">
-                        <a:buNone/>
-                      </a:pPr>
-                      <a:r>
-                        <a:rPr lang="en-US" sz="1150" dirty="0">
-                          <a:solidFill>
-                            <a:srgbClr val="31302E"/>
-                          </a:solidFill>
-                          <a:latin typeface="Inter" pitchFamily="34" charset="0"/>
-                          <a:ea typeface="Inter" pitchFamily="34" charset="-122"/>
-                          <a:cs typeface="Inter" pitchFamily="34" charset="-120"/>
-                        </a:rPr>
-                        <a:t>DNA + protein</a:t>
+                        <a:t>0.759</a:t>
                       </a:r>
                       <a:endParaRPr lang="en-US" sz="1150" dirty="0">
                         <a:latin typeface="Inter" charset="0"/>
@@ -14912,7 +20015,7 @@
                           <a:ea typeface="Inter" pitchFamily="34" charset="-122"/>
                           <a:cs typeface="Inter" pitchFamily="34" charset="-120"/>
                         </a:rPr>
-                        <a:t>0.439</a:t>
+                        <a:t>58.7</a:t>
                       </a:r>
                       <a:endParaRPr lang="en-US" sz="1150" dirty="0">
                         <a:latin typeface="Inter" charset="0"/>
@@ -14980,7 +20083,7 @@
                           <a:ea typeface="Inter" pitchFamily="34" charset="-122"/>
                           <a:cs typeface="Inter" pitchFamily="34" charset="-120"/>
                         </a:rPr>
-                        <a:t>0.52</a:t>
+                        <a:t>59.0</a:t>
                       </a:r>
                       <a:endParaRPr lang="en-US" sz="1150" dirty="0">
                         <a:latin typeface="Inter" charset="0"/>
@@ -15032,7 +20135,7 @@
                   </a:tcPr>
                 </a:tc>
               </a:tr>
-              <a:tr h="365760">
+              <a:tr h="347472">
                 <a:tc>
                   <a:txBody>
                     <a:bodyPr/>
@@ -15050,7 +20153,7 @@
                           <a:ea typeface="Inter" pitchFamily="34" charset="-122"/>
                           <a:cs typeface="Inter" pitchFamily="34" charset="-120"/>
                         </a:rPr>
-                        <a:t>DNA + RNA</a:t>
+                        <a:t>CaLM</a:t>
                       </a:r>
                       <a:endParaRPr lang="en-US" sz="1150" dirty="0">
                         <a:latin typeface="Inter" charset="0"/>
@@ -15118,7 +20221,7 @@
                           <a:ea typeface="Inter" pitchFamily="34" charset="-122"/>
                           <a:cs typeface="Inter" pitchFamily="34" charset="-120"/>
                         </a:rPr>
-                        <a:t>0.507</a:t>
+                        <a:t>0.844</a:t>
                       </a:r>
                       <a:endParaRPr lang="en-US" sz="1150" dirty="0">
                         <a:latin typeface="Inter" charset="0"/>
@@ -15186,77 +20289,7 @@
                           <a:ea typeface="Inter" pitchFamily="34" charset="-122"/>
                           <a:cs typeface="Inter" pitchFamily="34" charset="-120"/>
                         </a:rPr>
-                        <a:t>0.64</a:t>
-                      </a:r>
-                      <a:endParaRPr lang="en-US" sz="1150" dirty="0">
-                        <a:latin typeface="Inter" charset="0"/>
-                        <a:ea typeface="Inter" charset="0"/>
-                        <a:cs typeface="Inter" charset="0"/>
-                      </a:endParaRPr>
-                    </a:p>
-                  </a:txBody>
-                  <a:tcPr marL="73152" marR="73152" marT="36576" marB="36576" anchor="ctr">
-                    <a:lnL w="6350" cap="flat" cmpd="sng" algn="ctr">
-                      <a:solidFill>
-                        <a:srgbClr val="E6E6E6"/>
-                      </a:solidFill>
-                      <a:prstDash val="solid"/>
-                      <a:round/>
-                      <a:headEnd type="none" w="med" len="med"/>
-                      <a:tailEnd type="none" w="med" len="med"/>
-                    </a:lnL>
-                    <a:lnR w="6350" cap="flat" cmpd="sng" algn="ctr">
-                      <a:solidFill>
-                        <a:srgbClr val="E6E6E6"/>
-                      </a:solidFill>
-                      <a:prstDash val="solid"/>
-                      <a:round/>
-                      <a:headEnd type="none" w="med" len="med"/>
-                      <a:tailEnd type="none" w="med" len="med"/>
-                    </a:lnR>
-                    <a:lnT w="6350" cap="flat" cmpd="sng" algn="ctr">
-                      <a:solidFill>
-                        <a:srgbClr val="E6E6E6"/>
-                      </a:solidFill>
-                      <a:prstDash val="solid"/>
-                      <a:round/>
-                      <a:headEnd type="none" w="med" len="med"/>
-                      <a:tailEnd type="none" w="med" len="med"/>
-                    </a:lnT>
-                    <a:lnB w="6350" cap="flat" cmpd="sng" algn="ctr">
-                      <a:solidFill>
-                        <a:srgbClr val="E6E6E6"/>
-                      </a:solidFill>
-                      <a:prstDash val="solid"/>
-                      <a:round/>
-                      <a:headEnd type="none" w="med" len="med"/>
-                      <a:tailEnd type="none" w="med" len="med"/>
-                    </a:lnB>
-                    <a:solidFill>
-                      <a:srgbClr val="FFFFFF"/>
-                    </a:solidFill>
-                  </a:tcPr>
-                </a:tc>
-              </a:tr>
-              <a:tr h="365760">
-                <a:tc>
-                  <a:txBody>
-                    <a:bodyPr/>
-                    <a:lstStyle/>
-                    <a:p>
-                      <a:pPr algn="l" indent="0" marL="0">
-                        <a:buNone/>
-                      </a:pPr>
-                      <a:r>
-                        <a:rPr lang="en-US" sz="1150" dirty="0">
-                          <a:solidFill>
-                            <a:srgbClr val="31302E"/>
-                          </a:solidFill>
-                          <a:latin typeface="Inter" pitchFamily="34" charset="0"/>
-                          <a:ea typeface="Inter" pitchFamily="34" charset="-122"/>
-                          <a:cs typeface="Inter" pitchFamily="34" charset="-120"/>
-                        </a:rPr>
-                        <a:t>DNA + RNA + protein</a:t>
+                        <a:t>0.817</a:t>
                       </a:r>
                       <a:endParaRPr lang="en-US" sz="1150" dirty="0">
                         <a:latin typeface="Inter" charset="0"/>
@@ -15324,7 +20357,7 @@
                           <a:ea typeface="Inter" pitchFamily="34" charset="-122"/>
                           <a:cs typeface="Inter" pitchFamily="34" charset="-120"/>
                         </a:rPr>
-                        <a:t>0.499</a:t>
+                        <a:t>57.6</a:t>
                       </a:r>
                       <a:endParaRPr lang="en-US" sz="1150" dirty="0">
                         <a:latin typeface="Inter" charset="0"/>
@@ -15392,7 +20425,7 @@
                           <a:ea typeface="Inter" pitchFamily="34" charset="-122"/>
                           <a:cs typeface="Inter" pitchFamily="34" charset="-120"/>
                         </a:rPr>
-                        <a:t>0.65</a:t>
+                        <a:t>57.7</a:t>
                       </a:r>
                       <a:endParaRPr lang="en-US" sz="1150" dirty="0">
                         <a:latin typeface="Inter" charset="0"/>
@@ -15450,41 +20483,14 @@
       </p:graphicFrame>
       <p:sp>
         <p:nvSpPr>
-          <p:cNvPr id="6" name="lucaone card"/>
-          <p:cNvSpPr/>
-          <p:nvPr/>
-        </p:nvSpPr>
-        <p:spPr>
-          <a:xfrm>
-            <a:off x="5989320" y="2029968"/>
-            <a:ext cx="2423160" cy="3794760"/>
-          </a:xfrm>
-          <a:prstGeom prst="roundRect">
-            <a:avLst>
-              <a:gd name="adj" fmla="val 2264"/>
-            </a:avLst>
-          </a:prstGeom>
-          <a:solidFill>
-            <a:srgbClr val="FFFFFF"/>
-          </a:solidFill>
-          <a:ln w="9525">
-            <a:solidFill>
-              <a:srgbClr val="E6E6E6"/>
-            </a:solidFill>
-            <a:prstDash val="solid"/>
-          </a:ln>
-        </p:spPr>
-      </p:sp>
-      <p:sp>
-        <p:nvSpPr>
-          <p:cNvPr id="7" name="lucaone text"/>
+          <p:cNvPr id="6" name="swap reading"/>
           <p:cNvSpPr txBox="1"/>
           <p:nvPr/>
         </p:nvSpPr>
         <p:spPr>
           <a:xfrm>
-            <a:off x="6172200" y="2194560"/>
-            <a:ext cx="2103120" cy="3520440"/>
+            <a:off x="813816" y="3703320"/>
+            <a:ext cx="7589520" cy="2103120"/>
           </a:xfrm>
           <a:prstGeom prst="rect">
             <a:avLst/>
@@ -15500,34 +20506,53 @@
               <a:buNone/>
             </a:pPr>
             <a:r>
-              <a:rPr lang="en-US" sz="1200" b="1" dirty="0">
+              <a:rPr lang="en-US" sz="1250" b="1" dirty="0">
                 <a:solidFill>
                   <a:srgbClr val="31302E"/>
                 </a:solidFill>
               </a:rPr>
-              <a:t>LucaOne</a:t>
+              <a:t>What changed. </a:t>
             </a:r>
-            <a:endParaRPr lang="en-US" sz="1200" dirty="0"/>
-          </a:p>
-          <a:p>
             <a:pPr indent="0" marL="0">
               <a:buNone/>
             </a:pPr>
             <a:r>
-              <a:rPr lang="en-US" sz="1200" dirty="0">
+              <a:rPr lang="en-US" sz="1250" dirty="0">
                 <a:solidFill>
                   <a:srgbClr val="615D59"/>
                 </a:solidFill>
               </a:rPr>
-              <a:t>Its 1,280-token character-level context admits none of the pilot's 6,000-nt DNA windows and 40% of its transcripts; its joint mode caps a coding sequence at 957 nt. Joint checkpoints exist on the hub, so the context, not availability, rules it out on GTEx. A stability baseline remains possible.</a:t>
+              <a:t>On E. coli, mRNA-FM alone scores +8.0 [+4.0, +11.8] above RNA-FM alone, resolved, and CaLM +6.9 [+2.8, +10.8]. Concatenation with mRNA-FM then beats its own best single encoder by </a:t>
             </a:r>
-            <a:endParaRPr lang="en-US" sz="1200" dirty="0"/>
+            <a:pPr indent="0" marL="0">
+              <a:buNone/>
+            </a:pPr>
+            <a:r>
+              <a:rPr lang="en-US" sz="1250" b="1" dirty="0">
+                <a:solidFill>
+                  <a:srgbClr val="31302E"/>
+                </a:solidFill>
+              </a:rPr>
+              <a:t>+0.3 [-2.9, +3.7], which does not resolve.</a:t>
+            </a:r>
+            <a:pPr indent="0" marL="0">
+              <a:buNone/>
+            </a:pPr>
+            <a:r>
+              <a:rPr lang="en-US" sz="1250" dirty="0">
+                <a:solidFill>
+                  <a:srgbClr val="615D59"/>
+                </a:solidFill>
+              </a:rPr>
+              <a:t> Phase A's +6.9 was fusion compensating for a weak RNA encoder, not fusion adding information. On CoV-Vac the swap does not help: concatenation and the gated head with mRNA-FM resolve worse than the originals.</a:t>
+            </a:r>
+            <a:endParaRPr lang="en-US" sz="1250" dirty="0"/>
           </a:p>
         </p:txBody>
       </p:sp>
       <p:sp>
         <p:nvSpPr>
-          <p:cNvPr id="8" name="stat card"/>
+          <p:cNvPr id="7" name="stat card"/>
           <p:cNvSpPr/>
           <p:nvPr/>
         </p:nvSpPr>
@@ -15554,7 +20579,7 @@
       </p:sp>
       <p:sp>
         <p:nvSpPr>
-          <p:cNvPr id="9" name="stat value"/>
+          <p:cNvPr id="8" name="stat value"/>
           <p:cNvSpPr txBox="1"/>
           <p:nvPr/>
         </p:nvSpPr>
@@ -15582,7 +20607,7 @@
                   <a:srgbClr val="FFFFFF"/>
                 </a:solidFill>
               </a:rPr>
-              <a:t>+0.047</a:t>
+              <a:t>+8.0 points</a:t>
             </a:r>
             <a:endParaRPr lang="en-US" sz="2400" dirty="0"/>
           </a:p>
@@ -15590,7 +20615,7 @@
       </p:sp>
       <p:sp>
         <p:nvSpPr>
-          <p:cNvPr id="10" name="stat label"/>
+          <p:cNvPr id="9" name="stat label"/>
           <p:cNvSpPr txBox="1"/>
           <p:nvPr/>
         </p:nvSpPr>
@@ -15618,7 +20643,7 @@
                   <a:srgbClr val="FFFFFF"/>
                 </a:solidFill>
               </a:rPr>
-              <a:t>All three modalities minus RNA alone, [+0.027, +0.069]: resolved. DNA with RNA minus RNA alone +0.055 [+0.032, +0.078]. Protein adds nothing measurable.</a:t>
+              <a:t>mRNA-FM alone over RNA-FM alone on E. coli. The mRFP control predicted exactly this encoder, on exactly this kind of task.</a:t>
             </a:r>
             <a:endParaRPr lang="en-US" sz="1150" dirty="0"/>
           </a:p>
@@ -15626,7 +20651,7 @@
       </p:sp>
       <p:sp>
         <p:nvSpPr>
-          <p:cNvPr id="11" name="stat card"/>
+          <p:cNvPr id="10" name="stat card"/>
           <p:cNvSpPr/>
           <p:nvPr/>
         </p:nvSpPr>
@@ -15653,7 +20678,7 @@
       </p:sp>
       <p:sp>
         <p:nvSpPr>
-          <p:cNvPr id="12" name="stat value"/>
+          <p:cNvPr id="11" name="stat value"/>
           <p:cNvSpPr txBox="1"/>
           <p:nvPr/>
         </p:nvSpPr>
@@ -15681,7 +20706,7 @@
                   <a:srgbClr val="31302E"/>
                 </a:solidFill>
               </a:rPr>
-              <a:t>3 of 4</a:t>
+              <a:t>Half right</a:t>
             </a:r>
             <a:endParaRPr lang="en-US" sz="2400" dirty="0"/>
           </a:p>
@@ -15689,7 +20714,7 @@
       </p:sp>
       <p:sp>
         <p:nvSpPr>
-          <p:cNvPr id="13" name="stat label"/>
+          <p:cNvPr id="12" name="stat label"/>
           <p:cNvSpPr txBox="1"/>
           <p:nvPr/>
         </p:nvSpPr>
@@ -15717,7 +20742,7 @@
                   <a:srgbClr val="615D59"/>
                 </a:solidFill>
               </a:rPr>
-              <a:t>of the paper's orderings reproduce: RNA is the strongest single modality, all three beat the best single one, DNA with RNA beats DNA with protein.</a:t>
+              <a:t>The information the control found is real and it is in the encoder. It does not become a fusion gain, which is a sharper finding than either outcome alone.</a:t>
             </a:r>
             <a:endParaRPr lang="en-US" sz="1150" dirty="0"/>
           </a:p>

--- a/docs/notes/Slides/Mina_Progress_Slides_2026-10-22.pptx
+++ b/docs/notes/Slides/Mina_Progress_Slides_2026-10-22.pptx
@@ -605,14 +605,16 @@
           <a:p>
             <a:r>
               <a:rPr lang="en-US" dirty="0"/>
-              <a:t>WHAT RAN. Chase completed Phase B between October 25 and 27 on his GPU: eight single-encoder swaps (DNA slot: NT 500M human-ref and HyenaDNA large in place of NT v2 100M; RNA slot: RiNALMo 150M, mRNA-FM and CaLM in place of RNA-FM; protein slot: ESM-2 35M, ESM-2 150M and ProtBERT in place of ESM-2 8M) on fungal, CoV-Vac and E. coli, plus three of them (mRNA-FM, CaLM, ESM-2 150M) on mRNA stability. That is 27 swap-benchmark pairs, each with the swapped encoder read alone and all three fusion heads, seed 0, everything else at Phase A's settings, including the gated head's entropy weight. DNABERT-2 is left out because its variable-length tokens need a grid adapter. The paired intervals are from Chase's notebook (2,000 draws, identical sequences resampled together).
-HOW TO READ THE GRID. Each cell is one fusion head minus the best single encoder validation chose, for that swap on that benchmark. Blue: fusion ahead and the interval excludes zero. Orange: fusion behind, resolved. Grey: a tie. The dashed top row is the original encoders at seed 0, for reference. The table underneath is the encoder question: each swapped encoder read alone, with the original it replaces in brackets.
-THE ENCODER QUESTION. The RNA swaps change the most. On fungal, RiNALMo, mRNA-FM and CaLM alone score 0.844 to 0.852, against 0.722 for RNA-FM and 0.813 for NT v2, the best original encoder; one swapped encoder alone beats the paper's best fusion on fungal (0.824). On E. coli the same three lift the single encoder from 50.7 to 57.3 to 58.7. The DNA swaps are worse than NT v2 on fungal and CoV-Vac, and the protein swaps move little except ESM-2 150M on E. coli (53.9 against 50.1).
-THE FUSION QUESTION. 81 comparisons: 15 resolved ahead, 14 resolved behind, 52 ties. Three of the 15 are fungal with ProtBERT, measured against ProtBERT alone because validation picked it, although NT v2 alone scores 0.813 on test; against NT v2 those three are ties. So 12 real candidates. Ten are on E. coli, and eight of those ten come from configurations where the weak RNA-FM still sits in the RNA slot (the DNA and protein swaps): the same compensation as Phase A. With mRNA-FM or CaLM in the slot, E. coli fusion gains vanish and two heads are resolved worse (gated -5.6 with mRNA-FM, cross-attention -3.7 with CaLM). Fungal: every other comparison ties. Stability: all nine tie.
-WHAT IS NEW. Three gains that a weak encoder does not explain. On CoV-Vac, cross-attention with HyenaDNA is +0.039 over the best single encoder (RNA-FM, 0.833), reaching 0.872, above the paper's best CoV-Vac number (0.864); cross-attention with RiNALMo is +0.031. Both swaps are nucleotide-resolution encoders, and CoV-Vac is the folding of 81-nucleotide fragments, so this is the first sign that combining nucleotide-level streams through attention can help a nucleotide-scale task. On E. coli, the gated head with RiNALMo reaches 62.5%, the highest E. coli accuracy in the project, +6.5 over the best single encoder, and here its weights actually mix (RNA 0.42, protein 0.50). Also: on CoV-Vac, concatenation and the gated head are resolved worse than the best single encoder in 12 of 16 configurations, while cross-attention is never resolved worse.
-THE GATED HEAD, REVISITED. With a strong RNA encoder the gate now gives RNA real weight (fungal 0.48 to 0.60, stability with mRNA-FM 0.79, CoV-Vac with RiNALMo 0.94), so it is a selector that often picks the strongest stream. But on E. coli with mRNA-FM, the best single encoder there, it still gives RNA 0.00 and scores 53.1: it selects, and sometimes selects wrong.
-CAVEATS. One seed per configuration; the intervals measure test-row sampling, not training variation, so the three new gains are candidates. The entropy weight is inherited, not retuned per swap. The single reference is chosen on validation, which went wrong once (fungal, ProtBERT).
-NEXT. Seeds on the three new gains; the mRNA-FM-anchored fusions Mina asked for; the plan's two-encoder replacements, chosen from these single swaps.</a:t>
+              <a:t>WHAT THIS SLIDE ANSWERS. The fusion question, on the same eight swaps slide 9 covered: once an encoder is in place, does any fusion head beat the best single encoder available in that configuration?
+HOW TO READ THE GRID. Each cell is one head minus the best single encoder validation chose for that configuration, with the 95% paired interval from Chase's notebook (2,000 draws, identical sequences resampled together) deciding the shading. Blue: fusion ahead, interval excludes zero. Orange: fusion behind, resolved. Grey: a tie. The dashed top row is the original encoders at seed 0, for reference.
+THE TALLY. 81 comparisons: 15 resolve with fusion ahead, 14 with fusion behind, 52 are ties. The 15 need splitting, because two groups of them are artifacts of the comparison rather than fusion working.
+ARTIFACT ONE, A WEAK REFERENCE (3 of the 15). Fungal with ProtBERT. Validation chose ProtBERT alone (0.761) as the single encoder to beat, although NT v2 100M alone scores 0.813 on test. Measured against NT v2 those three gains are ties. They are marked with a dagger on the slide.
+ARTIFACT TWO, A WEAK RNA SLOT (8 of the 15). The E. coli gains under the DNA and protein swaps. In all of those the paper's RNA-FM still sits in the RNA slot, so fusion is compensating for it exactly as in Phase A. The proof is the contrast: with mRNA-FM or CaLM in that slot, no head gains on E. coli, and two are resolved worse (gated -5.6 with mRNA-FM, cross-attention -3.7 with CaLM).
+WHAT SURVIVES (3 of the 15). CoV-Vac, cross-attention with HyenaDNA: +0.039 [+0.012, +0.066] over RNA-FM alone, reaching 0.872, above the paper's best CoV-Vac value of 0.864. CoV-Vac, cross-attention with RiNALMo: +0.031 [+0.008, +0.054], reaching 0.854. E. coli, gated head with RiNALMo: +6.5 points [+3.4, +9.6], reaching 62.5%, the highest E. coli accuracy in the project. The two CoV-Vac gains are both nucleotide-resolution encoders on a task governed by local folding, which is the first sign that letting nucleotide-level streams attend to each other helps a nucleotide-scale task. Each rests on one seed, so they are candidates.
+TWO MORE PATTERNS. On CoV-Vac, concatenation and the gated head are resolved worse than the best single encoder in 12 of 16 configurations, while cross-attention is never resolved worse there. On stability all nine comparisons tie.
+THE GATED HEAD, REVISITED. With a strong RNA encoder the gate gives RNA real weight (fungal 0.48 to 0.60, stability 0.79 with mRNA-FM, CoV-Vac 0.94 with RiNALMo), so slide 6's "RNA is zero everywhere" holds for RNA-FM, not for every RNA encoder. It still selects wrongly where it matters: on E. coli with mRNA-FM, the best single encoder there, it gives RNA 0.00 and scores 53.1.
+GRIDDED DNA, A SIDE RESULT. The sweep also read the swapped DNA encoders after the grid's learned upsampling. For NT 500M the grid helps (fungal 0.740 to 0.766); for HyenaDNA, already nucleotide-resolution, it hurts (0.737 to 0.676). Whether the grid helps depends on the encoder, so the same check on the original NT v2 100M is still worth running.
+WHAT IS LEFT. Seeds on the three surviving gains; the mRNA-FM-anchored fusions Mina asked for; the plan's two-encoder replacements, chosen from these single swaps; DNABERT-2 once it has a grid adapter; the five swaps not yet run on stability.</a:t>
             </a:r>
             <a:endParaRPr lang="en-US" dirty="0"/>
           </a:p>
@@ -978,7 +980,8 @@
             <a:r>
               <a:rPr lang="en-US" dirty="0"/>
               <a:t>THE FIVE CONCLUSIONS AND THEIR EVIDENCE. (1) The build is right: singles within 0.01 of the paper, cross-attention within 0.01 on all four benchmarks (slide 4). (2) The encoder matters more than the fusion head: one swap moved E. coli by 8 points and dissolved the fusion gain that had been compensating for the weak encoder (slide 9), and across all eight swaps the better RNA encoders lift fungal and E. coli alone while fusion on top of them adds nothing resolved; the three new fusion gains (cross-attention with HyenaDNA and RiNALMo on CoV-Vac, gated with RiNALMo on E. coli) are single-seed candidates (slide 10). (3) Fusion still wins where the modalities are different molecules: GTEx +0.047 resolved (slide 13); full transcript with protein +0.053 and +0.030 (slide 12). (4) One jointly pretrained model beats three fused ones on stability: LucaOne +0.092 resolved, on the leaky split (slide 11). (5) The gated head is a selector, not a mixer; the paper reports no error bars, and its fungal gain is the size of noise on that split (slides 5 and 6).
-WHAT MINA ASKED ON OCTOBER 22, AND WHERE EACH LANDS. Interpret why things work better, not only that they do: the guide and these notes carry the interpretation on every slide (pretraining domain predicts the best single encoder; fusion helps when the second input is a different molecule or region). Build fusion around mRNA-FM and try other mRNA encoders: a Phase B extension on the coding-sequence benchmarks (Gantt 24). Does cross-attention do better with the swapped encoders: not on the four swaps run so far (slide 9); the project's own cross-attention design is still scored in January (Gantt 25). Run LucaOne on the other datasets: E. coli, CoV-Vac and fungal fit its context, GTEx does not (Gantt 41). Which rows the paper reports on stability: the full 3,579-row published split (slide 7).
+WHAT RUNS NEXT, THE RIGHT-HAND PANEL. Seeds on the three surviving Phase B gains, since each rests on one seed today and the intervals measure test-row sampling rather than training variation. Fusion built around mRNA-FM (DNA with mRNA-FM, mRNA-FM with protein) and the other codon-level RNA encoders, then the plan's two-encoder replacements, whose candidates the single swaps have now identified (Gantt 24). The sequence-grouped stability re-split with seeds, the only way to settle whether fusion helps on that benchmark, since the published split repeats a training sequence in 68% of its test rows. LucaOne on E. coli, CoV-Vac and fungal, which fit its 1,280-token context where GTEx does not (Gantt 41); the gated head at the paper's 1,280 channels on the three benchmarks not yet run that way; the mouse half-life and translation-efficiency scores, whose embeddings already exist. Then the project's own designs from January: Coupled Mamba on the codon grid (Gantt 20 and 21), and IsoFormer-style cross-attention (Gantt 25) run on both redundant inputs (BioLangFusion's benchmarks) and complementary ones (full transcripts, GTEx), which is the controlled version of the comparison GTEx alone cannot make.
+FOUR ITEMS THAT NEED AN ANSWER FROM OUTSIDE THE PROJECT, in the footer. Whether Ab1, the fifth BioLangFusion benchmark, can be obtained through UCF, since it is from Yazdani-Jahromi et al. there and is the one benchmark where all three of the paper's heads beat the best single encoder. Whether seeds plus a paired bootstrap becomes the reporting standard for everything that follows. GPU access beyond one laptop and one desktop, which Coupled Mamba needs. Which two DNA encoders and which RNA encoder join the twelve Stage 1 teachers for distillation.
 STILL OPEN FROM THE DECK'S OWN LIST. Ab1 (not public; can it be obtained through UCF); seeds plus a paired bootstrap as the reporting standard for everything; GPU access for Coupled Mamba; the distillation teachers (which two DNA encoders and which RNA encoder join the twelve).
 OPEN RUNS, IN ORDER. Seeds on the three new Phase B gains (cross-attention with HyenaDNA and with RiNALMo on CoV-Vac, gated with RiNALMo on E. coli); the gated head at 1,280 channels on the other three benchmarks; the sequence-grouped stability re-split with seeds; seeds on the swaps that matter; the mouse half-life and translation-efficiency scores; LucaOne on the three coding-sequence benchmarks; the mRNA-FM-anchored fusions.
 ONE SENTENCE. The reproduction is faithful, the paper's fusion gains mostly do not survive a stronger single encoder, and the project's question is now which encoder to put in each slot and when a second molecule is worth fusing.</a:t>
@@ -1716,12 +1719,13 @@
           <a:p>
             <a:r>
               <a:rPr lang="en-US" dirty="0"/>
-              <a:t>WHY (Priority 1, Phase B). Keep the splits, preprocessing, heads and training fixed and change encoders only. The plan's success criterion is that at least one swap improves test performance under the same architecture; the plan's measure is delta-fusion against the best single encoder of that triple. The RNA slot went first because the mRFP control predicted mRNA-FM should carry the most; CaLM is its control (another codon-level encoder with a different pretraining set).
-HOW. Token embeddings for mRNA-FM and CaLM were extracted on the benchmarks (both read one token per codon, so they drop onto the grid without RNA-FM's three-to-one average). The Phase A sweep was rerun with the swapped encoder: alone, concatenation, the gated head at the validation-chosen lambda, and cross-attention. Each is compared by paired bootstrap on the same test rows against its own best single encoder (delta-fusion) and against the same head with the original encoders. Run on Chase's GPU, scored independently twice.
-E. COLI. mRNA-FM alone 58.7%, +8.0 points over RNA-FM alone [+3.9, +11.9], resolved, and +8.6 over ESM-2 alone (the validation-chosen single encoder in Phase A). CaLM alone 57.6%, +6.8 [+2.5, +10.8], resolved. With mRNA-FM in place: concatenation 59.0% (+0.3 over mRNA-FM alone, [-2.9, +3.5], not resolved); gated head 53.1% (-5.6, resolved worse); cross-attention 54.8% (-3.9, [-7.9, 0.0], not resolved). With CaLM: concatenation 57.7% (+0.1), gated 56.7% (-0.8), cross-attention 53.9% (-3.7, resolved worse). So Phase A's +6.9 for fusion was the fusion heads compensating for a weak RNA stream: give the model the right RNA encoder and the gain is gone. The 8-point single-encoder jump is the largest effect anywhere in Stage 4, and it is not a fusion effect.
-COV-VAC. The swap does not help: mRNA-FM alone 0.812 (-0.021 vs RNA-FM alone, a tie), CaLM alone 0.844 (+0.011, a tie). With either codon-level encoder, concatenation and the gated head are resolved worse than the encoder alone (mRNA-FM: -0.054, -0.050; CaLM: -0.027, -0.042) and cross-attention ties (+0.009, -0.017). Same pattern as Phase A: on a structure-driven task on RNA fragments, a codon-level encoder has no advantage and fusing three readings adds noise.
-MINA'S NOTES. "We want to see if fusion replaces RNA-FM and see if it works": that is exactly this comparison, each head with the swapped encoder against that encoder alone. On E. coli a good RNA encoder makes the single encoder as good as the fusion was, and fusion on top adds +0.3, unresolved: a good encoder replaces the fusion, not the other way around. "Check RNA-FM": it is the weakest of the four RNA encoders on codon information (mRFP: +0.02 vs +0.18 for mRNA-FM), but still the best choice on CoV-Vac, because that task is about RNA structure. "Explain fusion and what these mean": concat keeps every feature of every modality at every codon; gated keeps a weighted average with one weight per modality; cross lets each modality attend to every position of every modality. "Mark if cross-attention will be better": with the swapped encoders, no; it ties the encoder alone on CoV-Vac and on E. coli with mRNA-FM, and is resolved worse on E. coli with CaLM. The project's own cross-attention design (January, Gantt 25) will be scored against these baselines.
-STILL TO RUN. The DNA swaps (NT 500M, DNABERT-2 with an adapter, HyenaDNA), the protein swaps (ESM-2 150M, ProtBERT), RiNALMo, fungal and stability, and seeds on the swaps that matter.</a:t>
+              <a:t>WHAT THIS SLIDE ANSWERS. The encoder question: if you replace one frozen encoder and change nothing else, how much does the score move? Every one of the eight swaps is here, read alone through the same TextCNN, against the encoder it replaces. The next slide asks the fusion question on the same eight swaps.
+WHAT RAN. Chase ran four swaps by October 22 (mRNA-FM and CaLM on CoV-Vac and E. coli) and the rest between October 25 and 27. DNA slot: NT 500M human-ref and HyenaDNA large in place of NT v2 100M. RNA slot: RiNALMo 150M, mRNA-FM and CaLM in place of RNA-FM. Protein slot: ESM-2 35M, ESM-2 150M and ProtBERT in place of ESM-2 8M. Each on fungal, CoV-Vac and E. coli; mRNA-FM, CaLM and ESM-2 150M also on mRNA stability. Seed 0, everything else at Phase A's settings. DNABERT-2 is out of the sweep because its variable-length tokens need a grid adapter.
+HOW TO READ THE FIGURE. One panel per benchmark, one row per swap, grouped by slot. The open marker is the original encoder read alone; the filled marker is the swap, colored by slot. A long line to the right means the swap is much better alone.
+THE RNA SLOT IS WHERE IT MOVES. On fungal, RiNALMo, mRNA-FM and CaLM alone score 0.844, 0.852 and 0.851 against RNA-FM's 0.722: the single biggest effect anywhere in Stage 4. They also pass NT v2 100M (0.813), the best original encoder, and the paper's best fused model on that benchmark (0.824). So one frozen encoder read alone now beats the paper's best fusion. On E. coli the same three lift the single encoder from 50.7 to 57.3, 58.7 and 57.6; mRNA-FM alone is +8.0 points over RNA-FM alone [+3.9, +11.9] and CaLM +6.8 [+2.5, +10.8], both resolved.
+THE OTHER TWO SLOTS BARELY MOVE. The DNA swaps are worse than NT v2 100M on fungal (0.740 and 0.737 against 0.813) and on CoV-Vac. The protein swaps move little: ESM-2 35M and ProtBERT are near ESM-2 8M everywhere, and only ESM-2 150M on E. coli is clearly better (53.9 against 50.1).
+WHY THE BENCHMARKS DISAGREE ABOUT WHICH RNA ENCODER WINS. On CoV-Vac the codon-level swaps do not help: mRNA-FM alone is 0.812 against RNA-FM's 0.833, CaLM 0.844, both ties. E. coli expression and fungal expression are driven by codon usage, which mRNA-FM, CaLM and RiNALMo were pretrained on; CoV-Vac degradation is the folding of an 81-nucleotide fragment, which nucleotide-level RNA-FM was pretrained on. Match the encoder's pretraining to the task's biology, which is what the mRFP control (slide 8) predicted before any of this ran.
+CAVEAT. One seed per configuration. The intervals quoted are paired bootstraps over test rows, not over training runs.</a:t>
             </a:r>
             <a:endParaRPr lang="en-US" dirty="0"/>
           </a:p>
@@ -2564,7 +2568,7 @@
                 <a:ea typeface="Inter" pitchFamily="34" charset="-122"/>
                 <a:cs typeface="Inter" pitchFamily="34" charset="-120"/>
               </a:rPr>
-              <a:t>Priority 1, Phase B · all eight swaps, run October 25 to 27</a:t>
+              <a:t>Priority 1, Phase B · all eight swaps, the fusion question</a:t>
             </a:r>
             <a:endParaRPr lang="en-US" sz="1200" dirty="0"/>
           </a:p>
@@ -2603,7 +2607,7 @@
                 <a:ea typeface="Inter" pitchFamily="34" charset="-122"/>
                 <a:cs typeface="Inter" pitchFamily="34" charset="-120"/>
               </a:rPr>
-              <a:t>Across all eight swaps a better single encoder does the work; three new fusion gains remain to confirm with seeds</a:t>
+              <a:t>Once the single encoder is good, fusion adds nothing resolved; three gains survive that test and need seeds</a:t>
             </a:r>
             <a:endParaRPr lang="en-US" sz="2400" dirty="0"/>
           </a:p>
@@ -2625,8 +2629,8 @@
         </p:blipFill>
         <p:spPr>
           <a:xfrm>
-            <a:off x="1709928" y="1938528"/>
-            <a:ext cx="8375904" cy="3200400"/>
+            <a:off x="1600200" y="1920240"/>
+            <a:ext cx="8988552" cy="3438144"/>
           </a:xfrm>
           <a:prstGeom prst="rect">
             <a:avLst/>
@@ -2648,7 +2652,7 @@
           </p:nvPr>
         </p:nvGraphicFramePr>
         <p:xfrm>
-          <a:off x="813816" y="5212080"/>
+          <a:off x="813816" y="5449824"/>
           <a:ext cx="10881360" cy="914400"/>
         </p:xfrm>
         <a:graphic>
@@ -2656,17 +2660,13 @@
             <a:tbl>
               <a:tblPr/>
               <a:tblGrid>
-                <a:gridCol w="2322576"/>
-                <a:gridCol w="1069848"/>
-                <a:gridCol w="1069848"/>
-                <a:gridCol w="1069848"/>
-                <a:gridCol w="1069848"/>
-                <a:gridCol w="1069848"/>
-                <a:gridCol w="1069848"/>
-                <a:gridCol w="1069848"/>
-                <a:gridCol w="1069848"/>
+                <a:gridCol w="3108960"/>
+                <a:gridCol w="1371600"/>
+                <a:gridCol w="1737360"/>
+                <a:gridCol w="2560320"/>
+                <a:gridCol w="2103120"/>
               </a:tblGrid>
-              <a:tr h="201168">
+              <a:tr h="192024">
                 <a:tc>
                   <a:txBody>
                     <a:bodyPr/>
@@ -2676,17 +2676,17 @@
                         <a:buNone/>
                       </a:pPr>
                       <a:r>
-                        <a:rPr lang="en-US" sz="900" b="1" dirty="0">
-                          <a:solidFill>
-                            <a:srgbClr val="31302E"/>
-                          </a:solidFill>
-                          <a:latin typeface="Inter" pitchFamily="34" charset="0"/>
-                          <a:ea typeface="Inter" pitchFamily="34" charset="-122"/>
-                          <a:cs typeface="Inter" pitchFamily="34" charset="-120"/>
-                        </a:rPr>
-                        <a:t>Swapped in, alone (original it replaces)</a:t>
-                      </a:r>
-                      <a:endParaRPr lang="en-US" sz="900" dirty="0">
+                        <a:rPr lang="en-US" sz="950" b="1" dirty="0">
+                          <a:solidFill>
+                            <a:srgbClr val="31302E"/>
+                          </a:solidFill>
+                          <a:latin typeface="Inter" pitchFamily="34" charset="0"/>
+                          <a:ea typeface="Inter" pitchFamily="34" charset="-122"/>
+                          <a:cs typeface="Inter" pitchFamily="34" charset="-120"/>
+                        </a:rPr>
+                        <a:t>The three gains no weak reference explains</a:t>
+                      </a:r>
+                      <a:endParaRPr lang="en-US" sz="950" dirty="0">
                         <a:latin typeface="Inter" charset="0"/>
                         <a:ea typeface="Inter" charset="0"/>
                         <a:cs typeface="Inter" charset="0"/>
@@ -2744,17 +2744,17 @@
                         <a:buNone/>
                       </a:pPr>
                       <a:r>
-                        <a:rPr lang="en-US" sz="900" b="1" dirty="0">
-                          <a:solidFill>
-                            <a:srgbClr val="31302E"/>
-                          </a:solidFill>
-                          <a:latin typeface="Inter" pitchFamily="34" charset="0"/>
-                          <a:ea typeface="Inter" pitchFamily="34" charset="-122"/>
-                          <a:cs typeface="Inter" pitchFamily="34" charset="-120"/>
-                        </a:rPr>
-                        <a:t>NT 500M</a:t>
-                      </a:r>
-                      <a:endParaRPr lang="en-US" sz="900" dirty="0">
+                        <a:rPr lang="en-US" sz="950" b="1" dirty="0">
+                          <a:solidFill>
+                            <a:srgbClr val="31302E"/>
+                          </a:solidFill>
+                          <a:latin typeface="Inter" pitchFamily="34" charset="0"/>
+                          <a:ea typeface="Inter" pitchFamily="34" charset="-122"/>
+                          <a:cs typeface="Inter" pitchFamily="34" charset="-120"/>
+                        </a:rPr>
+                        <a:t>Benchmark</a:t>
+                      </a:r>
+                      <a:endParaRPr lang="en-US" sz="950" dirty="0">
                         <a:latin typeface="Inter" charset="0"/>
                         <a:ea typeface="Inter" charset="0"/>
                         <a:cs typeface="Inter" charset="0"/>
@@ -2812,17 +2812,17 @@
                         <a:buNone/>
                       </a:pPr>
                       <a:r>
-                        <a:rPr lang="en-US" sz="900" b="1" dirty="0">
-                          <a:solidFill>
-                            <a:srgbClr val="31302E"/>
-                          </a:solidFill>
-                          <a:latin typeface="Inter" pitchFamily="34" charset="0"/>
-                          <a:ea typeface="Inter" pitchFamily="34" charset="-122"/>
-                          <a:cs typeface="Inter" pitchFamily="34" charset="-120"/>
-                        </a:rPr>
-                        <a:t>HyenaDNA</a:t>
-                      </a:r>
-                      <a:endParaRPr lang="en-US" sz="900" dirty="0">
+                        <a:rPr lang="en-US" sz="950" b="1" dirty="0">
+                          <a:solidFill>
+                            <a:srgbClr val="31302E"/>
+                          </a:solidFill>
+                          <a:latin typeface="Inter" pitchFamily="34" charset="0"/>
+                          <a:ea typeface="Inter" pitchFamily="34" charset="-122"/>
+                          <a:cs typeface="Inter" pitchFamily="34" charset="-120"/>
+                        </a:rPr>
+                        <a:t>Head</a:t>
+                      </a:r>
+                      <a:endParaRPr lang="en-US" sz="950" dirty="0">
                         <a:latin typeface="Inter" charset="0"/>
                         <a:ea typeface="Inter" charset="0"/>
                         <a:cs typeface="Inter" charset="0"/>
@@ -2880,17 +2880,17 @@
                         <a:buNone/>
                       </a:pPr>
                       <a:r>
-                        <a:rPr lang="en-US" sz="900" b="1" dirty="0">
-                          <a:solidFill>
-                            <a:srgbClr val="31302E"/>
-                          </a:solidFill>
-                          <a:latin typeface="Inter" pitchFamily="34" charset="0"/>
-                          <a:ea typeface="Inter" pitchFamily="34" charset="-122"/>
-                          <a:cs typeface="Inter" pitchFamily="34" charset="-120"/>
-                        </a:rPr>
-                        <a:t>RiNALMo</a:t>
-                      </a:r>
-                      <a:endParaRPr lang="en-US" sz="900" dirty="0">
+                        <a:rPr lang="en-US" sz="950" b="1" dirty="0">
+                          <a:solidFill>
+                            <a:srgbClr val="31302E"/>
+                          </a:solidFill>
+                          <a:latin typeface="Inter" pitchFamily="34" charset="0"/>
+                          <a:ea typeface="Inter" pitchFamily="34" charset="-122"/>
+                          <a:cs typeface="Inter" pitchFamily="34" charset="-120"/>
+                        </a:rPr>
+                        <a:t>Over the best single encoder</a:t>
+                      </a:r>
+                      <a:endParaRPr lang="en-US" sz="950" dirty="0">
                         <a:latin typeface="Inter" charset="0"/>
                         <a:ea typeface="Inter" charset="0"/>
                         <a:cs typeface="Inter" charset="0"/>
@@ -2948,17 +2948,17 @@
                         <a:buNone/>
                       </a:pPr>
                       <a:r>
-                        <a:rPr lang="en-US" sz="900" b="1" dirty="0">
-                          <a:solidFill>
-                            <a:srgbClr val="31302E"/>
-                          </a:solidFill>
-                          <a:latin typeface="Inter" pitchFamily="34" charset="0"/>
-                          <a:ea typeface="Inter" pitchFamily="34" charset="-122"/>
-                          <a:cs typeface="Inter" pitchFamily="34" charset="-120"/>
-                        </a:rPr>
-                        <a:t>mRNA-FM</a:t>
-                      </a:r>
-                      <a:endParaRPr lang="en-US" sz="900" dirty="0">
+                        <a:rPr lang="en-US" sz="950" b="1" dirty="0">
+                          <a:solidFill>
+                            <a:srgbClr val="31302E"/>
+                          </a:solidFill>
+                          <a:latin typeface="Inter" pitchFamily="34" charset="0"/>
+                          <a:ea typeface="Inter" pitchFamily="34" charset="-122"/>
+                          <a:cs typeface="Inter" pitchFamily="34" charset="-120"/>
+                        </a:rPr>
+                        <a:t>Score reached</a:t>
+                      </a:r>
+                      <a:endParaRPr lang="en-US" sz="950" dirty="0">
                         <a:latin typeface="Inter" charset="0"/>
                         <a:ea typeface="Inter" charset="0"/>
                         <a:cs typeface="Inter" charset="0"/>
@@ -3007,6 +3007,76 @@
                     </a:solidFill>
                   </a:tcPr>
                 </a:tc>
+              </a:tr>
+              <a:tr h="192024">
+                <a:tc>
+                  <a:txBody>
+                    <a:bodyPr/>
+                    <a:lstStyle/>
+                    <a:p>
+                      <a:pPr indent="0" marL="0">
+                        <a:buNone/>
+                      </a:pPr>
+                      <a:r>
+                        <a:rPr lang="en-US" sz="950" dirty="0">
+                          <a:solidFill>
+                            <a:srgbClr val="31302E"/>
+                          </a:solidFill>
+                          <a:latin typeface="Inter" pitchFamily="34" charset="0"/>
+                          <a:ea typeface="Inter" pitchFamily="34" charset="-122"/>
+                          <a:cs typeface="Inter" pitchFamily="34" charset="-120"/>
+                        </a:rPr>
+                        <a:t>HyenaDNA in the DNA slot</a:t>
+                      </a:r>
+                      <a:endParaRPr lang="en-US" sz="950" dirty="0">
+                        <a:latin typeface="Inter" charset="0"/>
+                        <a:ea typeface="Inter" charset="0"/>
+                        <a:cs typeface="Inter" charset="0"/>
+                      </a:endParaRPr>
+                    </a:p>
+                  </a:txBody>
+                  <a:tcPr marL="63500" marR="63500" marT="38100" marB="38100" anchor="ctr">
+                    <a:lnL w="6350" cap="flat" cmpd="sng" algn="ctr">
+                      <a:solidFill>
+                        <a:srgbClr val="E6E6E6"/>
+                      </a:solidFill>
+                      <a:prstDash val="solid"/>
+                      <a:round/>
+                      <a:headEnd type="none" w="med" len="med"/>
+                      <a:tailEnd type="none" w="med" len="med"/>
+                    </a:lnL>
+                    <a:lnR w="6350" cap="flat" cmpd="sng" algn="ctr">
+                      <a:solidFill>
+                        <a:srgbClr val="E6E6E6"/>
+                      </a:solidFill>
+                      <a:prstDash val="solid"/>
+                      <a:round/>
+                      <a:headEnd type="none" w="med" len="med"/>
+                      <a:tailEnd type="none" w="med" len="med"/>
+                    </a:lnR>
+                    <a:lnT w="6350" cap="flat" cmpd="sng" algn="ctr">
+                      <a:solidFill>
+                        <a:srgbClr val="E6E6E6"/>
+                      </a:solidFill>
+                      <a:prstDash val="solid"/>
+                      <a:round/>
+                      <a:headEnd type="none" w="med" len="med"/>
+                      <a:tailEnd type="none" w="med" len="med"/>
+                    </a:lnT>
+                    <a:lnB w="6350" cap="flat" cmpd="sng" algn="ctr">
+                      <a:solidFill>
+                        <a:srgbClr val="E6E6E6"/>
+                      </a:solidFill>
+                      <a:prstDash val="solid"/>
+                      <a:round/>
+                      <a:headEnd type="none" w="med" len="med"/>
+                      <a:tailEnd type="none" w="med" len="med"/>
+                    </a:lnB>
+                    <a:solidFill>
+                      <a:srgbClr val="FFFFFF"/>
+                    </a:solidFill>
+                  </a:tcPr>
+                </a:tc>
                 <a:tc>
                   <a:txBody>
                     <a:bodyPr/>
@@ -3016,62 +3086,62 @@
                         <a:buNone/>
                       </a:pPr>
                       <a:r>
-                        <a:rPr lang="en-US" sz="900" b="1" dirty="0">
-                          <a:solidFill>
-                            <a:srgbClr val="31302E"/>
-                          </a:solidFill>
-                          <a:latin typeface="Inter" pitchFamily="34" charset="0"/>
-                          <a:ea typeface="Inter" pitchFamily="34" charset="-122"/>
-                          <a:cs typeface="Inter" pitchFamily="34" charset="-120"/>
-                        </a:rPr>
-                        <a:t>CaLM</a:t>
-                      </a:r>
-                      <a:endParaRPr lang="en-US" sz="900" dirty="0">
-                        <a:latin typeface="Inter" charset="0"/>
-                        <a:ea typeface="Inter" charset="0"/>
-                        <a:cs typeface="Inter" charset="0"/>
-                      </a:endParaRPr>
-                    </a:p>
-                  </a:txBody>
-                  <a:tcPr marL="63500" marR="63500" marT="38100" marB="38100" anchor="ctr">
-                    <a:lnL w="6350" cap="flat" cmpd="sng" algn="ctr">
-                      <a:solidFill>
-                        <a:srgbClr val="E6E6E6"/>
-                      </a:solidFill>
-                      <a:prstDash val="solid"/>
-                      <a:round/>
-                      <a:headEnd type="none" w="med" len="med"/>
-                      <a:tailEnd type="none" w="med" len="med"/>
-                    </a:lnL>
-                    <a:lnR w="6350" cap="flat" cmpd="sng" algn="ctr">
-                      <a:solidFill>
-                        <a:srgbClr val="E6E6E6"/>
-                      </a:solidFill>
-                      <a:prstDash val="solid"/>
-                      <a:round/>
-                      <a:headEnd type="none" w="med" len="med"/>
-                      <a:tailEnd type="none" w="med" len="med"/>
-                    </a:lnR>
-                    <a:lnT w="6350" cap="flat" cmpd="sng" algn="ctr">
-                      <a:solidFill>
-                        <a:srgbClr val="E6E6E6"/>
-                      </a:solidFill>
-                      <a:prstDash val="solid"/>
-                      <a:round/>
-                      <a:headEnd type="none" w="med" len="med"/>
-                      <a:tailEnd type="none" w="med" len="med"/>
-                    </a:lnT>
-                    <a:lnB w="6350" cap="flat" cmpd="sng" algn="ctr">
-                      <a:solidFill>
-                        <a:srgbClr val="E6E6E6"/>
-                      </a:solidFill>
-                      <a:prstDash val="solid"/>
-                      <a:round/>
-                      <a:headEnd type="none" w="med" len="med"/>
-                      <a:tailEnd type="none" w="med" len="med"/>
-                    </a:lnB>
-                    <a:solidFill>
-                      <a:srgbClr val="F0F0EE"/>
+                        <a:rPr lang="en-US" sz="950" dirty="0">
+                          <a:solidFill>
+                            <a:srgbClr val="31302E"/>
+                          </a:solidFill>
+                          <a:latin typeface="Inter" pitchFamily="34" charset="0"/>
+                          <a:ea typeface="Inter" pitchFamily="34" charset="-122"/>
+                          <a:cs typeface="Inter" pitchFamily="34" charset="-120"/>
+                        </a:rPr>
+                        <a:t>CoV-Vac</a:t>
+                      </a:r>
+                      <a:endParaRPr lang="en-US" sz="950" dirty="0">
+                        <a:latin typeface="Inter" charset="0"/>
+                        <a:ea typeface="Inter" charset="0"/>
+                        <a:cs typeface="Inter" charset="0"/>
+                      </a:endParaRPr>
+                    </a:p>
+                  </a:txBody>
+                  <a:tcPr marL="63500" marR="63500" marT="38100" marB="38100" anchor="ctr">
+                    <a:lnL w="6350" cap="flat" cmpd="sng" algn="ctr">
+                      <a:solidFill>
+                        <a:srgbClr val="E6E6E6"/>
+                      </a:solidFill>
+                      <a:prstDash val="solid"/>
+                      <a:round/>
+                      <a:headEnd type="none" w="med" len="med"/>
+                      <a:tailEnd type="none" w="med" len="med"/>
+                    </a:lnL>
+                    <a:lnR w="6350" cap="flat" cmpd="sng" algn="ctr">
+                      <a:solidFill>
+                        <a:srgbClr val="E6E6E6"/>
+                      </a:solidFill>
+                      <a:prstDash val="solid"/>
+                      <a:round/>
+                      <a:headEnd type="none" w="med" len="med"/>
+                      <a:tailEnd type="none" w="med" len="med"/>
+                    </a:lnR>
+                    <a:lnT w="6350" cap="flat" cmpd="sng" algn="ctr">
+                      <a:solidFill>
+                        <a:srgbClr val="E6E6E6"/>
+                      </a:solidFill>
+                      <a:prstDash val="solid"/>
+                      <a:round/>
+                      <a:headEnd type="none" w="med" len="med"/>
+                      <a:tailEnd type="none" w="med" len="med"/>
+                    </a:lnT>
+                    <a:lnB w="6350" cap="flat" cmpd="sng" algn="ctr">
+                      <a:solidFill>
+                        <a:srgbClr val="E6E6E6"/>
+                      </a:solidFill>
+                      <a:prstDash val="solid"/>
+                      <a:round/>
+                      <a:headEnd type="none" w="med" len="med"/>
+                      <a:tailEnd type="none" w="med" len="med"/>
+                    </a:lnB>
+                    <a:solidFill>
+                      <a:srgbClr val="FFFFFF"/>
                     </a:solidFill>
                   </a:tcPr>
                 </a:tc>
@@ -3084,62 +3154,62 @@
                         <a:buNone/>
                       </a:pPr>
                       <a:r>
-                        <a:rPr lang="en-US" sz="900" b="1" dirty="0">
-                          <a:solidFill>
-                            <a:srgbClr val="31302E"/>
-                          </a:solidFill>
-                          <a:latin typeface="Inter" pitchFamily="34" charset="0"/>
-                          <a:ea typeface="Inter" pitchFamily="34" charset="-122"/>
-                          <a:cs typeface="Inter" pitchFamily="34" charset="-120"/>
-                        </a:rPr>
-                        <a:t>ESM-2 35M</a:t>
-                      </a:r>
-                      <a:endParaRPr lang="en-US" sz="900" dirty="0">
-                        <a:latin typeface="Inter" charset="0"/>
-                        <a:ea typeface="Inter" charset="0"/>
-                        <a:cs typeface="Inter" charset="0"/>
-                      </a:endParaRPr>
-                    </a:p>
-                  </a:txBody>
-                  <a:tcPr marL="63500" marR="63500" marT="38100" marB="38100" anchor="ctr">
-                    <a:lnL w="6350" cap="flat" cmpd="sng" algn="ctr">
-                      <a:solidFill>
-                        <a:srgbClr val="E6E6E6"/>
-                      </a:solidFill>
-                      <a:prstDash val="solid"/>
-                      <a:round/>
-                      <a:headEnd type="none" w="med" len="med"/>
-                      <a:tailEnd type="none" w="med" len="med"/>
-                    </a:lnL>
-                    <a:lnR w="6350" cap="flat" cmpd="sng" algn="ctr">
-                      <a:solidFill>
-                        <a:srgbClr val="E6E6E6"/>
-                      </a:solidFill>
-                      <a:prstDash val="solid"/>
-                      <a:round/>
-                      <a:headEnd type="none" w="med" len="med"/>
-                      <a:tailEnd type="none" w="med" len="med"/>
-                    </a:lnR>
-                    <a:lnT w="6350" cap="flat" cmpd="sng" algn="ctr">
-                      <a:solidFill>
-                        <a:srgbClr val="E6E6E6"/>
-                      </a:solidFill>
-                      <a:prstDash val="solid"/>
-                      <a:round/>
-                      <a:headEnd type="none" w="med" len="med"/>
-                      <a:tailEnd type="none" w="med" len="med"/>
-                    </a:lnT>
-                    <a:lnB w="6350" cap="flat" cmpd="sng" algn="ctr">
-                      <a:solidFill>
-                        <a:srgbClr val="E6E6E6"/>
-                      </a:solidFill>
-                      <a:prstDash val="solid"/>
-                      <a:round/>
-                      <a:headEnd type="none" w="med" len="med"/>
-                      <a:tailEnd type="none" w="med" len="med"/>
-                    </a:lnB>
-                    <a:solidFill>
-                      <a:srgbClr val="F0F0EE"/>
+                        <a:rPr lang="en-US" sz="950" dirty="0">
+                          <a:solidFill>
+                            <a:srgbClr val="31302E"/>
+                          </a:solidFill>
+                          <a:latin typeface="Inter" pitchFamily="34" charset="0"/>
+                          <a:ea typeface="Inter" pitchFamily="34" charset="-122"/>
+                          <a:cs typeface="Inter" pitchFamily="34" charset="-120"/>
+                        </a:rPr>
+                        <a:t>cross-attention</a:t>
+                      </a:r>
+                      <a:endParaRPr lang="en-US" sz="950" dirty="0">
+                        <a:latin typeface="Inter" charset="0"/>
+                        <a:ea typeface="Inter" charset="0"/>
+                        <a:cs typeface="Inter" charset="0"/>
+                      </a:endParaRPr>
+                    </a:p>
+                  </a:txBody>
+                  <a:tcPr marL="63500" marR="63500" marT="38100" marB="38100" anchor="ctr">
+                    <a:lnL w="6350" cap="flat" cmpd="sng" algn="ctr">
+                      <a:solidFill>
+                        <a:srgbClr val="E6E6E6"/>
+                      </a:solidFill>
+                      <a:prstDash val="solid"/>
+                      <a:round/>
+                      <a:headEnd type="none" w="med" len="med"/>
+                      <a:tailEnd type="none" w="med" len="med"/>
+                    </a:lnL>
+                    <a:lnR w="6350" cap="flat" cmpd="sng" algn="ctr">
+                      <a:solidFill>
+                        <a:srgbClr val="E6E6E6"/>
+                      </a:solidFill>
+                      <a:prstDash val="solid"/>
+                      <a:round/>
+                      <a:headEnd type="none" w="med" len="med"/>
+                      <a:tailEnd type="none" w="med" len="med"/>
+                    </a:lnR>
+                    <a:lnT w="6350" cap="flat" cmpd="sng" algn="ctr">
+                      <a:solidFill>
+                        <a:srgbClr val="E6E6E6"/>
+                      </a:solidFill>
+                      <a:prstDash val="solid"/>
+                      <a:round/>
+                      <a:headEnd type="none" w="med" len="med"/>
+                      <a:tailEnd type="none" w="med" len="med"/>
+                    </a:lnT>
+                    <a:lnB w="6350" cap="flat" cmpd="sng" algn="ctr">
+                      <a:solidFill>
+                        <a:srgbClr val="E6E6E6"/>
+                      </a:solidFill>
+                      <a:prstDash val="solid"/>
+                      <a:round/>
+                      <a:headEnd type="none" w="med" len="med"/>
+                      <a:tailEnd type="none" w="med" len="med"/>
+                    </a:lnB>
+                    <a:solidFill>
+                      <a:srgbClr val="FFFFFF"/>
                     </a:solidFill>
                   </a:tcPr>
                 </a:tc>
@@ -3152,62 +3222,62 @@
                         <a:buNone/>
                       </a:pPr>
                       <a:r>
-                        <a:rPr lang="en-US" sz="900" b="1" dirty="0">
-                          <a:solidFill>
-                            <a:srgbClr val="31302E"/>
-                          </a:solidFill>
-                          <a:latin typeface="Inter" pitchFamily="34" charset="0"/>
-                          <a:ea typeface="Inter" pitchFamily="34" charset="-122"/>
-                          <a:cs typeface="Inter" pitchFamily="34" charset="-120"/>
-                        </a:rPr>
-                        <a:t>ESM-2 150M</a:t>
-                      </a:r>
-                      <a:endParaRPr lang="en-US" sz="900" dirty="0">
-                        <a:latin typeface="Inter" charset="0"/>
-                        <a:ea typeface="Inter" charset="0"/>
-                        <a:cs typeface="Inter" charset="0"/>
-                      </a:endParaRPr>
-                    </a:p>
-                  </a:txBody>
-                  <a:tcPr marL="63500" marR="63500" marT="38100" marB="38100" anchor="ctr">
-                    <a:lnL w="6350" cap="flat" cmpd="sng" algn="ctr">
-                      <a:solidFill>
-                        <a:srgbClr val="E6E6E6"/>
-                      </a:solidFill>
-                      <a:prstDash val="solid"/>
-                      <a:round/>
-                      <a:headEnd type="none" w="med" len="med"/>
-                      <a:tailEnd type="none" w="med" len="med"/>
-                    </a:lnL>
-                    <a:lnR w="6350" cap="flat" cmpd="sng" algn="ctr">
-                      <a:solidFill>
-                        <a:srgbClr val="E6E6E6"/>
-                      </a:solidFill>
-                      <a:prstDash val="solid"/>
-                      <a:round/>
-                      <a:headEnd type="none" w="med" len="med"/>
-                      <a:tailEnd type="none" w="med" len="med"/>
-                    </a:lnR>
-                    <a:lnT w="6350" cap="flat" cmpd="sng" algn="ctr">
-                      <a:solidFill>
-                        <a:srgbClr val="E6E6E6"/>
-                      </a:solidFill>
-                      <a:prstDash val="solid"/>
-                      <a:round/>
-                      <a:headEnd type="none" w="med" len="med"/>
-                      <a:tailEnd type="none" w="med" len="med"/>
-                    </a:lnT>
-                    <a:lnB w="6350" cap="flat" cmpd="sng" algn="ctr">
-                      <a:solidFill>
-                        <a:srgbClr val="E6E6E6"/>
-                      </a:solidFill>
-                      <a:prstDash val="solid"/>
-                      <a:round/>
-                      <a:headEnd type="none" w="med" len="med"/>
-                      <a:tailEnd type="none" w="med" len="med"/>
-                    </a:lnB>
-                    <a:solidFill>
-                      <a:srgbClr val="F0F0EE"/>
+                        <a:rPr lang="en-US" sz="950" dirty="0">
+                          <a:solidFill>
+                            <a:srgbClr val="31302E"/>
+                          </a:solidFill>
+                          <a:latin typeface="Inter" pitchFamily="34" charset="0"/>
+                          <a:ea typeface="Inter" pitchFamily="34" charset="-122"/>
+                          <a:cs typeface="Inter" pitchFamily="34" charset="-120"/>
+                        </a:rPr>
+                        <a:t>+0.039  [+0.012, +0.066]</a:t>
+                      </a:r>
+                      <a:endParaRPr lang="en-US" sz="950" dirty="0">
+                        <a:latin typeface="Inter" charset="0"/>
+                        <a:ea typeface="Inter" charset="0"/>
+                        <a:cs typeface="Inter" charset="0"/>
+                      </a:endParaRPr>
+                    </a:p>
+                  </a:txBody>
+                  <a:tcPr marL="63500" marR="63500" marT="38100" marB="38100" anchor="ctr">
+                    <a:lnL w="6350" cap="flat" cmpd="sng" algn="ctr">
+                      <a:solidFill>
+                        <a:srgbClr val="E6E6E6"/>
+                      </a:solidFill>
+                      <a:prstDash val="solid"/>
+                      <a:round/>
+                      <a:headEnd type="none" w="med" len="med"/>
+                      <a:tailEnd type="none" w="med" len="med"/>
+                    </a:lnL>
+                    <a:lnR w="6350" cap="flat" cmpd="sng" algn="ctr">
+                      <a:solidFill>
+                        <a:srgbClr val="E6E6E6"/>
+                      </a:solidFill>
+                      <a:prstDash val="solid"/>
+                      <a:round/>
+                      <a:headEnd type="none" w="med" len="med"/>
+                      <a:tailEnd type="none" w="med" len="med"/>
+                    </a:lnR>
+                    <a:lnT w="6350" cap="flat" cmpd="sng" algn="ctr">
+                      <a:solidFill>
+                        <a:srgbClr val="E6E6E6"/>
+                      </a:solidFill>
+                      <a:prstDash val="solid"/>
+                      <a:round/>
+                      <a:headEnd type="none" w="med" len="med"/>
+                      <a:tailEnd type="none" w="med" len="med"/>
+                    </a:lnT>
+                    <a:lnB w="6350" cap="flat" cmpd="sng" algn="ctr">
+                      <a:solidFill>
+                        <a:srgbClr val="E6E6E6"/>
+                      </a:solidFill>
+                      <a:prstDash val="solid"/>
+                      <a:round/>
+                      <a:headEnd type="none" w="med" len="med"/>
+                      <a:tailEnd type="none" w="med" len="med"/>
+                    </a:lnB>
+                    <a:solidFill>
+                      <a:srgbClr val="FBF1D6"/>
                     </a:solidFill>
                   </a:tcPr>
                 </a:tc>
@@ -3220,67 +3290,67 @@
                         <a:buNone/>
                       </a:pPr>
                       <a:r>
-                        <a:rPr lang="en-US" sz="900" b="1" dirty="0">
-                          <a:solidFill>
-                            <a:srgbClr val="31302E"/>
-                          </a:solidFill>
-                          <a:latin typeface="Inter" pitchFamily="34" charset="0"/>
-                          <a:ea typeface="Inter" pitchFamily="34" charset="-122"/>
-                          <a:cs typeface="Inter" pitchFamily="34" charset="-120"/>
-                        </a:rPr>
-                        <a:t>ProtBERT</a:t>
-                      </a:r>
-                      <a:endParaRPr lang="en-US" sz="900" dirty="0">
-                        <a:latin typeface="Inter" charset="0"/>
-                        <a:ea typeface="Inter" charset="0"/>
-                        <a:cs typeface="Inter" charset="0"/>
-                      </a:endParaRPr>
-                    </a:p>
-                  </a:txBody>
-                  <a:tcPr marL="63500" marR="63500" marT="38100" marB="38100" anchor="ctr">
-                    <a:lnL w="6350" cap="flat" cmpd="sng" algn="ctr">
-                      <a:solidFill>
-                        <a:srgbClr val="E6E6E6"/>
-                      </a:solidFill>
-                      <a:prstDash val="solid"/>
-                      <a:round/>
-                      <a:headEnd type="none" w="med" len="med"/>
-                      <a:tailEnd type="none" w="med" len="med"/>
-                    </a:lnL>
-                    <a:lnR w="6350" cap="flat" cmpd="sng" algn="ctr">
-                      <a:solidFill>
-                        <a:srgbClr val="E6E6E6"/>
-                      </a:solidFill>
-                      <a:prstDash val="solid"/>
-                      <a:round/>
-                      <a:headEnd type="none" w="med" len="med"/>
-                      <a:tailEnd type="none" w="med" len="med"/>
-                    </a:lnR>
-                    <a:lnT w="6350" cap="flat" cmpd="sng" algn="ctr">
-                      <a:solidFill>
-                        <a:srgbClr val="E6E6E6"/>
-                      </a:solidFill>
-                      <a:prstDash val="solid"/>
-                      <a:round/>
-                      <a:headEnd type="none" w="med" len="med"/>
-                      <a:tailEnd type="none" w="med" len="med"/>
-                    </a:lnT>
-                    <a:lnB w="6350" cap="flat" cmpd="sng" algn="ctr">
-                      <a:solidFill>
-                        <a:srgbClr val="E6E6E6"/>
-                      </a:solidFill>
-                      <a:prstDash val="solid"/>
-                      <a:round/>
-                      <a:headEnd type="none" w="med" len="med"/>
-                      <a:tailEnd type="none" w="med" len="med"/>
-                    </a:lnB>
-                    <a:solidFill>
-                      <a:srgbClr val="F0F0EE"/>
+                        <a:rPr lang="en-US" sz="950" dirty="0">
+                          <a:solidFill>
+                            <a:srgbClr val="31302E"/>
+                          </a:solidFill>
+                          <a:latin typeface="Inter" pitchFamily="34" charset="0"/>
+                          <a:ea typeface="Inter" pitchFamily="34" charset="-122"/>
+                          <a:cs typeface="Inter" pitchFamily="34" charset="-120"/>
+                        </a:rPr>
+                        <a:t>0.872, above the paper's 0.864</a:t>
+                      </a:r>
+                      <a:endParaRPr lang="en-US" sz="950" dirty="0">
+                        <a:latin typeface="Inter" charset="0"/>
+                        <a:ea typeface="Inter" charset="0"/>
+                        <a:cs typeface="Inter" charset="0"/>
+                      </a:endParaRPr>
+                    </a:p>
+                  </a:txBody>
+                  <a:tcPr marL="63500" marR="63500" marT="38100" marB="38100" anchor="ctr">
+                    <a:lnL w="6350" cap="flat" cmpd="sng" algn="ctr">
+                      <a:solidFill>
+                        <a:srgbClr val="E6E6E6"/>
+                      </a:solidFill>
+                      <a:prstDash val="solid"/>
+                      <a:round/>
+                      <a:headEnd type="none" w="med" len="med"/>
+                      <a:tailEnd type="none" w="med" len="med"/>
+                    </a:lnL>
+                    <a:lnR w="6350" cap="flat" cmpd="sng" algn="ctr">
+                      <a:solidFill>
+                        <a:srgbClr val="E6E6E6"/>
+                      </a:solidFill>
+                      <a:prstDash val="solid"/>
+                      <a:round/>
+                      <a:headEnd type="none" w="med" len="med"/>
+                      <a:tailEnd type="none" w="med" len="med"/>
+                    </a:lnR>
+                    <a:lnT w="6350" cap="flat" cmpd="sng" algn="ctr">
+                      <a:solidFill>
+                        <a:srgbClr val="E6E6E6"/>
+                      </a:solidFill>
+                      <a:prstDash val="solid"/>
+                      <a:round/>
+                      <a:headEnd type="none" w="med" len="med"/>
+                      <a:tailEnd type="none" w="med" len="med"/>
+                    </a:lnT>
+                    <a:lnB w="6350" cap="flat" cmpd="sng" algn="ctr">
+                      <a:solidFill>
+                        <a:srgbClr val="E6E6E6"/>
+                      </a:solidFill>
+                      <a:prstDash val="solid"/>
+                      <a:round/>
+                      <a:headEnd type="none" w="med" len="med"/>
+                      <a:tailEnd type="none" w="med" len="med"/>
+                    </a:lnB>
+                    <a:solidFill>
+                      <a:srgbClr val="FBF1D6"/>
                     </a:solidFill>
                   </a:tcPr>
                 </a:tc>
               </a:tr>
-              <a:tr h="201168">
+              <a:tr h="192024">
                 <a:tc>
                   <a:txBody>
                     <a:bodyPr/>
@@ -3290,17 +3360,17 @@
                         <a:buNone/>
                       </a:pPr>
                       <a:r>
-                        <a:rPr lang="en-US" sz="900" dirty="0">
-                          <a:solidFill>
-                            <a:srgbClr val="31302E"/>
-                          </a:solidFill>
-                          <a:latin typeface="Inter" pitchFamily="34" charset="0"/>
-                          <a:ea typeface="Inter" pitchFamily="34" charset="-122"/>
-                          <a:cs typeface="Inter" pitchFamily="34" charset="-120"/>
-                        </a:rPr>
-                        <a:t>Fungal</a:t>
-                      </a:r>
-                      <a:endParaRPr lang="en-US" sz="900" dirty="0">
+                        <a:rPr lang="en-US" sz="950" dirty="0">
+                          <a:solidFill>
+                            <a:srgbClr val="31302E"/>
+                          </a:solidFill>
+                          <a:latin typeface="Inter" pitchFamily="34" charset="0"/>
+                          <a:ea typeface="Inter" pitchFamily="34" charset="-122"/>
+                          <a:cs typeface="Inter" pitchFamily="34" charset="-120"/>
+                        </a:rPr>
+                        <a:t>RiNALMo in the RNA slot</a:t>
+                      </a:r>
+                      <a:endParaRPr lang="en-US" sz="950" dirty="0">
                         <a:latin typeface="Inter" charset="0"/>
                         <a:ea typeface="Inter" charset="0"/>
                         <a:cs typeface="Inter" charset="0"/>
@@ -3358,17 +3428,17 @@
                         <a:buNone/>
                       </a:pPr>
                       <a:r>
-                        <a:rPr lang="en-US" sz="900" dirty="0">
-                          <a:solidFill>
-                            <a:srgbClr val="31302E"/>
-                          </a:solidFill>
-                          <a:latin typeface="Inter" pitchFamily="34" charset="0"/>
-                          <a:ea typeface="Inter" pitchFamily="34" charset="-122"/>
-                          <a:cs typeface="Inter" pitchFamily="34" charset="-120"/>
-                        </a:rPr>
-                        <a:t>0.740 (0.813)</a:t>
-                      </a:r>
-                      <a:endParaRPr lang="en-US" sz="900" dirty="0">
+                        <a:rPr lang="en-US" sz="950" dirty="0">
+                          <a:solidFill>
+                            <a:srgbClr val="31302E"/>
+                          </a:solidFill>
+                          <a:latin typeface="Inter" pitchFamily="34" charset="0"/>
+                          <a:ea typeface="Inter" pitchFamily="34" charset="-122"/>
+                          <a:cs typeface="Inter" pitchFamily="34" charset="-120"/>
+                        </a:rPr>
+                        <a:t>CoV-Vac</a:t>
+                      </a:r>
+                      <a:endParaRPr lang="en-US" sz="950" dirty="0">
                         <a:latin typeface="Inter" charset="0"/>
                         <a:ea typeface="Inter" charset="0"/>
                         <a:cs typeface="Inter" charset="0"/>
@@ -3426,17 +3496,17 @@
                         <a:buNone/>
                       </a:pPr>
                       <a:r>
-                        <a:rPr lang="en-US" sz="900" dirty="0">
-                          <a:solidFill>
-                            <a:srgbClr val="31302E"/>
-                          </a:solidFill>
-                          <a:latin typeface="Inter" pitchFamily="34" charset="0"/>
-                          <a:ea typeface="Inter" pitchFamily="34" charset="-122"/>
-                          <a:cs typeface="Inter" pitchFamily="34" charset="-120"/>
-                        </a:rPr>
-                        <a:t>0.737 (0.813)</a:t>
-                      </a:r>
-                      <a:endParaRPr lang="en-US" sz="900" dirty="0">
+                        <a:rPr lang="en-US" sz="950" dirty="0">
+                          <a:solidFill>
+                            <a:srgbClr val="31302E"/>
+                          </a:solidFill>
+                          <a:latin typeface="Inter" pitchFamily="34" charset="0"/>
+                          <a:ea typeface="Inter" pitchFamily="34" charset="-122"/>
+                          <a:cs typeface="Inter" pitchFamily="34" charset="-120"/>
+                        </a:rPr>
+                        <a:t>cross-attention</a:t>
+                      </a:r>
+                      <a:endParaRPr lang="en-US" sz="950" dirty="0">
                         <a:latin typeface="Inter" charset="0"/>
                         <a:ea typeface="Inter" charset="0"/>
                         <a:cs typeface="Inter" charset="0"/>
@@ -3494,17 +3564,155 @@
                         <a:buNone/>
                       </a:pPr>
                       <a:r>
-                        <a:rPr lang="en-US" sz="900" b="1" dirty="0">
-                          <a:solidFill>
-                            <a:srgbClr val="31302E"/>
-                          </a:solidFill>
-                          <a:latin typeface="Inter" pitchFamily="34" charset="0"/>
-                          <a:ea typeface="Inter" pitchFamily="34" charset="-122"/>
-                          <a:cs typeface="Inter" pitchFamily="34" charset="-120"/>
-                        </a:rPr>
-                        <a:t>0.844 (0.722)</a:t>
-                      </a:r>
-                      <a:endParaRPr lang="en-US" sz="900" dirty="0">
+                        <a:rPr lang="en-US" sz="950" dirty="0">
+                          <a:solidFill>
+                            <a:srgbClr val="31302E"/>
+                          </a:solidFill>
+                          <a:latin typeface="Inter" pitchFamily="34" charset="0"/>
+                          <a:ea typeface="Inter" pitchFamily="34" charset="-122"/>
+                          <a:cs typeface="Inter" pitchFamily="34" charset="-120"/>
+                        </a:rPr>
+                        <a:t>+0.031  [+0.008, +0.054]</a:t>
+                      </a:r>
+                      <a:endParaRPr lang="en-US" sz="950" dirty="0">
+                        <a:latin typeface="Inter" charset="0"/>
+                        <a:ea typeface="Inter" charset="0"/>
+                        <a:cs typeface="Inter" charset="0"/>
+                      </a:endParaRPr>
+                    </a:p>
+                  </a:txBody>
+                  <a:tcPr marL="63500" marR="63500" marT="38100" marB="38100" anchor="ctr">
+                    <a:lnL w="6350" cap="flat" cmpd="sng" algn="ctr">
+                      <a:solidFill>
+                        <a:srgbClr val="E6E6E6"/>
+                      </a:solidFill>
+                      <a:prstDash val="solid"/>
+                      <a:round/>
+                      <a:headEnd type="none" w="med" len="med"/>
+                      <a:tailEnd type="none" w="med" len="med"/>
+                    </a:lnL>
+                    <a:lnR w="6350" cap="flat" cmpd="sng" algn="ctr">
+                      <a:solidFill>
+                        <a:srgbClr val="E6E6E6"/>
+                      </a:solidFill>
+                      <a:prstDash val="solid"/>
+                      <a:round/>
+                      <a:headEnd type="none" w="med" len="med"/>
+                      <a:tailEnd type="none" w="med" len="med"/>
+                    </a:lnR>
+                    <a:lnT w="6350" cap="flat" cmpd="sng" algn="ctr">
+                      <a:solidFill>
+                        <a:srgbClr val="E6E6E6"/>
+                      </a:solidFill>
+                      <a:prstDash val="solid"/>
+                      <a:round/>
+                      <a:headEnd type="none" w="med" len="med"/>
+                      <a:tailEnd type="none" w="med" len="med"/>
+                    </a:lnT>
+                    <a:lnB w="6350" cap="flat" cmpd="sng" algn="ctr">
+                      <a:solidFill>
+                        <a:srgbClr val="E6E6E6"/>
+                      </a:solidFill>
+                      <a:prstDash val="solid"/>
+                      <a:round/>
+                      <a:headEnd type="none" w="med" len="med"/>
+                      <a:tailEnd type="none" w="med" len="med"/>
+                    </a:lnB>
+                    <a:solidFill>
+                      <a:srgbClr val="FBF1D6"/>
+                    </a:solidFill>
+                  </a:tcPr>
+                </a:tc>
+                <a:tc>
+                  <a:txBody>
+                    <a:bodyPr/>
+                    <a:lstStyle/>
+                    <a:p>
+                      <a:pPr algn="ctr" indent="0" marL="0">
+                        <a:buNone/>
+                      </a:pPr>
+                      <a:r>
+                        <a:rPr lang="en-US" sz="950" dirty="0">
+                          <a:solidFill>
+                            <a:srgbClr val="31302E"/>
+                          </a:solidFill>
+                          <a:latin typeface="Inter" pitchFamily="34" charset="0"/>
+                          <a:ea typeface="Inter" pitchFamily="34" charset="-122"/>
+                          <a:cs typeface="Inter" pitchFamily="34" charset="-120"/>
+                        </a:rPr>
+                        <a:t>0.854</a:t>
+                      </a:r>
+                      <a:endParaRPr lang="en-US" sz="950" dirty="0">
+                        <a:latin typeface="Inter" charset="0"/>
+                        <a:ea typeface="Inter" charset="0"/>
+                        <a:cs typeface="Inter" charset="0"/>
+                      </a:endParaRPr>
+                    </a:p>
+                  </a:txBody>
+                  <a:tcPr marL="63500" marR="63500" marT="38100" marB="38100" anchor="ctr">
+                    <a:lnL w="6350" cap="flat" cmpd="sng" algn="ctr">
+                      <a:solidFill>
+                        <a:srgbClr val="E6E6E6"/>
+                      </a:solidFill>
+                      <a:prstDash val="solid"/>
+                      <a:round/>
+                      <a:headEnd type="none" w="med" len="med"/>
+                      <a:tailEnd type="none" w="med" len="med"/>
+                    </a:lnL>
+                    <a:lnR w="6350" cap="flat" cmpd="sng" algn="ctr">
+                      <a:solidFill>
+                        <a:srgbClr val="E6E6E6"/>
+                      </a:solidFill>
+                      <a:prstDash val="solid"/>
+                      <a:round/>
+                      <a:headEnd type="none" w="med" len="med"/>
+                      <a:tailEnd type="none" w="med" len="med"/>
+                    </a:lnR>
+                    <a:lnT w="6350" cap="flat" cmpd="sng" algn="ctr">
+                      <a:solidFill>
+                        <a:srgbClr val="E6E6E6"/>
+                      </a:solidFill>
+                      <a:prstDash val="solid"/>
+                      <a:round/>
+                      <a:headEnd type="none" w="med" len="med"/>
+                      <a:tailEnd type="none" w="med" len="med"/>
+                    </a:lnT>
+                    <a:lnB w="6350" cap="flat" cmpd="sng" algn="ctr">
+                      <a:solidFill>
+                        <a:srgbClr val="E6E6E6"/>
+                      </a:solidFill>
+                      <a:prstDash val="solid"/>
+                      <a:round/>
+                      <a:headEnd type="none" w="med" len="med"/>
+                      <a:tailEnd type="none" w="med" len="med"/>
+                    </a:lnB>
+                    <a:solidFill>
+                      <a:srgbClr val="FBF1D6"/>
+                    </a:solidFill>
+                  </a:tcPr>
+                </a:tc>
+              </a:tr>
+              <a:tr h="192024">
+                <a:tc>
+                  <a:txBody>
+                    <a:bodyPr/>
+                    <a:lstStyle/>
+                    <a:p>
+                      <a:pPr indent="0" marL="0">
+                        <a:buNone/>
+                      </a:pPr>
+                      <a:r>
+                        <a:rPr lang="en-US" sz="950" dirty="0">
+                          <a:solidFill>
+                            <a:srgbClr val="31302E"/>
+                          </a:solidFill>
+                          <a:latin typeface="Inter" pitchFamily="34" charset="0"/>
+                          <a:ea typeface="Inter" pitchFamily="34" charset="-122"/>
+                          <a:cs typeface="Inter" pitchFamily="34" charset="-120"/>
+                        </a:rPr>
+                        <a:t>RiNALMo in the RNA slot</a:t>
+                      </a:r>
+                      <a:endParaRPr lang="en-US" sz="950" dirty="0">
                         <a:latin typeface="Inter" charset="0"/>
                         <a:ea typeface="Inter" charset="0"/>
                         <a:cs typeface="Inter" charset="0"/>
@@ -3562,17 +3770,17 @@
                         <a:buNone/>
                       </a:pPr>
                       <a:r>
-                        <a:rPr lang="en-US" sz="900" b="1" dirty="0">
-                          <a:solidFill>
-                            <a:srgbClr val="31302E"/>
-                          </a:solidFill>
-                          <a:latin typeface="Inter" pitchFamily="34" charset="0"/>
-                          <a:ea typeface="Inter" pitchFamily="34" charset="-122"/>
-                          <a:cs typeface="Inter" pitchFamily="34" charset="-120"/>
-                        </a:rPr>
-                        <a:t>0.852 (0.722)</a:t>
-                      </a:r>
-                      <a:endParaRPr lang="en-US" sz="900" dirty="0">
+                        <a:rPr lang="en-US" sz="950" dirty="0">
+                          <a:solidFill>
+                            <a:srgbClr val="31302E"/>
+                          </a:solidFill>
+                          <a:latin typeface="Inter" pitchFamily="34" charset="0"/>
+                          <a:ea typeface="Inter" pitchFamily="34" charset="-122"/>
+                          <a:cs typeface="Inter" pitchFamily="34" charset="-120"/>
+                        </a:rPr>
+                        <a:t>E. coli</a:t>
+                      </a:r>
+                      <a:endParaRPr lang="en-US" sz="950" dirty="0">
                         <a:latin typeface="Inter" charset="0"/>
                         <a:ea typeface="Inter" charset="0"/>
                         <a:cs typeface="Inter" charset="0"/>
@@ -3630,17 +3838,17 @@
                         <a:buNone/>
                       </a:pPr>
                       <a:r>
-                        <a:rPr lang="en-US" sz="900" b="1" dirty="0">
-                          <a:solidFill>
-                            <a:srgbClr val="31302E"/>
-                          </a:solidFill>
-                          <a:latin typeface="Inter" pitchFamily="34" charset="0"/>
-                          <a:ea typeface="Inter" pitchFamily="34" charset="-122"/>
-                          <a:cs typeface="Inter" pitchFamily="34" charset="-120"/>
-                        </a:rPr>
-                        <a:t>0.851 (0.722)</a:t>
-                      </a:r>
-                      <a:endParaRPr lang="en-US" sz="900" dirty="0">
+                        <a:rPr lang="en-US" sz="950" dirty="0">
+                          <a:solidFill>
+                            <a:srgbClr val="31302E"/>
+                          </a:solidFill>
+                          <a:latin typeface="Inter" pitchFamily="34" charset="0"/>
+                          <a:ea typeface="Inter" pitchFamily="34" charset="-122"/>
+                          <a:cs typeface="Inter" pitchFamily="34" charset="-120"/>
+                        </a:rPr>
+                        <a:t>gated</a:t>
+                      </a:r>
+                      <a:endParaRPr lang="en-US" sz="950" dirty="0">
                         <a:latin typeface="Inter" charset="0"/>
                         <a:ea typeface="Inter" charset="0"/>
                         <a:cs typeface="Inter" charset="0"/>
@@ -3698,62 +3906,62 @@
                         <a:buNone/>
                       </a:pPr>
                       <a:r>
-                        <a:rPr lang="en-US" sz="900" dirty="0">
-                          <a:solidFill>
-                            <a:srgbClr val="31302E"/>
-                          </a:solidFill>
-                          <a:latin typeface="Inter" pitchFamily="34" charset="0"/>
-                          <a:ea typeface="Inter" pitchFamily="34" charset="-122"/>
-                          <a:cs typeface="Inter" pitchFamily="34" charset="-120"/>
-                        </a:rPr>
-                        <a:t>0.696 (0.698)</a:t>
-                      </a:r>
-                      <a:endParaRPr lang="en-US" sz="900" dirty="0">
-                        <a:latin typeface="Inter" charset="0"/>
-                        <a:ea typeface="Inter" charset="0"/>
-                        <a:cs typeface="Inter" charset="0"/>
-                      </a:endParaRPr>
-                    </a:p>
-                  </a:txBody>
-                  <a:tcPr marL="63500" marR="63500" marT="38100" marB="38100" anchor="ctr">
-                    <a:lnL w="6350" cap="flat" cmpd="sng" algn="ctr">
-                      <a:solidFill>
-                        <a:srgbClr val="E6E6E6"/>
-                      </a:solidFill>
-                      <a:prstDash val="solid"/>
-                      <a:round/>
-                      <a:headEnd type="none" w="med" len="med"/>
-                      <a:tailEnd type="none" w="med" len="med"/>
-                    </a:lnL>
-                    <a:lnR w="6350" cap="flat" cmpd="sng" algn="ctr">
-                      <a:solidFill>
-                        <a:srgbClr val="E6E6E6"/>
-                      </a:solidFill>
-                      <a:prstDash val="solid"/>
-                      <a:round/>
-                      <a:headEnd type="none" w="med" len="med"/>
-                      <a:tailEnd type="none" w="med" len="med"/>
-                    </a:lnR>
-                    <a:lnT w="6350" cap="flat" cmpd="sng" algn="ctr">
-                      <a:solidFill>
-                        <a:srgbClr val="E6E6E6"/>
-                      </a:solidFill>
-                      <a:prstDash val="solid"/>
-                      <a:round/>
-                      <a:headEnd type="none" w="med" len="med"/>
-                      <a:tailEnd type="none" w="med" len="med"/>
-                    </a:lnT>
-                    <a:lnB w="6350" cap="flat" cmpd="sng" algn="ctr">
-                      <a:solidFill>
-                        <a:srgbClr val="E6E6E6"/>
-                      </a:solidFill>
-                      <a:prstDash val="solid"/>
-                      <a:round/>
-                      <a:headEnd type="none" w="med" len="med"/>
-                      <a:tailEnd type="none" w="med" len="med"/>
-                    </a:lnB>
-                    <a:solidFill>
-                      <a:srgbClr val="FFFFFF"/>
+                        <a:rPr lang="en-US" sz="950" dirty="0">
+                          <a:solidFill>
+                            <a:srgbClr val="31302E"/>
+                          </a:solidFill>
+                          <a:latin typeface="Inter" pitchFamily="34" charset="0"/>
+                          <a:ea typeface="Inter" pitchFamily="34" charset="-122"/>
+                          <a:cs typeface="Inter" pitchFamily="34" charset="-120"/>
+                        </a:rPr>
+                        <a:t>+6.5 points  [+3.4, +9.6]</a:t>
+                      </a:r>
+                      <a:endParaRPr lang="en-US" sz="950" dirty="0">
+                        <a:latin typeface="Inter" charset="0"/>
+                        <a:ea typeface="Inter" charset="0"/>
+                        <a:cs typeface="Inter" charset="0"/>
+                      </a:endParaRPr>
+                    </a:p>
+                  </a:txBody>
+                  <a:tcPr marL="63500" marR="63500" marT="38100" marB="38100" anchor="ctr">
+                    <a:lnL w="6350" cap="flat" cmpd="sng" algn="ctr">
+                      <a:solidFill>
+                        <a:srgbClr val="E6E6E6"/>
+                      </a:solidFill>
+                      <a:prstDash val="solid"/>
+                      <a:round/>
+                      <a:headEnd type="none" w="med" len="med"/>
+                      <a:tailEnd type="none" w="med" len="med"/>
+                    </a:lnL>
+                    <a:lnR w="6350" cap="flat" cmpd="sng" algn="ctr">
+                      <a:solidFill>
+                        <a:srgbClr val="E6E6E6"/>
+                      </a:solidFill>
+                      <a:prstDash val="solid"/>
+                      <a:round/>
+                      <a:headEnd type="none" w="med" len="med"/>
+                      <a:tailEnd type="none" w="med" len="med"/>
+                    </a:lnR>
+                    <a:lnT w="6350" cap="flat" cmpd="sng" algn="ctr">
+                      <a:solidFill>
+                        <a:srgbClr val="E6E6E6"/>
+                      </a:solidFill>
+                      <a:prstDash val="solid"/>
+                      <a:round/>
+                      <a:headEnd type="none" w="med" len="med"/>
+                      <a:tailEnd type="none" w="med" len="med"/>
+                    </a:lnT>
+                    <a:lnB w="6350" cap="flat" cmpd="sng" algn="ctr">
+                      <a:solidFill>
+                        <a:srgbClr val="E6E6E6"/>
+                      </a:solidFill>
+                      <a:prstDash val="solid"/>
+                      <a:round/>
+                      <a:headEnd type="none" w="med" len="med"/>
+                      <a:tailEnd type="none" w="med" len="med"/>
+                    </a:lnB>
+                    <a:solidFill>
+                      <a:srgbClr val="FBF1D6"/>
                     </a:solidFill>
                   </a:tcPr>
                 </a:tc>
@@ -3766,1972 +3974,62 @@
                         <a:buNone/>
                       </a:pPr>
                       <a:r>
-                        <a:rPr lang="en-US" sz="900" dirty="0">
-                          <a:solidFill>
-                            <a:srgbClr val="31302E"/>
-                          </a:solidFill>
-                          <a:latin typeface="Inter" pitchFamily="34" charset="0"/>
-                          <a:ea typeface="Inter" pitchFamily="34" charset="-122"/>
-                          <a:cs typeface="Inter" pitchFamily="34" charset="-120"/>
-                        </a:rPr>
-                        <a:t>0.729 (0.698)</a:t>
-                      </a:r>
-                      <a:endParaRPr lang="en-US" sz="900" dirty="0">
-                        <a:latin typeface="Inter" charset="0"/>
-                        <a:ea typeface="Inter" charset="0"/>
-                        <a:cs typeface="Inter" charset="0"/>
-                      </a:endParaRPr>
-                    </a:p>
-                  </a:txBody>
-                  <a:tcPr marL="63500" marR="63500" marT="38100" marB="38100" anchor="ctr">
-                    <a:lnL w="6350" cap="flat" cmpd="sng" algn="ctr">
-                      <a:solidFill>
-                        <a:srgbClr val="E6E6E6"/>
-                      </a:solidFill>
-                      <a:prstDash val="solid"/>
-                      <a:round/>
-                      <a:headEnd type="none" w="med" len="med"/>
-                      <a:tailEnd type="none" w="med" len="med"/>
-                    </a:lnL>
-                    <a:lnR w="6350" cap="flat" cmpd="sng" algn="ctr">
-                      <a:solidFill>
-                        <a:srgbClr val="E6E6E6"/>
-                      </a:solidFill>
-                      <a:prstDash val="solid"/>
-                      <a:round/>
-                      <a:headEnd type="none" w="med" len="med"/>
-                      <a:tailEnd type="none" w="med" len="med"/>
-                    </a:lnR>
-                    <a:lnT w="6350" cap="flat" cmpd="sng" algn="ctr">
-                      <a:solidFill>
-                        <a:srgbClr val="E6E6E6"/>
-                      </a:solidFill>
-                      <a:prstDash val="solid"/>
-                      <a:round/>
-                      <a:headEnd type="none" w="med" len="med"/>
-                      <a:tailEnd type="none" w="med" len="med"/>
-                    </a:lnT>
-                    <a:lnB w="6350" cap="flat" cmpd="sng" algn="ctr">
-                      <a:solidFill>
-                        <a:srgbClr val="E6E6E6"/>
-                      </a:solidFill>
-                      <a:prstDash val="solid"/>
-                      <a:round/>
-                      <a:headEnd type="none" w="med" len="med"/>
-                      <a:tailEnd type="none" w="med" len="med"/>
-                    </a:lnB>
-                    <a:solidFill>
-                      <a:srgbClr val="FFFFFF"/>
-                    </a:solidFill>
-                  </a:tcPr>
-                </a:tc>
-                <a:tc>
-                  <a:txBody>
-                    <a:bodyPr/>
-                    <a:lstStyle/>
-                    <a:p>
-                      <a:pPr algn="ctr" indent="0" marL="0">
-                        <a:buNone/>
-                      </a:pPr>
-                      <a:r>
-                        <a:rPr lang="en-US" sz="900" dirty="0">
-                          <a:solidFill>
-                            <a:srgbClr val="31302E"/>
-                          </a:solidFill>
-                          <a:latin typeface="Inter" pitchFamily="34" charset="0"/>
-                          <a:ea typeface="Inter" pitchFamily="34" charset="-122"/>
-                          <a:cs typeface="Inter" pitchFamily="34" charset="-120"/>
-                        </a:rPr>
-                        <a:t>0.761 (0.698)</a:t>
-                      </a:r>
-                      <a:endParaRPr lang="en-US" sz="900" dirty="0">
-                        <a:latin typeface="Inter" charset="0"/>
-                        <a:ea typeface="Inter" charset="0"/>
-                        <a:cs typeface="Inter" charset="0"/>
-                      </a:endParaRPr>
-                    </a:p>
-                  </a:txBody>
-                  <a:tcPr marL="63500" marR="63500" marT="38100" marB="38100" anchor="ctr">
-                    <a:lnL w="6350" cap="flat" cmpd="sng" algn="ctr">
-                      <a:solidFill>
-                        <a:srgbClr val="E6E6E6"/>
-                      </a:solidFill>
-                      <a:prstDash val="solid"/>
-                      <a:round/>
-                      <a:headEnd type="none" w="med" len="med"/>
-                      <a:tailEnd type="none" w="med" len="med"/>
-                    </a:lnL>
-                    <a:lnR w="6350" cap="flat" cmpd="sng" algn="ctr">
-                      <a:solidFill>
-                        <a:srgbClr val="E6E6E6"/>
-                      </a:solidFill>
-                      <a:prstDash val="solid"/>
-                      <a:round/>
-                      <a:headEnd type="none" w="med" len="med"/>
-                      <a:tailEnd type="none" w="med" len="med"/>
-                    </a:lnR>
-                    <a:lnT w="6350" cap="flat" cmpd="sng" algn="ctr">
-                      <a:solidFill>
-                        <a:srgbClr val="E6E6E6"/>
-                      </a:solidFill>
-                      <a:prstDash val="solid"/>
-                      <a:round/>
-                      <a:headEnd type="none" w="med" len="med"/>
-                      <a:tailEnd type="none" w="med" len="med"/>
-                    </a:lnT>
-                    <a:lnB w="6350" cap="flat" cmpd="sng" algn="ctr">
-                      <a:solidFill>
-                        <a:srgbClr val="E6E6E6"/>
-                      </a:solidFill>
-                      <a:prstDash val="solid"/>
-                      <a:round/>
-                      <a:headEnd type="none" w="med" len="med"/>
-                      <a:tailEnd type="none" w="med" len="med"/>
-                    </a:lnB>
-                    <a:solidFill>
-                      <a:srgbClr val="FFFFFF"/>
-                    </a:solidFill>
-                  </a:tcPr>
-                </a:tc>
-              </a:tr>
-              <a:tr h="201168">
-                <a:tc>
-                  <a:txBody>
-                    <a:bodyPr/>
-                    <a:lstStyle/>
-                    <a:p>
-                      <a:pPr indent="0" marL="0">
-                        <a:buNone/>
-                      </a:pPr>
-                      <a:r>
-                        <a:rPr lang="en-US" sz="900" dirty="0">
-                          <a:solidFill>
-                            <a:srgbClr val="31302E"/>
-                          </a:solidFill>
-                          <a:latin typeface="Inter" pitchFamily="34" charset="0"/>
-                          <a:ea typeface="Inter" pitchFamily="34" charset="-122"/>
-                          <a:cs typeface="Inter" pitchFamily="34" charset="-120"/>
-                        </a:rPr>
-                        <a:t>CoV-Vac</a:t>
-                      </a:r>
-                      <a:endParaRPr lang="en-US" sz="900" dirty="0">
-                        <a:latin typeface="Inter" charset="0"/>
-                        <a:ea typeface="Inter" charset="0"/>
-                        <a:cs typeface="Inter" charset="0"/>
-                      </a:endParaRPr>
-                    </a:p>
-                  </a:txBody>
-                  <a:tcPr marL="63500" marR="63500" marT="38100" marB="38100" anchor="ctr">
-                    <a:lnL w="6350" cap="flat" cmpd="sng" algn="ctr">
-                      <a:solidFill>
-                        <a:srgbClr val="E6E6E6"/>
-                      </a:solidFill>
-                      <a:prstDash val="solid"/>
-                      <a:round/>
-                      <a:headEnd type="none" w="med" len="med"/>
-                      <a:tailEnd type="none" w="med" len="med"/>
-                    </a:lnL>
-                    <a:lnR w="6350" cap="flat" cmpd="sng" algn="ctr">
-                      <a:solidFill>
-                        <a:srgbClr val="E6E6E6"/>
-                      </a:solidFill>
-                      <a:prstDash val="solid"/>
-                      <a:round/>
-                      <a:headEnd type="none" w="med" len="med"/>
-                      <a:tailEnd type="none" w="med" len="med"/>
-                    </a:lnR>
-                    <a:lnT w="6350" cap="flat" cmpd="sng" algn="ctr">
-                      <a:solidFill>
-                        <a:srgbClr val="E6E6E6"/>
-                      </a:solidFill>
-                      <a:prstDash val="solid"/>
-                      <a:round/>
-                      <a:headEnd type="none" w="med" len="med"/>
-                      <a:tailEnd type="none" w="med" len="med"/>
-                    </a:lnT>
-                    <a:lnB w="6350" cap="flat" cmpd="sng" algn="ctr">
-                      <a:solidFill>
-                        <a:srgbClr val="E6E6E6"/>
-                      </a:solidFill>
-                      <a:prstDash val="solid"/>
-                      <a:round/>
-                      <a:headEnd type="none" w="med" len="med"/>
-                      <a:tailEnd type="none" w="med" len="med"/>
-                    </a:lnB>
-                    <a:solidFill>
-                      <a:srgbClr val="FFFFFF"/>
-                    </a:solidFill>
-                  </a:tcPr>
-                </a:tc>
-                <a:tc>
-                  <a:txBody>
-                    <a:bodyPr/>
-                    <a:lstStyle/>
-                    <a:p>
-                      <a:pPr algn="ctr" indent="0" marL="0">
-                        <a:buNone/>
-                      </a:pPr>
-                      <a:r>
-                        <a:rPr lang="en-US" sz="900" dirty="0">
-                          <a:solidFill>
-                            <a:srgbClr val="31302E"/>
-                          </a:solidFill>
-                          <a:latin typeface="Inter" pitchFamily="34" charset="0"/>
-                          <a:ea typeface="Inter" pitchFamily="34" charset="-122"/>
-                          <a:cs typeface="Inter" pitchFamily="34" charset="-120"/>
-                        </a:rPr>
-                        <a:t>0.727 (0.779)</a:t>
-                      </a:r>
-                      <a:endParaRPr lang="en-US" sz="900" dirty="0">
-                        <a:latin typeface="Inter" charset="0"/>
-                        <a:ea typeface="Inter" charset="0"/>
-                        <a:cs typeface="Inter" charset="0"/>
-                      </a:endParaRPr>
-                    </a:p>
-                  </a:txBody>
-                  <a:tcPr marL="63500" marR="63500" marT="38100" marB="38100" anchor="ctr">
-                    <a:lnL w="6350" cap="flat" cmpd="sng" algn="ctr">
-                      <a:solidFill>
-                        <a:srgbClr val="E6E6E6"/>
-                      </a:solidFill>
-                      <a:prstDash val="solid"/>
-                      <a:round/>
-                      <a:headEnd type="none" w="med" len="med"/>
-                      <a:tailEnd type="none" w="med" len="med"/>
-                    </a:lnL>
-                    <a:lnR w="6350" cap="flat" cmpd="sng" algn="ctr">
-                      <a:solidFill>
-                        <a:srgbClr val="E6E6E6"/>
-                      </a:solidFill>
-                      <a:prstDash val="solid"/>
-                      <a:round/>
-                      <a:headEnd type="none" w="med" len="med"/>
-                      <a:tailEnd type="none" w="med" len="med"/>
-                    </a:lnR>
-                    <a:lnT w="6350" cap="flat" cmpd="sng" algn="ctr">
-                      <a:solidFill>
-                        <a:srgbClr val="E6E6E6"/>
-                      </a:solidFill>
-                      <a:prstDash val="solid"/>
-                      <a:round/>
-                      <a:headEnd type="none" w="med" len="med"/>
-                      <a:tailEnd type="none" w="med" len="med"/>
-                    </a:lnT>
-                    <a:lnB w="6350" cap="flat" cmpd="sng" algn="ctr">
-                      <a:solidFill>
-                        <a:srgbClr val="E6E6E6"/>
-                      </a:solidFill>
-                      <a:prstDash val="solid"/>
-                      <a:round/>
-                      <a:headEnd type="none" w="med" len="med"/>
-                      <a:tailEnd type="none" w="med" len="med"/>
-                    </a:lnB>
-                    <a:solidFill>
-                      <a:srgbClr val="FFFFFF"/>
-                    </a:solidFill>
-                  </a:tcPr>
-                </a:tc>
-                <a:tc>
-                  <a:txBody>
-                    <a:bodyPr/>
-                    <a:lstStyle/>
-                    <a:p>
-                      <a:pPr algn="ctr" indent="0" marL="0">
-                        <a:buNone/>
-                      </a:pPr>
-                      <a:r>
-                        <a:rPr lang="en-US" sz="900" dirty="0">
-                          <a:solidFill>
-                            <a:srgbClr val="31302E"/>
-                          </a:solidFill>
-                          <a:latin typeface="Inter" pitchFamily="34" charset="0"/>
-                          <a:ea typeface="Inter" pitchFamily="34" charset="-122"/>
-                          <a:cs typeface="Inter" pitchFamily="34" charset="-120"/>
-                        </a:rPr>
-                        <a:t>0.755 (0.779)</a:t>
-                      </a:r>
-                      <a:endParaRPr lang="en-US" sz="900" dirty="0">
-                        <a:latin typeface="Inter" charset="0"/>
-                        <a:ea typeface="Inter" charset="0"/>
-                        <a:cs typeface="Inter" charset="0"/>
-                      </a:endParaRPr>
-                    </a:p>
-                  </a:txBody>
-                  <a:tcPr marL="63500" marR="63500" marT="38100" marB="38100" anchor="ctr">
-                    <a:lnL w="6350" cap="flat" cmpd="sng" algn="ctr">
-                      <a:solidFill>
-                        <a:srgbClr val="E6E6E6"/>
-                      </a:solidFill>
-                      <a:prstDash val="solid"/>
-                      <a:round/>
-                      <a:headEnd type="none" w="med" len="med"/>
-                      <a:tailEnd type="none" w="med" len="med"/>
-                    </a:lnL>
-                    <a:lnR w="6350" cap="flat" cmpd="sng" algn="ctr">
-                      <a:solidFill>
-                        <a:srgbClr val="E6E6E6"/>
-                      </a:solidFill>
-                      <a:prstDash val="solid"/>
-                      <a:round/>
-                      <a:headEnd type="none" w="med" len="med"/>
-                      <a:tailEnd type="none" w="med" len="med"/>
-                    </a:lnR>
-                    <a:lnT w="6350" cap="flat" cmpd="sng" algn="ctr">
-                      <a:solidFill>
-                        <a:srgbClr val="E6E6E6"/>
-                      </a:solidFill>
-                      <a:prstDash val="solid"/>
-                      <a:round/>
-                      <a:headEnd type="none" w="med" len="med"/>
-                      <a:tailEnd type="none" w="med" len="med"/>
-                    </a:lnT>
-                    <a:lnB w="6350" cap="flat" cmpd="sng" algn="ctr">
-                      <a:solidFill>
-                        <a:srgbClr val="E6E6E6"/>
-                      </a:solidFill>
-                      <a:prstDash val="solid"/>
-                      <a:round/>
-                      <a:headEnd type="none" w="med" len="med"/>
-                      <a:tailEnd type="none" w="med" len="med"/>
-                    </a:lnB>
-                    <a:solidFill>
-                      <a:srgbClr val="FFFFFF"/>
-                    </a:solidFill>
-                  </a:tcPr>
-                </a:tc>
-                <a:tc>
-                  <a:txBody>
-                    <a:bodyPr/>
-                    <a:lstStyle/>
-                    <a:p>
-                      <a:pPr algn="ctr" indent="0" marL="0">
-                        <a:buNone/>
-                      </a:pPr>
-                      <a:r>
-                        <a:rPr lang="en-US" sz="900" dirty="0">
-                          <a:solidFill>
-                            <a:srgbClr val="31302E"/>
-                          </a:solidFill>
-                          <a:latin typeface="Inter" pitchFamily="34" charset="0"/>
-                          <a:ea typeface="Inter" pitchFamily="34" charset="-122"/>
-                          <a:cs typeface="Inter" pitchFamily="34" charset="-120"/>
-                        </a:rPr>
-                        <a:t>0.823 (0.833)</a:t>
-                      </a:r>
-                      <a:endParaRPr lang="en-US" sz="900" dirty="0">
-                        <a:latin typeface="Inter" charset="0"/>
-                        <a:ea typeface="Inter" charset="0"/>
-                        <a:cs typeface="Inter" charset="0"/>
-                      </a:endParaRPr>
-                    </a:p>
-                  </a:txBody>
-                  <a:tcPr marL="63500" marR="63500" marT="38100" marB="38100" anchor="ctr">
-                    <a:lnL w="6350" cap="flat" cmpd="sng" algn="ctr">
-                      <a:solidFill>
-                        <a:srgbClr val="E6E6E6"/>
-                      </a:solidFill>
-                      <a:prstDash val="solid"/>
-                      <a:round/>
-                      <a:headEnd type="none" w="med" len="med"/>
-                      <a:tailEnd type="none" w="med" len="med"/>
-                    </a:lnL>
-                    <a:lnR w="6350" cap="flat" cmpd="sng" algn="ctr">
-                      <a:solidFill>
-                        <a:srgbClr val="E6E6E6"/>
-                      </a:solidFill>
-                      <a:prstDash val="solid"/>
-                      <a:round/>
-                      <a:headEnd type="none" w="med" len="med"/>
-                      <a:tailEnd type="none" w="med" len="med"/>
-                    </a:lnR>
-                    <a:lnT w="6350" cap="flat" cmpd="sng" algn="ctr">
-                      <a:solidFill>
-                        <a:srgbClr val="E6E6E6"/>
-                      </a:solidFill>
-                      <a:prstDash val="solid"/>
-                      <a:round/>
-                      <a:headEnd type="none" w="med" len="med"/>
-                      <a:tailEnd type="none" w="med" len="med"/>
-                    </a:lnT>
-                    <a:lnB w="6350" cap="flat" cmpd="sng" algn="ctr">
-                      <a:solidFill>
-                        <a:srgbClr val="E6E6E6"/>
-                      </a:solidFill>
-                      <a:prstDash val="solid"/>
-                      <a:round/>
-                      <a:headEnd type="none" w="med" len="med"/>
-                      <a:tailEnd type="none" w="med" len="med"/>
-                    </a:lnB>
-                    <a:solidFill>
-                      <a:srgbClr val="FFFFFF"/>
-                    </a:solidFill>
-                  </a:tcPr>
-                </a:tc>
-                <a:tc>
-                  <a:txBody>
-                    <a:bodyPr/>
-                    <a:lstStyle/>
-                    <a:p>
-                      <a:pPr algn="ctr" indent="0" marL="0">
-                        <a:buNone/>
-                      </a:pPr>
-                      <a:r>
-                        <a:rPr lang="en-US" sz="900" dirty="0">
-                          <a:solidFill>
-                            <a:srgbClr val="31302E"/>
-                          </a:solidFill>
-                          <a:latin typeface="Inter" pitchFamily="34" charset="0"/>
-                          <a:ea typeface="Inter" pitchFamily="34" charset="-122"/>
-                          <a:cs typeface="Inter" pitchFamily="34" charset="-120"/>
-                        </a:rPr>
-                        <a:t>0.812 (0.833)</a:t>
-                      </a:r>
-                      <a:endParaRPr lang="en-US" sz="900" dirty="0">
-                        <a:latin typeface="Inter" charset="0"/>
-                        <a:ea typeface="Inter" charset="0"/>
-                        <a:cs typeface="Inter" charset="0"/>
-                      </a:endParaRPr>
-                    </a:p>
-                  </a:txBody>
-                  <a:tcPr marL="63500" marR="63500" marT="38100" marB="38100" anchor="ctr">
-                    <a:lnL w="6350" cap="flat" cmpd="sng" algn="ctr">
-                      <a:solidFill>
-                        <a:srgbClr val="E6E6E6"/>
-                      </a:solidFill>
-                      <a:prstDash val="solid"/>
-                      <a:round/>
-                      <a:headEnd type="none" w="med" len="med"/>
-                      <a:tailEnd type="none" w="med" len="med"/>
-                    </a:lnL>
-                    <a:lnR w="6350" cap="flat" cmpd="sng" algn="ctr">
-                      <a:solidFill>
-                        <a:srgbClr val="E6E6E6"/>
-                      </a:solidFill>
-                      <a:prstDash val="solid"/>
-                      <a:round/>
-                      <a:headEnd type="none" w="med" len="med"/>
-                      <a:tailEnd type="none" w="med" len="med"/>
-                    </a:lnR>
-                    <a:lnT w="6350" cap="flat" cmpd="sng" algn="ctr">
-                      <a:solidFill>
-                        <a:srgbClr val="E6E6E6"/>
-                      </a:solidFill>
-                      <a:prstDash val="solid"/>
-                      <a:round/>
-                      <a:headEnd type="none" w="med" len="med"/>
-                      <a:tailEnd type="none" w="med" len="med"/>
-                    </a:lnT>
-                    <a:lnB w="6350" cap="flat" cmpd="sng" algn="ctr">
-                      <a:solidFill>
-                        <a:srgbClr val="E6E6E6"/>
-                      </a:solidFill>
-                      <a:prstDash val="solid"/>
-                      <a:round/>
-                      <a:headEnd type="none" w="med" len="med"/>
-                      <a:tailEnd type="none" w="med" len="med"/>
-                    </a:lnB>
-                    <a:solidFill>
-                      <a:srgbClr val="FFFFFF"/>
-                    </a:solidFill>
-                  </a:tcPr>
-                </a:tc>
-                <a:tc>
-                  <a:txBody>
-                    <a:bodyPr/>
-                    <a:lstStyle/>
-                    <a:p>
-                      <a:pPr algn="ctr" indent="0" marL="0">
-                        <a:buNone/>
-                      </a:pPr>
-                      <a:r>
-                        <a:rPr lang="en-US" sz="900" dirty="0">
-                          <a:solidFill>
-                            <a:srgbClr val="31302E"/>
-                          </a:solidFill>
-                          <a:latin typeface="Inter" pitchFamily="34" charset="0"/>
-                          <a:ea typeface="Inter" pitchFamily="34" charset="-122"/>
-                          <a:cs typeface="Inter" pitchFamily="34" charset="-120"/>
-                        </a:rPr>
-                        <a:t>0.844 (0.833)</a:t>
-                      </a:r>
-                      <a:endParaRPr lang="en-US" sz="900" dirty="0">
-                        <a:latin typeface="Inter" charset="0"/>
-                        <a:ea typeface="Inter" charset="0"/>
-                        <a:cs typeface="Inter" charset="0"/>
-                      </a:endParaRPr>
-                    </a:p>
-                  </a:txBody>
-                  <a:tcPr marL="63500" marR="63500" marT="38100" marB="38100" anchor="ctr">
-                    <a:lnL w="6350" cap="flat" cmpd="sng" algn="ctr">
-                      <a:solidFill>
-                        <a:srgbClr val="E6E6E6"/>
-                      </a:solidFill>
-                      <a:prstDash val="solid"/>
-                      <a:round/>
-                      <a:headEnd type="none" w="med" len="med"/>
-                      <a:tailEnd type="none" w="med" len="med"/>
-                    </a:lnL>
-                    <a:lnR w="6350" cap="flat" cmpd="sng" algn="ctr">
-                      <a:solidFill>
-                        <a:srgbClr val="E6E6E6"/>
-                      </a:solidFill>
-                      <a:prstDash val="solid"/>
-                      <a:round/>
-                      <a:headEnd type="none" w="med" len="med"/>
-                      <a:tailEnd type="none" w="med" len="med"/>
-                    </a:lnR>
-                    <a:lnT w="6350" cap="flat" cmpd="sng" algn="ctr">
-                      <a:solidFill>
-                        <a:srgbClr val="E6E6E6"/>
-                      </a:solidFill>
-                      <a:prstDash val="solid"/>
-                      <a:round/>
-                      <a:headEnd type="none" w="med" len="med"/>
-                      <a:tailEnd type="none" w="med" len="med"/>
-                    </a:lnT>
-                    <a:lnB w="6350" cap="flat" cmpd="sng" algn="ctr">
-                      <a:solidFill>
-                        <a:srgbClr val="E6E6E6"/>
-                      </a:solidFill>
-                      <a:prstDash val="solid"/>
-                      <a:round/>
-                      <a:headEnd type="none" w="med" len="med"/>
-                      <a:tailEnd type="none" w="med" len="med"/>
-                    </a:lnB>
-                    <a:solidFill>
-                      <a:srgbClr val="FFFFFF"/>
-                    </a:solidFill>
-                  </a:tcPr>
-                </a:tc>
-                <a:tc>
-                  <a:txBody>
-                    <a:bodyPr/>
-                    <a:lstStyle/>
-                    <a:p>
-                      <a:pPr algn="ctr" indent="0" marL="0">
-                        <a:buNone/>
-                      </a:pPr>
-                      <a:r>
-                        <a:rPr lang="en-US" sz="900" dirty="0">
-                          <a:solidFill>
-                            <a:srgbClr val="31302E"/>
-                          </a:solidFill>
-                          <a:latin typeface="Inter" pitchFamily="34" charset="0"/>
-                          <a:ea typeface="Inter" pitchFamily="34" charset="-122"/>
-                          <a:cs typeface="Inter" pitchFamily="34" charset="-120"/>
-                        </a:rPr>
-                        <a:t>0.814 (0.816)</a:t>
-                      </a:r>
-                      <a:endParaRPr lang="en-US" sz="900" dirty="0">
-                        <a:latin typeface="Inter" charset="0"/>
-                        <a:ea typeface="Inter" charset="0"/>
-                        <a:cs typeface="Inter" charset="0"/>
-                      </a:endParaRPr>
-                    </a:p>
-                  </a:txBody>
-                  <a:tcPr marL="63500" marR="63500" marT="38100" marB="38100" anchor="ctr">
-                    <a:lnL w="6350" cap="flat" cmpd="sng" algn="ctr">
-                      <a:solidFill>
-                        <a:srgbClr val="E6E6E6"/>
-                      </a:solidFill>
-                      <a:prstDash val="solid"/>
-                      <a:round/>
-                      <a:headEnd type="none" w="med" len="med"/>
-                      <a:tailEnd type="none" w="med" len="med"/>
-                    </a:lnL>
-                    <a:lnR w="6350" cap="flat" cmpd="sng" algn="ctr">
-                      <a:solidFill>
-                        <a:srgbClr val="E6E6E6"/>
-                      </a:solidFill>
-                      <a:prstDash val="solid"/>
-                      <a:round/>
-                      <a:headEnd type="none" w="med" len="med"/>
-                      <a:tailEnd type="none" w="med" len="med"/>
-                    </a:lnR>
-                    <a:lnT w="6350" cap="flat" cmpd="sng" algn="ctr">
-                      <a:solidFill>
-                        <a:srgbClr val="E6E6E6"/>
-                      </a:solidFill>
-                      <a:prstDash val="solid"/>
-                      <a:round/>
-                      <a:headEnd type="none" w="med" len="med"/>
-                      <a:tailEnd type="none" w="med" len="med"/>
-                    </a:lnT>
-                    <a:lnB w="6350" cap="flat" cmpd="sng" algn="ctr">
-                      <a:solidFill>
-                        <a:srgbClr val="E6E6E6"/>
-                      </a:solidFill>
-                      <a:prstDash val="solid"/>
-                      <a:round/>
-                      <a:headEnd type="none" w="med" len="med"/>
-                      <a:tailEnd type="none" w="med" len="med"/>
-                    </a:lnB>
-                    <a:solidFill>
-                      <a:srgbClr val="FFFFFF"/>
-                    </a:solidFill>
-                  </a:tcPr>
-                </a:tc>
-                <a:tc>
-                  <a:txBody>
-                    <a:bodyPr/>
-                    <a:lstStyle/>
-                    <a:p>
-                      <a:pPr algn="ctr" indent="0" marL="0">
-                        <a:buNone/>
-                      </a:pPr>
-                      <a:r>
-                        <a:rPr lang="en-US" sz="900" dirty="0">
-                          <a:solidFill>
-                            <a:srgbClr val="31302E"/>
-                          </a:solidFill>
-                          <a:latin typeface="Inter" pitchFamily="34" charset="0"/>
-                          <a:ea typeface="Inter" pitchFamily="34" charset="-122"/>
-                          <a:cs typeface="Inter" pitchFamily="34" charset="-120"/>
-                        </a:rPr>
-                        <a:t>0.827 (0.816)</a:t>
-                      </a:r>
-                      <a:endParaRPr lang="en-US" sz="900" dirty="0">
-                        <a:latin typeface="Inter" charset="0"/>
-                        <a:ea typeface="Inter" charset="0"/>
-                        <a:cs typeface="Inter" charset="0"/>
-                      </a:endParaRPr>
-                    </a:p>
-                  </a:txBody>
-                  <a:tcPr marL="63500" marR="63500" marT="38100" marB="38100" anchor="ctr">
-                    <a:lnL w="6350" cap="flat" cmpd="sng" algn="ctr">
-                      <a:solidFill>
-                        <a:srgbClr val="E6E6E6"/>
-                      </a:solidFill>
-                      <a:prstDash val="solid"/>
-                      <a:round/>
-                      <a:headEnd type="none" w="med" len="med"/>
-                      <a:tailEnd type="none" w="med" len="med"/>
-                    </a:lnL>
-                    <a:lnR w="6350" cap="flat" cmpd="sng" algn="ctr">
-                      <a:solidFill>
-                        <a:srgbClr val="E6E6E6"/>
-                      </a:solidFill>
-                      <a:prstDash val="solid"/>
-                      <a:round/>
-                      <a:headEnd type="none" w="med" len="med"/>
-                      <a:tailEnd type="none" w="med" len="med"/>
-                    </a:lnR>
-                    <a:lnT w="6350" cap="flat" cmpd="sng" algn="ctr">
-                      <a:solidFill>
-                        <a:srgbClr val="E6E6E6"/>
-                      </a:solidFill>
-                      <a:prstDash val="solid"/>
-                      <a:round/>
-                      <a:headEnd type="none" w="med" len="med"/>
-                      <a:tailEnd type="none" w="med" len="med"/>
-                    </a:lnT>
-                    <a:lnB w="6350" cap="flat" cmpd="sng" algn="ctr">
-                      <a:solidFill>
-                        <a:srgbClr val="E6E6E6"/>
-                      </a:solidFill>
-                      <a:prstDash val="solid"/>
-                      <a:round/>
-                      <a:headEnd type="none" w="med" len="med"/>
-                      <a:tailEnd type="none" w="med" len="med"/>
-                    </a:lnB>
-                    <a:solidFill>
-                      <a:srgbClr val="FFFFFF"/>
-                    </a:solidFill>
-                  </a:tcPr>
-                </a:tc>
-                <a:tc>
-                  <a:txBody>
-                    <a:bodyPr/>
-                    <a:lstStyle/>
-                    <a:p>
-                      <a:pPr algn="ctr" indent="0" marL="0">
-                        <a:buNone/>
-                      </a:pPr>
-                      <a:r>
-                        <a:rPr lang="en-US" sz="900" dirty="0">
-                          <a:solidFill>
-                            <a:srgbClr val="31302E"/>
-                          </a:solidFill>
-                          <a:latin typeface="Inter" pitchFamily="34" charset="0"/>
-                          <a:ea typeface="Inter" pitchFamily="34" charset="-122"/>
-                          <a:cs typeface="Inter" pitchFamily="34" charset="-120"/>
-                        </a:rPr>
-                        <a:t>0.776 (0.816)</a:t>
-                      </a:r>
-                      <a:endParaRPr lang="en-US" sz="900" dirty="0">
-                        <a:latin typeface="Inter" charset="0"/>
-                        <a:ea typeface="Inter" charset="0"/>
-                        <a:cs typeface="Inter" charset="0"/>
-                      </a:endParaRPr>
-                    </a:p>
-                  </a:txBody>
-                  <a:tcPr marL="63500" marR="63500" marT="38100" marB="38100" anchor="ctr">
-                    <a:lnL w="6350" cap="flat" cmpd="sng" algn="ctr">
-                      <a:solidFill>
-                        <a:srgbClr val="E6E6E6"/>
-                      </a:solidFill>
-                      <a:prstDash val="solid"/>
-                      <a:round/>
-                      <a:headEnd type="none" w="med" len="med"/>
-                      <a:tailEnd type="none" w="med" len="med"/>
-                    </a:lnL>
-                    <a:lnR w="6350" cap="flat" cmpd="sng" algn="ctr">
-                      <a:solidFill>
-                        <a:srgbClr val="E6E6E6"/>
-                      </a:solidFill>
-                      <a:prstDash val="solid"/>
-                      <a:round/>
-                      <a:headEnd type="none" w="med" len="med"/>
-                      <a:tailEnd type="none" w="med" len="med"/>
-                    </a:lnR>
-                    <a:lnT w="6350" cap="flat" cmpd="sng" algn="ctr">
-                      <a:solidFill>
-                        <a:srgbClr val="E6E6E6"/>
-                      </a:solidFill>
-                      <a:prstDash val="solid"/>
-                      <a:round/>
-                      <a:headEnd type="none" w="med" len="med"/>
-                      <a:tailEnd type="none" w="med" len="med"/>
-                    </a:lnT>
-                    <a:lnB w="6350" cap="flat" cmpd="sng" algn="ctr">
-                      <a:solidFill>
-                        <a:srgbClr val="E6E6E6"/>
-                      </a:solidFill>
-                      <a:prstDash val="solid"/>
-                      <a:round/>
-                      <a:headEnd type="none" w="med" len="med"/>
-                      <a:tailEnd type="none" w="med" len="med"/>
-                    </a:lnB>
-                    <a:solidFill>
-                      <a:srgbClr val="FFFFFF"/>
-                    </a:solidFill>
-                  </a:tcPr>
-                </a:tc>
-              </a:tr>
-              <a:tr h="201168">
-                <a:tc>
-                  <a:txBody>
-                    <a:bodyPr/>
-                    <a:lstStyle/>
-                    <a:p>
-                      <a:pPr indent="0" marL="0">
-                        <a:buNone/>
-                      </a:pPr>
-                      <a:r>
-                        <a:rPr lang="en-US" sz="900" dirty="0">
-                          <a:solidFill>
-                            <a:srgbClr val="31302E"/>
-                          </a:solidFill>
-                          <a:latin typeface="Inter" pitchFamily="34" charset="0"/>
-                          <a:ea typeface="Inter" pitchFamily="34" charset="-122"/>
-                          <a:cs typeface="Inter" pitchFamily="34" charset="-120"/>
-                        </a:rPr>
-                        <a:t>E. coli (%)</a:t>
-                      </a:r>
-                      <a:endParaRPr lang="en-US" sz="900" dirty="0">
-                        <a:latin typeface="Inter" charset="0"/>
-                        <a:ea typeface="Inter" charset="0"/>
-                        <a:cs typeface="Inter" charset="0"/>
-                      </a:endParaRPr>
-                    </a:p>
-                  </a:txBody>
-                  <a:tcPr marL="63500" marR="63500" marT="38100" marB="38100" anchor="ctr">
-                    <a:lnL w="6350" cap="flat" cmpd="sng" algn="ctr">
-                      <a:solidFill>
-                        <a:srgbClr val="E6E6E6"/>
-                      </a:solidFill>
-                      <a:prstDash val="solid"/>
-                      <a:round/>
-                      <a:headEnd type="none" w="med" len="med"/>
-                      <a:tailEnd type="none" w="med" len="med"/>
-                    </a:lnL>
-                    <a:lnR w="6350" cap="flat" cmpd="sng" algn="ctr">
-                      <a:solidFill>
-                        <a:srgbClr val="E6E6E6"/>
-                      </a:solidFill>
-                      <a:prstDash val="solid"/>
-                      <a:round/>
-                      <a:headEnd type="none" w="med" len="med"/>
-                      <a:tailEnd type="none" w="med" len="med"/>
-                    </a:lnR>
-                    <a:lnT w="6350" cap="flat" cmpd="sng" algn="ctr">
-                      <a:solidFill>
-                        <a:srgbClr val="E6E6E6"/>
-                      </a:solidFill>
-                      <a:prstDash val="solid"/>
-                      <a:round/>
-                      <a:headEnd type="none" w="med" len="med"/>
-                      <a:tailEnd type="none" w="med" len="med"/>
-                    </a:lnT>
-                    <a:lnB w="6350" cap="flat" cmpd="sng" algn="ctr">
-                      <a:solidFill>
-                        <a:srgbClr val="E6E6E6"/>
-                      </a:solidFill>
-                      <a:prstDash val="solid"/>
-                      <a:round/>
-                      <a:headEnd type="none" w="med" len="med"/>
-                      <a:tailEnd type="none" w="med" len="med"/>
-                    </a:lnB>
-                    <a:solidFill>
-                      <a:srgbClr val="FFFFFF"/>
-                    </a:solidFill>
-                  </a:tcPr>
-                </a:tc>
-                <a:tc>
-                  <a:txBody>
-                    <a:bodyPr/>
-                    <a:lstStyle/>
-                    <a:p>
-                      <a:pPr algn="ctr" indent="0" marL="0">
-                        <a:buNone/>
-                      </a:pPr>
-                      <a:r>
-                        <a:rPr lang="en-US" sz="900" dirty="0">
-                          <a:solidFill>
-                            <a:srgbClr val="31302E"/>
-                          </a:solidFill>
-                          <a:latin typeface="Inter" pitchFamily="34" charset="0"/>
-                          <a:ea typeface="Inter" pitchFamily="34" charset="-122"/>
-                          <a:cs typeface="Inter" pitchFamily="34" charset="-120"/>
-                        </a:rPr>
-                        <a:t>47.5 (47.8)</a:t>
-                      </a:r>
-                      <a:endParaRPr lang="en-US" sz="900" dirty="0">
-                        <a:latin typeface="Inter" charset="0"/>
-                        <a:ea typeface="Inter" charset="0"/>
-                        <a:cs typeface="Inter" charset="0"/>
-                      </a:endParaRPr>
-                    </a:p>
-                  </a:txBody>
-                  <a:tcPr marL="63500" marR="63500" marT="38100" marB="38100" anchor="ctr">
-                    <a:lnL w="6350" cap="flat" cmpd="sng" algn="ctr">
-                      <a:solidFill>
-                        <a:srgbClr val="E6E6E6"/>
-                      </a:solidFill>
-                      <a:prstDash val="solid"/>
-                      <a:round/>
-                      <a:headEnd type="none" w="med" len="med"/>
-                      <a:tailEnd type="none" w="med" len="med"/>
-                    </a:lnL>
-                    <a:lnR w="6350" cap="flat" cmpd="sng" algn="ctr">
-                      <a:solidFill>
-                        <a:srgbClr val="E6E6E6"/>
-                      </a:solidFill>
-                      <a:prstDash val="solid"/>
-                      <a:round/>
-                      <a:headEnd type="none" w="med" len="med"/>
-                      <a:tailEnd type="none" w="med" len="med"/>
-                    </a:lnR>
-                    <a:lnT w="6350" cap="flat" cmpd="sng" algn="ctr">
-                      <a:solidFill>
-                        <a:srgbClr val="E6E6E6"/>
-                      </a:solidFill>
-                      <a:prstDash val="solid"/>
-                      <a:round/>
-                      <a:headEnd type="none" w="med" len="med"/>
-                      <a:tailEnd type="none" w="med" len="med"/>
-                    </a:lnT>
-                    <a:lnB w="6350" cap="flat" cmpd="sng" algn="ctr">
-                      <a:solidFill>
-                        <a:srgbClr val="E6E6E6"/>
-                      </a:solidFill>
-                      <a:prstDash val="solid"/>
-                      <a:round/>
-                      <a:headEnd type="none" w="med" len="med"/>
-                      <a:tailEnd type="none" w="med" len="med"/>
-                    </a:lnB>
-                    <a:solidFill>
-                      <a:srgbClr val="FFFFFF"/>
-                    </a:solidFill>
-                  </a:tcPr>
-                </a:tc>
-                <a:tc>
-                  <a:txBody>
-                    <a:bodyPr/>
-                    <a:lstStyle/>
-                    <a:p>
-                      <a:pPr algn="ctr" indent="0" marL="0">
-                        <a:buNone/>
-                      </a:pPr>
-                      <a:r>
-                        <a:rPr lang="en-US" sz="900" dirty="0">
-                          <a:solidFill>
-                            <a:srgbClr val="31302E"/>
-                          </a:solidFill>
-                          <a:latin typeface="Inter" pitchFamily="34" charset="0"/>
-                          <a:ea typeface="Inter" pitchFamily="34" charset="-122"/>
-                          <a:cs typeface="Inter" pitchFamily="34" charset="-120"/>
-                        </a:rPr>
-                        <a:t>50.4 (47.8)</a:t>
-                      </a:r>
-                      <a:endParaRPr lang="en-US" sz="900" dirty="0">
-                        <a:latin typeface="Inter" charset="0"/>
-                        <a:ea typeface="Inter" charset="0"/>
-                        <a:cs typeface="Inter" charset="0"/>
-                      </a:endParaRPr>
-                    </a:p>
-                  </a:txBody>
-                  <a:tcPr marL="63500" marR="63500" marT="38100" marB="38100" anchor="ctr">
-                    <a:lnL w="6350" cap="flat" cmpd="sng" algn="ctr">
-                      <a:solidFill>
-                        <a:srgbClr val="E6E6E6"/>
-                      </a:solidFill>
-                      <a:prstDash val="solid"/>
-                      <a:round/>
-                      <a:headEnd type="none" w="med" len="med"/>
-                      <a:tailEnd type="none" w="med" len="med"/>
-                    </a:lnL>
-                    <a:lnR w="6350" cap="flat" cmpd="sng" algn="ctr">
-                      <a:solidFill>
-                        <a:srgbClr val="E6E6E6"/>
-                      </a:solidFill>
-                      <a:prstDash val="solid"/>
-                      <a:round/>
-                      <a:headEnd type="none" w="med" len="med"/>
-                      <a:tailEnd type="none" w="med" len="med"/>
-                    </a:lnR>
-                    <a:lnT w="6350" cap="flat" cmpd="sng" algn="ctr">
-                      <a:solidFill>
-                        <a:srgbClr val="E6E6E6"/>
-                      </a:solidFill>
-                      <a:prstDash val="solid"/>
-                      <a:round/>
-                      <a:headEnd type="none" w="med" len="med"/>
-                      <a:tailEnd type="none" w="med" len="med"/>
-                    </a:lnT>
-                    <a:lnB w="6350" cap="flat" cmpd="sng" algn="ctr">
-                      <a:solidFill>
-                        <a:srgbClr val="E6E6E6"/>
-                      </a:solidFill>
-                      <a:prstDash val="solid"/>
-                      <a:round/>
-                      <a:headEnd type="none" w="med" len="med"/>
-                      <a:tailEnd type="none" w="med" len="med"/>
-                    </a:lnB>
-                    <a:solidFill>
-                      <a:srgbClr val="FFFFFF"/>
-                    </a:solidFill>
-                  </a:tcPr>
-                </a:tc>
-                <a:tc>
-                  <a:txBody>
-                    <a:bodyPr/>
-                    <a:lstStyle/>
-                    <a:p>
-                      <a:pPr algn="ctr" indent="0" marL="0">
-                        <a:buNone/>
-                      </a:pPr>
-                      <a:r>
-                        <a:rPr lang="en-US" sz="900" b="1" dirty="0">
-                          <a:solidFill>
-                            <a:srgbClr val="31302E"/>
-                          </a:solidFill>
-                          <a:latin typeface="Inter" pitchFamily="34" charset="0"/>
-                          <a:ea typeface="Inter" pitchFamily="34" charset="-122"/>
-                          <a:cs typeface="Inter" pitchFamily="34" charset="-120"/>
-                        </a:rPr>
-                        <a:t>57.3 (50.7)</a:t>
-                      </a:r>
-                      <a:endParaRPr lang="en-US" sz="900" dirty="0">
-                        <a:latin typeface="Inter" charset="0"/>
-                        <a:ea typeface="Inter" charset="0"/>
-                        <a:cs typeface="Inter" charset="0"/>
-                      </a:endParaRPr>
-                    </a:p>
-                  </a:txBody>
-                  <a:tcPr marL="63500" marR="63500" marT="38100" marB="38100" anchor="ctr">
-                    <a:lnL w="6350" cap="flat" cmpd="sng" algn="ctr">
-                      <a:solidFill>
-                        <a:srgbClr val="E6E6E6"/>
-                      </a:solidFill>
-                      <a:prstDash val="solid"/>
-                      <a:round/>
-                      <a:headEnd type="none" w="med" len="med"/>
-                      <a:tailEnd type="none" w="med" len="med"/>
-                    </a:lnL>
-                    <a:lnR w="6350" cap="flat" cmpd="sng" algn="ctr">
-                      <a:solidFill>
-                        <a:srgbClr val="E6E6E6"/>
-                      </a:solidFill>
-                      <a:prstDash val="solid"/>
-                      <a:round/>
-                      <a:headEnd type="none" w="med" len="med"/>
-                      <a:tailEnd type="none" w="med" len="med"/>
-                    </a:lnR>
-                    <a:lnT w="6350" cap="flat" cmpd="sng" algn="ctr">
-                      <a:solidFill>
-                        <a:srgbClr val="E6E6E6"/>
-                      </a:solidFill>
-                      <a:prstDash val="solid"/>
-                      <a:round/>
-                      <a:headEnd type="none" w="med" len="med"/>
-                      <a:tailEnd type="none" w="med" len="med"/>
-                    </a:lnT>
-                    <a:lnB w="6350" cap="flat" cmpd="sng" algn="ctr">
-                      <a:solidFill>
-                        <a:srgbClr val="E6E6E6"/>
-                      </a:solidFill>
-                      <a:prstDash val="solid"/>
-                      <a:round/>
-                      <a:headEnd type="none" w="med" len="med"/>
-                      <a:tailEnd type="none" w="med" len="med"/>
-                    </a:lnB>
-                    <a:solidFill>
-                      <a:srgbClr val="FFFFFF"/>
-                    </a:solidFill>
-                  </a:tcPr>
-                </a:tc>
-                <a:tc>
-                  <a:txBody>
-                    <a:bodyPr/>
-                    <a:lstStyle/>
-                    <a:p>
-                      <a:pPr algn="ctr" indent="0" marL="0">
-                        <a:buNone/>
-                      </a:pPr>
-                      <a:r>
-                        <a:rPr lang="en-US" sz="900" b="1" dirty="0">
-                          <a:solidFill>
-                            <a:srgbClr val="31302E"/>
-                          </a:solidFill>
-                          <a:latin typeface="Inter" pitchFamily="34" charset="0"/>
-                          <a:ea typeface="Inter" pitchFamily="34" charset="-122"/>
-                          <a:cs typeface="Inter" pitchFamily="34" charset="-120"/>
-                        </a:rPr>
-                        <a:t>58.7 (50.7)</a:t>
-                      </a:r>
-                      <a:endParaRPr lang="en-US" sz="900" dirty="0">
-                        <a:latin typeface="Inter" charset="0"/>
-                        <a:ea typeface="Inter" charset="0"/>
-                        <a:cs typeface="Inter" charset="0"/>
-                      </a:endParaRPr>
-                    </a:p>
-                  </a:txBody>
-                  <a:tcPr marL="63500" marR="63500" marT="38100" marB="38100" anchor="ctr">
-                    <a:lnL w="6350" cap="flat" cmpd="sng" algn="ctr">
-                      <a:solidFill>
-                        <a:srgbClr val="E6E6E6"/>
-                      </a:solidFill>
-                      <a:prstDash val="solid"/>
-                      <a:round/>
-                      <a:headEnd type="none" w="med" len="med"/>
-                      <a:tailEnd type="none" w="med" len="med"/>
-                    </a:lnL>
-                    <a:lnR w="6350" cap="flat" cmpd="sng" algn="ctr">
-                      <a:solidFill>
-                        <a:srgbClr val="E6E6E6"/>
-                      </a:solidFill>
-                      <a:prstDash val="solid"/>
-                      <a:round/>
-                      <a:headEnd type="none" w="med" len="med"/>
-                      <a:tailEnd type="none" w="med" len="med"/>
-                    </a:lnR>
-                    <a:lnT w="6350" cap="flat" cmpd="sng" algn="ctr">
-                      <a:solidFill>
-                        <a:srgbClr val="E6E6E6"/>
-                      </a:solidFill>
-                      <a:prstDash val="solid"/>
-                      <a:round/>
-                      <a:headEnd type="none" w="med" len="med"/>
-                      <a:tailEnd type="none" w="med" len="med"/>
-                    </a:lnT>
-                    <a:lnB w="6350" cap="flat" cmpd="sng" algn="ctr">
-                      <a:solidFill>
-                        <a:srgbClr val="E6E6E6"/>
-                      </a:solidFill>
-                      <a:prstDash val="solid"/>
-                      <a:round/>
-                      <a:headEnd type="none" w="med" len="med"/>
-                      <a:tailEnd type="none" w="med" len="med"/>
-                    </a:lnB>
-                    <a:solidFill>
-                      <a:srgbClr val="FFFFFF"/>
-                    </a:solidFill>
-                  </a:tcPr>
-                </a:tc>
-                <a:tc>
-                  <a:txBody>
-                    <a:bodyPr/>
-                    <a:lstStyle/>
-                    <a:p>
-                      <a:pPr algn="ctr" indent="0" marL="0">
-                        <a:buNone/>
-                      </a:pPr>
-                      <a:r>
-                        <a:rPr lang="en-US" sz="900" b="1" dirty="0">
-                          <a:solidFill>
-                            <a:srgbClr val="31302E"/>
-                          </a:solidFill>
-                          <a:latin typeface="Inter" pitchFamily="34" charset="0"/>
-                          <a:ea typeface="Inter" pitchFamily="34" charset="-122"/>
-                          <a:cs typeface="Inter" pitchFamily="34" charset="-120"/>
-                        </a:rPr>
-                        <a:t>57.6 (50.7)</a:t>
-                      </a:r>
-                      <a:endParaRPr lang="en-US" sz="900" dirty="0">
-                        <a:latin typeface="Inter" charset="0"/>
-                        <a:ea typeface="Inter" charset="0"/>
-                        <a:cs typeface="Inter" charset="0"/>
-                      </a:endParaRPr>
-                    </a:p>
-                  </a:txBody>
-                  <a:tcPr marL="63500" marR="63500" marT="38100" marB="38100" anchor="ctr">
-                    <a:lnL w="6350" cap="flat" cmpd="sng" algn="ctr">
-                      <a:solidFill>
-                        <a:srgbClr val="E6E6E6"/>
-                      </a:solidFill>
-                      <a:prstDash val="solid"/>
-                      <a:round/>
-                      <a:headEnd type="none" w="med" len="med"/>
-                      <a:tailEnd type="none" w="med" len="med"/>
-                    </a:lnL>
-                    <a:lnR w="6350" cap="flat" cmpd="sng" algn="ctr">
-                      <a:solidFill>
-                        <a:srgbClr val="E6E6E6"/>
-                      </a:solidFill>
-                      <a:prstDash val="solid"/>
-                      <a:round/>
-                      <a:headEnd type="none" w="med" len="med"/>
-                      <a:tailEnd type="none" w="med" len="med"/>
-                    </a:lnR>
-                    <a:lnT w="6350" cap="flat" cmpd="sng" algn="ctr">
-                      <a:solidFill>
-                        <a:srgbClr val="E6E6E6"/>
-                      </a:solidFill>
-                      <a:prstDash val="solid"/>
-                      <a:round/>
-                      <a:headEnd type="none" w="med" len="med"/>
-                      <a:tailEnd type="none" w="med" len="med"/>
-                    </a:lnT>
-                    <a:lnB w="6350" cap="flat" cmpd="sng" algn="ctr">
-                      <a:solidFill>
-                        <a:srgbClr val="E6E6E6"/>
-                      </a:solidFill>
-                      <a:prstDash val="solid"/>
-                      <a:round/>
-                      <a:headEnd type="none" w="med" len="med"/>
-                      <a:tailEnd type="none" w="med" len="med"/>
-                    </a:lnB>
-                    <a:solidFill>
-                      <a:srgbClr val="FFFFFF"/>
-                    </a:solidFill>
-                  </a:tcPr>
-                </a:tc>
-                <a:tc>
-                  <a:txBody>
-                    <a:bodyPr/>
-                    <a:lstStyle/>
-                    <a:p>
-                      <a:pPr algn="ctr" indent="0" marL="0">
-                        <a:buNone/>
-                      </a:pPr>
-                      <a:r>
-                        <a:rPr lang="en-US" sz="900" dirty="0">
-                          <a:solidFill>
-                            <a:srgbClr val="31302E"/>
-                          </a:solidFill>
-                          <a:latin typeface="Inter" pitchFamily="34" charset="0"/>
-                          <a:ea typeface="Inter" pitchFamily="34" charset="-122"/>
-                          <a:cs typeface="Inter" pitchFamily="34" charset="-120"/>
-                        </a:rPr>
-                        <a:t>52.1 (50.1)</a:t>
-                      </a:r>
-                      <a:endParaRPr lang="en-US" sz="900" dirty="0">
-                        <a:latin typeface="Inter" charset="0"/>
-                        <a:ea typeface="Inter" charset="0"/>
-                        <a:cs typeface="Inter" charset="0"/>
-                      </a:endParaRPr>
-                    </a:p>
-                  </a:txBody>
-                  <a:tcPr marL="63500" marR="63500" marT="38100" marB="38100" anchor="ctr">
-                    <a:lnL w="6350" cap="flat" cmpd="sng" algn="ctr">
-                      <a:solidFill>
-                        <a:srgbClr val="E6E6E6"/>
-                      </a:solidFill>
-                      <a:prstDash val="solid"/>
-                      <a:round/>
-                      <a:headEnd type="none" w="med" len="med"/>
-                      <a:tailEnd type="none" w="med" len="med"/>
-                    </a:lnL>
-                    <a:lnR w="6350" cap="flat" cmpd="sng" algn="ctr">
-                      <a:solidFill>
-                        <a:srgbClr val="E6E6E6"/>
-                      </a:solidFill>
-                      <a:prstDash val="solid"/>
-                      <a:round/>
-                      <a:headEnd type="none" w="med" len="med"/>
-                      <a:tailEnd type="none" w="med" len="med"/>
-                    </a:lnR>
-                    <a:lnT w="6350" cap="flat" cmpd="sng" algn="ctr">
-                      <a:solidFill>
-                        <a:srgbClr val="E6E6E6"/>
-                      </a:solidFill>
-                      <a:prstDash val="solid"/>
-                      <a:round/>
-                      <a:headEnd type="none" w="med" len="med"/>
-                      <a:tailEnd type="none" w="med" len="med"/>
-                    </a:lnT>
-                    <a:lnB w="6350" cap="flat" cmpd="sng" algn="ctr">
-                      <a:solidFill>
-                        <a:srgbClr val="E6E6E6"/>
-                      </a:solidFill>
-                      <a:prstDash val="solid"/>
-                      <a:round/>
-                      <a:headEnd type="none" w="med" len="med"/>
-                      <a:tailEnd type="none" w="med" len="med"/>
-                    </a:lnB>
-                    <a:solidFill>
-                      <a:srgbClr val="FFFFFF"/>
-                    </a:solidFill>
-                  </a:tcPr>
-                </a:tc>
-                <a:tc>
-                  <a:txBody>
-                    <a:bodyPr/>
-                    <a:lstStyle/>
-                    <a:p>
-                      <a:pPr algn="ctr" indent="0" marL="0">
-                        <a:buNone/>
-                      </a:pPr>
-                      <a:r>
-                        <a:rPr lang="en-US" sz="900" dirty="0">
-                          <a:solidFill>
-                            <a:srgbClr val="31302E"/>
-                          </a:solidFill>
-                          <a:latin typeface="Inter" pitchFamily="34" charset="0"/>
-                          <a:ea typeface="Inter" pitchFamily="34" charset="-122"/>
-                          <a:cs typeface="Inter" pitchFamily="34" charset="-120"/>
-                        </a:rPr>
-                        <a:t>53.9 (50.1)</a:t>
-                      </a:r>
-                      <a:endParaRPr lang="en-US" sz="900" dirty="0">
-                        <a:latin typeface="Inter" charset="0"/>
-                        <a:ea typeface="Inter" charset="0"/>
-                        <a:cs typeface="Inter" charset="0"/>
-                      </a:endParaRPr>
-                    </a:p>
-                  </a:txBody>
-                  <a:tcPr marL="63500" marR="63500" marT="38100" marB="38100" anchor="ctr">
-                    <a:lnL w="6350" cap="flat" cmpd="sng" algn="ctr">
-                      <a:solidFill>
-                        <a:srgbClr val="E6E6E6"/>
-                      </a:solidFill>
-                      <a:prstDash val="solid"/>
-                      <a:round/>
-                      <a:headEnd type="none" w="med" len="med"/>
-                      <a:tailEnd type="none" w="med" len="med"/>
-                    </a:lnL>
-                    <a:lnR w="6350" cap="flat" cmpd="sng" algn="ctr">
-                      <a:solidFill>
-                        <a:srgbClr val="E6E6E6"/>
-                      </a:solidFill>
-                      <a:prstDash val="solid"/>
-                      <a:round/>
-                      <a:headEnd type="none" w="med" len="med"/>
-                      <a:tailEnd type="none" w="med" len="med"/>
-                    </a:lnR>
-                    <a:lnT w="6350" cap="flat" cmpd="sng" algn="ctr">
-                      <a:solidFill>
-                        <a:srgbClr val="E6E6E6"/>
-                      </a:solidFill>
-                      <a:prstDash val="solid"/>
-                      <a:round/>
-                      <a:headEnd type="none" w="med" len="med"/>
-                      <a:tailEnd type="none" w="med" len="med"/>
-                    </a:lnT>
-                    <a:lnB w="6350" cap="flat" cmpd="sng" algn="ctr">
-                      <a:solidFill>
-                        <a:srgbClr val="E6E6E6"/>
-                      </a:solidFill>
-                      <a:prstDash val="solid"/>
-                      <a:round/>
-                      <a:headEnd type="none" w="med" len="med"/>
-                      <a:tailEnd type="none" w="med" len="med"/>
-                    </a:lnB>
-                    <a:solidFill>
-                      <a:srgbClr val="FFFFFF"/>
-                    </a:solidFill>
-                  </a:tcPr>
-                </a:tc>
-                <a:tc>
-                  <a:txBody>
-                    <a:bodyPr/>
-                    <a:lstStyle/>
-                    <a:p>
-                      <a:pPr algn="ctr" indent="0" marL="0">
-                        <a:buNone/>
-                      </a:pPr>
-                      <a:r>
-                        <a:rPr lang="en-US" sz="900" dirty="0">
-                          <a:solidFill>
-                            <a:srgbClr val="31302E"/>
-                          </a:solidFill>
-                          <a:latin typeface="Inter" pitchFamily="34" charset="0"/>
-                          <a:ea typeface="Inter" pitchFamily="34" charset="-122"/>
-                          <a:cs typeface="Inter" pitchFamily="34" charset="-120"/>
-                        </a:rPr>
-                        <a:t>52.5 (50.1)</a:t>
-                      </a:r>
-                      <a:endParaRPr lang="en-US" sz="900" dirty="0">
-                        <a:latin typeface="Inter" charset="0"/>
-                        <a:ea typeface="Inter" charset="0"/>
-                        <a:cs typeface="Inter" charset="0"/>
-                      </a:endParaRPr>
-                    </a:p>
-                  </a:txBody>
-                  <a:tcPr marL="63500" marR="63500" marT="38100" marB="38100" anchor="ctr">
-                    <a:lnL w="6350" cap="flat" cmpd="sng" algn="ctr">
-                      <a:solidFill>
-                        <a:srgbClr val="E6E6E6"/>
-                      </a:solidFill>
-                      <a:prstDash val="solid"/>
-                      <a:round/>
-                      <a:headEnd type="none" w="med" len="med"/>
-                      <a:tailEnd type="none" w="med" len="med"/>
-                    </a:lnL>
-                    <a:lnR w="6350" cap="flat" cmpd="sng" algn="ctr">
-                      <a:solidFill>
-                        <a:srgbClr val="E6E6E6"/>
-                      </a:solidFill>
-                      <a:prstDash val="solid"/>
-                      <a:round/>
-                      <a:headEnd type="none" w="med" len="med"/>
-                      <a:tailEnd type="none" w="med" len="med"/>
-                    </a:lnR>
-                    <a:lnT w="6350" cap="flat" cmpd="sng" algn="ctr">
-                      <a:solidFill>
-                        <a:srgbClr val="E6E6E6"/>
-                      </a:solidFill>
-                      <a:prstDash val="solid"/>
-                      <a:round/>
-                      <a:headEnd type="none" w="med" len="med"/>
-                      <a:tailEnd type="none" w="med" len="med"/>
-                    </a:lnT>
-                    <a:lnB w="6350" cap="flat" cmpd="sng" algn="ctr">
-                      <a:solidFill>
-                        <a:srgbClr val="E6E6E6"/>
-                      </a:solidFill>
-                      <a:prstDash val="solid"/>
-                      <a:round/>
-                      <a:headEnd type="none" w="med" len="med"/>
-                      <a:tailEnd type="none" w="med" len="med"/>
-                    </a:lnB>
-                    <a:solidFill>
-                      <a:srgbClr val="FFFFFF"/>
-                    </a:solidFill>
-                  </a:tcPr>
-                </a:tc>
-              </a:tr>
-              <a:tr h="201168">
-                <a:tc>
-                  <a:txBody>
-                    <a:bodyPr/>
-                    <a:lstStyle/>
-                    <a:p>
-                      <a:pPr indent="0" marL="0">
-                        <a:buNone/>
-                      </a:pPr>
-                      <a:r>
-                        <a:rPr lang="en-US" sz="900" dirty="0">
-                          <a:solidFill>
-                            <a:srgbClr val="31302E"/>
-                          </a:solidFill>
-                          <a:latin typeface="Inter" pitchFamily="34" charset="0"/>
-                          <a:ea typeface="Inter" pitchFamily="34" charset="-122"/>
-                          <a:cs typeface="Inter" pitchFamily="34" charset="-120"/>
-                        </a:rPr>
-                        <a:t>Stability</a:t>
-                      </a:r>
-                      <a:endParaRPr lang="en-US" sz="900" dirty="0">
-                        <a:latin typeface="Inter" charset="0"/>
-                        <a:ea typeface="Inter" charset="0"/>
-                        <a:cs typeface="Inter" charset="0"/>
-                      </a:endParaRPr>
-                    </a:p>
-                  </a:txBody>
-                  <a:tcPr marL="63500" marR="63500" marT="38100" marB="38100" anchor="ctr">
-                    <a:lnL w="6350" cap="flat" cmpd="sng" algn="ctr">
-                      <a:solidFill>
-                        <a:srgbClr val="E6E6E6"/>
-                      </a:solidFill>
-                      <a:prstDash val="solid"/>
-                      <a:round/>
-                      <a:headEnd type="none" w="med" len="med"/>
-                      <a:tailEnd type="none" w="med" len="med"/>
-                    </a:lnL>
-                    <a:lnR w="6350" cap="flat" cmpd="sng" algn="ctr">
-                      <a:solidFill>
-                        <a:srgbClr val="E6E6E6"/>
-                      </a:solidFill>
-                      <a:prstDash val="solid"/>
-                      <a:round/>
-                      <a:headEnd type="none" w="med" len="med"/>
-                      <a:tailEnd type="none" w="med" len="med"/>
-                    </a:lnR>
-                    <a:lnT w="6350" cap="flat" cmpd="sng" algn="ctr">
-                      <a:solidFill>
-                        <a:srgbClr val="E6E6E6"/>
-                      </a:solidFill>
-                      <a:prstDash val="solid"/>
-                      <a:round/>
-                      <a:headEnd type="none" w="med" len="med"/>
-                      <a:tailEnd type="none" w="med" len="med"/>
-                    </a:lnT>
-                    <a:lnB w="6350" cap="flat" cmpd="sng" algn="ctr">
-                      <a:solidFill>
-                        <a:srgbClr val="E6E6E6"/>
-                      </a:solidFill>
-                      <a:prstDash val="solid"/>
-                      <a:round/>
-                      <a:headEnd type="none" w="med" len="med"/>
-                      <a:tailEnd type="none" w="med" len="med"/>
-                    </a:lnB>
-                    <a:solidFill>
-                      <a:srgbClr val="FFFFFF"/>
-                    </a:solidFill>
-                  </a:tcPr>
-                </a:tc>
-                <a:tc>
-                  <a:txBody>
-                    <a:bodyPr/>
-                    <a:lstStyle/>
-                    <a:p>
-                      <a:pPr algn="ctr" indent="0" marL="0">
-                        <a:buNone/>
-                      </a:pPr>
-                      <a:r>
-                        <a:rPr lang="en-US" sz="900" dirty="0">
-                          <a:solidFill>
-                            <a:srgbClr val="31302E"/>
-                          </a:solidFill>
-                          <a:latin typeface="Inter" pitchFamily="34" charset="0"/>
-                          <a:ea typeface="Inter" pitchFamily="34" charset="-122"/>
-                          <a:cs typeface="Inter" pitchFamily="34" charset="-120"/>
-                        </a:rPr>
-                        <a:t>not run</a:t>
-                      </a:r>
-                      <a:endParaRPr lang="en-US" sz="900" dirty="0">
-                        <a:latin typeface="Inter" charset="0"/>
-                        <a:ea typeface="Inter" charset="0"/>
-                        <a:cs typeface="Inter" charset="0"/>
-                      </a:endParaRPr>
-                    </a:p>
-                  </a:txBody>
-                  <a:tcPr marL="63500" marR="63500" marT="38100" marB="38100" anchor="ctr">
-                    <a:lnL w="6350" cap="flat" cmpd="sng" algn="ctr">
-                      <a:solidFill>
-                        <a:srgbClr val="E6E6E6"/>
-                      </a:solidFill>
-                      <a:prstDash val="solid"/>
-                      <a:round/>
-                      <a:headEnd type="none" w="med" len="med"/>
-                      <a:tailEnd type="none" w="med" len="med"/>
-                    </a:lnL>
-                    <a:lnR w="6350" cap="flat" cmpd="sng" algn="ctr">
-                      <a:solidFill>
-                        <a:srgbClr val="E6E6E6"/>
-                      </a:solidFill>
-                      <a:prstDash val="solid"/>
-                      <a:round/>
-                      <a:headEnd type="none" w="med" len="med"/>
-                      <a:tailEnd type="none" w="med" len="med"/>
-                    </a:lnR>
-                    <a:lnT w="6350" cap="flat" cmpd="sng" algn="ctr">
-                      <a:solidFill>
-                        <a:srgbClr val="E6E6E6"/>
-                      </a:solidFill>
-                      <a:prstDash val="solid"/>
-                      <a:round/>
-                      <a:headEnd type="none" w="med" len="med"/>
-                      <a:tailEnd type="none" w="med" len="med"/>
-                    </a:lnT>
-                    <a:lnB w="6350" cap="flat" cmpd="sng" algn="ctr">
-                      <a:solidFill>
-                        <a:srgbClr val="E6E6E6"/>
-                      </a:solidFill>
-                      <a:prstDash val="solid"/>
-                      <a:round/>
-                      <a:headEnd type="none" w="med" len="med"/>
-                      <a:tailEnd type="none" w="med" len="med"/>
-                    </a:lnB>
-                    <a:solidFill>
-                      <a:srgbClr val="FFFFFF"/>
-                    </a:solidFill>
-                  </a:tcPr>
-                </a:tc>
-                <a:tc>
-                  <a:txBody>
-                    <a:bodyPr/>
-                    <a:lstStyle/>
-                    <a:p>
-                      <a:pPr algn="ctr" indent="0" marL="0">
-                        <a:buNone/>
-                      </a:pPr>
-                      <a:r>
-                        <a:rPr lang="en-US" sz="900" dirty="0">
-                          <a:solidFill>
-                            <a:srgbClr val="31302E"/>
-                          </a:solidFill>
-                          <a:latin typeface="Inter" pitchFamily="34" charset="0"/>
-                          <a:ea typeface="Inter" pitchFamily="34" charset="-122"/>
-                          <a:cs typeface="Inter" pitchFamily="34" charset="-120"/>
-                        </a:rPr>
-                        <a:t>not run</a:t>
-                      </a:r>
-                      <a:endParaRPr lang="en-US" sz="900" dirty="0">
-                        <a:latin typeface="Inter" charset="0"/>
-                        <a:ea typeface="Inter" charset="0"/>
-                        <a:cs typeface="Inter" charset="0"/>
-                      </a:endParaRPr>
-                    </a:p>
-                  </a:txBody>
-                  <a:tcPr marL="63500" marR="63500" marT="38100" marB="38100" anchor="ctr">
-                    <a:lnL w="6350" cap="flat" cmpd="sng" algn="ctr">
-                      <a:solidFill>
-                        <a:srgbClr val="E6E6E6"/>
-                      </a:solidFill>
-                      <a:prstDash val="solid"/>
-                      <a:round/>
-                      <a:headEnd type="none" w="med" len="med"/>
-                      <a:tailEnd type="none" w="med" len="med"/>
-                    </a:lnL>
-                    <a:lnR w="6350" cap="flat" cmpd="sng" algn="ctr">
-                      <a:solidFill>
-                        <a:srgbClr val="E6E6E6"/>
-                      </a:solidFill>
-                      <a:prstDash val="solid"/>
-                      <a:round/>
-                      <a:headEnd type="none" w="med" len="med"/>
-                      <a:tailEnd type="none" w="med" len="med"/>
-                    </a:lnR>
-                    <a:lnT w="6350" cap="flat" cmpd="sng" algn="ctr">
-                      <a:solidFill>
-                        <a:srgbClr val="E6E6E6"/>
-                      </a:solidFill>
-                      <a:prstDash val="solid"/>
-                      <a:round/>
-                      <a:headEnd type="none" w="med" len="med"/>
-                      <a:tailEnd type="none" w="med" len="med"/>
-                    </a:lnT>
-                    <a:lnB w="6350" cap="flat" cmpd="sng" algn="ctr">
-                      <a:solidFill>
-                        <a:srgbClr val="E6E6E6"/>
-                      </a:solidFill>
-                      <a:prstDash val="solid"/>
-                      <a:round/>
-                      <a:headEnd type="none" w="med" len="med"/>
-                      <a:tailEnd type="none" w="med" len="med"/>
-                    </a:lnB>
-                    <a:solidFill>
-                      <a:srgbClr val="FFFFFF"/>
-                    </a:solidFill>
-                  </a:tcPr>
-                </a:tc>
-                <a:tc>
-                  <a:txBody>
-                    <a:bodyPr/>
-                    <a:lstStyle/>
-                    <a:p>
-                      <a:pPr algn="ctr" indent="0" marL="0">
-                        <a:buNone/>
-                      </a:pPr>
-                      <a:r>
-                        <a:rPr lang="en-US" sz="900" dirty="0">
-                          <a:solidFill>
-                            <a:srgbClr val="31302E"/>
-                          </a:solidFill>
-                          <a:latin typeface="Inter" pitchFamily="34" charset="0"/>
-                          <a:ea typeface="Inter" pitchFamily="34" charset="-122"/>
-                          <a:cs typeface="Inter" pitchFamily="34" charset="-120"/>
-                        </a:rPr>
-                        <a:t>not run</a:t>
-                      </a:r>
-                      <a:endParaRPr lang="en-US" sz="900" dirty="0">
-                        <a:latin typeface="Inter" charset="0"/>
-                        <a:ea typeface="Inter" charset="0"/>
-                        <a:cs typeface="Inter" charset="0"/>
-                      </a:endParaRPr>
-                    </a:p>
-                  </a:txBody>
-                  <a:tcPr marL="63500" marR="63500" marT="38100" marB="38100" anchor="ctr">
-                    <a:lnL w="6350" cap="flat" cmpd="sng" algn="ctr">
-                      <a:solidFill>
-                        <a:srgbClr val="E6E6E6"/>
-                      </a:solidFill>
-                      <a:prstDash val="solid"/>
-                      <a:round/>
-                      <a:headEnd type="none" w="med" len="med"/>
-                      <a:tailEnd type="none" w="med" len="med"/>
-                    </a:lnL>
-                    <a:lnR w="6350" cap="flat" cmpd="sng" algn="ctr">
-                      <a:solidFill>
-                        <a:srgbClr val="E6E6E6"/>
-                      </a:solidFill>
-                      <a:prstDash val="solid"/>
-                      <a:round/>
-                      <a:headEnd type="none" w="med" len="med"/>
-                      <a:tailEnd type="none" w="med" len="med"/>
-                    </a:lnR>
-                    <a:lnT w="6350" cap="flat" cmpd="sng" algn="ctr">
-                      <a:solidFill>
-                        <a:srgbClr val="E6E6E6"/>
-                      </a:solidFill>
-                      <a:prstDash val="solid"/>
-                      <a:round/>
-                      <a:headEnd type="none" w="med" len="med"/>
-                      <a:tailEnd type="none" w="med" len="med"/>
-                    </a:lnT>
-                    <a:lnB w="6350" cap="flat" cmpd="sng" algn="ctr">
-                      <a:solidFill>
-                        <a:srgbClr val="E6E6E6"/>
-                      </a:solidFill>
-                      <a:prstDash val="solid"/>
-                      <a:round/>
-                      <a:headEnd type="none" w="med" len="med"/>
-                      <a:tailEnd type="none" w="med" len="med"/>
-                    </a:lnB>
-                    <a:solidFill>
-                      <a:srgbClr val="FFFFFF"/>
-                    </a:solidFill>
-                  </a:tcPr>
-                </a:tc>
-                <a:tc>
-                  <a:txBody>
-                    <a:bodyPr/>
-                    <a:lstStyle/>
-                    <a:p>
-                      <a:pPr algn="ctr" indent="0" marL="0">
-                        <a:buNone/>
-                      </a:pPr>
-                      <a:r>
-                        <a:rPr lang="en-US" sz="900" dirty="0">
-                          <a:solidFill>
-                            <a:srgbClr val="31302E"/>
-                          </a:solidFill>
-                          <a:latin typeface="Inter" pitchFamily="34" charset="0"/>
-                          <a:ea typeface="Inter" pitchFamily="34" charset="-122"/>
-                          <a:cs typeface="Inter" pitchFamily="34" charset="-120"/>
-                        </a:rPr>
-                        <a:t>0.565 (0.552)</a:t>
-                      </a:r>
-                      <a:endParaRPr lang="en-US" sz="900" dirty="0">
-                        <a:latin typeface="Inter" charset="0"/>
-                        <a:ea typeface="Inter" charset="0"/>
-                        <a:cs typeface="Inter" charset="0"/>
-                      </a:endParaRPr>
-                    </a:p>
-                  </a:txBody>
-                  <a:tcPr marL="63500" marR="63500" marT="38100" marB="38100" anchor="ctr">
-                    <a:lnL w="6350" cap="flat" cmpd="sng" algn="ctr">
-                      <a:solidFill>
-                        <a:srgbClr val="E6E6E6"/>
-                      </a:solidFill>
-                      <a:prstDash val="solid"/>
-                      <a:round/>
-                      <a:headEnd type="none" w="med" len="med"/>
-                      <a:tailEnd type="none" w="med" len="med"/>
-                    </a:lnL>
-                    <a:lnR w="6350" cap="flat" cmpd="sng" algn="ctr">
-                      <a:solidFill>
-                        <a:srgbClr val="E6E6E6"/>
-                      </a:solidFill>
-                      <a:prstDash val="solid"/>
-                      <a:round/>
-                      <a:headEnd type="none" w="med" len="med"/>
-                      <a:tailEnd type="none" w="med" len="med"/>
-                    </a:lnR>
-                    <a:lnT w="6350" cap="flat" cmpd="sng" algn="ctr">
-                      <a:solidFill>
-                        <a:srgbClr val="E6E6E6"/>
-                      </a:solidFill>
-                      <a:prstDash val="solid"/>
-                      <a:round/>
-                      <a:headEnd type="none" w="med" len="med"/>
-                      <a:tailEnd type="none" w="med" len="med"/>
-                    </a:lnT>
-                    <a:lnB w="6350" cap="flat" cmpd="sng" algn="ctr">
-                      <a:solidFill>
-                        <a:srgbClr val="E6E6E6"/>
-                      </a:solidFill>
-                      <a:prstDash val="solid"/>
-                      <a:round/>
-                      <a:headEnd type="none" w="med" len="med"/>
-                      <a:tailEnd type="none" w="med" len="med"/>
-                    </a:lnB>
-                    <a:solidFill>
-                      <a:srgbClr val="FFFFFF"/>
-                    </a:solidFill>
-                  </a:tcPr>
-                </a:tc>
-                <a:tc>
-                  <a:txBody>
-                    <a:bodyPr/>
-                    <a:lstStyle/>
-                    <a:p>
-                      <a:pPr algn="ctr" indent="0" marL="0">
-                        <a:buNone/>
-                      </a:pPr>
-                      <a:r>
-                        <a:rPr lang="en-US" sz="900" dirty="0">
-                          <a:solidFill>
-                            <a:srgbClr val="31302E"/>
-                          </a:solidFill>
-                          <a:latin typeface="Inter" pitchFamily="34" charset="0"/>
-                          <a:ea typeface="Inter" pitchFamily="34" charset="-122"/>
-                          <a:cs typeface="Inter" pitchFamily="34" charset="-120"/>
-                        </a:rPr>
-                        <a:t>0.559 (0.552)</a:t>
-                      </a:r>
-                      <a:endParaRPr lang="en-US" sz="900" dirty="0">
-                        <a:latin typeface="Inter" charset="0"/>
-                        <a:ea typeface="Inter" charset="0"/>
-                        <a:cs typeface="Inter" charset="0"/>
-                      </a:endParaRPr>
-                    </a:p>
-                  </a:txBody>
-                  <a:tcPr marL="63500" marR="63500" marT="38100" marB="38100" anchor="ctr">
-                    <a:lnL w="6350" cap="flat" cmpd="sng" algn="ctr">
-                      <a:solidFill>
-                        <a:srgbClr val="E6E6E6"/>
-                      </a:solidFill>
-                      <a:prstDash val="solid"/>
-                      <a:round/>
-                      <a:headEnd type="none" w="med" len="med"/>
-                      <a:tailEnd type="none" w="med" len="med"/>
-                    </a:lnL>
-                    <a:lnR w="6350" cap="flat" cmpd="sng" algn="ctr">
-                      <a:solidFill>
-                        <a:srgbClr val="E6E6E6"/>
-                      </a:solidFill>
-                      <a:prstDash val="solid"/>
-                      <a:round/>
-                      <a:headEnd type="none" w="med" len="med"/>
-                      <a:tailEnd type="none" w="med" len="med"/>
-                    </a:lnR>
-                    <a:lnT w="6350" cap="flat" cmpd="sng" algn="ctr">
-                      <a:solidFill>
-                        <a:srgbClr val="E6E6E6"/>
-                      </a:solidFill>
-                      <a:prstDash val="solid"/>
-                      <a:round/>
-                      <a:headEnd type="none" w="med" len="med"/>
-                      <a:tailEnd type="none" w="med" len="med"/>
-                    </a:lnT>
-                    <a:lnB w="6350" cap="flat" cmpd="sng" algn="ctr">
-                      <a:solidFill>
-                        <a:srgbClr val="E6E6E6"/>
-                      </a:solidFill>
-                      <a:prstDash val="solid"/>
-                      <a:round/>
-                      <a:headEnd type="none" w="med" len="med"/>
-                      <a:tailEnd type="none" w="med" len="med"/>
-                    </a:lnB>
-                    <a:solidFill>
-                      <a:srgbClr val="FFFFFF"/>
-                    </a:solidFill>
-                  </a:tcPr>
-                </a:tc>
-                <a:tc>
-                  <a:txBody>
-                    <a:bodyPr/>
-                    <a:lstStyle/>
-                    <a:p>
-                      <a:pPr algn="ctr" indent="0" marL="0">
-                        <a:buNone/>
-                      </a:pPr>
-                      <a:r>
-                        <a:rPr lang="en-US" sz="900" dirty="0">
-                          <a:solidFill>
-                            <a:srgbClr val="31302E"/>
-                          </a:solidFill>
-                          <a:latin typeface="Inter" pitchFamily="34" charset="0"/>
-                          <a:ea typeface="Inter" pitchFamily="34" charset="-122"/>
-                          <a:cs typeface="Inter" pitchFamily="34" charset="-120"/>
-                        </a:rPr>
-                        <a:t>not run</a:t>
-                      </a:r>
-                      <a:endParaRPr lang="en-US" sz="900" dirty="0">
-                        <a:latin typeface="Inter" charset="0"/>
-                        <a:ea typeface="Inter" charset="0"/>
-                        <a:cs typeface="Inter" charset="0"/>
-                      </a:endParaRPr>
-                    </a:p>
-                  </a:txBody>
-                  <a:tcPr marL="63500" marR="63500" marT="38100" marB="38100" anchor="ctr">
-                    <a:lnL w="6350" cap="flat" cmpd="sng" algn="ctr">
-                      <a:solidFill>
-                        <a:srgbClr val="E6E6E6"/>
-                      </a:solidFill>
-                      <a:prstDash val="solid"/>
-                      <a:round/>
-                      <a:headEnd type="none" w="med" len="med"/>
-                      <a:tailEnd type="none" w="med" len="med"/>
-                    </a:lnL>
-                    <a:lnR w="6350" cap="flat" cmpd="sng" algn="ctr">
-                      <a:solidFill>
-                        <a:srgbClr val="E6E6E6"/>
-                      </a:solidFill>
-                      <a:prstDash val="solid"/>
-                      <a:round/>
-                      <a:headEnd type="none" w="med" len="med"/>
-                      <a:tailEnd type="none" w="med" len="med"/>
-                    </a:lnR>
-                    <a:lnT w="6350" cap="flat" cmpd="sng" algn="ctr">
-                      <a:solidFill>
-                        <a:srgbClr val="E6E6E6"/>
-                      </a:solidFill>
-                      <a:prstDash val="solid"/>
-                      <a:round/>
-                      <a:headEnd type="none" w="med" len="med"/>
-                      <a:tailEnd type="none" w="med" len="med"/>
-                    </a:lnT>
-                    <a:lnB w="6350" cap="flat" cmpd="sng" algn="ctr">
-                      <a:solidFill>
-                        <a:srgbClr val="E6E6E6"/>
-                      </a:solidFill>
-                      <a:prstDash val="solid"/>
-                      <a:round/>
-                      <a:headEnd type="none" w="med" len="med"/>
-                      <a:tailEnd type="none" w="med" len="med"/>
-                    </a:lnB>
-                    <a:solidFill>
-                      <a:srgbClr val="FFFFFF"/>
-                    </a:solidFill>
-                  </a:tcPr>
-                </a:tc>
-                <a:tc>
-                  <a:txBody>
-                    <a:bodyPr/>
-                    <a:lstStyle/>
-                    <a:p>
-                      <a:pPr algn="ctr" indent="0" marL="0">
-                        <a:buNone/>
-                      </a:pPr>
-                      <a:r>
-                        <a:rPr lang="en-US" sz="900" dirty="0">
-                          <a:solidFill>
-                            <a:srgbClr val="31302E"/>
-                          </a:solidFill>
-                          <a:latin typeface="Inter" pitchFamily="34" charset="0"/>
-                          <a:ea typeface="Inter" pitchFamily="34" charset="-122"/>
-                          <a:cs typeface="Inter" pitchFamily="34" charset="-120"/>
-                        </a:rPr>
-                        <a:t>0.537 (0.531)</a:t>
-                      </a:r>
-                      <a:endParaRPr lang="en-US" sz="900" dirty="0">
-                        <a:latin typeface="Inter" charset="0"/>
-                        <a:ea typeface="Inter" charset="0"/>
-                        <a:cs typeface="Inter" charset="0"/>
-                      </a:endParaRPr>
-                    </a:p>
-                  </a:txBody>
-                  <a:tcPr marL="63500" marR="63500" marT="38100" marB="38100" anchor="ctr">
-                    <a:lnL w="6350" cap="flat" cmpd="sng" algn="ctr">
-                      <a:solidFill>
-                        <a:srgbClr val="E6E6E6"/>
-                      </a:solidFill>
-                      <a:prstDash val="solid"/>
-                      <a:round/>
-                      <a:headEnd type="none" w="med" len="med"/>
-                      <a:tailEnd type="none" w="med" len="med"/>
-                    </a:lnL>
-                    <a:lnR w="6350" cap="flat" cmpd="sng" algn="ctr">
-                      <a:solidFill>
-                        <a:srgbClr val="E6E6E6"/>
-                      </a:solidFill>
-                      <a:prstDash val="solid"/>
-                      <a:round/>
-                      <a:headEnd type="none" w="med" len="med"/>
-                      <a:tailEnd type="none" w="med" len="med"/>
-                    </a:lnR>
-                    <a:lnT w="6350" cap="flat" cmpd="sng" algn="ctr">
-                      <a:solidFill>
-                        <a:srgbClr val="E6E6E6"/>
-                      </a:solidFill>
-                      <a:prstDash val="solid"/>
-                      <a:round/>
-                      <a:headEnd type="none" w="med" len="med"/>
-                      <a:tailEnd type="none" w="med" len="med"/>
-                    </a:lnT>
-                    <a:lnB w="6350" cap="flat" cmpd="sng" algn="ctr">
-                      <a:solidFill>
-                        <a:srgbClr val="E6E6E6"/>
-                      </a:solidFill>
-                      <a:prstDash val="solid"/>
-                      <a:round/>
-                      <a:headEnd type="none" w="med" len="med"/>
-                      <a:tailEnd type="none" w="med" len="med"/>
-                    </a:lnB>
-                    <a:solidFill>
-                      <a:srgbClr val="FFFFFF"/>
-                    </a:solidFill>
-                  </a:tcPr>
-                </a:tc>
-                <a:tc>
-                  <a:txBody>
-                    <a:bodyPr/>
-                    <a:lstStyle/>
-                    <a:p>
-                      <a:pPr algn="ctr" indent="0" marL="0">
-                        <a:buNone/>
-                      </a:pPr>
-                      <a:r>
-                        <a:rPr lang="en-US" sz="900" dirty="0">
-                          <a:solidFill>
-                            <a:srgbClr val="31302E"/>
-                          </a:solidFill>
-                          <a:latin typeface="Inter" pitchFamily="34" charset="0"/>
-                          <a:ea typeface="Inter" pitchFamily="34" charset="-122"/>
-                          <a:cs typeface="Inter" pitchFamily="34" charset="-120"/>
-                        </a:rPr>
-                        <a:t>not run</a:t>
-                      </a:r>
-                      <a:endParaRPr lang="en-US" sz="900" dirty="0">
-                        <a:latin typeface="Inter" charset="0"/>
-                        <a:ea typeface="Inter" charset="0"/>
-                        <a:cs typeface="Inter" charset="0"/>
-                      </a:endParaRPr>
-                    </a:p>
-                  </a:txBody>
-                  <a:tcPr marL="63500" marR="63500" marT="38100" marB="38100" anchor="ctr">
-                    <a:lnL w="6350" cap="flat" cmpd="sng" algn="ctr">
-                      <a:solidFill>
-                        <a:srgbClr val="E6E6E6"/>
-                      </a:solidFill>
-                      <a:prstDash val="solid"/>
-                      <a:round/>
-                      <a:headEnd type="none" w="med" len="med"/>
-                      <a:tailEnd type="none" w="med" len="med"/>
-                    </a:lnL>
-                    <a:lnR w="6350" cap="flat" cmpd="sng" algn="ctr">
-                      <a:solidFill>
-                        <a:srgbClr val="E6E6E6"/>
-                      </a:solidFill>
-                      <a:prstDash val="solid"/>
-                      <a:round/>
-                      <a:headEnd type="none" w="med" len="med"/>
-                      <a:tailEnd type="none" w="med" len="med"/>
-                    </a:lnR>
-                    <a:lnT w="6350" cap="flat" cmpd="sng" algn="ctr">
-                      <a:solidFill>
-                        <a:srgbClr val="E6E6E6"/>
-                      </a:solidFill>
-                      <a:prstDash val="solid"/>
-                      <a:round/>
-                      <a:headEnd type="none" w="med" len="med"/>
-                      <a:tailEnd type="none" w="med" len="med"/>
-                    </a:lnT>
-                    <a:lnB w="6350" cap="flat" cmpd="sng" algn="ctr">
-                      <a:solidFill>
-                        <a:srgbClr val="E6E6E6"/>
-                      </a:solidFill>
-                      <a:prstDash val="solid"/>
-                      <a:round/>
-                      <a:headEnd type="none" w="med" len="med"/>
-                      <a:tailEnd type="none" w="med" len="med"/>
-                    </a:lnB>
-                    <a:solidFill>
-                      <a:srgbClr val="FFFFFF"/>
+                        <a:rPr lang="en-US" sz="950" dirty="0">
+                          <a:solidFill>
+                            <a:srgbClr val="31302E"/>
+                          </a:solidFill>
+                          <a:latin typeface="Inter" pitchFamily="34" charset="0"/>
+                          <a:ea typeface="Inter" pitchFamily="34" charset="-122"/>
+                          <a:cs typeface="Inter" pitchFamily="34" charset="-120"/>
+                        </a:rPr>
+                        <a:t>62.5%, the project's best</a:t>
+                      </a:r>
+                      <a:endParaRPr lang="en-US" sz="950" dirty="0">
+                        <a:latin typeface="Inter" charset="0"/>
+                        <a:ea typeface="Inter" charset="0"/>
+                        <a:cs typeface="Inter" charset="0"/>
+                      </a:endParaRPr>
+                    </a:p>
+                  </a:txBody>
+                  <a:tcPr marL="63500" marR="63500" marT="38100" marB="38100" anchor="ctr">
+                    <a:lnL w="6350" cap="flat" cmpd="sng" algn="ctr">
+                      <a:solidFill>
+                        <a:srgbClr val="E6E6E6"/>
+                      </a:solidFill>
+                      <a:prstDash val="solid"/>
+                      <a:round/>
+                      <a:headEnd type="none" w="med" len="med"/>
+                      <a:tailEnd type="none" w="med" len="med"/>
+                    </a:lnL>
+                    <a:lnR w="6350" cap="flat" cmpd="sng" algn="ctr">
+                      <a:solidFill>
+                        <a:srgbClr val="E6E6E6"/>
+                      </a:solidFill>
+                      <a:prstDash val="solid"/>
+                      <a:round/>
+                      <a:headEnd type="none" w="med" len="med"/>
+                      <a:tailEnd type="none" w="med" len="med"/>
+                    </a:lnR>
+                    <a:lnT w="6350" cap="flat" cmpd="sng" algn="ctr">
+                      <a:solidFill>
+                        <a:srgbClr val="E6E6E6"/>
+                      </a:solidFill>
+                      <a:prstDash val="solid"/>
+                      <a:round/>
+                      <a:headEnd type="none" w="med" len="med"/>
+                      <a:tailEnd type="none" w="med" len="med"/>
+                    </a:lnT>
+                    <a:lnB w="6350" cap="flat" cmpd="sng" algn="ctr">
+                      <a:solidFill>
+                        <a:srgbClr val="E6E6E6"/>
+                      </a:solidFill>
+                      <a:prstDash val="solid"/>
+                      <a:round/>
+                      <a:headEnd type="none" w="med" len="med"/>
+                      <a:tailEnd type="none" w="med" len="med"/>
+                    </a:lnB>
+                    <a:solidFill>
+                      <a:srgbClr val="FBF1D6"/>
                     </a:solidFill>
                   </a:tcPr>
                 </a:tc>
@@ -5748,8 +4046,8 @@
         </p:nvSpPr>
         <p:spPr>
           <a:xfrm>
-            <a:off x="813816" y="6400800"/>
-            <a:ext cx="10881360" cy="365760"/>
+            <a:off x="813816" y="6528816"/>
+            <a:ext cx="10881360" cy="274320"/>
           </a:xfrm>
           <a:prstGeom prst="rect">
             <a:avLst/>
@@ -5765,7 +4063,7 @@
               <a:buNone/>
             </a:pPr>
             <a:r>
-              <a:rPr lang="en-US" sz="800" dirty="0">
+              <a:rPr lang="en-US" sz="850" dirty="0">
                 <a:solidFill>
                   <a:srgbClr val="615D59"/>
                 </a:solidFill>
@@ -5773,9 +4071,9 @@
                 <a:ea typeface="Inter" pitchFamily="34" charset="-122"/>
                 <a:cs typeface="Inter" pitchFamily="34" charset="-120"/>
               </a:rPr>
-              <a:t>Grid: each head minus the best single encoder validation chose, one seed, 95% paired interval; shaded cells resolve. † Fungal with ProtBERT: validation chose ProtBERT alone (0.761) while NT v2 alone scores 0.813, so those three gains are measured against a weak reference. Bold in the table: the swap beats the encoder it replaces by a wide margin.</a:t>
+              <a:t>Grid: each head minus the best single encoder validation chose, one seed, 95% paired interval; shaded cells resolve. Of 81 comparisons, 15 resolve ahead, 14 behind. Three of the 15 are fungal with ProtBERT (†), where validation picked a weak reference; eight more are E. coli runs still carrying the weak RNA-FM, Phase A's compensation again. That leaves the three below, one seed each.</a:t>
             </a:r>
-            <a:endParaRPr lang="en-US" sz="800" dirty="0"/>
+            <a:endParaRPr lang="en-US" sz="850" dirty="0"/>
           </a:p>
         </p:txBody>
       </p:sp>
@@ -10028,7 +8326,7 @@
                 <a:ea typeface="Inter" pitchFamily="34" charset="-122"/>
                 <a:cs typeface="Inter" pitchFamily="34" charset="-120"/>
               </a:rPr>
-              <a:t>What it adds up to · and what Mina asked for on October 22</a:t>
+              <a:t>What it adds up to · and what runs next</a:t>
             </a:r>
             <a:endParaRPr lang="en-US" sz="1200" dirty="0"/>
           </a:p>
@@ -10326,7 +8624,7 @@
                 <a:ea typeface="Inter" pitchFamily="34" charset="-122"/>
                 <a:cs typeface="Inter" pitchFamily="34" charset="-120"/>
               </a:rPr>
-              <a:t>What Mina asked for, and where each lands</a:t>
+              <a:t>What runs next, in order</a:t>
             </a:r>
             <a:endParaRPr lang="en-US" sz="1300" dirty="0"/>
           </a:p>
@@ -10369,7 +8667,7 @@
                 <a:ea typeface="Inter" pitchFamily="34" charset="-122"/>
                 <a:cs typeface="Inter" pitchFamily="34" charset="-120"/>
               </a:rPr>
-              <a:t>Interpret why, not only what: the speaker notes and the slide guide now explain every slide; pretraining domain predicts the best single encoder, and fusion helps across molecules.</a:t>
+              <a:t>Seeds on the three surviving Phase B gains: cross-attention with HyenaDNA and with RiNALMo on CoV-Vac, the gated head with RiNALMo on E. coli. One seed each today.</a:t>
             </a:r>
             <a:endParaRPr lang="en-US" sz="1150" dirty="0"/>
           </a:p>
@@ -10390,7 +8688,7 @@
                 <a:ea typeface="Inter" pitchFamily="34" charset="-122"/>
                 <a:cs typeface="Inter" pitchFamily="34" charset="-120"/>
               </a:rPr>
-              <a:t>Fusion built around mRNA-FM (DNA + mRNA-FM, mRNA-FM + protein) and other mRNA encoders: added to Phase B (Gantt 24).</a:t>
+              <a:t>Fusion built around mRNA-FM (DNA with mRNA-FM, mRNA-FM with protein) and the other codon-level RNA encoders, then the two-encoder replacements chosen from the single swaps.</a:t>
             </a:r>
             <a:endParaRPr lang="en-US" sz="1150" dirty="0"/>
           </a:p>
@@ -10411,7 +8709,7 @@
                 <a:ea typeface="Inter" pitchFamily="34" charset="-122"/>
                 <a:cs typeface="Inter" pitchFamily="34" charset="-120"/>
               </a:rPr>
-              <a:t>Does cross-attention do better with the swaps? On CoV-Vac, yes with two nucleotide-level swaps (HyenaDNA +0.039, RiNALMo +0.031, one seed), and it is never resolved worse there (slide 10).</a:t>
+              <a:t>The sequence-grouped stability re-split with seeds, which is the only way to settle whether fusion helps there.</a:t>
             </a:r>
             <a:endParaRPr lang="en-US" sz="1150" dirty="0"/>
           </a:p>
@@ -10432,7 +8730,7 @@
                 <a:ea typeface="Inter" pitchFamily="34" charset="-122"/>
                 <a:cs typeface="Inter" pitchFamily="34" charset="-120"/>
               </a:rPr>
-              <a:t>LucaOne on the other datasets: E. coli, CoV-Vac and fungal fit its context; GTEx does not (Gantt 41).</a:t>
+              <a:t>LucaOne on E. coli, CoV-Vac and fungal, which fit its 1,280-token context; the gated head at the paper's 1,280 channels; mouse half-life and translation efficiency.</a:t>
             </a:r>
             <a:endParaRPr lang="en-US" sz="1150" dirty="0"/>
           </a:p>
@@ -10453,7 +8751,7 @@
                 <a:ea typeface="Inter" pitchFamily="34" charset="-122"/>
                 <a:cs typeface="Inter" pitchFamily="34" charset="-120"/>
               </a:rPr>
-              <a:t>Still open: Ab1 access; seeds + paired bootstrap as the reporting standard; GPU access for Coupled Mamba; the distillation teachers.</a:t>
+              <a:t>Then the project's own designs: Coupled Mamba on the codon grid, and IsoFormer-style cross-attention on both redundant and complementary inputs, from January.</a:t>
             </a:r>
             <a:endParaRPr lang="en-US" sz="1150" dirty="0"/>
           </a:p>
@@ -10492,7 +8790,7 @@
                 <a:ea typeface="Inter" pitchFamily="34" charset="-122"/>
                 <a:cs typeface="Inter" pitchFamily="34" charset="-120"/>
               </a:rPr>
-              <a:t>Open runs, in order: seeds on the new Phase B wins (cross-attention with HyenaDNA and RiNALMo on CoV-Vac, gated with RiNALMo on E. coli); the gated head at 1,280 channels; the sequence-grouped stability re-split; mouse half-life and TE; LucaOne on three more benchmarks; the mRNA-FM-anchored fusions.</a:t>
+              <a:t>Still open and not ours to decide: whether Ab1 can be obtained through UCF; whether seeds plus a paired bootstrap becomes the reporting standard for everything that follows; GPU access beyond one laptop and one desktop for Coupled Mamba; which encoders join the distillation teacher set.</a:t>
             </a:r>
             <a:endParaRPr lang="en-US" sz="1100" dirty="0"/>
           </a:p>
@@ -21173,7 +19471,7 @@
                 <a:ea typeface="Inter" pitchFamily="34" charset="-122"/>
                 <a:cs typeface="Inter" pitchFamily="34" charset="-120"/>
               </a:rPr>
-              <a:t>Priority 1, Phase B · one encoder swapped at a time</a:t>
+              <a:t>Priority 1, Phase B · all eight swaps, the encoder question</a:t>
             </a:r>
             <a:endParaRPr lang="en-US" sz="1200" dirty="0"/>
           </a:p>
@@ -21212,12 +19510,36 @@
                 <a:ea typeface="Inter" pitchFamily="34" charset="-122"/>
                 <a:cs typeface="Inter" pitchFamily="34" charset="-120"/>
               </a:rPr>
-              <a:t>A better RNA encoder raises the single-encoder score by 8 points and erases the fusion gain; cross-attention does not change that</a:t>
+              <a:t>Changing the RNA encoder moves the score by a lot; changing the DNA or protein encoder barely moves it</a:t>
             </a:r>
             <a:endParaRPr lang="en-US" sz="2400" dirty="0"/>
           </a:p>
         </p:txBody>
       </p:sp>
+      <p:pic>
+        <p:nvPicPr>
+          <p:cNvPr id="4" name="Image 0" descr="/tmp/claude-0/-home-claude/585091c6-c086-52e1-bab3-37f93535e6c5/scratchpad/deck/ovfigs/r34_phaseB_alone_slide.png">    </p:cNvPr>
+          <p:cNvPicPr>
+            <a:picLocks noChangeAspect="1"/>
+          </p:cNvPicPr>
+          <p:nvPr/>
+        </p:nvPicPr>
+        <p:blipFill>
+          <a:blip r:embed="rId1"/>
+          <a:stretch>
+            <a:fillRect/>
+          </a:stretch>
+        </p:blipFill>
+        <p:spPr>
+          <a:xfrm>
+            <a:off x="658368" y="1956816"/>
+            <a:ext cx="10881360" cy="3355848"/>
+          </a:xfrm>
+          <a:prstGeom prst="rect">
+            <a:avLst/>
+          </a:prstGeom>
+        </p:spPr>
+      </p:pic>
       <p:graphicFrame>
         <p:nvGraphicFramePr>
           <p:cNvPr id="10" name="Table 0"/>
@@ -21233,7 +19555,7 @@
           </p:nvPr>
         </p:nvGraphicFramePr>
         <p:xfrm>
-          <a:off x="813816" y="2011680"/>
+          <a:off x="813816" y="5340096"/>
           <a:ext cx="10881360" cy="914400"/>
         </p:xfrm>
         <a:graphic>
@@ -21241,18 +19563,18 @@
             <a:tbl>
               <a:tblPr/>
               <a:tblGrid>
-                <a:gridCol w="3200400"/>
-                <a:gridCol w="960120"/>
-                <a:gridCol w="960120"/>
-                <a:gridCol w="960120"/>
-                <a:gridCol w="960120"/>
-                <a:gridCol w="960120"/>
-                <a:gridCol w="960120"/>
-                <a:gridCol w="960120"/>
-                <a:gridCol w="960120"/>
+                <a:gridCol w="2322576"/>
+                <a:gridCol w="1069848"/>
+                <a:gridCol w="1069848"/>
+                <a:gridCol w="1069848"/>
+                <a:gridCol w="1069848"/>
+                <a:gridCol w="1069848"/>
+                <a:gridCol w="1069848"/>
+                <a:gridCol w="1069848"/>
+                <a:gridCol w="1069848"/>
               </a:tblGrid>
-              <a:tr h="256032">
-                <a:tc rowSpan="2">
+              <a:tr h="192024">
+                <a:tc>
                   <a:txBody>
                     <a:bodyPr/>
                     <a:lstStyle/>
@@ -21261,17 +19583,17 @@
                         <a:buNone/>
                       </a:pPr>
                       <a:r>
-                        <a:rPr lang="en-US" sz="1100" b="1" dirty="0">
-                          <a:solidFill>
-                            <a:srgbClr val="31302E"/>
-                          </a:solidFill>
-                          <a:latin typeface="Inter" pitchFamily="34" charset="0"/>
-                          <a:ea typeface="Inter" pitchFamily="34" charset="-122"/>
-                          <a:cs typeface="Inter" pitchFamily="34" charset="-120"/>
-                        </a:rPr>
-                        <a:t>Encoder in the RNA slot</a:t>
-                      </a:r>
-                      <a:endParaRPr lang="en-US" sz="1100" dirty="0">
+                        <a:rPr lang="en-US" sz="950" b="1" dirty="0">
+                          <a:solidFill>
+                            <a:srgbClr val="31302E"/>
+                          </a:solidFill>
+                          <a:latin typeface="Inter" pitchFamily="34" charset="0"/>
+                          <a:ea typeface="Inter" pitchFamily="34" charset="-122"/>
+                          <a:cs typeface="Inter" pitchFamily="34" charset="-120"/>
+                        </a:rPr>
+                        <a:t>Swapped in, alone (replaces)</a:t>
+                      </a:r>
+                      <a:endParaRPr lang="en-US" sz="950" dirty="0">
                         <a:latin typeface="Inter" charset="0"/>
                         <a:ea typeface="Inter" charset="0"/>
                         <a:cs typeface="Inter" charset="0"/>
@@ -21320,7 +19642,7 @@
                     </a:solidFill>
                   </a:tcPr>
                 </a:tc>
-                <a:tc gridSpan="4">
+                <a:tc>
                   <a:txBody>
                     <a:bodyPr/>
                     <a:lstStyle/>
@@ -21329,17 +19651,17 @@
                         <a:buNone/>
                       </a:pPr>
                       <a:r>
-                        <a:rPr lang="en-US" sz="1100" b="1" dirty="0">
-                          <a:solidFill>
-                            <a:srgbClr val="31302E"/>
-                          </a:solidFill>
-                          <a:latin typeface="Inter" pitchFamily="34" charset="0"/>
-                          <a:ea typeface="Inter" pitchFamily="34" charset="-122"/>
-                          <a:cs typeface="Inter" pitchFamily="34" charset="-120"/>
-                        </a:rPr>
-                        <a:t>CoV-Vac (Spearman)</a:t>
-                      </a:r>
-                      <a:endParaRPr lang="en-US" sz="1100" dirty="0">
+                        <a:rPr lang="en-US" sz="950" b="1" dirty="0">
+                          <a:solidFill>
+                            <a:srgbClr val="31302E"/>
+                          </a:solidFill>
+                          <a:latin typeface="Inter" pitchFamily="34" charset="0"/>
+                          <a:ea typeface="Inter" pitchFamily="34" charset="-122"/>
+                          <a:cs typeface="Inter" pitchFamily="34" charset="-120"/>
+                        </a:rPr>
+                        <a:t>NT 500M</a:t>
+                      </a:r>
+                      <a:endParaRPr lang="en-US" sz="950" dirty="0">
                         <a:latin typeface="Inter" charset="0"/>
                         <a:ea typeface="Inter" charset="0"/>
                         <a:cs typeface="Inter" charset="0"/>
@@ -21388,16 +19710,7 @@
                     </a:solidFill>
                   </a:tcPr>
                 </a:tc>
-                <a:tc hMerge="1">
-                  <a:tcPr/>
-                </a:tc>
-                <a:tc hMerge="1">
-                  <a:tcPr/>
-                </a:tc>
-                <a:tc hMerge="1">
-                  <a:tcPr/>
-                </a:tc>
-                <a:tc gridSpan="4">
+                <a:tc>
                   <a:txBody>
                     <a:bodyPr/>
                     <a:lstStyle/>
@@ -21406,17 +19719,17 @@
                         <a:buNone/>
                       </a:pPr>
                       <a:r>
-                        <a:rPr lang="en-US" sz="1100" b="1" dirty="0">
-                          <a:solidFill>
-                            <a:srgbClr val="31302E"/>
-                          </a:solidFill>
-                          <a:latin typeface="Inter" pitchFamily="34" charset="0"/>
-                          <a:ea typeface="Inter" pitchFamily="34" charset="-122"/>
-                          <a:cs typeface="Inter" pitchFamily="34" charset="-120"/>
-                        </a:rPr>
-                        <a:t>E. coli (accuracy, %)</a:t>
-                      </a:r>
-                      <a:endParaRPr lang="en-US" sz="1100" dirty="0">
+                        <a:rPr lang="en-US" sz="950" b="1" dirty="0">
+                          <a:solidFill>
+                            <a:srgbClr val="31302E"/>
+                          </a:solidFill>
+                          <a:latin typeface="Inter" pitchFamily="34" charset="0"/>
+                          <a:ea typeface="Inter" pitchFamily="34" charset="-122"/>
+                          <a:cs typeface="Inter" pitchFamily="34" charset="-120"/>
+                        </a:rPr>
+                        <a:t>HyenaDNA</a:t>
+                      </a:r>
+                      <a:endParaRPr lang="en-US" sz="950" dirty="0">
                         <a:latin typeface="Inter" charset="0"/>
                         <a:ea typeface="Inter" charset="0"/>
                         <a:cs typeface="Inter" charset="0"/>
@@ -21465,19 +19778,483 @@
                     </a:solidFill>
                   </a:tcPr>
                 </a:tc>
-                <a:tc hMerge="1">
-                  <a:tcPr/>
-                </a:tc>
-                <a:tc hMerge="1">
-                  <a:tcPr/>
-                </a:tc>
-                <a:tc hMerge="1">
-                  <a:tcPr/>
+                <a:tc>
+                  <a:txBody>
+                    <a:bodyPr/>
+                    <a:lstStyle/>
+                    <a:p>
+                      <a:pPr algn="ctr" indent="0" marL="0">
+                        <a:buNone/>
+                      </a:pPr>
+                      <a:r>
+                        <a:rPr lang="en-US" sz="950" b="1" dirty="0">
+                          <a:solidFill>
+                            <a:srgbClr val="31302E"/>
+                          </a:solidFill>
+                          <a:latin typeface="Inter" pitchFamily="34" charset="0"/>
+                          <a:ea typeface="Inter" pitchFamily="34" charset="-122"/>
+                          <a:cs typeface="Inter" pitchFamily="34" charset="-120"/>
+                        </a:rPr>
+                        <a:t>RiNALMo</a:t>
+                      </a:r>
+                      <a:endParaRPr lang="en-US" sz="950" dirty="0">
+                        <a:latin typeface="Inter" charset="0"/>
+                        <a:ea typeface="Inter" charset="0"/>
+                        <a:cs typeface="Inter" charset="0"/>
+                      </a:endParaRPr>
+                    </a:p>
+                  </a:txBody>
+                  <a:tcPr marL="63500" marR="63500" marT="38100" marB="38100" anchor="ctr">
+                    <a:lnL w="6350" cap="flat" cmpd="sng" algn="ctr">
+                      <a:solidFill>
+                        <a:srgbClr val="E6E6E6"/>
+                      </a:solidFill>
+                      <a:prstDash val="solid"/>
+                      <a:round/>
+                      <a:headEnd type="none" w="med" len="med"/>
+                      <a:tailEnd type="none" w="med" len="med"/>
+                    </a:lnL>
+                    <a:lnR w="6350" cap="flat" cmpd="sng" algn="ctr">
+                      <a:solidFill>
+                        <a:srgbClr val="E6E6E6"/>
+                      </a:solidFill>
+                      <a:prstDash val="solid"/>
+                      <a:round/>
+                      <a:headEnd type="none" w="med" len="med"/>
+                      <a:tailEnd type="none" w="med" len="med"/>
+                    </a:lnR>
+                    <a:lnT w="6350" cap="flat" cmpd="sng" algn="ctr">
+                      <a:solidFill>
+                        <a:srgbClr val="E6E6E6"/>
+                      </a:solidFill>
+                      <a:prstDash val="solid"/>
+                      <a:round/>
+                      <a:headEnd type="none" w="med" len="med"/>
+                      <a:tailEnd type="none" w="med" len="med"/>
+                    </a:lnT>
+                    <a:lnB w="6350" cap="flat" cmpd="sng" algn="ctr">
+                      <a:solidFill>
+                        <a:srgbClr val="E6E6E6"/>
+                      </a:solidFill>
+                      <a:prstDash val="solid"/>
+                      <a:round/>
+                      <a:headEnd type="none" w="med" len="med"/>
+                      <a:tailEnd type="none" w="med" len="med"/>
+                    </a:lnB>
+                    <a:solidFill>
+                      <a:srgbClr val="F0F0EE"/>
+                    </a:solidFill>
+                  </a:tcPr>
+                </a:tc>
+                <a:tc>
+                  <a:txBody>
+                    <a:bodyPr/>
+                    <a:lstStyle/>
+                    <a:p>
+                      <a:pPr algn="ctr" indent="0" marL="0">
+                        <a:buNone/>
+                      </a:pPr>
+                      <a:r>
+                        <a:rPr lang="en-US" sz="950" b="1" dirty="0">
+                          <a:solidFill>
+                            <a:srgbClr val="31302E"/>
+                          </a:solidFill>
+                          <a:latin typeface="Inter" pitchFamily="34" charset="0"/>
+                          <a:ea typeface="Inter" pitchFamily="34" charset="-122"/>
+                          <a:cs typeface="Inter" pitchFamily="34" charset="-120"/>
+                        </a:rPr>
+                        <a:t>mRNA-FM</a:t>
+                      </a:r>
+                      <a:endParaRPr lang="en-US" sz="950" dirty="0">
+                        <a:latin typeface="Inter" charset="0"/>
+                        <a:ea typeface="Inter" charset="0"/>
+                        <a:cs typeface="Inter" charset="0"/>
+                      </a:endParaRPr>
+                    </a:p>
+                  </a:txBody>
+                  <a:tcPr marL="63500" marR="63500" marT="38100" marB="38100" anchor="ctr">
+                    <a:lnL w="6350" cap="flat" cmpd="sng" algn="ctr">
+                      <a:solidFill>
+                        <a:srgbClr val="E6E6E6"/>
+                      </a:solidFill>
+                      <a:prstDash val="solid"/>
+                      <a:round/>
+                      <a:headEnd type="none" w="med" len="med"/>
+                      <a:tailEnd type="none" w="med" len="med"/>
+                    </a:lnL>
+                    <a:lnR w="6350" cap="flat" cmpd="sng" algn="ctr">
+                      <a:solidFill>
+                        <a:srgbClr val="E6E6E6"/>
+                      </a:solidFill>
+                      <a:prstDash val="solid"/>
+                      <a:round/>
+                      <a:headEnd type="none" w="med" len="med"/>
+                      <a:tailEnd type="none" w="med" len="med"/>
+                    </a:lnR>
+                    <a:lnT w="6350" cap="flat" cmpd="sng" algn="ctr">
+                      <a:solidFill>
+                        <a:srgbClr val="E6E6E6"/>
+                      </a:solidFill>
+                      <a:prstDash val="solid"/>
+                      <a:round/>
+                      <a:headEnd type="none" w="med" len="med"/>
+                      <a:tailEnd type="none" w="med" len="med"/>
+                    </a:lnT>
+                    <a:lnB w="6350" cap="flat" cmpd="sng" algn="ctr">
+                      <a:solidFill>
+                        <a:srgbClr val="E6E6E6"/>
+                      </a:solidFill>
+                      <a:prstDash val="solid"/>
+                      <a:round/>
+                      <a:headEnd type="none" w="med" len="med"/>
+                      <a:tailEnd type="none" w="med" len="med"/>
+                    </a:lnB>
+                    <a:solidFill>
+                      <a:srgbClr val="F0F0EE"/>
+                    </a:solidFill>
+                  </a:tcPr>
+                </a:tc>
+                <a:tc>
+                  <a:txBody>
+                    <a:bodyPr/>
+                    <a:lstStyle/>
+                    <a:p>
+                      <a:pPr algn="ctr" indent="0" marL="0">
+                        <a:buNone/>
+                      </a:pPr>
+                      <a:r>
+                        <a:rPr lang="en-US" sz="950" b="1" dirty="0">
+                          <a:solidFill>
+                            <a:srgbClr val="31302E"/>
+                          </a:solidFill>
+                          <a:latin typeface="Inter" pitchFamily="34" charset="0"/>
+                          <a:ea typeface="Inter" pitchFamily="34" charset="-122"/>
+                          <a:cs typeface="Inter" pitchFamily="34" charset="-120"/>
+                        </a:rPr>
+                        <a:t>CaLM</a:t>
+                      </a:r>
+                      <a:endParaRPr lang="en-US" sz="950" dirty="0">
+                        <a:latin typeface="Inter" charset="0"/>
+                        <a:ea typeface="Inter" charset="0"/>
+                        <a:cs typeface="Inter" charset="0"/>
+                      </a:endParaRPr>
+                    </a:p>
+                  </a:txBody>
+                  <a:tcPr marL="63500" marR="63500" marT="38100" marB="38100" anchor="ctr">
+                    <a:lnL w="6350" cap="flat" cmpd="sng" algn="ctr">
+                      <a:solidFill>
+                        <a:srgbClr val="E6E6E6"/>
+                      </a:solidFill>
+                      <a:prstDash val="solid"/>
+                      <a:round/>
+                      <a:headEnd type="none" w="med" len="med"/>
+                      <a:tailEnd type="none" w="med" len="med"/>
+                    </a:lnL>
+                    <a:lnR w="6350" cap="flat" cmpd="sng" algn="ctr">
+                      <a:solidFill>
+                        <a:srgbClr val="E6E6E6"/>
+                      </a:solidFill>
+                      <a:prstDash val="solid"/>
+                      <a:round/>
+                      <a:headEnd type="none" w="med" len="med"/>
+                      <a:tailEnd type="none" w="med" len="med"/>
+                    </a:lnR>
+                    <a:lnT w="6350" cap="flat" cmpd="sng" algn="ctr">
+                      <a:solidFill>
+                        <a:srgbClr val="E6E6E6"/>
+                      </a:solidFill>
+                      <a:prstDash val="solid"/>
+                      <a:round/>
+                      <a:headEnd type="none" w="med" len="med"/>
+                      <a:tailEnd type="none" w="med" len="med"/>
+                    </a:lnT>
+                    <a:lnB w="6350" cap="flat" cmpd="sng" algn="ctr">
+                      <a:solidFill>
+                        <a:srgbClr val="E6E6E6"/>
+                      </a:solidFill>
+                      <a:prstDash val="solid"/>
+                      <a:round/>
+                      <a:headEnd type="none" w="med" len="med"/>
+                      <a:tailEnd type="none" w="med" len="med"/>
+                    </a:lnB>
+                    <a:solidFill>
+                      <a:srgbClr val="F0F0EE"/>
+                    </a:solidFill>
+                  </a:tcPr>
+                </a:tc>
+                <a:tc>
+                  <a:txBody>
+                    <a:bodyPr/>
+                    <a:lstStyle/>
+                    <a:p>
+                      <a:pPr algn="ctr" indent="0" marL="0">
+                        <a:buNone/>
+                      </a:pPr>
+                      <a:r>
+                        <a:rPr lang="en-US" sz="950" b="1" dirty="0">
+                          <a:solidFill>
+                            <a:srgbClr val="31302E"/>
+                          </a:solidFill>
+                          <a:latin typeface="Inter" pitchFamily="34" charset="0"/>
+                          <a:ea typeface="Inter" pitchFamily="34" charset="-122"/>
+                          <a:cs typeface="Inter" pitchFamily="34" charset="-120"/>
+                        </a:rPr>
+                        <a:t>ESM-2 35M</a:t>
+                      </a:r>
+                      <a:endParaRPr lang="en-US" sz="950" dirty="0">
+                        <a:latin typeface="Inter" charset="0"/>
+                        <a:ea typeface="Inter" charset="0"/>
+                        <a:cs typeface="Inter" charset="0"/>
+                      </a:endParaRPr>
+                    </a:p>
+                  </a:txBody>
+                  <a:tcPr marL="63500" marR="63500" marT="38100" marB="38100" anchor="ctr">
+                    <a:lnL w="6350" cap="flat" cmpd="sng" algn="ctr">
+                      <a:solidFill>
+                        <a:srgbClr val="E6E6E6"/>
+                      </a:solidFill>
+                      <a:prstDash val="solid"/>
+                      <a:round/>
+                      <a:headEnd type="none" w="med" len="med"/>
+                      <a:tailEnd type="none" w="med" len="med"/>
+                    </a:lnL>
+                    <a:lnR w="6350" cap="flat" cmpd="sng" algn="ctr">
+                      <a:solidFill>
+                        <a:srgbClr val="E6E6E6"/>
+                      </a:solidFill>
+                      <a:prstDash val="solid"/>
+                      <a:round/>
+                      <a:headEnd type="none" w="med" len="med"/>
+                      <a:tailEnd type="none" w="med" len="med"/>
+                    </a:lnR>
+                    <a:lnT w="6350" cap="flat" cmpd="sng" algn="ctr">
+                      <a:solidFill>
+                        <a:srgbClr val="E6E6E6"/>
+                      </a:solidFill>
+                      <a:prstDash val="solid"/>
+                      <a:round/>
+                      <a:headEnd type="none" w="med" len="med"/>
+                      <a:tailEnd type="none" w="med" len="med"/>
+                    </a:lnT>
+                    <a:lnB w="6350" cap="flat" cmpd="sng" algn="ctr">
+                      <a:solidFill>
+                        <a:srgbClr val="E6E6E6"/>
+                      </a:solidFill>
+                      <a:prstDash val="solid"/>
+                      <a:round/>
+                      <a:headEnd type="none" w="med" len="med"/>
+                      <a:tailEnd type="none" w="med" len="med"/>
+                    </a:lnB>
+                    <a:solidFill>
+                      <a:srgbClr val="F0F0EE"/>
+                    </a:solidFill>
+                  </a:tcPr>
+                </a:tc>
+                <a:tc>
+                  <a:txBody>
+                    <a:bodyPr/>
+                    <a:lstStyle/>
+                    <a:p>
+                      <a:pPr algn="ctr" indent="0" marL="0">
+                        <a:buNone/>
+                      </a:pPr>
+                      <a:r>
+                        <a:rPr lang="en-US" sz="950" b="1" dirty="0">
+                          <a:solidFill>
+                            <a:srgbClr val="31302E"/>
+                          </a:solidFill>
+                          <a:latin typeface="Inter" pitchFamily="34" charset="0"/>
+                          <a:ea typeface="Inter" pitchFamily="34" charset="-122"/>
+                          <a:cs typeface="Inter" pitchFamily="34" charset="-120"/>
+                        </a:rPr>
+                        <a:t>ESM-2 150M</a:t>
+                      </a:r>
+                      <a:endParaRPr lang="en-US" sz="950" dirty="0">
+                        <a:latin typeface="Inter" charset="0"/>
+                        <a:ea typeface="Inter" charset="0"/>
+                        <a:cs typeface="Inter" charset="0"/>
+                      </a:endParaRPr>
+                    </a:p>
+                  </a:txBody>
+                  <a:tcPr marL="63500" marR="63500" marT="38100" marB="38100" anchor="ctr">
+                    <a:lnL w="6350" cap="flat" cmpd="sng" algn="ctr">
+                      <a:solidFill>
+                        <a:srgbClr val="E6E6E6"/>
+                      </a:solidFill>
+                      <a:prstDash val="solid"/>
+                      <a:round/>
+                      <a:headEnd type="none" w="med" len="med"/>
+                      <a:tailEnd type="none" w="med" len="med"/>
+                    </a:lnL>
+                    <a:lnR w="6350" cap="flat" cmpd="sng" algn="ctr">
+                      <a:solidFill>
+                        <a:srgbClr val="E6E6E6"/>
+                      </a:solidFill>
+                      <a:prstDash val="solid"/>
+                      <a:round/>
+                      <a:headEnd type="none" w="med" len="med"/>
+                      <a:tailEnd type="none" w="med" len="med"/>
+                    </a:lnR>
+                    <a:lnT w="6350" cap="flat" cmpd="sng" algn="ctr">
+                      <a:solidFill>
+                        <a:srgbClr val="E6E6E6"/>
+                      </a:solidFill>
+                      <a:prstDash val="solid"/>
+                      <a:round/>
+                      <a:headEnd type="none" w="med" len="med"/>
+                      <a:tailEnd type="none" w="med" len="med"/>
+                    </a:lnT>
+                    <a:lnB w="6350" cap="flat" cmpd="sng" algn="ctr">
+                      <a:solidFill>
+                        <a:srgbClr val="E6E6E6"/>
+                      </a:solidFill>
+                      <a:prstDash val="solid"/>
+                      <a:round/>
+                      <a:headEnd type="none" w="med" len="med"/>
+                      <a:tailEnd type="none" w="med" len="med"/>
+                    </a:lnB>
+                    <a:solidFill>
+                      <a:srgbClr val="F0F0EE"/>
+                    </a:solidFill>
+                  </a:tcPr>
+                </a:tc>
+                <a:tc>
+                  <a:txBody>
+                    <a:bodyPr/>
+                    <a:lstStyle/>
+                    <a:p>
+                      <a:pPr algn="ctr" indent="0" marL="0">
+                        <a:buNone/>
+                      </a:pPr>
+                      <a:r>
+                        <a:rPr lang="en-US" sz="950" b="1" dirty="0">
+                          <a:solidFill>
+                            <a:srgbClr val="31302E"/>
+                          </a:solidFill>
+                          <a:latin typeface="Inter" pitchFamily="34" charset="0"/>
+                          <a:ea typeface="Inter" pitchFamily="34" charset="-122"/>
+                          <a:cs typeface="Inter" pitchFamily="34" charset="-120"/>
+                        </a:rPr>
+                        <a:t>ProtBERT</a:t>
+                      </a:r>
+                      <a:endParaRPr lang="en-US" sz="950" dirty="0">
+                        <a:latin typeface="Inter" charset="0"/>
+                        <a:ea typeface="Inter" charset="0"/>
+                        <a:cs typeface="Inter" charset="0"/>
+                      </a:endParaRPr>
+                    </a:p>
+                  </a:txBody>
+                  <a:tcPr marL="63500" marR="63500" marT="38100" marB="38100" anchor="ctr">
+                    <a:lnL w="6350" cap="flat" cmpd="sng" algn="ctr">
+                      <a:solidFill>
+                        <a:srgbClr val="E6E6E6"/>
+                      </a:solidFill>
+                      <a:prstDash val="solid"/>
+                      <a:round/>
+                      <a:headEnd type="none" w="med" len="med"/>
+                      <a:tailEnd type="none" w="med" len="med"/>
+                    </a:lnL>
+                    <a:lnR w="6350" cap="flat" cmpd="sng" algn="ctr">
+                      <a:solidFill>
+                        <a:srgbClr val="E6E6E6"/>
+                      </a:solidFill>
+                      <a:prstDash val="solid"/>
+                      <a:round/>
+                      <a:headEnd type="none" w="med" len="med"/>
+                      <a:tailEnd type="none" w="med" len="med"/>
+                    </a:lnR>
+                    <a:lnT w="6350" cap="flat" cmpd="sng" algn="ctr">
+                      <a:solidFill>
+                        <a:srgbClr val="E6E6E6"/>
+                      </a:solidFill>
+                      <a:prstDash val="solid"/>
+                      <a:round/>
+                      <a:headEnd type="none" w="med" len="med"/>
+                      <a:tailEnd type="none" w="med" len="med"/>
+                    </a:lnT>
+                    <a:lnB w="6350" cap="flat" cmpd="sng" algn="ctr">
+                      <a:solidFill>
+                        <a:srgbClr val="E6E6E6"/>
+                      </a:solidFill>
+                      <a:prstDash val="solid"/>
+                      <a:round/>
+                      <a:headEnd type="none" w="med" len="med"/>
+                      <a:tailEnd type="none" w="med" len="med"/>
+                    </a:lnB>
+                    <a:solidFill>
+                      <a:srgbClr val="F0F0EE"/>
+                    </a:solidFill>
+                  </a:tcPr>
                 </a:tc>
               </a:tr>
-              <a:tr h="256032">
-                <a:tc vMerge="1">
-                  <a:tcPr/>
+              <a:tr h="192024">
+                <a:tc>
+                  <a:txBody>
+                    <a:bodyPr/>
+                    <a:lstStyle/>
+                    <a:p>
+                      <a:pPr indent="0" marL="0">
+                        <a:buNone/>
+                      </a:pPr>
+                      <a:r>
+                        <a:rPr lang="en-US" sz="950" dirty="0">
+                          <a:solidFill>
+                            <a:srgbClr val="31302E"/>
+                          </a:solidFill>
+                          <a:latin typeface="Inter" pitchFamily="34" charset="0"/>
+                          <a:ea typeface="Inter" pitchFamily="34" charset="-122"/>
+                          <a:cs typeface="Inter" pitchFamily="34" charset="-120"/>
+                        </a:rPr>
+                        <a:t>Fungal</a:t>
+                      </a:r>
+                      <a:endParaRPr lang="en-US" sz="950" dirty="0">
+                        <a:latin typeface="Inter" charset="0"/>
+                        <a:ea typeface="Inter" charset="0"/>
+                        <a:cs typeface="Inter" charset="0"/>
+                      </a:endParaRPr>
+                    </a:p>
+                  </a:txBody>
+                  <a:tcPr marL="63500" marR="63500" marT="38100" marB="38100" anchor="ctr">
+                    <a:lnL w="6350" cap="flat" cmpd="sng" algn="ctr">
+                      <a:solidFill>
+                        <a:srgbClr val="E6E6E6"/>
+                      </a:solidFill>
+                      <a:prstDash val="solid"/>
+                      <a:round/>
+                      <a:headEnd type="none" w="med" len="med"/>
+                      <a:tailEnd type="none" w="med" len="med"/>
+                    </a:lnL>
+                    <a:lnR w="6350" cap="flat" cmpd="sng" algn="ctr">
+                      <a:solidFill>
+                        <a:srgbClr val="E6E6E6"/>
+                      </a:solidFill>
+                      <a:prstDash val="solid"/>
+                      <a:round/>
+                      <a:headEnd type="none" w="med" len="med"/>
+                      <a:tailEnd type="none" w="med" len="med"/>
+                    </a:lnR>
+                    <a:lnT w="6350" cap="flat" cmpd="sng" algn="ctr">
+                      <a:solidFill>
+                        <a:srgbClr val="E6E6E6"/>
+                      </a:solidFill>
+                      <a:prstDash val="solid"/>
+                      <a:round/>
+                      <a:headEnd type="none" w="med" len="med"/>
+                      <a:tailEnd type="none" w="med" len="med"/>
+                    </a:lnT>
+                    <a:lnB w="6350" cap="flat" cmpd="sng" algn="ctr">
+                      <a:solidFill>
+                        <a:srgbClr val="E6E6E6"/>
+                      </a:solidFill>
+                      <a:prstDash val="solid"/>
+                      <a:round/>
+                      <a:headEnd type="none" w="med" len="med"/>
+                      <a:tailEnd type="none" w="med" len="med"/>
+                    </a:lnB>
+                    <a:solidFill>
+                      <a:srgbClr val="FFFFFF"/>
+                    </a:solidFill>
+                  </a:tcPr>
                 </a:tc>
                 <a:tc>
                   <a:txBody>
@@ -21488,62 +20265,62 @@
                         <a:buNone/>
                       </a:pPr>
                       <a:r>
-                        <a:rPr lang="en-US" sz="1100" b="1" dirty="0">
-                          <a:solidFill>
-                            <a:srgbClr val="31302E"/>
-                          </a:solidFill>
-                          <a:latin typeface="Inter" pitchFamily="34" charset="0"/>
-                          <a:ea typeface="Inter" pitchFamily="34" charset="-122"/>
-                          <a:cs typeface="Inter" pitchFamily="34" charset="-120"/>
-                        </a:rPr>
-                        <a:t>alone</a:t>
-                      </a:r>
-                      <a:endParaRPr lang="en-US" sz="1100" dirty="0">
-                        <a:latin typeface="Inter" charset="0"/>
-                        <a:ea typeface="Inter" charset="0"/>
-                        <a:cs typeface="Inter" charset="0"/>
-                      </a:endParaRPr>
-                    </a:p>
-                  </a:txBody>
-                  <a:tcPr marL="63500" marR="63500" marT="38100" marB="38100" anchor="ctr">
-                    <a:lnL w="6350" cap="flat" cmpd="sng" algn="ctr">
-                      <a:solidFill>
-                        <a:srgbClr val="E6E6E6"/>
-                      </a:solidFill>
-                      <a:prstDash val="solid"/>
-                      <a:round/>
-                      <a:headEnd type="none" w="med" len="med"/>
-                      <a:tailEnd type="none" w="med" len="med"/>
-                    </a:lnL>
-                    <a:lnR w="6350" cap="flat" cmpd="sng" algn="ctr">
-                      <a:solidFill>
-                        <a:srgbClr val="E6E6E6"/>
-                      </a:solidFill>
-                      <a:prstDash val="solid"/>
-                      <a:round/>
-                      <a:headEnd type="none" w="med" len="med"/>
-                      <a:tailEnd type="none" w="med" len="med"/>
-                    </a:lnR>
-                    <a:lnT w="6350" cap="flat" cmpd="sng" algn="ctr">
-                      <a:solidFill>
-                        <a:srgbClr val="E6E6E6"/>
-                      </a:solidFill>
-                      <a:prstDash val="solid"/>
-                      <a:round/>
-                      <a:headEnd type="none" w="med" len="med"/>
-                      <a:tailEnd type="none" w="med" len="med"/>
-                    </a:lnT>
-                    <a:lnB w="6350" cap="flat" cmpd="sng" algn="ctr">
-                      <a:solidFill>
-                        <a:srgbClr val="E6E6E6"/>
-                      </a:solidFill>
-                      <a:prstDash val="solid"/>
-                      <a:round/>
-                      <a:headEnd type="none" w="med" len="med"/>
-                      <a:tailEnd type="none" w="med" len="med"/>
-                    </a:lnB>
-                    <a:solidFill>
-                      <a:srgbClr val="F0F0EE"/>
+                        <a:rPr lang="en-US" sz="950" dirty="0">
+                          <a:solidFill>
+                            <a:srgbClr val="31302E"/>
+                          </a:solidFill>
+                          <a:latin typeface="Inter" pitchFamily="34" charset="0"/>
+                          <a:ea typeface="Inter" pitchFamily="34" charset="-122"/>
+                          <a:cs typeface="Inter" pitchFamily="34" charset="-120"/>
+                        </a:rPr>
+                        <a:t>0.740 (0.813)</a:t>
+                      </a:r>
+                      <a:endParaRPr lang="en-US" sz="950" dirty="0">
+                        <a:latin typeface="Inter" charset="0"/>
+                        <a:ea typeface="Inter" charset="0"/>
+                        <a:cs typeface="Inter" charset="0"/>
+                      </a:endParaRPr>
+                    </a:p>
+                  </a:txBody>
+                  <a:tcPr marL="63500" marR="63500" marT="38100" marB="38100" anchor="ctr">
+                    <a:lnL w="6350" cap="flat" cmpd="sng" algn="ctr">
+                      <a:solidFill>
+                        <a:srgbClr val="E6E6E6"/>
+                      </a:solidFill>
+                      <a:prstDash val="solid"/>
+                      <a:round/>
+                      <a:headEnd type="none" w="med" len="med"/>
+                      <a:tailEnd type="none" w="med" len="med"/>
+                    </a:lnL>
+                    <a:lnR w="6350" cap="flat" cmpd="sng" algn="ctr">
+                      <a:solidFill>
+                        <a:srgbClr val="E6E6E6"/>
+                      </a:solidFill>
+                      <a:prstDash val="solid"/>
+                      <a:round/>
+                      <a:headEnd type="none" w="med" len="med"/>
+                      <a:tailEnd type="none" w="med" len="med"/>
+                    </a:lnR>
+                    <a:lnT w="6350" cap="flat" cmpd="sng" algn="ctr">
+                      <a:solidFill>
+                        <a:srgbClr val="E6E6E6"/>
+                      </a:solidFill>
+                      <a:prstDash val="solid"/>
+                      <a:round/>
+                      <a:headEnd type="none" w="med" len="med"/>
+                      <a:tailEnd type="none" w="med" len="med"/>
+                    </a:lnT>
+                    <a:lnB w="6350" cap="flat" cmpd="sng" algn="ctr">
+                      <a:solidFill>
+                        <a:srgbClr val="E6E6E6"/>
+                      </a:solidFill>
+                      <a:prstDash val="solid"/>
+                      <a:round/>
+                      <a:headEnd type="none" w="med" len="med"/>
+                      <a:tailEnd type="none" w="med" len="med"/>
+                    </a:lnB>
+                    <a:solidFill>
+                      <a:srgbClr val="FFFFFF"/>
                     </a:solidFill>
                   </a:tcPr>
                 </a:tc>
@@ -21556,62 +20333,62 @@
                         <a:buNone/>
                       </a:pPr>
                       <a:r>
-                        <a:rPr lang="en-US" sz="1100" b="1" dirty="0">
-                          <a:solidFill>
-                            <a:srgbClr val="31302E"/>
-                          </a:solidFill>
-                          <a:latin typeface="Inter" pitchFamily="34" charset="0"/>
-                          <a:ea typeface="Inter" pitchFamily="34" charset="-122"/>
-                          <a:cs typeface="Inter" pitchFamily="34" charset="-120"/>
-                        </a:rPr>
-                        <a:t>concat</a:t>
-                      </a:r>
-                      <a:endParaRPr lang="en-US" sz="1100" dirty="0">
-                        <a:latin typeface="Inter" charset="0"/>
-                        <a:ea typeface="Inter" charset="0"/>
-                        <a:cs typeface="Inter" charset="0"/>
-                      </a:endParaRPr>
-                    </a:p>
-                  </a:txBody>
-                  <a:tcPr marL="63500" marR="63500" marT="38100" marB="38100" anchor="ctr">
-                    <a:lnL w="6350" cap="flat" cmpd="sng" algn="ctr">
-                      <a:solidFill>
-                        <a:srgbClr val="E6E6E6"/>
-                      </a:solidFill>
-                      <a:prstDash val="solid"/>
-                      <a:round/>
-                      <a:headEnd type="none" w="med" len="med"/>
-                      <a:tailEnd type="none" w="med" len="med"/>
-                    </a:lnL>
-                    <a:lnR w="6350" cap="flat" cmpd="sng" algn="ctr">
-                      <a:solidFill>
-                        <a:srgbClr val="E6E6E6"/>
-                      </a:solidFill>
-                      <a:prstDash val="solid"/>
-                      <a:round/>
-                      <a:headEnd type="none" w="med" len="med"/>
-                      <a:tailEnd type="none" w="med" len="med"/>
-                    </a:lnR>
-                    <a:lnT w="6350" cap="flat" cmpd="sng" algn="ctr">
-                      <a:solidFill>
-                        <a:srgbClr val="E6E6E6"/>
-                      </a:solidFill>
-                      <a:prstDash val="solid"/>
-                      <a:round/>
-                      <a:headEnd type="none" w="med" len="med"/>
-                      <a:tailEnd type="none" w="med" len="med"/>
-                    </a:lnT>
-                    <a:lnB w="6350" cap="flat" cmpd="sng" algn="ctr">
-                      <a:solidFill>
-                        <a:srgbClr val="E6E6E6"/>
-                      </a:solidFill>
-                      <a:prstDash val="solid"/>
-                      <a:round/>
-                      <a:headEnd type="none" w="med" len="med"/>
-                      <a:tailEnd type="none" w="med" len="med"/>
-                    </a:lnB>
-                    <a:solidFill>
-                      <a:srgbClr val="F0F0EE"/>
+                        <a:rPr lang="en-US" sz="950" dirty="0">
+                          <a:solidFill>
+                            <a:srgbClr val="31302E"/>
+                          </a:solidFill>
+                          <a:latin typeface="Inter" pitchFamily="34" charset="0"/>
+                          <a:ea typeface="Inter" pitchFamily="34" charset="-122"/>
+                          <a:cs typeface="Inter" pitchFamily="34" charset="-120"/>
+                        </a:rPr>
+                        <a:t>0.737 (0.813)</a:t>
+                      </a:r>
+                      <a:endParaRPr lang="en-US" sz="950" dirty="0">
+                        <a:latin typeface="Inter" charset="0"/>
+                        <a:ea typeface="Inter" charset="0"/>
+                        <a:cs typeface="Inter" charset="0"/>
+                      </a:endParaRPr>
+                    </a:p>
+                  </a:txBody>
+                  <a:tcPr marL="63500" marR="63500" marT="38100" marB="38100" anchor="ctr">
+                    <a:lnL w="6350" cap="flat" cmpd="sng" algn="ctr">
+                      <a:solidFill>
+                        <a:srgbClr val="E6E6E6"/>
+                      </a:solidFill>
+                      <a:prstDash val="solid"/>
+                      <a:round/>
+                      <a:headEnd type="none" w="med" len="med"/>
+                      <a:tailEnd type="none" w="med" len="med"/>
+                    </a:lnL>
+                    <a:lnR w="6350" cap="flat" cmpd="sng" algn="ctr">
+                      <a:solidFill>
+                        <a:srgbClr val="E6E6E6"/>
+                      </a:solidFill>
+                      <a:prstDash val="solid"/>
+                      <a:round/>
+                      <a:headEnd type="none" w="med" len="med"/>
+                      <a:tailEnd type="none" w="med" len="med"/>
+                    </a:lnR>
+                    <a:lnT w="6350" cap="flat" cmpd="sng" algn="ctr">
+                      <a:solidFill>
+                        <a:srgbClr val="E6E6E6"/>
+                      </a:solidFill>
+                      <a:prstDash val="solid"/>
+                      <a:round/>
+                      <a:headEnd type="none" w="med" len="med"/>
+                      <a:tailEnd type="none" w="med" len="med"/>
+                    </a:lnT>
+                    <a:lnB w="6350" cap="flat" cmpd="sng" algn="ctr">
+                      <a:solidFill>
+                        <a:srgbClr val="E6E6E6"/>
+                      </a:solidFill>
+                      <a:prstDash val="solid"/>
+                      <a:round/>
+                      <a:headEnd type="none" w="med" len="med"/>
+                      <a:tailEnd type="none" w="med" len="med"/>
+                    </a:lnB>
+                    <a:solidFill>
+                      <a:srgbClr val="FFFFFF"/>
                     </a:solidFill>
                   </a:tcPr>
                 </a:tc>
@@ -21624,62 +20401,62 @@
                         <a:buNone/>
                       </a:pPr>
                       <a:r>
-                        <a:rPr lang="en-US" sz="1100" b="1" dirty="0">
-                          <a:solidFill>
-                            <a:srgbClr val="31302E"/>
-                          </a:solidFill>
-                          <a:latin typeface="Inter" pitchFamily="34" charset="0"/>
-                          <a:ea typeface="Inter" pitchFamily="34" charset="-122"/>
-                          <a:cs typeface="Inter" pitchFamily="34" charset="-120"/>
-                        </a:rPr>
-                        <a:t>gated</a:t>
-                      </a:r>
-                      <a:endParaRPr lang="en-US" sz="1100" dirty="0">
-                        <a:latin typeface="Inter" charset="0"/>
-                        <a:ea typeface="Inter" charset="0"/>
-                        <a:cs typeface="Inter" charset="0"/>
-                      </a:endParaRPr>
-                    </a:p>
-                  </a:txBody>
-                  <a:tcPr marL="63500" marR="63500" marT="38100" marB="38100" anchor="ctr">
-                    <a:lnL w="6350" cap="flat" cmpd="sng" algn="ctr">
-                      <a:solidFill>
-                        <a:srgbClr val="E6E6E6"/>
-                      </a:solidFill>
-                      <a:prstDash val="solid"/>
-                      <a:round/>
-                      <a:headEnd type="none" w="med" len="med"/>
-                      <a:tailEnd type="none" w="med" len="med"/>
-                    </a:lnL>
-                    <a:lnR w="6350" cap="flat" cmpd="sng" algn="ctr">
-                      <a:solidFill>
-                        <a:srgbClr val="E6E6E6"/>
-                      </a:solidFill>
-                      <a:prstDash val="solid"/>
-                      <a:round/>
-                      <a:headEnd type="none" w="med" len="med"/>
-                      <a:tailEnd type="none" w="med" len="med"/>
-                    </a:lnR>
-                    <a:lnT w="6350" cap="flat" cmpd="sng" algn="ctr">
-                      <a:solidFill>
-                        <a:srgbClr val="E6E6E6"/>
-                      </a:solidFill>
-                      <a:prstDash val="solid"/>
-                      <a:round/>
-                      <a:headEnd type="none" w="med" len="med"/>
-                      <a:tailEnd type="none" w="med" len="med"/>
-                    </a:lnT>
-                    <a:lnB w="6350" cap="flat" cmpd="sng" algn="ctr">
-                      <a:solidFill>
-                        <a:srgbClr val="E6E6E6"/>
-                      </a:solidFill>
-                      <a:prstDash val="solid"/>
-                      <a:round/>
-                      <a:headEnd type="none" w="med" len="med"/>
-                      <a:tailEnd type="none" w="med" len="med"/>
-                    </a:lnB>
-                    <a:solidFill>
-                      <a:srgbClr val="F0F0EE"/>
+                        <a:rPr lang="en-US" sz="950" b="1" dirty="0">
+                          <a:solidFill>
+                            <a:srgbClr val="31302E"/>
+                          </a:solidFill>
+                          <a:latin typeface="Inter" pitchFamily="34" charset="0"/>
+                          <a:ea typeface="Inter" pitchFamily="34" charset="-122"/>
+                          <a:cs typeface="Inter" pitchFamily="34" charset="-120"/>
+                        </a:rPr>
+                        <a:t>0.844 (0.722)</a:t>
+                      </a:r>
+                      <a:endParaRPr lang="en-US" sz="950" dirty="0">
+                        <a:latin typeface="Inter" charset="0"/>
+                        <a:ea typeface="Inter" charset="0"/>
+                        <a:cs typeface="Inter" charset="0"/>
+                      </a:endParaRPr>
+                    </a:p>
+                  </a:txBody>
+                  <a:tcPr marL="63500" marR="63500" marT="38100" marB="38100" anchor="ctr">
+                    <a:lnL w="6350" cap="flat" cmpd="sng" algn="ctr">
+                      <a:solidFill>
+                        <a:srgbClr val="E6E6E6"/>
+                      </a:solidFill>
+                      <a:prstDash val="solid"/>
+                      <a:round/>
+                      <a:headEnd type="none" w="med" len="med"/>
+                      <a:tailEnd type="none" w="med" len="med"/>
+                    </a:lnL>
+                    <a:lnR w="6350" cap="flat" cmpd="sng" algn="ctr">
+                      <a:solidFill>
+                        <a:srgbClr val="E6E6E6"/>
+                      </a:solidFill>
+                      <a:prstDash val="solid"/>
+                      <a:round/>
+                      <a:headEnd type="none" w="med" len="med"/>
+                      <a:tailEnd type="none" w="med" len="med"/>
+                    </a:lnR>
+                    <a:lnT w="6350" cap="flat" cmpd="sng" algn="ctr">
+                      <a:solidFill>
+                        <a:srgbClr val="E6E6E6"/>
+                      </a:solidFill>
+                      <a:prstDash val="solid"/>
+                      <a:round/>
+                      <a:headEnd type="none" w="med" len="med"/>
+                      <a:tailEnd type="none" w="med" len="med"/>
+                    </a:lnT>
+                    <a:lnB w="6350" cap="flat" cmpd="sng" algn="ctr">
+                      <a:solidFill>
+                        <a:srgbClr val="E6E6E6"/>
+                      </a:solidFill>
+                      <a:prstDash val="solid"/>
+                      <a:round/>
+                      <a:headEnd type="none" w="med" len="med"/>
+                      <a:tailEnd type="none" w="med" len="med"/>
+                    </a:lnB>
+                    <a:solidFill>
+                      <a:srgbClr val="FFFFFF"/>
                     </a:solidFill>
                   </a:tcPr>
                 </a:tc>
@@ -21692,62 +20469,62 @@
                         <a:buNone/>
                       </a:pPr>
                       <a:r>
-                        <a:rPr lang="en-US" sz="1100" b="1" dirty="0">
-                          <a:solidFill>
-                            <a:srgbClr val="31302E"/>
-                          </a:solidFill>
-                          <a:latin typeface="Inter" pitchFamily="34" charset="0"/>
-                          <a:ea typeface="Inter" pitchFamily="34" charset="-122"/>
-                          <a:cs typeface="Inter" pitchFamily="34" charset="-120"/>
-                        </a:rPr>
-                        <a:t>cross</a:t>
-                      </a:r>
-                      <a:endParaRPr lang="en-US" sz="1100" dirty="0">
-                        <a:latin typeface="Inter" charset="0"/>
-                        <a:ea typeface="Inter" charset="0"/>
-                        <a:cs typeface="Inter" charset="0"/>
-                      </a:endParaRPr>
-                    </a:p>
-                  </a:txBody>
-                  <a:tcPr marL="63500" marR="63500" marT="38100" marB="38100" anchor="ctr">
-                    <a:lnL w="6350" cap="flat" cmpd="sng" algn="ctr">
-                      <a:solidFill>
-                        <a:srgbClr val="E6E6E6"/>
-                      </a:solidFill>
-                      <a:prstDash val="solid"/>
-                      <a:round/>
-                      <a:headEnd type="none" w="med" len="med"/>
-                      <a:tailEnd type="none" w="med" len="med"/>
-                    </a:lnL>
-                    <a:lnR w="6350" cap="flat" cmpd="sng" algn="ctr">
-                      <a:solidFill>
-                        <a:srgbClr val="E6E6E6"/>
-                      </a:solidFill>
-                      <a:prstDash val="solid"/>
-                      <a:round/>
-                      <a:headEnd type="none" w="med" len="med"/>
-                      <a:tailEnd type="none" w="med" len="med"/>
-                    </a:lnR>
-                    <a:lnT w="6350" cap="flat" cmpd="sng" algn="ctr">
-                      <a:solidFill>
-                        <a:srgbClr val="E6E6E6"/>
-                      </a:solidFill>
-                      <a:prstDash val="solid"/>
-                      <a:round/>
-                      <a:headEnd type="none" w="med" len="med"/>
-                      <a:tailEnd type="none" w="med" len="med"/>
-                    </a:lnT>
-                    <a:lnB w="6350" cap="flat" cmpd="sng" algn="ctr">
-                      <a:solidFill>
-                        <a:srgbClr val="E6E6E6"/>
-                      </a:solidFill>
-                      <a:prstDash val="solid"/>
-                      <a:round/>
-                      <a:headEnd type="none" w="med" len="med"/>
-                      <a:tailEnd type="none" w="med" len="med"/>
-                    </a:lnB>
-                    <a:solidFill>
-                      <a:srgbClr val="F0F0EE"/>
+                        <a:rPr lang="en-US" sz="950" b="1" dirty="0">
+                          <a:solidFill>
+                            <a:srgbClr val="31302E"/>
+                          </a:solidFill>
+                          <a:latin typeface="Inter" pitchFamily="34" charset="0"/>
+                          <a:ea typeface="Inter" pitchFamily="34" charset="-122"/>
+                          <a:cs typeface="Inter" pitchFamily="34" charset="-120"/>
+                        </a:rPr>
+                        <a:t>0.852 (0.722)</a:t>
+                      </a:r>
+                      <a:endParaRPr lang="en-US" sz="950" dirty="0">
+                        <a:latin typeface="Inter" charset="0"/>
+                        <a:ea typeface="Inter" charset="0"/>
+                        <a:cs typeface="Inter" charset="0"/>
+                      </a:endParaRPr>
+                    </a:p>
+                  </a:txBody>
+                  <a:tcPr marL="63500" marR="63500" marT="38100" marB="38100" anchor="ctr">
+                    <a:lnL w="6350" cap="flat" cmpd="sng" algn="ctr">
+                      <a:solidFill>
+                        <a:srgbClr val="E6E6E6"/>
+                      </a:solidFill>
+                      <a:prstDash val="solid"/>
+                      <a:round/>
+                      <a:headEnd type="none" w="med" len="med"/>
+                      <a:tailEnd type="none" w="med" len="med"/>
+                    </a:lnL>
+                    <a:lnR w="6350" cap="flat" cmpd="sng" algn="ctr">
+                      <a:solidFill>
+                        <a:srgbClr val="E6E6E6"/>
+                      </a:solidFill>
+                      <a:prstDash val="solid"/>
+                      <a:round/>
+                      <a:headEnd type="none" w="med" len="med"/>
+                      <a:tailEnd type="none" w="med" len="med"/>
+                    </a:lnR>
+                    <a:lnT w="6350" cap="flat" cmpd="sng" algn="ctr">
+                      <a:solidFill>
+                        <a:srgbClr val="E6E6E6"/>
+                      </a:solidFill>
+                      <a:prstDash val="solid"/>
+                      <a:round/>
+                      <a:headEnd type="none" w="med" len="med"/>
+                      <a:tailEnd type="none" w="med" len="med"/>
+                    </a:lnT>
+                    <a:lnB w="6350" cap="flat" cmpd="sng" algn="ctr">
+                      <a:solidFill>
+                        <a:srgbClr val="E6E6E6"/>
+                      </a:solidFill>
+                      <a:prstDash val="solid"/>
+                      <a:round/>
+                      <a:headEnd type="none" w="med" len="med"/>
+                      <a:tailEnd type="none" w="med" len="med"/>
+                    </a:lnB>
+                    <a:solidFill>
+                      <a:srgbClr val="FFFFFF"/>
                     </a:solidFill>
                   </a:tcPr>
                 </a:tc>
@@ -21760,62 +20537,62 @@
                         <a:buNone/>
                       </a:pPr>
                       <a:r>
-                        <a:rPr lang="en-US" sz="1100" b="1" dirty="0">
-                          <a:solidFill>
-                            <a:srgbClr val="31302E"/>
-                          </a:solidFill>
-                          <a:latin typeface="Inter" pitchFamily="34" charset="0"/>
-                          <a:ea typeface="Inter" pitchFamily="34" charset="-122"/>
-                          <a:cs typeface="Inter" pitchFamily="34" charset="-120"/>
-                        </a:rPr>
-                        <a:t>alone</a:t>
-                      </a:r>
-                      <a:endParaRPr lang="en-US" sz="1100" dirty="0">
-                        <a:latin typeface="Inter" charset="0"/>
-                        <a:ea typeface="Inter" charset="0"/>
-                        <a:cs typeface="Inter" charset="0"/>
-                      </a:endParaRPr>
-                    </a:p>
-                  </a:txBody>
-                  <a:tcPr marL="63500" marR="63500" marT="38100" marB="38100" anchor="ctr">
-                    <a:lnL w="6350" cap="flat" cmpd="sng" algn="ctr">
-                      <a:solidFill>
-                        <a:srgbClr val="E6E6E6"/>
-                      </a:solidFill>
-                      <a:prstDash val="solid"/>
-                      <a:round/>
-                      <a:headEnd type="none" w="med" len="med"/>
-                      <a:tailEnd type="none" w="med" len="med"/>
-                    </a:lnL>
-                    <a:lnR w="6350" cap="flat" cmpd="sng" algn="ctr">
-                      <a:solidFill>
-                        <a:srgbClr val="E6E6E6"/>
-                      </a:solidFill>
-                      <a:prstDash val="solid"/>
-                      <a:round/>
-                      <a:headEnd type="none" w="med" len="med"/>
-                      <a:tailEnd type="none" w="med" len="med"/>
-                    </a:lnR>
-                    <a:lnT w="6350" cap="flat" cmpd="sng" algn="ctr">
-                      <a:solidFill>
-                        <a:srgbClr val="E6E6E6"/>
-                      </a:solidFill>
-                      <a:prstDash val="solid"/>
-                      <a:round/>
-                      <a:headEnd type="none" w="med" len="med"/>
-                      <a:tailEnd type="none" w="med" len="med"/>
-                    </a:lnT>
-                    <a:lnB w="6350" cap="flat" cmpd="sng" algn="ctr">
-                      <a:solidFill>
-                        <a:srgbClr val="E6E6E6"/>
-                      </a:solidFill>
-                      <a:prstDash val="solid"/>
-                      <a:round/>
-                      <a:headEnd type="none" w="med" len="med"/>
-                      <a:tailEnd type="none" w="med" len="med"/>
-                    </a:lnB>
-                    <a:solidFill>
-                      <a:srgbClr val="F0F0EE"/>
+                        <a:rPr lang="en-US" sz="950" b="1" dirty="0">
+                          <a:solidFill>
+                            <a:srgbClr val="31302E"/>
+                          </a:solidFill>
+                          <a:latin typeface="Inter" pitchFamily="34" charset="0"/>
+                          <a:ea typeface="Inter" pitchFamily="34" charset="-122"/>
+                          <a:cs typeface="Inter" pitchFamily="34" charset="-120"/>
+                        </a:rPr>
+                        <a:t>0.851 (0.722)</a:t>
+                      </a:r>
+                      <a:endParaRPr lang="en-US" sz="950" dirty="0">
+                        <a:latin typeface="Inter" charset="0"/>
+                        <a:ea typeface="Inter" charset="0"/>
+                        <a:cs typeface="Inter" charset="0"/>
+                      </a:endParaRPr>
+                    </a:p>
+                  </a:txBody>
+                  <a:tcPr marL="63500" marR="63500" marT="38100" marB="38100" anchor="ctr">
+                    <a:lnL w="6350" cap="flat" cmpd="sng" algn="ctr">
+                      <a:solidFill>
+                        <a:srgbClr val="E6E6E6"/>
+                      </a:solidFill>
+                      <a:prstDash val="solid"/>
+                      <a:round/>
+                      <a:headEnd type="none" w="med" len="med"/>
+                      <a:tailEnd type="none" w="med" len="med"/>
+                    </a:lnL>
+                    <a:lnR w="6350" cap="flat" cmpd="sng" algn="ctr">
+                      <a:solidFill>
+                        <a:srgbClr val="E6E6E6"/>
+                      </a:solidFill>
+                      <a:prstDash val="solid"/>
+                      <a:round/>
+                      <a:headEnd type="none" w="med" len="med"/>
+                      <a:tailEnd type="none" w="med" len="med"/>
+                    </a:lnR>
+                    <a:lnT w="6350" cap="flat" cmpd="sng" algn="ctr">
+                      <a:solidFill>
+                        <a:srgbClr val="E6E6E6"/>
+                      </a:solidFill>
+                      <a:prstDash val="solid"/>
+                      <a:round/>
+                      <a:headEnd type="none" w="med" len="med"/>
+                      <a:tailEnd type="none" w="med" len="med"/>
+                    </a:lnT>
+                    <a:lnB w="6350" cap="flat" cmpd="sng" algn="ctr">
+                      <a:solidFill>
+                        <a:srgbClr val="E6E6E6"/>
+                      </a:solidFill>
+                      <a:prstDash val="solid"/>
+                      <a:round/>
+                      <a:headEnd type="none" w="med" len="med"/>
+                      <a:tailEnd type="none" w="med" len="med"/>
+                    </a:lnB>
+                    <a:solidFill>
+                      <a:srgbClr val="FFFFFF"/>
                     </a:solidFill>
                   </a:tcPr>
                 </a:tc>
@@ -21828,62 +20605,62 @@
                         <a:buNone/>
                       </a:pPr>
                       <a:r>
-                        <a:rPr lang="en-US" sz="1100" b="1" dirty="0">
-                          <a:solidFill>
-                            <a:srgbClr val="31302E"/>
-                          </a:solidFill>
-                          <a:latin typeface="Inter" pitchFamily="34" charset="0"/>
-                          <a:ea typeface="Inter" pitchFamily="34" charset="-122"/>
-                          <a:cs typeface="Inter" pitchFamily="34" charset="-120"/>
-                        </a:rPr>
-                        <a:t>concat</a:t>
-                      </a:r>
-                      <a:endParaRPr lang="en-US" sz="1100" dirty="0">
-                        <a:latin typeface="Inter" charset="0"/>
-                        <a:ea typeface="Inter" charset="0"/>
-                        <a:cs typeface="Inter" charset="0"/>
-                      </a:endParaRPr>
-                    </a:p>
-                  </a:txBody>
-                  <a:tcPr marL="63500" marR="63500" marT="38100" marB="38100" anchor="ctr">
-                    <a:lnL w="6350" cap="flat" cmpd="sng" algn="ctr">
-                      <a:solidFill>
-                        <a:srgbClr val="E6E6E6"/>
-                      </a:solidFill>
-                      <a:prstDash val="solid"/>
-                      <a:round/>
-                      <a:headEnd type="none" w="med" len="med"/>
-                      <a:tailEnd type="none" w="med" len="med"/>
-                    </a:lnL>
-                    <a:lnR w="6350" cap="flat" cmpd="sng" algn="ctr">
-                      <a:solidFill>
-                        <a:srgbClr val="E6E6E6"/>
-                      </a:solidFill>
-                      <a:prstDash val="solid"/>
-                      <a:round/>
-                      <a:headEnd type="none" w="med" len="med"/>
-                      <a:tailEnd type="none" w="med" len="med"/>
-                    </a:lnR>
-                    <a:lnT w="6350" cap="flat" cmpd="sng" algn="ctr">
-                      <a:solidFill>
-                        <a:srgbClr val="E6E6E6"/>
-                      </a:solidFill>
-                      <a:prstDash val="solid"/>
-                      <a:round/>
-                      <a:headEnd type="none" w="med" len="med"/>
-                      <a:tailEnd type="none" w="med" len="med"/>
-                    </a:lnT>
-                    <a:lnB w="6350" cap="flat" cmpd="sng" algn="ctr">
-                      <a:solidFill>
-                        <a:srgbClr val="E6E6E6"/>
-                      </a:solidFill>
-                      <a:prstDash val="solid"/>
-                      <a:round/>
-                      <a:headEnd type="none" w="med" len="med"/>
-                      <a:tailEnd type="none" w="med" len="med"/>
-                    </a:lnB>
-                    <a:solidFill>
-                      <a:srgbClr val="F0F0EE"/>
+                        <a:rPr lang="en-US" sz="950" dirty="0">
+                          <a:solidFill>
+                            <a:srgbClr val="31302E"/>
+                          </a:solidFill>
+                          <a:latin typeface="Inter" pitchFamily="34" charset="0"/>
+                          <a:ea typeface="Inter" pitchFamily="34" charset="-122"/>
+                          <a:cs typeface="Inter" pitchFamily="34" charset="-120"/>
+                        </a:rPr>
+                        <a:t>0.696 (0.698)</a:t>
+                      </a:r>
+                      <a:endParaRPr lang="en-US" sz="950" dirty="0">
+                        <a:latin typeface="Inter" charset="0"/>
+                        <a:ea typeface="Inter" charset="0"/>
+                        <a:cs typeface="Inter" charset="0"/>
+                      </a:endParaRPr>
+                    </a:p>
+                  </a:txBody>
+                  <a:tcPr marL="63500" marR="63500" marT="38100" marB="38100" anchor="ctr">
+                    <a:lnL w="6350" cap="flat" cmpd="sng" algn="ctr">
+                      <a:solidFill>
+                        <a:srgbClr val="E6E6E6"/>
+                      </a:solidFill>
+                      <a:prstDash val="solid"/>
+                      <a:round/>
+                      <a:headEnd type="none" w="med" len="med"/>
+                      <a:tailEnd type="none" w="med" len="med"/>
+                    </a:lnL>
+                    <a:lnR w="6350" cap="flat" cmpd="sng" algn="ctr">
+                      <a:solidFill>
+                        <a:srgbClr val="E6E6E6"/>
+                      </a:solidFill>
+                      <a:prstDash val="solid"/>
+                      <a:round/>
+                      <a:headEnd type="none" w="med" len="med"/>
+                      <a:tailEnd type="none" w="med" len="med"/>
+                    </a:lnR>
+                    <a:lnT w="6350" cap="flat" cmpd="sng" algn="ctr">
+                      <a:solidFill>
+                        <a:srgbClr val="E6E6E6"/>
+                      </a:solidFill>
+                      <a:prstDash val="solid"/>
+                      <a:round/>
+                      <a:headEnd type="none" w="med" len="med"/>
+                      <a:tailEnd type="none" w="med" len="med"/>
+                    </a:lnT>
+                    <a:lnB w="6350" cap="flat" cmpd="sng" algn="ctr">
+                      <a:solidFill>
+                        <a:srgbClr val="E6E6E6"/>
+                      </a:solidFill>
+                      <a:prstDash val="solid"/>
+                      <a:round/>
+                      <a:headEnd type="none" w="med" len="med"/>
+                      <a:tailEnd type="none" w="med" len="med"/>
+                    </a:lnB>
+                    <a:solidFill>
+                      <a:srgbClr val="FFFFFF"/>
                     </a:solidFill>
                   </a:tcPr>
                 </a:tc>
@@ -21896,62 +20673,62 @@
                         <a:buNone/>
                       </a:pPr>
                       <a:r>
-                        <a:rPr lang="en-US" sz="1100" b="1" dirty="0">
-                          <a:solidFill>
-                            <a:srgbClr val="31302E"/>
-                          </a:solidFill>
-                          <a:latin typeface="Inter" pitchFamily="34" charset="0"/>
-                          <a:ea typeface="Inter" pitchFamily="34" charset="-122"/>
-                          <a:cs typeface="Inter" pitchFamily="34" charset="-120"/>
-                        </a:rPr>
-                        <a:t>gated</a:t>
-                      </a:r>
-                      <a:endParaRPr lang="en-US" sz="1100" dirty="0">
-                        <a:latin typeface="Inter" charset="0"/>
-                        <a:ea typeface="Inter" charset="0"/>
-                        <a:cs typeface="Inter" charset="0"/>
-                      </a:endParaRPr>
-                    </a:p>
-                  </a:txBody>
-                  <a:tcPr marL="63500" marR="63500" marT="38100" marB="38100" anchor="ctr">
-                    <a:lnL w="6350" cap="flat" cmpd="sng" algn="ctr">
-                      <a:solidFill>
-                        <a:srgbClr val="E6E6E6"/>
-                      </a:solidFill>
-                      <a:prstDash val="solid"/>
-                      <a:round/>
-                      <a:headEnd type="none" w="med" len="med"/>
-                      <a:tailEnd type="none" w="med" len="med"/>
-                    </a:lnL>
-                    <a:lnR w="6350" cap="flat" cmpd="sng" algn="ctr">
-                      <a:solidFill>
-                        <a:srgbClr val="E6E6E6"/>
-                      </a:solidFill>
-                      <a:prstDash val="solid"/>
-                      <a:round/>
-                      <a:headEnd type="none" w="med" len="med"/>
-                      <a:tailEnd type="none" w="med" len="med"/>
-                    </a:lnR>
-                    <a:lnT w="6350" cap="flat" cmpd="sng" algn="ctr">
-                      <a:solidFill>
-                        <a:srgbClr val="E6E6E6"/>
-                      </a:solidFill>
-                      <a:prstDash val="solid"/>
-                      <a:round/>
-                      <a:headEnd type="none" w="med" len="med"/>
-                      <a:tailEnd type="none" w="med" len="med"/>
-                    </a:lnT>
-                    <a:lnB w="6350" cap="flat" cmpd="sng" algn="ctr">
-                      <a:solidFill>
-                        <a:srgbClr val="E6E6E6"/>
-                      </a:solidFill>
-                      <a:prstDash val="solid"/>
-                      <a:round/>
-                      <a:headEnd type="none" w="med" len="med"/>
-                      <a:tailEnd type="none" w="med" len="med"/>
-                    </a:lnB>
-                    <a:solidFill>
-                      <a:srgbClr val="F0F0EE"/>
+                        <a:rPr lang="en-US" sz="950" dirty="0">
+                          <a:solidFill>
+                            <a:srgbClr val="31302E"/>
+                          </a:solidFill>
+                          <a:latin typeface="Inter" pitchFamily="34" charset="0"/>
+                          <a:ea typeface="Inter" pitchFamily="34" charset="-122"/>
+                          <a:cs typeface="Inter" pitchFamily="34" charset="-120"/>
+                        </a:rPr>
+                        <a:t>0.729 (0.698)</a:t>
+                      </a:r>
+                      <a:endParaRPr lang="en-US" sz="950" dirty="0">
+                        <a:latin typeface="Inter" charset="0"/>
+                        <a:ea typeface="Inter" charset="0"/>
+                        <a:cs typeface="Inter" charset="0"/>
+                      </a:endParaRPr>
+                    </a:p>
+                  </a:txBody>
+                  <a:tcPr marL="63500" marR="63500" marT="38100" marB="38100" anchor="ctr">
+                    <a:lnL w="6350" cap="flat" cmpd="sng" algn="ctr">
+                      <a:solidFill>
+                        <a:srgbClr val="E6E6E6"/>
+                      </a:solidFill>
+                      <a:prstDash val="solid"/>
+                      <a:round/>
+                      <a:headEnd type="none" w="med" len="med"/>
+                      <a:tailEnd type="none" w="med" len="med"/>
+                    </a:lnL>
+                    <a:lnR w="6350" cap="flat" cmpd="sng" algn="ctr">
+                      <a:solidFill>
+                        <a:srgbClr val="E6E6E6"/>
+                      </a:solidFill>
+                      <a:prstDash val="solid"/>
+                      <a:round/>
+                      <a:headEnd type="none" w="med" len="med"/>
+                      <a:tailEnd type="none" w="med" len="med"/>
+                    </a:lnR>
+                    <a:lnT w="6350" cap="flat" cmpd="sng" algn="ctr">
+                      <a:solidFill>
+                        <a:srgbClr val="E6E6E6"/>
+                      </a:solidFill>
+                      <a:prstDash val="solid"/>
+                      <a:round/>
+                      <a:headEnd type="none" w="med" len="med"/>
+                      <a:tailEnd type="none" w="med" len="med"/>
+                    </a:lnT>
+                    <a:lnB w="6350" cap="flat" cmpd="sng" algn="ctr">
+                      <a:solidFill>
+                        <a:srgbClr val="E6E6E6"/>
+                      </a:solidFill>
+                      <a:prstDash val="solid"/>
+                      <a:round/>
+                      <a:headEnd type="none" w="med" len="med"/>
+                      <a:tailEnd type="none" w="med" len="med"/>
+                    </a:lnB>
+                    <a:solidFill>
+                      <a:srgbClr val="FFFFFF"/>
                     </a:solidFill>
                   </a:tcPr>
                 </a:tc>
@@ -21964,67 +20741,67 @@
                         <a:buNone/>
                       </a:pPr>
                       <a:r>
-                        <a:rPr lang="en-US" sz="1100" b="1" dirty="0">
-                          <a:solidFill>
-                            <a:srgbClr val="31302E"/>
-                          </a:solidFill>
-                          <a:latin typeface="Inter" pitchFamily="34" charset="0"/>
-                          <a:ea typeface="Inter" pitchFamily="34" charset="-122"/>
-                          <a:cs typeface="Inter" pitchFamily="34" charset="-120"/>
-                        </a:rPr>
-                        <a:t>cross</a:t>
-                      </a:r>
-                      <a:endParaRPr lang="en-US" sz="1100" dirty="0">
-                        <a:latin typeface="Inter" charset="0"/>
-                        <a:ea typeface="Inter" charset="0"/>
-                        <a:cs typeface="Inter" charset="0"/>
-                      </a:endParaRPr>
-                    </a:p>
-                  </a:txBody>
-                  <a:tcPr marL="63500" marR="63500" marT="38100" marB="38100" anchor="ctr">
-                    <a:lnL w="6350" cap="flat" cmpd="sng" algn="ctr">
-                      <a:solidFill>
-                        <a:srgbClr val="E6E6E6"/>
-                      </a:solidFill>
-                      <a:prstDash val="solid"/>
-                      <a:round/>
-                      <a:headEnd type="none" w="med" len="med"/>
-                      <a:tailEnd type="none" w="med" len="med"/>
-                    </a:lnL>
-                    <a:lnR w="6350" cap="flat" cmpd="sng" algn="ctr">
-                      <a:solidFill>
-                        <a:srgbClr val="E6E6E6"/>
-                      </a:solidFill>
-                      <a:prstDash val="solid"/>
-                      <a:round/>
-                      <a:headEnd type="none" w="med" len="med"/>
-                      <a:tailEnd type="none" w="med" len="med"/>
-                    </a:lnR>
-                    <a:lnT w="6350" cap="flat" cmpd="sng" algn="ctr">
-                      <a:solidFill>
-                        <a:srgbClr val="E6E6E6"/>
-                      </a:solidFill>
-                      <a:prstDash val="solid"/>
-                      <a:round/>
-                      <a:headEnd type="none" w="med" len="med"/>
-                      <a:tailEnd type="none" w="med" len="med"/>
-                    </a:lnT>
-                    <a:lnB w="6350" cap="flat" cmpd="sng" algn="ctr">
-                      <a:solidFill>
-                        <a:srgbClr val="E6E6E6"/>
-                      </a:solidFill>
-                      <a:prstDash val="solid"/>
-                      <a:round/>
-                      <a:headEnd type="none" w="med" len="med"/>
-                      <a:tailEnd type="none" w="med" len="med"/>
-                    </a:lnB>
-                    <a:solidFill>
-                      <a:srgbClr val="F0F0EE"/>
+                        <a:rPr lang="en-US" sz="950" dirty="0">
+                          <a:solidFill>
+                            <a:srgbClr val="31302E"/>
+                          </a:solidFill>
+                          <a:latin typeface="Inter" pitchFamily="34" charset="0"/>
+                          <a:ea typeface="Inter" pitchFamily="34" charset="-122"/>
+                          <a:cs typeface="Inter" pitchFamily="34" charset="-120"/>
+                        </a:rPr>
+                        <a:t>0.761 (0.698)</a:t>
+                      </a:r>
+                      <a:endParaRPr lang="en-US" sz="950" dirty="0">
+                        <a:latin typeface="Inter" charset="0"/>
+                        <a:ea typeface="Inter" charset="0"/>
+                        <a:cs typeface="Inter" charset="0"/>
+                      </a:endParaRPr>
+                    </a:p>
+                  </a:txBody>
+                  <a:tcPr marL="63500" marR="63500" marT="38100" marB="38100" anchor="ctr">
+                    <a:lnL w="6350" cap="flat" cmpd="sng" algn="ctr">
+                      <a:solidFill>
+                        <a:srgbClr val="E6E6E6"/>
+                      </a:solidFill>
+                      <a:prstDash val="solid"/>
+                      <a:round/>
+                      <a:headEnd type="none" w="med" len="med"/>
+                      <a:tailEnd type="none" w="med" len="med"/>
+                    </a:lnL>
+                    <a:lnR w="6350" cap="flat" cmpd="sng" algn="ctr">
+                      <a:solidFill>
+                        <a:srgbClr val="E6E6E6"/>
+                      </a:solidFill>
+                      <a:prstDash val="solid"/>
+                      <a:round/>
+                      <a:headEnd type="none" w="med" len="med"/>
+                      <a:tailEnd type="none" w="med" len="med"/>
+                    </a:lnR>
+                    <a:lnT w="6350" cap="flat" cmpd="sng" algn="ctr">
+                      <a:solidFill>
+                        <a:srgbClr val="E6E6E6"/>
+                      </a:solidFill>
+                      <a:prstDash val="solid"/>
+                      <a:round/>
+                      <a:headEnd type="none" w="med" len="med"/>
+                      <a:tailEnd type="none" w="med" len="med"/>
+                    </a:lnT>
+                    <a:lnB w="6350" cap="flat" cmpd="sng" algn="ctr">
+                      <a:solidFill>
+                        <a:srgbClr val="E6E6E6"/>
+                      </a:solidFill>
+                      <a:prstDash val="solid"/>
+                      <a:round/>
+                      <a:headEnd type="none" w="med" len="med"/>
+                      <a:tailEnd type="none" w="med" len="med"/>
+                    </a:lnB>
+                    <a:solidFill>
+                      <a:srgbClr val="FFFFFF"/>
                     </a:solidFill>
                   </a:tcPr>
                 </a:tc>
               </a:tr>
-              <a:tr h="256032">
+              <a:tr h="192024">
                 <a:tc>
                   <a:txBody>
                     <a:bodyPr/>
@@ -22034,17 +20811,17 @@
                         <a:buNone/>
                       </a:pPr>
                       <a:r>
-                        <a:rPr lang="en-US" sz="1100" dirty="0">
-                          <a:solidFill>
-                            <a:srgbClr val="31302E"/>
-                          </a:solidFill>
-                          <a:latin typeface="Inter" pitchFamily="34" charset="0"/>
-                          <a:ea typeface="Inter" pitchFamily="34" charset="-122"/>
-                          <a:cs typeface="Inter" pitchFamily="34" charset="-120"/>
-                        </a:rPr>
-                        <a:t>RNA-FM (the paper's own)</a:t>
-                      </a:r>
-                      <a:endParaRPr lang="en-US" sz="1100" dirty="0">
+                        <a:rPr lang="en-US" sz="950" dirty="0">
+                          <a:solidFill>
+                            <a:srgbClr val="31302E"/>
+                          </a:solidFill>
+                          <a:latin typeface="Inter" pitchFamily="34" charset="0"/>
+                          <a:ea typeface="Inter" pitchFamily="34" charset="-122"/>
+                          <a:cs typeface="Inter" pitchFamily="34" charset="-120"/>
+                        </a:rPr>
+                        <a:t>CoV-Vac</a:t>
+                      </a:r>
+                      <a:endParaRPr lang="en-US" sz="950" dirty="0">
                         <a:latin typeface="Inter" charset="0"/>
                         <a:ea typeface="Inter" charset="0"/>
                         <a:cs typeface="Inter" charset="0"/>
@@ -22102,17 +20879,17 @@
                         <a:buNone/>
                       </a:pPr>
                       <a:r>
-                        <a:rPr lang="en-US" sz="1100" dirty="0">
-                          <a:solidFill>
-                            <a:srgbClr val="31302E"/>
-                          </a:solidFill>
-                          <a:latin typeface="Inter" pitchFamily="34" charset="0"/>
-                          <a:ea typeface="Inter" pitchFamily="34" charset="-122"/>
-                          <a:cs typeface="Inter" pitchFamily="34" charset="-120"/>
-                        </a:rPr>
-                        <a:t>0.833</a:t>
-                      </a:r>
-                      <a:endParaRPr lang="en-US" sz="1100" dirty="0">
+                        <a:rPr lang="en-US" sz="950" dirty="0">
+                          <a:solidFill>
+                            <a:srgbClr val="31302E"/>
+                          </a:solidFill>
+                          <a:latin typeface="Inter" pitchFamily="34" charset="0"/>
+                          <a:ea typeface="Inter" pitchFamily="34" charset="-122"/>
+                          <a:cs typeface="Inter" pitchFamily="34" charset="-120"/>
+                        </a:rPr>
+                        <a:t>0.727 (0.779)</a:t>
+                      </a:r>
+                      <a:endParaRPr lang="en-US" sz="950" dirty="0">
                         <a:latin typeface="Inter" charset="0"/>
                         <a:ea typeface="Inter" charset="0"/>
                         <a:cs typeface="Inter" charset="0"/>
@@ -22170,17 +20947,17 @@
                         <a:buNone/>
                       </a:pPr>
                       <a:r>
-                        <a:rPr lang="en-US" sz="1100" dirty="0">
-                          <a:solidFill>
-                            <a:srgbClr val="31302E"/>
-                          </a:solidFill>
-                          <a:latin typeface="Inter" pitchFamily="34" charset="0"/>
-                          <a:ea typeface="Inter" pitchFamily="34" charset="-122"/>
-                          <a:cs typeface="Inter" pitchFamily="34" charset="-120"/>
-                        </a:rPr>
-                        <a:t>0.801</a:t>
-                      </a:r>
-                      <a:endParaRPr lang="en-US" sz="1100" dirty="0">
+                        <a:rPr lang="en-US" sz="950" dirty="0">
+                          <a:solidFill>
+                            <a:srgbClr val="31302E"/>
+                          </a:solidFill>
+                          <a:latin typeface="Inter" pitchFamily="34" charset="0"/>
+                          <a:ea typeface="Inter" pitchFamily="34" charset="-122"/>
+                          <a:cs typeface="Inter" pitchFamily="34" charset="-120"/>
+                        </a:rPr>
+                        <a:t>0.755 (0.779)</a:t>
+                      </a:r>
+                      <a:endParaRPr lang="en-US" sz="950" dirty="0">
                         <a:latin typeface="Inter" charset="0"/>
                         <a:ea typeface="Inter" charset="0"/>
                         <a:cs typeface="Inter" charset="0"/>
@@ -22238,17 +21015,17 @@
                         <a:buNone/>
                       </a:pPr>
                       <a:r>
-                        <a:rPr lang="en-US" sz="1100" dirty="0">
-                          <a:solidFill>
-                            <a:srgbClr val="31302E"/>
-                          </a:solidFill>
-                          <a:latin typeface="Inter" pitchFamily="34" charset="0"/>
-                          <a:ea typeface="Inter" pitchFamily="34" charset="-122"/>
-                          <a:cs typeface="Inter" pitchFamily="34" charset="-120"/>
-                        </a:rPr>
-                        <a:t>0.783</a:t>
-                      </a:r>
-                      <a:endParaRPr lang="en-US" sz="1100" dirty="0">
+                        <a:rPr lang="en-US" sz="950" dirty="0">
+                          <a:solidFill>
+                            <a:srgbClr val="31302E"/>
+                          </a:solidFill>
+                          <a:latin typeface="Inter" pitchFamily="34" charset="0"/>
+                          <a:ea typeface="Inter" pitchFamily="34" charset="-122"/>
+                          <a:cs typeface="Inter" pitchFamily="34" charset="-120"/>
+                        </a:rPr>
+                        <a:t>0.823 (0.833)</a:t>
+                      </a:r>
+                      <a:endParaRPr lang="en-US" sz="950" dirty="0">
                         <a:latin typeface="Inter" charset="0"/>
                         <a:ea typeface="Inter" charset="0"/>
                         <a:cs typeface="Inter" charset="0"/>
@@ -22306,17 +21083,17 @@
                         <a:buNone/>
                       </a:pPr>
                       <a:r>
-                        <a:rPr lang="en-US" sz="1100" dirty="0">
-                          <a:solidFill>
-                            <a:srgbClr val="31302E"/>
-                          </a:solidFill>
-                          <a:latin typeface="Inter" pitchFamily="34" charset="0"/>
-                          <a:ea typeface="Inter" pitchFamily="34" charset="-122"/>
-                          <a:cs typeface="Inter" pitchFamily="34" charset="-120"/>
-                        </a:rPr>
-                        <a:t>0.832</a:t>
-                      </a:r>
-                      <a:endParaRPr lang="en-US" sz="1100" dirty="0">
+                        <a:rPr lang="en-US" sz="950" dirty="0">
+                          <a:solidFill>
+                            <a:srgbClr val="31302E"/>
+                          </a:solidFill>
+                          <a:latin typeface="Inter" pitchFamily="34" charset="0"/>
+                          <a:ea typeface="Inter" pitchFamily="34" charset="-122"/>
+                          <a:cs typeface="Inter" pitchFamily="34" charset="-120"/>
+                        </a:rPr>
+                        <a:t>0.812 (0.833)</a:t>
+                      </a:r>
+                      <a:endParaRPr lang="en-US" sz="950" dirty="0">
                         <a:latin typeface="Inter" charset="0"/>
                         <a:ea typeface="Inter" charset="0"/>
                         <a:cs typeface="Inter" charset="0"/>
@@ -22374,17 +21151,17 @@
                         <a:buNone/>
                       </a:pPr>
                       <a:r>
-                        <a:rPr lang="en-US" sz="1100" dirty="0">
-                          <a:solidFill>
-                            <a:srgbClr val="31302E"/>
-                          </a:solidFill>
-                          <a:latin typeface="Inter" pitchFamily="34" charset="0"/>
-                          <a:ea typeface="Inter" pitchFamily="34" charset="-122"/>
-                          <a:cs typeface="Inter" pitchFamily="34" charset="-120"/>
-                        </a:rPr>
-                        <a:t>50.7</a:t>
-                      </a:r>
-                      <a:endParaRPr lang="en-US" sz="1100" dirty="0">
+                        <a:rPr lang="en-US" sz="950" dirty="0">
+                          <a:solidFill>
+                            <a:srgbClr val="31302E"/>
+                          </a:solidFill>
+                          <a:latin typeface="Inter" pitchFamily="34" charset="0"/>
+                          <a:ea typeface="Inter" pitchFamily="34" charset="-122"/>
+                          <a:cs typeface="Inter" pitchFamily="34" charset="-120"/>
+                        </a:rPr>
+                        <a:t>0.844 (0.833)</a:t>
+                      </a:r>
+                      <a:endParaRPr lang="en-US" sz="950" dirty="0">
                         <a:latin typeface="Inter" charset="0"/>
                         <a:ea typeface="Inter" charset="0"/>
                         <a:cs typeface="Inter" charset="0"/>
@@ -22442,17 +21219,17 @@
                         <a:buNone/>
                       </a:pPr>
                       <a:r>
-                        <a:rPr lang="en-US" sz="1100" dirty="0">
-                          <a:solidFill>
-                            <a:srgbClr val="31302E"/>
-                          </a:solidFill>
-                          <a:latin typeface="Inter" pitchFamily="34" charset="0"/>
-                          <a:ea typeface="Inter" pitchFamily="34" charset="-122"/>
-                          <a:cs typeface="Inter" pitchFamily="34" charset="-120"/>
-                        </a:rPr>
-                        <a:t>60.7</a:t>
-                      </a:r>
-                      <a:endParaRPr lang="en-US" sz="1100" dirty="0">
+                        <a:rPr lang="en-US" sz="950" dirty="0">
+                          <a:solidFill>
+                            <a:srgbClr val="31302E"/>
+                          </a:solidFill>
+                          <a:latin typeface="Inter" pitchFamily="34" charset="0"/>
+                          <a:ea typeface="Inter" pitchFamily="34" charset="-122"/>
+                          <a:cs typeface="Inter" pitchFamily="34" charset="-120"/>
+                        </a:rPr>
+                        <a:t>0.814 (0.816)</a:t>
+                      </a:r>
+                      <a:endParaRPr lang="en-US" sz="950" dirty="0">
                         <a:latin typeface="Inter" charset="0"/>
                         <a:ea typeface="Inter" charset="0"/>
                         <a:cs typeface="Inter" charset="0"/>
@@ -22510,17 +21287,17 @@
                         <a:buNone/>
                       </a:pPr>
                       <a:r>
-                        <a:rPr lang="en-US" sz="1100" dirty="0">
-                          <a:solidFill>
-                            <a:srgbClr val="31302E"/>
-                          </a:solidFill>
-                          <a:latin typeface="Inter" pitchFamily="34" charset="0"/>
-                          <a:ea typeface="Inter" pitchFamily="34" charset="-122"/>
-                          <a:cs typeface="Inter" pitchFamily="34" charset="-120"/>
-                        </a:rPr>
-                        <a:t>54.4</a:t>
-                      </a:r>
-                      <a:endParaRPr lang="en-US" sz="1100" dirty="0">
+                        <a:rPr lang="en-US" sz="950" dirty="0">
+                          <a:solidFill>
+                            <a:srgbClr val="31302E"/>
+                          </a:solidFill>
+                          <a:latin typeface="Inter" pitchFamily="34" charset="0"/>
+                          <a:ea typeface="Inter" pitchFamily="34" charset="-122"/>
+                          <a:cs typeface="Inter" pitchFamily="34" charset="-120"/>
+                        </a:rPr>
+                        <a:t>0.827 (0.816)</a:t>
+                      </a:r>
+                      <a:endParaRPr lang="en-US" sz="950" dirty="0">
                         <a:latin typeface="Inter" charset="0"/>
                         <a:ea typeface="Inter" charset="0"/>
                         <a:cs typeface="Inter" charset="0"/>
@@ -22578,17 +21355,17 @@
                         <a:buNone/>
                       </a:pPr>
                       <a:r>
-                        <a:rPr lang="en-US" sz="1100" dirty="0">
-                          <a:solidFill>
-                            <a:srgbClr val="31302E"/>
-                          </a:solidFill>
-                          <a:latin typeface="Inter" pitchFamily="34" charset="0"/>
-                          <a:ea typeface="Inter" pitchFamily="34" charset="-122"/>
-                          <a:cs typeface="Inter" pitchFamily="34" charset="-120"/>
-                        </a:rPr>
-                        <a:t>53.8</a:t>
-                      </a:r>
-                      <a:endParaRPr lang="en-US" sz="1100" dirty="0">
+                        <a:rPr lang="en-US" sz="950" dirty="0">
+                          <a:solidFill>
+                            <a:srgbClr val="31302E"/>
+                          </a:solidFill>
+                          <a:latin typeface="Inter" pitchFamily="34" charset="0"/>
+                          <a:ea typeface="Inter" pitchFamily="34" charset="-122"/>
+                          <a:cs typeface="Inter" pitchFamily="34" charset="-120"/>
+                        </a:rPr>
+                        <a:t>0.776 (0.816)</a:t>
+                      </a:r>
+                      <a:endParaRPr lang="en-US" sz="950" dirty="0">
                         <a:latin typeface="Inter" charset="0"/>
                         <a:ea typeface="Inter" charset="0"/>
                         <a:cs typeface="Inter" charset="0"/>
@@ -22638,7 +21415,7 @@
                   </a:tcPr>
                 </a:tc>
               </a:tr>
-              <a:tr h="256032">
+              <a:tr h="192024">
                 <a:tc>
                   <a:txBody>
                     <a:bodyPr/>
@@ -22648,17 +21425,17 @@
                         <a:buNone/>
                       </a:pPr>
                       <a:r>
-                        <a:rPr lang="en-US" sz="1100" dirty="0">
-                          <a:solidFill>
-                            <a:srgbClr val="31302E"/>
-                          </a:solidFill>
-                          <a:latin typeface="Inter" pitchFamily="34" charset="0"/>
-                          <a:ea typeface="Inter" pitchFamily="34" charset="-122"/>
-                          <a:cs typeface="Inter" pitchFamily="34" charset="-120"/>
-                        </a:rPr>
-                        <a:t>mRNA-FM</a:t>
-                      </a:r>
-                      <a:endParaRPr lang="en-US" sz="1100" dirty="0">
+                        <a:rPr lang="en-US" sz="950" dirty="0">
+                          <a:solidFill>
+                            <a:srgbClr val="31302E"/>
+                          </a:solidFill>
+                          <a:latin typeface="Inter" pitchFamily="34" charset="0"/>
+                          <a:ea typeface="Inter" pitchFamily="34" charset="-122"/>
+                          <a:cs typeface="Inter" pitchFamily="34" charset="-120"/>
+                        </a:rPr>
+                        <a:t>E. coli (%)</a:t>
+                      </a:r>
+                      <a:endParaRPr lang="en-US" sz="950" dirty="0">
                         <a:latin typeface="Inter" charset="0"/>
                         <a:ea typeface="Inter" charset="0"/>
                         <a:cs typeface="Inter" charset="0"/>
@@ -22716,17 +21493,17 @@
                         <a:buNone/>
                       </a:pPr>
                       <a:r>
-                        <a:rPr lang="en-US" sz="1100" dirty="0">
-                          <a:solidFill>
-                            <a:srgbClr val="31302E"/>
-                          </a:solidFill>
-                          <a:latin typeface="Inter" pitchFamily="34" charset="0"/>
-                          <a:ea typeface="Inter" pitchFamily="34" charset="-122"/>
-                          <a:cs typeface="Inter" pitchFamily="34" charset="-120"/>
-                        </a:rPr>
-                        <a:t>0.812</a:t>
-                      </a:r>
-                      <a:endParaRPr lang="en-US" sz="1100" dirty="0">
+                        <a:rPr lang="en-US" sz="950" dirty="0">
+                          <a:solidFill>
+                            <a:srgbClr val="31302E"/>
+                          </a:solidFill>
+                          <a:latin typeface="Inter" pitchFamily="34" charset="0"/>
+                          <a:ea typeface="Inter" pitchFamily="34" charset="-122"/>
+                          <a:cs typeface="Inter" pitchFamily="34" charset="-120"/>
+                        </a:rPr>
+                        <a:t>47.5 (47.8)</a:t>
+                      </a:r>
+                      <a:endParaRPr lang="en-US" sz="950" dirty="0">
                         <a:latin typeface="Inter" charset="0"/>
                         <a:ea typeface="Inter" charset="0"/>
                         <a:cs typeface="Inter" charset="0"/>
@@ -22784,17 +21561,17 @@
                         <a:buNone/>
                       </a:pPr>
                       <a:r>
-                        <a:rPr lang="en-US" sz="1100" dirty="0">
-                          <a:solidFill>
-                            <a:srgbClr val="31302E"/>
-                          </a:solidFill>
-                          <a:latin typeface="Inter" pitchFamily="34" charset="0"/>
-                          <a:ea typeface="Inter" pitchFamily="34" charset="-122"/>
-                          <a:cs typeface="Inter" pitchFamily="34" charset="-120"/>
-                        </a:rPr>
-                        <a:t>0.759</a:t>
-                      </a:r>
-                      <a:endParaRPr lang="en-US" sz="1100" dirty="0">
+                        <a:rPr lang="en-US" sz="950" dirty="0">
+                          <a:solidFill>
+                            <a:srgbClr val="31302E"/>
+                          </a:solidFill>
+                          <a:latin typeface="Inter" pitchFamily="34" charset="0"/>
+                          <a:ea typeface="Inter" pitchFamily="34" charset="-122"/>
+                          <a:cs typeface="Inter" pitchFamily="34" charset="-120"/>
+                        </a:rPr>
+                        <a:t>50.4 (47.8)</a:t>
+                      </a:r>
+                      <a:endParaRPr lang="en-US" sz="950" dirty="0">
                         <a:latin typeface="Inter" charset="0"/>
                         <a:ea typeface="Inter" charset="0"/>
                         <a:cs typeface="Inter" charset="0"/>
@@ -22852,17 +21629,17 @@
                         <a:buNone/>
                       </a:pPr>
                       <a:r>
-                        <a:rPr lang="en-US" sz="1100" dirty="0">
-                          <a:solidFill>
-                            <a:srgbClr val="31302E"/>
-                          </a:solidFill>
-                          <a:latin typeface="Inter" pitchFamily="34" charset="0"/>
-                          <a:ea typeface="Inter" pitchFamily="34" charset="-122"/>
-                          <a:cs typeface="Inter" pitchFamily="34" charset="-120"/>
-                        </a:rPr>
-                        <a:t>0.762</a:t>
-                      </a:r>
-                      <a:endParaRPr lang="en-US" sz="1100" dirty="0">
+                        <a:rPr lang="en-US" sz="950" b="1" dirty="0">
+                          <a:solidFill>
+                            <a:srgbClr val="31302E"/>
+                          </a:solidFill>
+                          <a:latin typeface="Inter" pitchFamily="34" charset="0"/>
+                          <a:ea typeface="Inter" pitchFamily="34" charset="-122"/>
+                          <a:cs typeface="Inter" pitchFamily="34" charset="-120"/>
+                        </a:rPr>
+                        <a:t>57.3 (50.7)</a:t>
+                      </a:r>
+                      <a:endParaRPr lang="en-US" sz="950" dirty="0">
                         <a:latin typeface="Inter" charset="0"/>
                         <a:ea typeface="Inter" charset="0"/>
                         <a:cs typeface="Inter" charset="0"/>
@@ -22920,17 +21697,17 @@
                         <a:buNone/>
                       </a:pPr>
                       <a:r>
-                        <a:rPr lang="en-US" sz="1100" dirty="0">
-                          <a:solidFill>
-                            <a:srgbClr val="31302E"/>
-                          </a:solidFill>
-                          <a:latin typeface="Inter" pitchFamily="34" charset="0"/>
-                          <a:ea typeface="Inter" pitchFamily="34" charset="-122"/>
-                          <a:cs typeface="Inter" pitchFamily="34" charset="-120"/>
-                        </a:rPr>
-                        <a:t>0.822</a:t>
-                      </a:r>
-                      <a:endParaRPr lang="en-US" sz="1100" dirty="0">
+                        <a:rPr lang="en-US" sz="950" b="1" dirty="0">
+                          <a:solidFill>
+                            <a:srgbClr val="31302E"/>
+                          </a:solidFill>
+                          <a:latin typeface="Inter" pitchFamily="34" charset="0"/>
+                          <a:ea typeface="Inter" pitchFamily="34" charset="-122"/>
+                          <a:cs typeface="Inter" pitchFamily="34" charset="-120"/>
+                        </a:rPr>
+                        <a:t>58.7 (50.7)</a:t>
+                      </a:r>
+                      <a:endParaRPr lang="en-US" sz="950" dirty="0">
                         <a:latin typeface="Inter" charset="0"/>
                         <a:ea typeface="Inter" charset="0"/>
                         <a:cs typeface="Inter" charset="0"/>
@@ -22988,17 +21765,17 @@
                         <a:buNone/>
                       </a:pPr>
                       <a:r>
-                        <a:rPr lang="en-US" sz="1100" b="1" dirty="0">
-                          <a:solidFill>
-                            <a:srgbClr val="31302E"/>
-                          </a:solidFill>
-                          <a:latin typeface="Inter" pitchFamily="34" charset="0"/>
-                          <a:ea typeface="Inter" pitchFamily="34" charset="-122"/>
-                          <a:cs typeface="Inter" pitchFamily="34" charset="-120"/>
-                        </a:rPr>
-                        <a:t>58.7</a:t>
-                      </a:r>
-                      <a:endParaRPr lang="en-US" sz="1100" dirty="0">
+                        <a:rPr lang="en-US" sz="950" b="1" dirty="0">
+                          <a:solidFill>
+                            <a:srgbClr val="31302E"/>
+                          </a:solidFill>
+                          <a:latin typeface="Inter" pitchFamily="34" charset="0"/>
+                          <a:ea typeface="Inter" pitchFamily="34" charset="-122"/>
+                          <a:cs typeface="Inter" pitchFamily="34" charset="-120"/>
+                        </a:rPr>
+                        <a:t>57.6 (50.7)</a:t>
+                      </a:r>
+                      <a:endParaRPr lang="en-US" sz="950" dirty="0">
                         <a:latin typeface="Inter" charset="0"/>
                         <a:ea typeface="Inter" charset="0"/>
                         <a:cs typeface="Inter" charset="0"/>
@@ -23056,17 +21833,17 @@
                         <a:buNone/>
                       </a:pPr>
                       <a:r>
-                        <a:rPr lang="en-US" sz="1100" dirty="0">
-                          <a:solidFill>
-                            <a:srgbClr val="31302E"/>
-                          </a:solidFill>
-                          <a:latin typeface="Inter" pitchFamily="34" charset="0"/>
-                          <a:ea typeface="Inter" pitchFamily="34" charset="-122"/>
-                          <a:cs typeface="Inter" pitchFamily="34" charset="-120"/>
-                        </a:rPr>
-                        <a:t>59.0</a:t>
-                      </a:r>
-                      <a:endParaRPr lang="en-US" sz="1100" dirty="0">
+                        <a:rPr lang="en-US" sz="950" dirty="0">
+                          <a:solidFill>
+                            <a:srgbClr val="31302E"/>
+                          </a:solidFill>
+                          <a:latin typeface="Inter" pitchFamily="34" charset="0"/>
+                          <a:ea typeface="Inter" pitchFamily="34" charset="-122"/>
+                          <a:cs typeface="Inter" pitchFamily="34" charset="-120"/>
+                        </a:rPr>
+                        <a:t>52.1 (50.1)</a:t>
+                      </a:r>
+                      <a:endParaRPr lang="en-US" sz="950" dirty="0">
                         <a:latin typeface="Inter" charset="0"/>
                         <a:ea typeface="Inter" charset="0"/>
                         <a:cs typeface="Inter" charset="0"/>
@@ -23124,17 +21901,17 @@
                         <a:buNone/>
                       </a:pPr>
                       <a:r>
-                        <a:rPr lang="en-US" sz="1100" dirty="0">
-                          <a:solidFill>
-                            <a:srgbClr val="31302E"/>
-                          </a:solidFill>
-                          <a:latin typeface="Inter" pitchFamily="34" charset="0"/>
-                          <a:ea typeface="Inter" pitchFamily="34" charset="-122"/>
-                          <a:cs typeface="Inter" pitchFamily="34" charset="-120"/>
-                        </a:rPr>
-                        <a:t>53.1</a:t>
-                      </a:r>
-                      <a:endParaRPr lang="en-US" sz="1100" dirty="0">
+                        <a:rPr lang="en-US" sz="950" dirty="0">
+                          <a:solidFill>
+                            <a:srgbClr val="31302E"/>
+                          </a:solidFill>
+                          <a:latin typeface="Inter" pitchFamily="34" charset="0"/>
+                          <a:ea typeface="Inter" pitchFamily="34" charset="-122"/>
+                          <a:cs typeface="Inter" pitchFamily="34" charset="-120"/>
+                        </a:rPr>
+                        <a:t>53.9 (50.1)</a:t>
+                      </a:r>
+                      <a:endParaRPr lang="en-US" sz="950" dirty="0">
                         <a:latin typeface="Inter" charset="0"/>
                         <a:ea typeface="Inter" charset="0"/>
                         <a:cs typeface="Inter" charset="0"/>
@@ -23192,17 +21969,17 @@
                         <a:buNone/>
                       </a:pPr>
                       <a:r>
-                        <a:rPr lang="en-US" sz="1100" dirty="0">
-                          <a:solidFill>
-                            <a:srgbClr val="31302E"/>
-                          </a:solidFill>
-                          <a:latin typeface="Inter" pitchFamily="34" charset="0"/>
-                          <a:ea typeface="Inter" pitchFamily="34" charset="-122"/>
-                          <a:cs typeface="Inter" pitchFamily="34" charset="-120"/>
-                        </a:rPr>
-                        <a:t>54.8</a:t>
-                      </a:r>
-                      <a:endParaRPr lang="en-US" sz="1100" dirty="0">
+                        <a:rPr lang="en-US" sz="950" dirty="0">
+                          <a:solidFill>
+                            <a:srgbClr val="31302E"/>
+                          </a:solidFill>
+                          <a:latin typeface="Inter" pitchFamily="34" charset="0"/>
+                          <a:ea typeface="Inter" pitchFamily="34" charset="-122"/>
+                          <a:cs typeface="Inter" pitchFamily="34" charset="-120"/>
+                        </a:rPr>
+                        <a:t>52.5 (50.1)</a:t>
+                      </a:r>
+                      <a:endParaRPr lang="en-US" sz="950" dirty="0">
                         <a:latin typeface="Inter" charset="0"/>
                         <a:ea typeface="Inter" charset="0"/>
                         <a:cs typeface="Inter" charset="0"/>
@@ -23252,7 +22029,7 @@
                   </a:tcPr>
                 </a:tc>
               </a:tr>
-              <a:tr h="256032">
+              <a:tr h="192024">
                 <a:tc>
                   <a:txBody>
                     <a:bodyPr/>
@@ -23262,17 +22039,17 @@
                         <a:buNone/>
                       </a:pPr>
                       <a:r>
-                        <a:rPr lang="en-US" sz="1100" dirty="0">
-                          <a:solidFill>
-                            <a:srgbClr val="31302E"/>
-                          </a:solidFill>
-                          <a:latin typeface="Inter" pitchFamily="34" charset="0"/>
-                          <a:ea typeface="Inter" pitchFamily="34" charset="-122"/>
-                          <a:cs typeface="Inter" pitchFamily="34" charset="-120"/>
-                        </a:rPr>
-                        <a:t>CaLM</a:t>
-                      </a:r>
-                      <a:endParaRPr lang="en-US" sz="1100" dirty="0">
+                        <a:rPr lang="en-US" sz="950" dirty="0">
+                          <a:solidFill>
+                            <a:srgbClr val="31302E"/>
+                          </a:solidFill>
+                          <a:latin typeface="Inter" pitchFamily="34" charset="0"/>
+                          <a:ea typeface="Inter" pitchFamily="34" charset="-122"/>
+                          <a:cs typeface="Inter" pitchFamily="34" charset="-120"/>
+                        </a:rPr>
+                        <a:t>Stability</a:t>
+                      </a:r>
+                      <a:endParaRPr lang="en-US" sz="950" dirty="0">
                         <a:latin typeface="Inter" charset="0"/>
                         <a:ea typeface="Inter" charset="0"/>
                         <a:cs typeface="Inter" charset="0"/>
@@ -23330,17 +22107,17 @@
                         <a:buNone/>
                       </a:pPr>
                       <a:r>
-                        <a:rPr lang="en-US" sz="1100" b="1" dirty="0">
-                          <a:solidFill>
-                            <a:srgbClr val="31302E"/>
-                          </a:solidFill>
-                          <a:latin typeface="Inter" pitchFamily="34" charset="0"/>
-                          <a:ea typeface="Inter" pitchFamily="34" charset="-122"/>
-                          <a:cs typeface="Inter" pitchFamily="34" charset="-120"/>
-                        </a:rPr>
-                        <a:t>0.844</a:t>
-                      </a:r>
-                      <a:endParaRPr lang="en-US" sz="1100" dirty="0">
+                        <a:rPr lang="en-US" sz="950" dirty="0">
+                          <a:solidFill>
+                            <a:srgbClr val="31302E"/>
+                          </a:solidFill>
+                          <a:latin typeface="Inter" pitchFamily="34" charset="0"/>
+                          <a:ea typeface="Inter" pitchFamily="34" charset="-122"/>
+                          <a:cs typeface="Inter" pitchFamily="34" charset="-120"/>
+                        </a:rPr>
+                        <a:t>not run</a:t>
+                      </a:r>
+                      <a:endParaRPr lang="en-US" sz="950" dirty="0">
                         <a:latin typeface="Inter" charset="0"/>
                         <a:ea typeface="Inter" charset="0"/>
                         <a:cs typeface="Inter" charset="0"/>
@@ -23398,17 +22175,17 @@
                         <a:buNone/>
                       </a:pPr>
                       <a:r>
-                        <a:rPr lang="en-US" sz="1100" dirty="0">
-                          <a:solidFill>
-                            <a:srgbClr val="31302E"/>
-                          </a:solidFill>
-                          <a:latin typeface="Inter" pitchFamily="34" charset="0"/>
-                          <a:ea typeface="Inter" pitchFamily="34" charset="-122"/>
-                          <a:cs typeface="Inter" pitchFamily="34" charset="-120"/>
-                        </a:rPr>
-                        <a:t>0.817</a:t>
-                      </a:r>
-                      <a:endParaRPr lang="en-US" sz="1100" dirty="0">
+                        <a:rPr lang="en-US" sz="950" dirty="0">
+                          <a:solidFill>
+                            <a:srgbClr val="31302E"/>
+                          </a:solidFill>
+                          <a:latin typeface="Inter" pitchFamily="34" charset="0"/>
+                          <a:ea typeface="Inter" pitchFamily="34" charset="-122"/>
+                          <a:cs typeface="Inter" pitchFamily="34" charset="-120"/>
+                        </a:rPr>
+                        <a:t>not run</a:t>
+                      </a:r>
+                      <a:endParaRPr lang="en-US" sz="950" dirty="0">
                         <a:latin typeface="Inter" charset="0"/>
                         <a:ea typeface="Inter" charset="0"/>
                         <a:cs typeface="Inter" charset="0"/>
@@ -23466,17 +22243,17 @@
                         <a:buNone/>
                       </a:pPr>
                       <a:r>
-                        <a:rPr lang="en-US" sz="1100" dirty="0">
-                          <a:solidFill>
-                            <a:srgbClr val="31302E"/>
-                          </a:solidFill>
-                          <a:latin typeface="Inter" pitchFamily="34" charset="0"/>
-                          <a:ea typeface="Inter" pitchFamily="34" charset="-122"/>
-                          <a:cs typeface="Inter" pitchFamily="34" charset="-120"/>
-                        </a:rPr>
-                        <a:t>0.802</a:t>
-                      </a:r>
-                      <a:endParaRPr lang="en-US" sz="1100" dirty="0">
+                        <a:rPr lang="en-US" sz="950" dirty="0">
+                          <a:solidFill>
+                            <a:srgbClr val="31302E"/>
+                          </a:solidFill>
+                          <a:latin typeface="Inter" pitchFamily="34" charset="0"/>
+                          <a:ea typeface="Inter" pitchFamily="34" charset="-122"/>
+                          <a:cs typeface="Inter" pitchFamily="34" charset="-120"/>
+                        </a:rPr>
+                        <a:t>not run</a:t>
+                      </a:r>
+                      <a:endParaRPr lang="en-US" sz="950" dirty="0">
                         <a:latin typeface="Inter" charset="0"/>
                         <a:ea typeface="Inter" charset="0"/>
                         <a:cs typeface="Inter" charset="0"/>
@@ -23534,17 +22311,17 @@
                         <a:buNone/>
                       </a:pPr>
                       <a:r>
-                        <a:rPr lang="en-US" sz="1100" dirty="0">
-                          <a:solidFill>
-                            <a:srgbClr val="31302E"/>
-                          </a:solidFill>
-                          <a:latin typeface="Inter" pitchFamily="34" charset="0"/>
-                          <a:ea typeface="Inter" pitchFamily="34" charset="-122"/>
-                          <a:cs typeface="Inter" pitchFamily="34" charset="-120"/>
-                        </a:rPr>
-                        <a:t>0.828</a:t>
-                      </a:r>
-                      <a:endParaRPr lang="en-US" sz="1100" dirty="0">
+                        <a:rPr lang="en-US" sz="950" dirty="0">
+                          <a:solidFill>
+                            <a:srgbClr val="31302E"/>
+                          </a:solidFill>
+                          <a:latin typeface="Inter" pitchFamily="34" charset="0"/>
+                          <a:ea typeface="Inter" pitchFamily="34" charset="-122"/>
+                          <a:cs typeface="Inter" pitchFamily="34" charset="-120"/>
+                        </a:rPr>
+                        <a:t>0.565 (0.552)</a:t>
+                      </a:r>
+                      <a:endParaRPr lang="en-US" sz="950" dirty="0">
                         <a:latin typeface="Inter" charset="0"/>
                         <a:ea typeface="Inter" charset="0"/>
                         <a:cs typeface="Inter" charset="0"/>
@@ -23602,17 +22379,17 @@
                         <a:buNone/>
                       </a:pPr>
                       <a:r>
-                        <a:rPr lang="en-US" sz="1100" dirty="0">
-                          <a:solidFill>
-                            <a:srgbClr val="31302E"/>
-                          </a:solidFill>
-                          <a:latin typeface="Inter" pitchFamily="34" charset="0"/>
-                          <a:ea typeface="Inter" pitchFamily="34" charset="-122"/>
-                          <a:cs typeface="Inter" pitchFamily="34" charset="-120"/>
-                        </a:rPr>
-                        <a:t>57.6</a:t>
-                      </a:r>
-                      <a:endParaRPr lang="en-US" sz="1100" dirty="0">
+                        <a:rPr lang="en-US" sz="950" dirty="0">
+                          <a:solidFill>
+                            <a:srgbClr val="31302E"/>
+                          </a:solidFill>
+                          <a:latin typeface="Inter" pitchFamily="34" charset="0"/>
+                          <a:ea typeface="Inter" pitchFamily="34" charset="-122"/>
+                          <a:cs typeface="Inter" pitchFamily="34" charset="-120"/>
+                        </a:rPr>
+                        <a:t>0.559 (0.552)</a:t>
+                      </a:r>
+                      <a:endParaRPr lang="en-US" sz="950" dirty="0">
                         <a:latin typeface="Inter" charset="0"/>
                         <a:ea typeface="Inter" charset="0"/>
                         <a:cs typeface="Inter" charset="0"/>
@@ -23670,17 +22447,17 @@
                         <a:buNone/>
                       </a:pPr>
                       <a:r>
-                        <a:rPr lang="en-US" sz="1100" dirty="0">
-                          <a:solidFill>
-                            <a:srgbClr val="31302E"/>
-                          </a:solidFill>
-                          <a:latin typeface="Inter" pitchFamily="34" charset="0"/>
-                          <a:ea typeface="Inter" pitchFamily="34" charset="-122"/>
-                          <a:cs typeface="Inter" pitchFamily="34" charset="-120"/>
-                        </a:rPr>
-                        <a:t>57.7</a:t>
-                      </a:r>
-                      <a:endParaRPr lang="en-US" sz="1100" dirty="0">
+                        <a:rPr lang="en-US" sz="950" dirty="0">
+                          <a:solidFill>
+                            <a:srgbClr val="31302E"/>
+                          </a:solidFill>
+                          <a:latin typeface="Inter" pitchFamily="34" charset="0"/>
+                          <a:ea typeface="Inter" pitchFamily="34" charset="-122"/>
+                          <a:cs typeface="Inter" pitchFamily="34" charset="-120"/>
+                        </a:rPr>
+                        <a:t>not run</a:t>
+                      </a:r>
+                      <a:endParaRPr lang="en-US" sz="950" dirty="0">
                         <a:latin typeface="Inter" charset="0"/>
                         <a:ea typeface="Inter" charset="0"/>
                         <a:cs typeface="Inter" charset="0"/>
@@ -23738,17 +22515,17 @@
                         <a:buNone/>
                       </a:pPr>
                       <a:r>
-                        <a:rPr lang="en-US" sz="1100" dirty="0">
-                          <a:solidFill>
-                            <a:srgbClr val="31302E"/>
-                          </a:solidFill>
-                          <a:latin typeface="Inter" pitchFamily="34" charset="0"/>
-                          <a:ea typeface="Inter" pitchFamily="34" charset="-122"/>
-                          <a:cs typeface="Inter" pitchFamily="34" charset="-120"/>
-                        </a:rPr>
-                        <a:t>56.7</a:t>
-                      </a:r>
-                      <a:endParaRPr lang="en-US" sz="1100" dirty="0">
+                        <a:rPr lang="en-US" sz="950" dirty="0">
+                          <a:solidFill>
+                            <a:srgbClr val="31302E"/>
+                          </a:solidFill>
+                          <a:latin typeface="Inter" pitchFamily="34" charset="0"/>
+                          <a:ea typeface="Inter" pitchFamily="34" charset="-122"/>
+                          <a:cs typeface="Inter" pitchFamily="34" charset="-120"/>
+                        </a:rPr>
+                        <a:t>0.537 (0.531)</a:t>
+                      </a:r>
+                      <a:endParaRPr lang="en-US" sz="950" dirty="0">
                         <a:latin typeface="Inter" charset="0"/>
                         <a:ea typeface="Inter" charset="0"/>
                         <a:cs typeface="Inter" charset="0"/>
@@ -23806,17 +22583,17 @@
                         <a:buNone/>
                       </a:pPr>
                       <a:r>
-                        <a:rPr lang="en-US" sz="1100" dirty="0">
-                          <a:solidFill>
-                            <a:srgbClr val="31302E"/>
-                          </a:solidFill>
-                          <a:latin typeface="Inter" pitchFamily="34" charset="0"/>
-                          <a:ea typeface="Inter" pitchFamily="34" charset="-122"/>
-                          <a:cs typeface="Inter" pitchFamily="34" charset="-120"/>
-                        </a:rPr>
-                        <a:t>53.9</a:t>
-                      </a:r>
-                      <a:endParaRPr lang="en-US" sz="1100" dirty="0">
+                        <a:rPr lang="en-US" sz="950" dirty="0">
+                          <a:solidFill>
+                            <a:srgbClr val="31302E"/>
+                          </a:solidFill>
+                          <a:latin typeface="Inter" pitchFamily="34" charset="0"/>
+                          <a:ea typeface="Inter" pitchFamily="34" charset="-122"/>
+                          <a:cs typeface="Inter" pitchFamily="34" charset="-120"/>
+                        </a:rPr>
+                        <a:t>not run</a:t>
+                      </a:r>
+                      <a:endParaRPr lang="en-US" sz="950" dirty="0">
                         <a:latin typeface="Inter" charset="0"/>
                         <a:ea typeface="Inter" charset="0"/>
                         <a:cs typeface="Inter" charset="0"/>
@@ -23870,30 +22647,6 @@
           </a:graphicData>
         </a:graphic>
       </p:graphicFrame>
-      <p:pic>
-        <p:nvPicPr>
-          <p:cNvPr id="5" name="Image 0" descr="/tmp/claude-0/-home-claude/585091c6-c086-52e1-bab3-37f93535e6c5/scratchpad/deck/ovfigs/r34_phaseB.png">    </p:cNvPr>
-          <p:cNvPicPr>
-            <a:picLocks noChangeAspect="1"/>
-          </p:cNvPicPr>
-          <p:nvPr/>
-        </p:nvPicPr>
-        <p:blipFill>
-          <a:blip r:embed="rId1"/>
-          <a:stretch>
-            <a:fillRect/>
-          </a:stretch>
-        </p:blipFill>
-        <p:spPr>
-          <a:xfrm>
-            <a:off x="813816" y="3401568"/>
-            <a:ext cx="5614416" cy="3273552"/>
-          </a:xfrm>
-          <a:prstGeom prst="rect">
-            <a:avLst/>
-          </a:prstGeom>
-        </p:spPr>
-      </p:pic>
       <p:sp>
         <p:nvSpPr>
           <p:cNvPr id="6" name="Text 2"/>
@@ -23902,8 +22655,8 @@
         </p:nvSpPr>
         <p:spPr>
           <a:xfrm>
-            <a:off x="6720840" y="3401568"/>
-            <a:ext cx="4983480" cy="2743200"/>
+            <a:off x="813816" y="6528816"/>
+            <a:ext cx="10881360" cy="274320"/>
           </a:xfrm>
           <a:prstGeom prst="rect">
             <a:avLst/>
@@ -23919,24 +22672,7 @@
               <a:buNone/>
             </a:pPr>
             <a:r>
-              <a:rPr lang="en-US" sz="1050" b="1" dirty="0">
-                <a:solidFill>
-                  <a:srgbClr val="31302E"/>
-                </a:solidFill>
-                <a:latin typeface="Inter" pitchFamily="34" charset="0"/>
-                <a:ea typeface="Inter" pitchFamily="34" charset="-122"/>
-                <a:cs typeface="Inter" pitchFamily="34" charset="-120"/>
-              </a:rPr>
-              <a:t>What changed. </a:t>
-            </a:r>
-            <a:pPr indent="0" marL="0">
-              <a:spcAft>
-                <a:spcPts val="400"/>
-              </a:spcAft>
-              <a:buNone/>
-            </a:pPr>
-            <a:r>
-              <a:rPr lang="en-US" sz="1050" dirty="0">
+              <a:rPr lang="en-US" sz="850" dirty="0">
                 <a:solidFill>
                   <a:srgbClr val="615D59"/>
                 </a:solidFill>
@@ -23944,79 +22680,9 @@
                 <a:ea typeface="Inter" pitchFamily="34" charset="-122"/>
                 <a:cs typeface="Inter" pitchFamily="34" charset="-120"/>
               </a:rPr>
-              <a:t>E. coli: mRNA-FM alone is +8.0 points over RNA-FM alone [+3.9, +11.9], resolved; CaLM +6.8 [+2.5, +10.8]. Fusion on top of mRNA-FM: concatenation +0.3 [-2.9, +3.5], not resolved; gated -5.6, resolved worse; cross-attention -3.9, not better. Phase A's +6.9 was fusion compensating for a weak RNA encoder. CoV-Vac: the codon-level swap does not help (both tie RNA-FM alone), concatenation and the gated head are resolved worse than the encoder alone, and cross-attention ties.</a:t>
+              <a:t>Each swapped encoder alone through the same TextCNN, test split, seed 0; the encoder it replaces in brackets. The three RNA swaps lift fungal from 0.722 past NT v2 (0.813) and past the paper's best fused model (0.824), and E. coli from 50.7 to 58.7: mRNA-FM alone is +8.0 points over RNA-FM alone [+3.9, +11.9], CaLM +6.8 [+2.5, +10.8], both resolved.</a:t>
             </a:r>
-            <a:endParaRPr lang="en-US" sz="1050" dirty="0"/>
-          </a:p>
-          <a:p>
-            <a:pPr indent="0" marL="0">
-              <a:buNone/>
-            </a:pPr>
-            <a:r>
-              <a:rPr lang="en-US" sz="1050" b="1" dirty="0">
-                <a:solidFill>
-                  <a:srgbClr val="31302E"/>
-                </a:solidFill>
-                <a:latin typeface="Inter" pitchFamily="34" charset="0"/>
-                <a:ea typeface="Inter" pitchFamily="34" charset="-122"/>
-                <a:cs typeface="Inter" pitchFamily="34" charset="-120"/>
-              </a:rPr>
-              <a:t>Why. </a:t>
-            </a:r>
-            <a:pPr indent="0" marL="0">
-              <a:buNone/>
-            </a:pPr>
-            <a:r>
-              <a:rPr lang="en-US" sz="1050" dirty="0">
-                <a:solidFill>
-                  <a:srgbClr val="615D59"/>
-                </a:solidFill>
-                <a:latin typeface="Inter" pitchFamily="34" charset="0"/>
-                <a:ea typeface="Inter" pitchFamily="34" charset="-122"/>
-                <a:cs typeface="Inter" pitchFamily="34" charset="-120"/>
-              </a:rPr>
-              <a:t>E. coli expression is driven by codon usage, which codon-level encoders (mRNA-FM, CaLM) were pretrained on. CoV-Vac degradation is driven by the folding of a short RNA fragment, which nucleotide-level RNA-FM was pretrained on. Match the encoder to the task first; fusion of three readings of one sequence adds nothing after that.</a:t>
-            </a:r>
-            <a:endParaRPr lang="en-US" sz="1050" dirty="0"/>
-          </a:p>
-        </p:txBody>
-      </p:sp>
-      <p:sp>
-        <p:nvSpPr>
-          <p:cNvPr id="7" name="Text 3"/>
-          <p:cNvSpPr txBox="1"/>
-          <p:nvPr/>
-        </p:nvSpPr>
-        <p:spPr>
-          <a:xfrm>
-            <a:off x="6720840" y="6263640"/>
-            <a:ext cx="4983480" cy="411480"/>
-          </a:xfrm>
-          <a:prstGeom prst="rect">
-            <a:avLst/>
-          </a:prstGeom>
-          <a:noFill/>
-          <a:ln/>
-        </p:spPr>
-        <p:txBody>
-          <a:bodyPr wrap="square" lIns="0" tIns="0" rIns="0" bIns="0" rtlCol="0" anchor="t"/>
-          <a:lstStyle/>
-          <a:p>
-            <a:pPr indent="0" marL="0">
-              <a:buNone/>
-            </a:pPr>
-            <a:r>
-              <a:rPr lang="en-US" sz="900" dirty="0">
-                <a:solidFill>
-                  <a:srgbClr val="615D59"/>
-                </a:solidFill>
-                <a:latin typeface="Inter" pitchFamily="34" charset="0"/>
-                <a:ea typeface="Inter" pitchFamily="34" charset="-122"/>
-                <a:cs typeface="Inter" pitchFamily="34" charset="-120"/>
-              </a:rPr>
-              <a:t>Seed 0, Equation 1, 100 channels, everything else at Phase A's settings; paired bootstrap on the same test rows. These are the first four swaps in detail; all eight are on the next slide.</a:t>
-            </a:r>
-            <a:endParaRPr lang="en-US" sz="900" dirty="0"/>
+            <a:endParaRPr lang="en-US" sz="850" dirty="0"/>
           </a:p>
         </p:txBody>
       </p:sp>

--- a/docs/notes/Slides/Mina_Progress_Slides_2026-10-22.pptx
+++ b/docs/notes/Slides/Mina_Progress_Slides_2026-10-22.pptx
@@ -16787,7 +16787,7 @@
                 <a:ea typeface="Inter" pitchFamily="34" charset="-122"/>
                 <a:cs typeface="Inter" pitchFamily="34" charset="-120"/>
               </a:rPr>
-              <a:t>Phase A · the three fusion heads, and why only the gated one fails</a:t>
+              <a:t>Phase A · how the three fusion heads work, and why the gated one collapses onto one modality</a:t>
             </a:r>
             <a:endParaRPr lang="en-US" sz="1200" dirty="0"/>
           </a:p>

--- a/docs/notes/Slides/Mina_Progress_Slides_2026-10-22.pptx
+++ b/docs/notes/Slides/Mina_Progress_Slides_2026-10-22.pptx
@@ -516,7 +516,7 @@
             <a:r>
               <a:rPr lang="en-US" dirty="0"/>
               <a:t>WHAT THIS DECK IS. Progress between the October 7 and October 22 meetings, in the order of Mina's October 9 research plan: Priority 1 (BioLangFusion reproduced, then its encoders swapped), Priority 2 (LucaOne), Priorities 3 and 4 (full-transcript half-life and translation efficiency), Priority 5 (the mRFP control).
-THE STORY IN FIVE SENTENCES. (1) We rebuilt BioLangFusion from its text and our copy gives the paper's scores for every single encoder and for its cross-attention head, so the build is right. (2) The paper's best head, gated attention, does not reproduce, and its own weights show why: it picks one modality instead of mixing three, and on CoV-Vac it picks the wrong one. (3) The paper's central claim, fusion beats the best single encoder, holds on two of six settings, and the biggest of those (E. coli, +6.9 points) disappeared when we swapped the paper's weak RNA encoder for a better one: the better encoder alone gained 8 points and fusion then added nothing. (4) Fusion still clearly helps where the inputs are physically different molecules (GTEx; full transcript with protein), and one jointly pretrained model (LucaOne) beats three fused ones on stability. (5) So the question is shifting from "does fusion help" to "when does it help, and which encoder goes in each slot", which is what the alignment work in Stages 1 and 2 was built to answer.
+THE STORY IN FIVE SENTENCES. (1) We rebuilt BioLangFusion from its text and our copy gives the paper's scores for its single encoders (RNA-FM on fungal aside) and for its cross-attention head, so the build is right. (2) The paper's best head, gated attention, does not reproduce, and its own weights show why: on CoV-Vac and E. coli it keeps mostly one modality instead of mixing three, and on CoV-Vac it keeps the wrong one. Concatenation also falls short of the paper on fungal and CoV-Vac. (3) The paper's central claim, fusion beats the best single encoder, holds in two of six settings (E. coli and GTEx), and the biggest of those (E. coli, +6.9 points) disappeared when mRNA-FM or CaLM replaced the paper's weak RNA encoder: the better encoder alone gained 7 to 8 points and fusion then added nothing. (4) Fusion helps where the second input is a different molecule or region (GTEx, resolved; full transcript with protein, not yet tested with a paired interval), and one jointly pretrained model (LucaOne) beats three fused ones on stability. (5) So the question is shifting from "does fusion help" to "when does it help, and which encoder goes in each slot", which is what the alignment work in Stages 1 and 2 was built to answer.
 VOCABULARY. Encoder: a pretrained sequence model we use only to turn a sequence into numbers. Frozen: its weights never change; everything we train sits on top. Embedding: the numbers it produces (one vector per token, or pooled to one per sequence). Head: the small trained network on top. Probe: a ridge regression on pooled vectors. Resolved: a paired-bootstrap interval that excludes zero.</a:t>
             </a:r>
             <a:endParaRPr lang="en-US" dirty="0"/>
@@ -606,15 +606,15 @@
             <a:r>
               <a:rPr lang="en-US" dirty="0"/>
               <a:t>WHAT THIS SLIDE ANSWERS. The fusion question, on the same eight swaps slide 9 covered: once an encoder is in place, does any fusion head beat the best single encoder available in that configuration?
-HOW TO READ THE GRID. Each cell is one head minus the best single encoder validation chose for that configuration, with the 95% paired interval from Chase's notebook (2,000 draws, identical sequences resampled together) deciding the shading. Blue: fusion ahead, interval excludes zero. Orange: fusion behind, resolved. Grey: a tie. The dashed top row is the original encoders at seed 0, for reference.
-THE TALLY. 81 comparisons: 15 resolve with fusion ahead, 14 with fusion behind, 52 are ties. The 15 need splitting, because two groups of them are artifacts of the comparison rather than fusion working.
+HOW TO READ THE GRID. Each cell is one head minus the best single encoder validation chose for that configuration, with the 95% paired interval from Chase's notebook (2,000 draws, identical sequences resampled together) deciding the shading. Blue: fusion ahead, interval excludes zero. Orange: fusion behind, resolved. Gray: a tie. The dashed top row is the original encoders at seed 0, for reference, so its E. coli cells (+10.5, +4.2, +3.7) are seed-0 values, not slide 5's three-seed means.
+THE TALLY. 81 comparisons: 15 resolve with fusion ahead, 14 with fusion behind, 52 are ties. The 15 need splitting, because two groups of them (11 of the 15) are artifacts of the comparison rather than fusion working.
 ARTIFACT ONE, A WEAK REFERENCE (3 of the 15). Fungal with ProtBERT. Validation chose ProtBERT alone (0.761) as the single encoder to beat, although NT v2 100M alone scores 0.813 on test. Measured against NT v2 those three gains are ties. They are marked with a dagger on the slide.
 ARTIFACT TWO, A WEAK RNA SLOT (8 of the 15). The E. coli gains under the DNA and protein swaps. In all of those the paper's RNA-FM still sits in the RNA slot, so fusion is compensating for it exactly as in Phase A. The proof is the contrast: with mRNA-FM or CaLM in that slot, no head gains on E. coli, and two are resolved worse (gated -5.6 with mRNA-FM, cross-attention -3.7 with CaLM).
-WHAT SURVIVES (3 of the 15). CoV-Vac, cross-attention with HyenaDNA: +0.039 [+0.012, +0.066] over RNA-FM alone, reaching 0.872, above the paper's best CoV-Vac value of 0.864. CoV-Vac, cross-attention with RiNALMo: +0.031 [+0.008, +0.054], reaching 0.854. E. coli, gated head with RiNALMo: +6.5 points [+3.4, +9.6], reaching 62.5%, the highest E. coli accuracy in the project. The two CoV-Vac gains are both nucleotide-resolution encoders on a task governed by local folding, which is the first sign that letting nucleotide-level streams attend to each other helps a nucleotide-scale task. Each rests on one seed, so they are candidates.
+WHAT SURVIVES (4 of the 15). CoV-Vac, cross-attention with HyenaDNA: +0.039 [+0.012, +0.066] over RNA-FM alone, reaching 0.872, above the paper's best CoV-Vac value of 0.864. CoV-Vac, cross-attention with RiNALMo: +0.031 [+0.008, +0.054] over RiNALMo alone, reaching 0.854. E. coli, gated head with RiNALMo: +6.5 points [+3.4, +9.6], reaching 62.5%, the highest E. coli accuracy in the project; its weights mix RNA (0.42) and protein (0.50). E. coli, concatenation with RiNALMo: +3.9 points [+0.8, +7.2], reaching 60.0%. Both E. coli gains are measured against the reference validation chose, RiNALMo pooled onto the codon grid (56.0); RiNALMo read natively scores 57.3 on test, against which the point gains are +5.2 and +2.7 (no interval computed for that comparison). The two CoV-Vac gains are both nucleotide-resolution encoders on a task governed by local folding, which is the first sign that letting nucleotide-level streams attend to each other helps a nucleotide-scale task. Each rests on one seed, so they are candidates.
 TWO MORE PATTERNS. On CoV-Vac, concatenation and the gated head are resolved worse than the best single encoder in 12 of 16 configurations, while cross-attention is never resolved worse there. On stability all nine comparisons tie.
-THE GATED HEAD, REVISITED. With a strong RNA encoder the gate gives RNA real weight (fungal 0.48 to 0.60, stability 0.79 with mRNA-FM, CoV-Vac 0.94 with RiNALMo), so slide 6's "RNA is zero everywhere" holds for RNA-FM, not for every RNA encoder. It still selects wrongly where it matters: on E. coli with mRNA-FM, the best single encoder there, it gives RNA 0.00 and scores 53.1.
+THE GATED HEAD WITH OTHER ENCODERS. Slide 6's near-zero RNA weight belongs to the paper's encoder set on CoV-Vac, E. coli and stability. With a strong RNA encoder the gate gives RNA real weight (fungal 0.48 to 0.60 with the three RNA swaps, stability 0.79 with mRNA-FM, CoV-Vac 0.94 with RiNALMo, E. coli 0.42 with RiNALMo), and even RNA-FM gets 0.52 on CoV-Vac once HyenaDNA replaces the DNA encoder. It still selects wrongly where it matters: on E. coli with mRNA-FM, the best single encoder there, it gives RNA 0.00 and scores 53.1.
 GRIDDED DNA, A SIDE RESULT. The sweep also read the swapped DNA encoders after the grid's learned upsampling. For NT 500M the grid helps (fungal 0.740 to 0.766); for HyenaDNA, already nucleotide-resolution, it hurts (0.737 to 0.676). Whether the grid helps depends on the encoder, so the same check on the original NT v2 100M is still worth running.
-WHAT IS LEFT. Seeds on the three surviving gains; the mRNA-FM-anchored fusions Mina asked for; the plan's two-encoder replacements, chosen from these single swaps; DNABERT-2 once it has a grid adapter; the five swaps not yet run on stability.</a:t>
+WHAT IS LEFT. Seeds on the four surviving gains; the mRNA-FM-anchored fusions Mina asked for; the plan's two-encoder replacements, chosen from these single swaps; DNABERT-2 once it has a grid adapter; the five swaps not yet run on stability.</a:t>
             </a:r>
             <a:endParaRPr lang="en-US" dirty="0"/>
           </a:p>
@@ -702,11 +702,11 @@
           <a:p>
             <a:r>
               <a:rPr lang="en-US" dirty="0"/>
-              <a:t>WHY (Priority 2). Does one model pretrained jointly on nucleotide and protein sequences (LucaOne: 1.8 billion parameters, both alphabets, one vocabulary) give a stronger representation than three separately pretrained encoders and their fusion? If joint pretraining already captures the cross-modal structure, fusing separately pretrained models is solving a problem pretraining can solve better.
+              <a:t>WHY (Priority 2). Does one model pretrained jointly on nucleotide and protein sequences (LucaOne: 1.57 billion parameters as loaded, both alphabets, one vocabulary) give a stronger representation than three separately pretrained encoders and their fusion? If joint pretraining already captures the cross-modal structure, fusing separately pretrained models is solving a problem pretraining can solve better.
 HOW. LucaOne cannot be dropped into the BioLangFusion grid (different tokenizer and context), so the comparison is at the level of pooled vectors with an identical ridge probe for every row: same rows, same split, same probe. LucaOne reads the coding sequence as its gene stream and the translated protein as its protein stream; "both streams" is the two pooled vectors concatenated. The bootstrap groups identical test sequences together.
 WHAT "BLF THREE FUSED" MEANS (Mina's question). The pooled vector of each of BioLangFusion's three encoders (NT v2 100M, 512 wide; RNA-FM, 640; ESM-2 8M, 320) concatenated into one 1,472-wide vector, with the same ridge probe fit on it. It is the probe-level equivalent of concatenation fusion, included so that LucaOne is compared against the three encoders combined and not only against each alone. It is not the trained TextCNN concatenation head of slides 4 and 5; those are trained on token streams, these are linear probes on pooled vectors, and the two are not interchangeable.
 WHAT THE NUMBERS MEAN. LucaOne's two streams reach 0.483 against 0.390 for the three BioLangFusion encoders concatenated: +0.092 [+0.066, +0.120], resolved. Against the best single BioLangFusion encoder (NT, 0.312) it is +0.170. Even LucaOne's gene stream alone (0.443) beats the three fused. So one jointly pretrained model carries more linearly accessible stability signal than three separately pretrained encoders combined.
-CAVEATS. This is the published split with its 68% train/test sequence overlap; grouping repeated sequences in the bootstrap does not remove the overlap, so read it beside slide 7. LucaOne is 1.8B parameters against 108M for the three encoders combined, so this compares representations, not matched budgets.
+CAVEATS. This is the published split with its 68% train/test sequence overlap; grouping repeated sequences in the bootstrap does not remove the overlap, so read it beside slide 7. LucaOne is 1.57B parameters as loaded, against about 205M for the three encoders combined (NT v2 100M about 98M, RNA-FM about 100M, ESM-2 8M about 8M), so this compares representations, not matched budgets.
 MINA'S NOTE ("do LucaOne on the other datasets"). Agreed. E. coli, CoV-Vac and fungal all fit LucaOne's 1,280-token context after the 999-nucleotide rule, so the same probe comparison runs on each. GTEx cannot: the 6,000-nt DNA window does not fit and only 40% of transcripts do. Added to the plan under Gantt 41.</a:t>
             </a:r>
             <a:endParaRPr lang="en-US" dirty="0"/>
@@ -799,7 +799,7 @@
 HOW. mRNABench's human half-life (12,939 transcripts; the target is the first principal component over 39 half-life studies) and human translation efficiency (10,281 transcripts, from ribosome profiling). Frozen encoders (RNA-FM, NT v2 100M, ESM-2 8M), windowed pooling for transcripts longer than an encoder's context, ridge probes, nine gene-grouped splits, mean and standard error. The composition baselines are counted features (nucleotide and codon frequencies, length) on each region set.
 WHAT THE NUMBERS MEAN. Counted features of the whole transcript already reach 0.542 on half-life and 0.702 on translation efficiency. Those are the floors an encoder has to clear, not zero. The UTRs add about +0.055 to half-life and +0.019 to translation efficiency over coding-sequence composition before any encoder is involved. The 5' UTR alone carries real signal (0.178 and 0.433), and the full transcript beats the coding sequence alone on half-life (0.512 vs 0.473), so there is information outside the coding sequence the Phase A benchmark could never see. The protein encoder is the best single representation on both tasks (0.552 and 0.682), which is not what a transcript-level task would predict. A plausible reading: half-life and translation efficiency track codon optimality and ORF length, and amino-acid composition and protein length carry that side cleanly, while the RNA encoder reads a transcript of median length about 3,000 nt in 1,024-nt windows and averages them, losing long-range structure. The DNA encoder (NT v2, 6-mer tokens, a context of about 12,000 nt, so it reads most transcripts whole) on the full transcript reaches 0.660 on translation efficiency, above the RNA encoder's 0.610, which supports the context explanation. Fusing the full transcript with the protein gains +0.053 on half-life (0.606) and +0.030 on translation efficiency (0.712) over the best single encoder; the three-encoder fusion is within error of it (0.602, 0.713).
 WHY NOT YET PROOF. These are means and standard errors over nine splits, with no per-split predictions kept, so there is no paired interval. The fused rows are within each other's error, and the gain over composition is +0.064 on half-life but only +0.010 on translation efficiency. Mouse is embedded and not yet scored.
-ONE SENTENCE. Once the input is a full transcript with its protein, fusion helps on both tasks, which fits the pattern: fusion adds something when the second input carries information the first one could not see.</a:t>
+ONE SENTENCE. Once the input is a full transcript with its protein, fusion leads the best single encoder on both tasks (+0.053 and +0.030, no paired interval yet), which fits the pattern: fusion adds something when the second input carries information the first one could not see.</a:t>
             </a:r>
             <a:endParaRPr lang="en-US" dirty="0"/>
           </a:p>
@@ -979,11 +979,9 @@
           <a:p>
             <a:r>
               <a:rPr lang="en-US" dirty="0"/>
-              <a:t>THE FIVE CONCLUSIONS AND THEIR EVIDENCE. (1) The build is right: singles within 0.01 of the paper, cross-attention within 0.01 on all four benchmarks (slide 4). (2) The encoder matters more than the fusion head: one swap moved E. coli by 8 points and dissolved the fusion gain that had been compensating for the weak encoder (slide 9), and across all eight swaps the better RNA encoders lift fungal and E. coli alone while fusion on top of them adds nothing resolved; the three new fusion gains (cross-attention with HyenaDNA and RiNALMo on CoV-Vac, gated with RiNALMo on E. coli) are single-seed candidates (slide 10). (3) Fusion still wins where the modalities are different molecules: GTEx +0.047 resolved (slide 13); full transcript with protein +0.053 and +0.030 (slide 12). (4) One jointly pretrained model beats three fused ones on stability: LucaOne +0.092 resolved, on the leaky split (slide 11). (5) The gated head is a selector, not a mixer; the paper reports no error bars, and its fungal gain is the size of noise on that split (slides 5 and 6).
-WHAT RUNS NEXT, THE RIGHT-HAND PANEL. Seeds on the three surviving Phase B gains, since each rests on one seed today and the intervals measure test-row sampling rather than training variation. Fusion built around mRNA-FM (DNA with mRNA-FM, mRNA-FM with protein) and the other codon-level RNA encoders, then the plan's two-encoder replacements, whose candidates the single swaps have now identified (Gantt 24). The sequence-grouped stability re-split with seeds, the only way to settle whether fusion helps on that benchmark, since the published split repeats a training sequence in 68% of its test rows. LucaOne on E. coli, CoV-Vac and fungal, which fit its 1,280-token context where GTEx does not (Gantt 41); the gated head at the paper's 1,280 channels on the three benchmarks not yet run that way; the mouse half-life and translation-efficiency scores, whose embeddings already exist. Then the project's own designs from January: Coupled Mamba on the codon grid (Gantt 20 and 21), and IsoFormer-style cross-attention (Gantt 25) run on both redundant inputs (BioLangFusion's benchmarks) and complementary ones (full transcripts, GTEx), which is the controlled version of the comparison GTEx alone cannot make.
-FOUR ITEMS THAT NEED AN ANSWER FROM OUTSIDE THE PROJECT, in the footer. Whether Ab1, the fifth BioLangFusion benchmark, can be obtained through UCF, since it is from Yazdani-Jahromi et al. there and is the one benchmark where all three of the paper's heads beat the best single encoder. Whether seeds plus a paired bootstrap becomes the reporting standard for everything that follows. GPU access beyond one laptop and one desktop, which Coupled Mamba needs. Which two DNA encoders and which RNA encoder join the twelve Stage 1 teachers for distillation.
-STILL OPEN FROM THE DECK'S OWN LIST. Ab1 (not public; can it be obtained through UCF); seeds plus a paired bootstrap as the reporting standard for everything; GPU access for Coupled Mamba; the distillation teachers (which two DNA encoders and which RNA encoder join the twelve).
-OPEN RUNS, IN ORDER. Seeds on the three new Phase B gains (cross-attention with HyenaDNA and with RiNALMo on CoV-Vac, gated with RiNALMo on E. coli); the gated head at 1,280 channels on the other three benchmarks; the sequence-grouped stability re-split with seeds; seeds on the swaps that matter; the mouse half-life and translation-efficiency scores; LucaOne on the three coding-sequence benchmarks; the mRNA-FM-anchored fusions.
+              <a:t>THE FIVE CONCLUSIONS AND THEIR EVIDENCE. (1) The build is right: singles within 0.01 of the paper on CoV-Vac and stability and on fungal except RNA-FM, cross-attention nowhere more than 0.01 below the paper (slide 4). (2) The encoder matters more than the fusion head: mRNA-FM alone moved E. coli by 8 points and matched the fusion gain that had been compensating for the weak encoder (slides 9 and 10); with mRNA-FM or CaLM in the RNA slot fusion adds nothing resolved, and the four fusion gains that remain (cross-attention with HyenaDNA and with RiNALMo on CoV-Vac, gated and concatenation with RiNALMo on E. coli) are single-seed candidates (slide 10). (3) Fusion helps where the second input is a different molecule or region: GTEx +0.047 resolved (slide 13); full transcript with protein +0.053 and +0.030 over the best single encoder, with no paired interval yet (slide 12). (4) One jointly pretrained model beats three fused ones on stability: LucaOne +0.092 resolved, on the leaky split (slide 11). (5) With the paper's encoders the gated head mostly keeps one modality rather than mixing them; the paper reports no error bars, and its fungal gain is the size of noise on that split (slides 5 and 6).
+WHAT RUNS NEXT, THE RIGHT-HAND PANEL. Seeds on the four surviving Phase B gains, since each rests on one seed today and the intervals measure test-row sampling rather than training variation. Fusion built around mRNA-FM (DNA with mRNA-FM, mRNA-FM with protein) and the other codon-level RNA encoders, then the plan's two-encoder replacements, whose candidates the single swaps have now identified (Gantt 24). The sequence-grouped stability re-split with seeds, the only way to settle whether fusion helps on that benchmark, since the published split repeats a training sequence in 68% of its test rows. LucaOne on E. coli, CoV-Vac and fungal, which fit its 1,280-token context where GTEx does not (Gantt 41); the gated head at the paper's 1,280 channels on the three benchmarks not yet run that way; the mouse half-life and translation-efficiency scores, whose embeddings already exist. Then the project's own designs from January: Coupled Mamba on the codon grid (Gantt 20 and 21), and IsoFormer-style cross-attention (Gantt 25) run on both redundant inputs (BioLangFusion's benchmarks) and complementary ones (full transcripts, GTEx), which is the controlled version of the comparison GTEx alone cannot make.
+FOUR ITEMS THAT NEED AN ANSWER FROM OUTSIDE THE PROJECT, in the footer. Whether Ab1, the fifth BioLangFusion benchmark, can be obtained through UCF, since it is from Yazdani-Jahromi et al. there and is the benchmark where the paper's three heads lead by the widest margins (+0.017 to +0.022; on fungal all three also lead, by +0.001 to +0.020). Whether seeds plus a paired bootstrap becomes the reporting standard for everything that follows. GPU access beyond one laptop and one desktop, which Coupled Mamba needs. Which two DNA encoders and which RNA encoder join the twelve Stage 1 teachers for distillation.
 ONE SENTENCE. The reproduction is faithful, the paper's fusion gains mostly do not survive a stronger single encoder, and the project's question is now which encoder to put in each slot and when a second molecule is worth fusing.</a:t>
             </a:r>
             <a:endParaRPr lang="en-US" dirty="0"/>
@@ -1074,7 +1072,7 @@
               <a:rPr lang="en-US" dirty="0"/>
               <a:t>WHY THIS ORDER. The plan's rule is reproduce first, then change one thing at a time. So: adopt the plan and place it in the Gantt chart; build the pipeline; check that the pipeline reproduces the paper on the cleanest benchmark (fungal expression); run the two things that need no codon grid (IsoFormer on GTEx, the LucaOne feasibility check); run the cheap control (mRFP); run Phase A on the other three benchmarks (27 hours on Julian's laptop); then Phase B, LucaOne and the half-life and translation-efficiency probes on Chase's GPU.
 WHY FUNGAL WAS THE BUILD CHECK. It is the only benchmark with clean published splits (no test sequence appears in training), published values for all six model variants, and no preprocessing choice of ours in the way. If the build reproduces anywhere, it has to reproduce there.
-WHAT EACH STEP DECIDED. Oct 17 to 18: singles reproduce, so the plumbing is right; no fusion head beats NT alone at 95%; the paper's appendix convolution is two codons out of register. Oct 18 to 19: with frozen encoders, IsoFormer's fusion beats RNA alone (+0.047, resolved); LucaOne's 1,280-token context admits none of the 6,000-nt GTEx windows. Oct 19: protein encoders predict nothing on synonymous recodings (the control holds); mRNA-FM carries by far the most codon information. Oct 19 to 20: singles and cross-attention reproduce on all four benchmarks; the gated head does not; fusion appeared to win on E. coli. Oct 21 to 22: the RNA-encoder swap erased that E. coli gain; LucaOne beats the three fused on stability; full transcript plus protein helps on both new tasks.
+WHAT EACH STEP DECIDED. Oct 17 to 18: NT and ESM-2 reproduce, so the plumbing is right, while RNA-FM reads 0.722 against the paper's 0.767 (slide 4 explains); no fusion head beats NT alone at 95%; the paper's appendix convolution is two codons out of register. Oct 18 to 19: with frozen encoders, IsoFormer's fusion beats RNA alone (+0.047, resolved); LucaOne's 1,280-token context admits none of the 6,000-nt GTEx windows. Oct 19: protein encoders predict nothing on synonymous recodings (the control holds); mRNA-FM carries by far the most codon information. Oct 19 to 20: singles and cross-attention reproduce on CoV-Vac, E. coli and stability; the gated head misses on CoV-Vac and stability and concatenation on CoV-Vac; with the paper's encoders, fusion wins on E. coli (+6.9 points). Oct 21 to 22: mRNA-FM or CaLM in the RNA slot erased that E. coli gain; LucaOne beats the three fused on stability; full transcript plus protein helps on both new tasks. The other six swaps ran October 25 to 27 (slides 9 and 10).
 Ab1, the paper's fifth benchmark, is from Yazdani-Jahromi et al. at UCF and is not public.</a:t>
             </a:r>
             <a:endParaRPr lang="en-US" dirty="0"/>
@@ -1165,7 +1163,7 @@
               <a:rPr lang="en-US" dirty="0"/>
               <a:t>WHY. Priority 1 asks for a faithful reproduction before any encoder is swapped. There is no official code, so the paper's text, equations and appendix lists are the specification. Where the paper contradicts itself we picked a reading and measured which one is right.
 HOW THE PIPELINE WORKS. (1) Three frozen encoders read the same coding sequence in three alphabets: Nucleotide Transformer v2 100M reads DNA as 6-mer tokens (one token per six nucleotides); RNA-FM reads RNA one nucleotide per token; ESM-2 8M reads the translated protein one amino acid per token. (2) The three token streams are placed on one codon grid. A codon is three nucleotides and codes one amino acid, so the protein stream is already on the grid; the RNA stream is averaged in groups of three; the DNA stream has one token per two codons, so it is upsampled by two with a learned transposed convolution (the paper's Equation 1). Result: three streams of equal length, one vector per codon per modality. (3) One of three fusion heads combines them (slide 6). (4) The TextCNN prediction head: three parallel convolutions of width 3, 4 and 5 codons, ReLU, max over positions, dropout 0.2, one linear layer. Same head for every variant so only the fusion changes. (5) Training: Adam at 3e-5, weight decay 1e-5, batch 32, up to 500 epochs, early stopping on validation, best validation epoch restored; MSE for regression, cross-entropy for classification.
-THE CONTRADICTIONS SETTLED BY MEASUREMENT. Length rule: the paper says it truncates at 1,000 tokens, but its own row counts (23,929 stability sequences used, 3,138 fungal, 4,450 E. coli, 2,400 CoV-Vac) only come out if sequences over 999 nucleotides are dropped. Dropping reproduces all four counts exactly. DNA upsampling: Equation 1 says kernel 2, stride 2; the appendix lists say kernel 3, stride 2, padding 2. An impulse test (feed one token, see where it lands) shows the appendix setting places the DNA stream two codons out of register with the protein frame and three codons short; Equation 1 lands exactly. Retraining under Equation 1 raised the two heads that combine streams position by position (concatenation +0.015, gated +0.008) and left cross-attention flat, which is the signature of an alignment fault. TextCNN width: the paper gives its "fixed" head 1,280 channels for the gated head and 100 for the others; we use 100 everywhere so capacity is matched, and run the gated head at 1,280 as a diagnostic.
+THE CONTRADICTIONS SETTLED BY MEASUREMENT. Length rule: the paper says it truncates at 1,000 tokens, but its own row counts (23,929 stability sequences used, 3,138 fungal, 4,450 E. coli, 2,400 CoV-Vac) only come out if sequences over 999 nucleotides are dropped. Dropping reproduces all four counts exactly. DNA upsampling: Equation 1 says kernel 2, stride 2; the appendix lists say kernel 3, stride 2, padding 2. An impulse test (feed one token, see where it lands) shows the appendix setting places the DNA stream two codons out of register with the protein frame and three codons short; Equation 1 lands exactly. Under Equation 1, the two heads that combine streams position by position score higher than under the appendix setting (concatenation +0.015, gated +0.008) while cross-attention is flat, which is the signature of an alignment fault. TextCNN width: the paper gives its "fixed" head 1,280 channels for the gated head and 100 for the others; we use 100 everywhere so capacity is matched, and run the gated head at 1,280 as a diagnostic.
 ERROR BARS. The paper reports one number per cell with no error bar. Every one of our runs saves per-row test predictions, so any two models can be compared by a paired bootstrap on the same rows. That is what lets later slides say resolved or tie.</a:t>
             </a:r>
             <a:endParaRPr lang="en-US" dirty="0"/>
@@ -1255,11 +1253,11 @@
             <a:r>
               <a:rPr lang="en-US" dirty="0"/>
               <a:t>WHY. This is the proof that the build is the paper's. A single-encoder run uses everything in the pipeline except the fusion head: the token caches, the splits, the codon grid, the TextCNN and the training loop. If the single encoders give the paper's numbers, all of that is right. If a fusion head then misses, the miss is in the head or in the paper's description of it.
-HOW TO READ THE TABLE. Each cell is ours (paper). Spearman correlation everywhere except E. coli, which is accuracy in percent. Rows 1 to 4 are single encoders; "RNA-FM read on the codon grid" is RNA-FM with its nucleotide tokens averaged three to one, which is how it enters every fusion head and which the paper does not report. Rows 5 to 8 are the three heads, with the gated head shown with and without its entropy term (the paper's Table 4 ablation). Within 0.01 counts as reproduced: a Spearman on a few hundred test rows carries about plus or minus 0.03 of noise, and E. coli accuracy on 712 rows carries about plus or minus 3.7 points, so every E. coli difference here is within noise.
-WHAT THE NUMBERS MEAN. Every single encoder matches within 0.01 on CoV-Vac and stability; NT and ESM-2 match on fungal. The one single-encoder number we cannot place is RNA-FM on fungal. Read as the encoder writes it (one token per nucleotide) it is 0.722 against 0.767; pooled three to one onto the codon grid, as every fusion head sees it, it is 0.794. The published value sits between the two readings, 0.045 above one and 0.027 below the other, and both of ours are one seed. On the other three benchmarks the published RNA-FM numbers track the unpooled reading (CoV-Vac 0.841 vs our 0.838, E. coli 52.9 vs 50.7, stability 0.553 vs 0.552), so the paper's baselines look unpooled and the fungal row is the outlier. Do not say the paper's baseline was pooled: that would explain fungal and contradict CoV-Vac.
-WHY RNA-FM IS THE ONLY ENCODER WITH TWO READINGS. The codon grid exists to make three streams the same length so they can be combined; a single encoder has nothing to line up against, so an alone row is simply that encoder's own tokens into the TextCNN. ESM-2 writes one token per amino acid, which is already one per codon, so for it the two readings are the same object. Nucleotide Transformer writes one token per 6-mer, one per two codons, and its grid version needs the learned transposed convolution that only exists inside a fusion model, so alone it is read natively. RNA-FM writes one token per nucleotide, three per codon, and pooling them three to one is a fixed average that needs no training, so both readings exist and they are genuinely different inputs: the TextCNN's kernels of 3, 4 and 5 span 3 to 5 nucleotides on the native stream and 3 to 5 codons, 9 to 15 nucleotides, on the grid. Cross-attention reproduces everywhere, within 0.01 on all four benchmarks and above the paper on three. The gated head, the paper's best head on three of five benchmarks, is the best head on none here. It is below the paper on fungal (0.801 vs 0.824), far below on CoV-Vac (0.783 vs 0.864) and 0.012 low on stability; on E. coli it is above the paper (54.5 vs 52.1), where every difference in the table is inside the plus or minus 3.7 points of accuracy noise and so decides nothing. The two misses that count are the two benchmarks where the comparison is tightest, and CoV-Vac is the largest miss in the reproduction. Without the entropy term the picture is the same: fungal 0.802 vs 0.826 and CoV-Vac 0.792 vs 0.854 still miss, stability matches (0.558 vs 0.556). Concatenation is close on fungal and stability, above the paper on E. coli (58.7 vs 50.3) and below on CoV-Vac (0.799 vs 0.831).
-MINA'S NOTE ("another table"). This table is only the comparison with the paper, not the comparison between heads. Read it as three questions: do the single-encoder rows match (yes), does cross-attention match (yes), does the gated head match (no). Slide 5 is the table for the fusion question.
-ONE SENTENCE. Our build gives the paper's numbers for every encoder alone and for cross-attention; the paper's headline head, gated attention, is the one thing that does not reproduce.</a:t>
+HOW TO READ THE TABLE. Each cell is ours (paper). Spearman correlation everywhere except E. coli, which is accuracy in percent. Rows 1 to 4 are single encoders; "RNA-FM read on the codon grid" is RNA-FM with its nucleotide tokens averaged three to one, which is how it enters every fusion head and which the paper does not report. Rows 5 to 8 are the three heads, with the gated head shown with and without its entropy term (the paper's Table 4 ablation). Shaded cells are more than 0.01 below the paper. A Spearman on a few hundred test rows carries about plus or minus 0.03 of noise, and E. coli accuracy on 712 rows carries about plus or minus 3.7 points, so E. coli is not shaded: no E. coli score is that far below the paper. Two are that far above it (NT alone 47.8 against 41.3, concatenation 58.7 against 50.3). Our values are means over seeds where three exist (the fusion heads, NT on fungal, and the single encoder validation chose on CoV-Vac and E. coli); the other rows and all of stability are one seed.
+WHAT THE NUMBERS MEAN. Every single encoder matches within 0.01 on CoV-Vac and stability; NT matches on fungal and ESM-2 lands 0.011 above it. The one single-encoder number we cannot place is RNA-FM on fungal. Read as the encoder writes it (one token per nucleotide) it is 0.722 against 0.767; pooled three to one onto the codon grid, as every fusion head sees it, it is 0.794. The published value sits between the two readings, 0.045 above one and 0.027 below the other, and both of ours are one seed. On the other three benchmarks the published RNA-FM numbers track the unpooled reading (CoV-Vac 0.841 vs our 0.838, E. coli 52.9 vs 50.7, stability 0.553 vs 0.552), so the paper's baselines look unpooled and the fungal row is the outlier. Do not say the paper's baseline was pooled: that would explain fungal and contradict CoV-Vac.
+WHY RNA-FM IS THE ONLY ENCODER WITH TWO READINGS. The codon grid exists to make three streams the same length so they can be combined; a single encoder has nothing to line up against, so an alone row is simply that encoder's own tokens into the TextCNN. ESM-2 writes one token per amino acid, which is already one per codon, so for it the two readings are the same object. Nucleotide Transformer writes one token per 6-mer, one per two codons, and its grid version needs the learned transposed convolution that only exists inside a fusion model, so alone it is read natively. RNA-FM writes one token per nucleotide, three per codon, and pooling them three to one is a fixed average that needs no training, so both readings exist and they are genuinely different inputs: the TextCNN's kernels of 3, 4 and 5 span 3 to 5 nucleotides on the native stream and 3 to 5 codons, 9 to 15 nucleotides, on the grid. Cross-attention reproduces everywhere: nowhere more than 0.01 below the paper, and above it on three benchmarks. The gated head, the paper's best head on three of five benchmarks, is the best head on none here. It is below the paper on fungal (0.801 vs 0.824), far below on CoV-Vac (0.783 vs 0.864) and 0.012 low on stability; on E. coli it is above the paper (54.5 vs 52.1), inside the plus or minus 3.7 points of accuracy noise. CoV-Vac is the largest miss in the reproduction. Without the entropy term the picture is the same: fungal 0.802 vs 0.826 and CoV-Vac 0.792 vs 0.854 still miss, stability matches (0.558 vs 0.556). Concatenation also falls short on fungal (0.791 vs 0.805) and CoV-Vac (0.799 vs 0.831), and is above the paper on E. coli (58.7 vs 50.3) and stability (0.558 vs 0.539).
+MINA'S NOTE ("another table"). This table is only the comparison with the paper, not the comparison between heads. Read it as three questions: do the single-encoder rows match (yes, RNA-FM on fungal aside), does cross-attention match (yes), do the other two heads match (no: both fall short on fungal and CoV-Vac). Slide 5 is the table for the fusion question.
+ONE SENTENCE. Our build gives the paper's numbers for its single encoders (RNA-FM on fungal aside) and for cross-attention; concatenation and the paper's headline head, gated attention, fall short on fungal and CoV-Vac.</a:t>
             </a:r>
             <a:endParaRPr lang="en-US" dirty="0"/>
           </a:p>
@@ -1349,9 +1347,9 @@
               <a:rPr lang="en-US" dirty="0"/>
               <a:t>WHY. The paper's claim is not "fusion scores 0.82" but "fusion beats each encoder alone". That is a paired comparison on the same test rows, and the paper gives no error bar for it. This table is Mina's delta-fusion from the research plan, one line per task, with an interval.
 HOW. For each benchmark the best single encoder is chosen on the validation split (not on test, to avoid picking the winner after the fact), and so is the best head. Both are scored on the published test split; 4,000 paired resamples of the test rows; identical sequences resampled together so a repeated sequence does not count as independent evidence; the three seeds averaged inside each draw where three exist. The interval is the middle 95% of the resampled differences. Interval excludes zero: resolved. Contains zero: tie on this split.
-THE VERDICTS, AND WHY EACH CAME OUT THAT WAY. Fungal: tie. All three streams are readings of one coding sequence; NT alone (pretrained on whole genomes of many species) already carries what the task needs, and the paper's own +0.020 sits inside our interval, so the paper's gain is the size of noise on a 430-row split. CoV-Vac: tie for cross-attention; concatenation and the gated head are resolved worse than RNA-FM alone. These are 81-nt fragments scored for degradation, which is about RNA structure, which is what RNA-FM (nucleotide-level, pretrained on structured non-coding RNA) is good at; the "protein" of an 81-nt fragment is a 27-residue peptide in an arbitrary frame and the DNA stream is the same letters at coarser resolution, so adding them adds noise. E. coli: fusion won in Phase A (+6.9 points), and slide 9 shows it was fusion compensating for a weak RNA encoder. Stability, published split: tie, but 68% of its test rows repeat a training sequence (slide 7). Stability, unseen rows: leans fusion (+0.040), one seed. GTEx: fusion wins, the only setting where the three inputs are different molecules (slide 13).
-THE PATTERN (the interpretation Mina asked for). Fusion of three readings of one coding sequence does not beat the best single encoder, because the three encoders see the same information in three alphabets and the one that saw the most relevant data in pretraining wins alone. Fusion beats the best single encoder when the inputs carry information no single encoder could have seen (the genomic window on GTEx; the untranslated regions on half-life and translation efficiency).
-MINA'S NOTE ("if someone wants to train a foundation model, train on task-specific datasets"). Her reading matches the evidence: on each benchmark the strongest single encoder is the one whose pretraining data is closest to the task's biology. RNA-FM (non-coding RNA, structure) wins CoV-Vac. mRNA-FM and CaLM (coding sequences, codon tokens) win E. coli, and mRNA-FM carries by far the most synonymous-codon information in the mRFP control. NT (many genomes) wins fungal. Practical rule: match the encoder's pretraining domain to the task before asking whether to fuse, and expect fusion to add something only when the second input is a different molecule or region.</a:t>
+THE VERDICTS, AND WHY EACH CAME OUT THAT WAY. Fungal: tie. All three streams are readings of one coding sequence; NT alone (pretrained on whole genomes of many species) already carries what the task needs, and the paper's own +0.020 sits inside our interval, so the paper's gain is the size of noise on a 430-row split. CoV-Vac: tie for cross-attention; concatenation and the gated head are resolved worse than RNA-FM alone. These are 81-nt fragments scored for degradation, which is about RNA structure, which is what RNA-FM (nucleotide-level, pretrained on structured non-coding RNA) is good at; the "protein" of an 81-nt fragment is a 27-residue peptide in an arbitrary frame and the DNA stream is the same letters at coarser resolution, so adding them adds noise. E. coli: fusion won in Phase A (+6.9 points), and slides 9 and 10 show it was fusion compensating for a weak RNA encoder. Stability, published split: tie, but 68% of its test rows repeat a training sequence (slide 7). Stability, unseen rows: leans fusion (+0.040 over RNA-FM as the encoder writes it, one seed), but only +0.007 to +0.019 over RNA-FM pooled onto the grid (slide 7). GTEx: fusion wins, the only setting where the three inputs are different molecules (slide 13).
+THE PATTERN (the interpretation Mina asked for). Fusion of three readings of one coding sequence rarely beats the best single encoder once that encoder is a strong one, because the three encoders see largely the same information in three alphabets (slide 10 has four single-seed exceptions). Fusion beats the best single encoder when the inputs carry information no single encoder could have seen (the genomic window on GTEx; the untranslated regions on half-life and translation efficiency).
+MINA'S NOTE ("if someone wants to train a foundation model, train on task-specific datasets"). The evidence partly supports her reading. Among the paper's three encoders, RNA-FM (non-coding RNA, nucleotide level) wins CoV-Vac, a folding-driven task, and NT (many genomes) wins fungal. With the Phase B swaps, mRNA-FM and CaLM, pretrained on coding sequences with codon tokens, are the best single encoders on fungal and E. coli, and mRNA-FM carries by far the most synonymous-codon information in the mRFP control. But RiNALMo, pretrained on non-coding RNA like RNA-FM, lifts fungal and E. coli almost as much, so pretraining domain is not the whole story. Practical rule: pick the strongest single encoder for the task first, then ask whether to fuse, and expect fusion to add something mainly when the second input is a different molecule or region.</a:t>
             </a:r>
             <a:endParaRPr lang="en-US" dirty="0"/>
           </a:p>
@@ -1439,14 +1437,14 @@
           <a:p>
             <a:r>
               <a:rPr lang="en-US" dirty="0"/>
-              <a:t>HOW TO READ THE FIGURE. Three panels, one per fusion head, all starting from the same three streams on the codon grid (a stream is one vector per codon for one encoder). Panel a, concatenation: at each codon the three vectors are glued end to end into 1,560 numbers (DNA is first projected from 512 to 600) and one linear layer maps that to 600; nothing is discarded and the TextCNN that follows decides which features of which modality to use. Panel b, gated attention: each stream is averaged over its codons into one summary, a gate scores the three summaries, a softmax turns the scores into three weights that add to one, and those same three weights multiply the full streams codon by codon; the example weights (0.14 DNA, 0.00 RNA, 0.86 protein) are the measured E. coli weights for seed 0, and with RNA at 0.00 the whole RNA stream is gone from every position. Panel c, cross-modal attention: the three streams are laid end to end into one context of 3T positions, every position of every modality queries that context, and the updated streams are merged back; arrow width in the drawing stands for attention weight. The source figure is docs/notes/figures/figures_overleaf/fusion_heads_slide.pdf, and the Overleaf version is Figure "fusion heads".
-THE MEASURED WEIGHTS, BENCHMARK BY BENCHMARK (entropy weight 0.01, averaged over the test split; three values are seeds 0, 1 and 2). Fungal: DNA 0.20 / 0.16 / 0.14, RNA 0.20 / 0.25 / 0.26, protein 0.61 / 0.59 / 0.60. CoV-Vac: DNA 0.83 / 0.92 / 0.94, RNA 0.01 / 0.03 / 0.00, protein 0.16 / 0.05 / 0.06. E. coli: DNA 0.11 / 0.18 / 0.10, RNA 0.00, protein 0.89 / 0.82 / 0.90. Stability: DNA 0.28, RNA 0.00, protein 0.71. At entropy weight 0.5 or 1.0, one modality takes 1.00 and the other two 0.00 on every benchmark.
+              <a:t>HOW TO READ THE FIGURE. Three panels, one per fusion head, all starting from the same three streams on the codon grid (a stream is one vector per codon for one encoder). Panel a, concatenation: at each codon the three vectors are glued end to end into 1,560 numbers (DNA is first projected from 512 to 600) and one linear layer maps that to 600; nothing is discarded and the TextCNN that follows decides which features of which modality to use. Panel b, gated attention: each stream is averaged over its codons into one summary, a gate scores the three summaries, a softmax turns the scores into three weights that add to one, and those same three weights multiply the full streams codon by codon; the example weights (0.11 DNA, 0.00 RNA, 0.89 protein) are the measured E. coli weights for seed 0, and with RNA at 0.00 the whole RNA stream is gone from every position. Panel c, cross-modal attention: the three streams are laid end to end into one context of 3T positions, every position of every modality queries that context, and the updated streams are merged back; arrow width in the drawing stands for attention weight. The source figure is docs/notes/figures/figures_overleaf/fusion_heads_slide.pdf, and the Overleaf version is Figure "fusion heads".
+THE MEASURED WEIGHTS, BENCHMARK BY BENCHMARK (entropy weight 0.01, averaged over the test split; three values are seeds 0, 1 and 2). Fungal: DNA 0.20 / 0.16 / 0.14, RNA 0.20 / 0.25 / 0.26, protein 0.61 / 0.59 / 0.60. CoV-Vac: DNA 0.83 / 0.92 / 0.94, RNA 0.01 / 0.03 / 0.00, protein 0.16 / 0.05 / 0.06. E. coli: DNA 0.11 / 0.18 / 0.10, RNA 0.00, protein 0.89 / 0.82 / 0.90. Stability (one seed): DNA 0.28, RNA 0.00, protein 0.71. At entropy weight 1.0, one modality takes 1.00 and the other two 0.00 on every benchmark; at 0.5 the same happens on CoV-Vac, E. coli and stability, while fungal keeps RNA 0.28 and protein 0.72.
 WHAT THE GATED HEAD IS (Mina: "what is the gated head and how does it work"). After the three streams are projected to a common width, each modality's stream is summarized by one vector, the mean of its codon vectors. Each summary goes through a gate, tanh(V h) times sigmoid(U h), then a linear score. The three scores go through a softmax (we also learn a temperature, which the paper does not mention), giving three weights that add to one. The fused stream is weight_DNA times the DNA stream plus weight_RNA times the RNA stream plus weight_protein times the protein stream, codon by codon. The whole decision is three numbers per sequence. The paper calls these weights an interpretability output: how much each modality is used.
 IS IT MIL ATTENTION? (Mina: "is gated MIL attention related?") Yes. It is the attention-based multiple instance learning pooling of Ilse, Tomczak and Welling (2018), where a bag of instances gets one attention weight per instance and the bag representation is the weighted sum. BioLangFusion uses the same equations with the three modalities as the three instances of one bag.
-THE ENTROPY TERM. Loss = task loss + lambda times the negative entropy of the three weights, so it pushes the weights toward one-sided values. Lambda is chosen on validation among 0.01, 0.5 and 1; validation chose 0.01 everywhere. At 0.5 or 1.0 one modality takes 1.00 on every benchmark. The term never helps: on all four benchmarks the head without it scores at or above the head with it.
-WHAT THE WEIGHTS SHOW. Nearly one-hot even at lambda 0.01. RNA is at zero on all three Phase A benchmarks. On E. coli the head keeps protein (0.89). On CoV-Vac it keeps DNA (0.83 to 0.94 across seeds) and scores 0.783, almost exactly the DNA-only score of 0.779, although RNA-FM alone is the best single encoder at 0.838. So on CoV-Vac the head selected against the best encoder, and that choice is the largest miss in the reproduction.
-WHY RNA GOES TO ZERO (Mina: "E. coli, why is RNA 0"). Three things combine. First, softmax plus the entropy penalty is winner-take-all: once one modality's weight pulls ahead early in training, the others get almost no gradient and cannot recover (the same collapse seen in gating networks generally). Second, the RNA-FM stream carries the least usable codon information of the three for an expression task (smallest gain above the codon-frequency controls in the mRFP control) and on E. coli it is redundant with the DNA stream, which is the same letters read as 6-mers. Third, the gate decides from a mean over all codons, which erases the positional detail that makes a stream useful. The clearest demonstration is Phase B: with mRNA-FM in the RNA slot on E. coli, mRNA-FM alone is the best single encoder at 58.7%, and the gated head still gives RNA 0.0007 and scores 53.1%, five points below the encoder it threw away.
-HOW THIS RELATES TO FUSION AND CONCATENATION (Mina: "how does it help with fusion / concatenation"). It does not add information; it reweights. With near one-hot weights it behaves like a single encoder plus a projection, and its score tracks whichever modality it kept. Concatenation keeps all three streams at every codon and lets the TextCNN pick features from any of them, so where the modalities are complementary (E. coli, Phase A) concatenation wins by seven points and the gated head by three. Cross-attention can move information across modalities and positions, so it is the only head that never loses to the best single encoder in Phase A. Measured order: cross-attention above concatenation above gated, the reverse of the paper; on fungal, cross minus gated is resolved (+0.022 [+0.009, +0.036]).
+THE ENTROPY TERM. Loss = task loss + lambda times the negative entropy of the three weights, so it pushes the weights toward one-sided values. Lambda is chosen on validation among 0.01, 0.5 and 1; validation chose 0.01 everywhere. At 1.0 one modality takes 1.00 on every benchmark, and at 0.5 on three of the four. The term never helps: on all four benchmarks the head without it scores at or above the head with it.
+WHAT THE WEIGHTS SHOW. Even at lambda 0.01 the weights are concentrated on CoV-Vac, E. coli and stability: RNA gets at most 0.03 on those three, DNA dominates CoV-Vac, protein dominates E. coli (0.89) and leans protein on stability (0.71). Fungal is the one benchmark where all three streams keep a share (DNA 0.14 to 0.20, RNA 0.20 to 0.26, protein about 0.60). On CoV-Vac it keeps DNA (0.83 to 0.94 across seeds) and scores 0.783, almost exactly the DNA-only score of 0.779, although RNA-FM alone is the best single encoder at 0.838. So on CoV-Vac the head selected against the best encoder, and that choice is the largest miss in the reproduction.
+WHY RNA GOES TO ZERO (Mina: "E. coli, why is RNA 0"). Three things combine. First, softmax plus the entropy penalty is winner-take-all: once one modality's weight pulls ahead early in training, the others get almost no gradient and cannot recover (the same collapse seen in gating networks generally). Second, the RNA-FM stream carries the least codon information of the nucleotide encoders (the smallest gain above all controls in the mRFP control, +0.021) and on E. coli it is redundant with the DNA stream, which is the same letters read as 6-mers. Third, the gate decides from a mean over all codons, which erases the positional detail that makes a stream useful. The clearest demonstration is Phase B: with mRNA-FM in the RNA slot on E. coli, mRNA-FM alone is the best single encoder at 58.7%, and the gated head still gives RNA 0.0007 and scores 53.1%, five points below the encoder it threw away.
+HOW THIS RELATES TO FUSION AND CONCATENATION (Mina: "how does it help with fusion / concatenation"). It does not add information; it reweights. With concentrated weights it behaves like a single encoder plus a projection, and its score tracks whichever modality it kept. Concatenation keeps all three streams at every codon and lets the TextCNN pick features from any of them, so where the modalities are complementary (E. coli, Phase A) concatenation wins by seven points and the gated head by three. Cross-attention can move information across modalities and positions, so it is the only head that never loses to the best single encoder in Phase A. Measured order: cross-attention resolves above the gated head on fungal (+0.022 [+0.009, +0.036]) and CoV-Vac (+0.052), the reverse of the paper's ordering of those two; concatenation is the best head on E. coli, resolved above both others; on stability the three heads tie.
 WIDTH. The paper gives the gated head a 1,280-channel TextCNN and the others 100. At 1,280 on fungal the gated head recovers about half its gap (0.801 to 0.812 vs 0.824). The other three benchmarks at 1,280 are the last check before the verdict is final.</a:t>
             </a:r>
             <a:endParaRPr lang="en-US" dirty="0"/>
@@ -1537,7 +1535,7 @@
               <a:rPr lang="en-US" dirty="0"/>
               <a:t>WHY. The Stage 3 dataset audit found that the published mRNA stability split repeats a training sequence in 2,444 of its 3,579 test rows (68%), usually with a different label (the same sequence measured again; median label spread 0.49). Validation leaks the same way (2,360 of 3,608 rows), so early stopping was also watching a leaky split. A score on this split is mostly a test of whether the model remembers sequences it has seen. We had to know how much of the published 0.55 is memory.
 HOW. No retraining. The models trained on the published split were scored on all 3,579 test rows (the published number) and then on only the 1,135 unseen-sequence rows. One seed.
-WHAT THE NUMBERS MEAN. Published-split scores cluster at 0.53 to 0.56 for every model, ours and the paper's, and that range is carried by the repeated rows. On unseen sequences the scores are 0.27 to 0.36: the honest generalization range for this benchmark, a third lower than the paper reports. On the unseen rows the three fusion heads (0.347 to 0.359) sit above RNA-FM as the encoder writes it (0.319) by 0.03 to 0.04, just short of resolving at one seed (concatenation +0.040 [-0.003, +0.083]). But RNA-FM pooled onto the codon grid, the stream every fusion head actually receives, scores 0.340 on the same rows, so the part of that gap fusion itself adds is 0.007 to 0.019. Whether the leak hides a real fusion gain is open, and the sequence-grouped re-split with seeds is the run that settles it.
+WHAT THE NUMBERS MEAN. Published-split scores cluster at 0.53 to 0.56 for every model, ours and the paper's, and that range is carried by the repeated rows. On unseen sequences the scores are 0.27 to 0.36: the honest generalization range for this benchmark, 0.2 to 0.27 below the published-split scores. On the unseen rows the three fusion heads (0.347 to 0.359) sit above RNA-FM as the encoder writes it (0.319) by 0.03 to 0.04, just short of resolving at one seed (concatenation +0.040 [-0.003, +0.083]). But RNA-FM pooled onto the codon grid, the stream every fusion head actually receives, scores 0.340 on the same rows, so the part of that gap fusion itself adds is 0.007 to 0.019. Whether the leak hides a real fusion gain is open, and the sequence-grouped re-split with seeds is the run that settles it.
 MINA'S QUESTION ("did it report 1,000 rows or 3,000 rows in BioLangFusion?"). The 3,000. BioLangFusion reports its stability numbers on the full published test split, which is 3,579 rows after its own 999-nucleotide filter. The evidence: our full-split numbers match the paper's within 0.01 for every single encoder (RNA-FM 0.552 vs 0.553, NT 0.539 vs 0.530, ESM-2 0.531 vs 0.539). The 1,135 unseen rows are our construction; the paper never scores them and no published number exists for them. So the paper's stability column is a score on a split where two thirds of the test sequences were seen in training.
 ONE SENTENCE. The paper's 0.55 on stability is on a split where 68% of test sequences are in training; on sequences the models have never seen, everyone is at about 0.3, and fusion is slightly ahead.</a:t>
             </a:r>
@@ -1630,8 +1628,8 @@
               <a:t>WHY (plan item 5). The mRFP data set is one gene (a red fluorescent protein) recoded 1,000 ways with synonymous codons, so every sequence encodes the identical protein and expression differs only because of the codons chosen. That gives two clean tests. The protein encoders must be invariant: they see the same amino-acid string every time, so they must predict nothing; this is a negative control on the whole pipeline. And a nucleotide encoder is only interesting if it predicts expression beyond simple codon statistics; otherwise it has just memorized codon frequencies.
 HOW. Stage 1's pooled embeddings of the twelve encoders. Controls: GC, GC3 (GC at the third codon position), the 64 codon frequencies, a Nussinov base-pairing proxy on the first 200 nt, and ViennaRNA minimum free energy of the first 60 nt and of the whole sequence. Together the controls reach R-squared 0.306. For each encoder a ridge probe is fit on the controls with inner cross-validation, the encoder is fit on the residual, and the gain in held-out R-squared is recorded over ten grouped fold assignments (identical sequences kept in one fold).
 WHAT THE NUMBERS MEAN. The protein control holds: 0.000 gain, in every fold assignment. Every nucleotide encoder beats the Track A controls (GC3, codon use, Nussinov) in 10 of 10 fold assignments, so all of them carry codon information beyond frequencies. mRNA-FM carries far more than the others (+0.18 above every control, +0.26 above the Track A set); RNA-FM, BioLangFusion's own RNA encoder, carries the least (+0.02). Among the controls, the one structure feature that matters is the folding energy of the first 60 nt after the start codon (R-squared 0.11 alone; a weaker fold means higher expression), the classic Kudla et al. 2009 result. The Nussinov proxy carries nothing.
-WHY mRNA-FM. mRNA-FM and CaLM read coding sequences one codon per token and were pretrained on coding sequences, so their vocabulary is codon identity in context. RNA-FM reads single nucleotides and was pretrained on non-coding RNA, so synonymous codon choice is not something its pretraining ever rewarded. Nucleotide Transformer reads 6-mers across whole genomes, which contain codon structure but dilute it. The ranking is the ranking of how much codon context each encoder's pretraining exposed it to.
-MINA'S NOTE ("mRNA-FM performs best; maybe do fusion against mRNA-FM, like DNA or RNA fusion with mRNA-FM; try different mRNA encoders as well"). Agreed, and Phase B already put mRNA-FM in the RNA slot first because this control predicted it (slide 9). The follow-up is to make mRNA-FM the anchor: DNA + mRNA-FM, mRNA-FM + protein, and mRNA-FM beside other codon-level RNA encoders (CaLM, and RiNALMo, the remaining RNA swap) on the coding-sequence benchmarks. This goes into the plan as a Phase B extension under Gantt 24.</a:t>
+WHY mRNA-FM. mRNA-FM and CaLM read coding sequences one codon per token and were pretrained on coding sequences, so their vocabulary is codon identity in context. RNA-FM reads single nucleotides and was pretrained on non-coding RNA, so synonymous codon choice is not something its pretraining ever rewarded. Nucleotide Transformer reads 6-mers across whole genomes, which contain codon structure but dilute it. That explains mRNA-FM's lead over RNA-FM, but pretraining domain does not order the rest: CaLM, also codon-level and pretrained on coding sequences, adds only +0.022 above all controls, less than NT 500M (+0.076) or RiNALMo (+0.049), and gains in 9 of 10 fold assignments rather than 10.
+MINA'S NOTE ("mRNA-FM performs best; maybe do fusion against mRNA-FM, like DNA or RNA fusion with mRNA-FM; try different mRNA encoders as well"). Agreed, and Phase B put mRNA-FM in the RNA slot first because this control pointed to it (slide 9). The follow-up is to make mRNA-FM the anchor: DNA + mRNA-FM, mRNA-FM + protein, and mRNA-FM beside the other RNA encoders already swapped in (CaLM, codon-level; RiNALMo, nucleotide-level) on the coding-sequence benchmarks. This goes into the plan as a Phase B extension under Gantt 24.</a:t>
             </a:r>
             <a:endParaRPr lang="en-US" dirty="0"/>
           </a:p>
@@ -1720,11 +1718,11 @@
             <a:r>
               <a:rPr lang="en-US" dirty="0"/>
               <a:t>WHAT THIS SLIDE ANSWERS. The encoder question: if you replace one frozen encoder and change nothing else, how much does the score move? Every one of the eight swaps is here, read alone through the same TextCNN, against the encoder it replaces. The next slide asks the fusion question on the same eight swaps.
-WHAT RAN. Chase ran four swaps by October 22 (mRNA-FM and CaLM on CoV-Vac and E. coli) and the rest between October 25 and 27. DNA slot: NT 500M human-ref and HyenaDNA large in place of NT v2 100M. RNA slot: RiNALMo 150M, mRNA-FM and CaLM in place of RNA-FM. Protein slot: ESM-2 35M, ESM-2 150M and ProtBERT in place of ESM-2 8M. Each on fungal, CoV-Vac and E. coli; mRNA-FM, CaLM and ESM-2 150M also on mRNA stability. Seed 0, everything else at Phase A's settings. DNABERT-2 is out of the sweep because its variable-length tokens need a grid adapter.
+WHAT RAN. By October 22 Chase had run two of the swaps, mRNA-FM and CaLM, on CoV-Vac and E. coli; the rest ran between October 25 and 27. DNA slot: NT 500M human-ref and HyenaDNA large in place of NT v2 100M. RNA slot: RiNALMo 150M, mRNA-FM and CaLM in place of RNA-FM. Protein slot: ESM-2 35M, ESM-2 150M and ProtBERT in place of ESM-2 8M. Each on fungal, CoV-Vac and E. coli; mRNA-FM, CaLM and ESM-2 150M also on mRNA stability. Seed 0, everything else at Phase A's settings. DNABERT-2 is out of the sweep because its variable-length tokens need a grid adapter.
 HOW TO READ THE FIGURE. One panel per benchmark, one row per swap, grouped by slot. The open marker is the original encoder read alone; the filled marker is the swap, colored by slot. A long line to the right means the swap is much better alone.
-THE RNA SLOT IS WHERE IT MOVES. On fungal, RiNALMo, mRNA-FM and CaLM alone score 0.844, 0.852 and 0.851 against RNA-FM's 0.722: the single biggest effect anywhere in Stage 4. They also pass NT v2 100M (0.813), the best original encoder, and the paper's best fused model on that benchmark (0.824). So one frozen encoder read alone now beats the paper's best fusion. On E. coli the same three lift the single encoder from 50.7 to 57.3, 58.7 and 57.6; mRNA-FM alone is +8.0 points over RNA-FM alone [+3.9, +11.9] and CaLM +6.8 [+2.5, +10.8], both resolved.
-THE OTHER TWO SLOTS BARELY MOVE. The DNA swaps are worse than NT v2 100M on fungal (0.740 and 0.737 against 0.813) and on CoV-Vac. The protein swaps move little: ESM-2 35M and ProtBERT are near ESM-2 8M everywhere, and only ESM-2 150M on E. coli is clearly better (53.9 against 50.1).
-WHY THE BENCHMARKS DISAGREE ABOUT WHICH RNA ENCODER WINS. On CoV-Vac the codon-level swaps do not help: mRNA-FM alone is 0.812 against RNA-FM's 0.833, CaLM 0.844, both ties. E. coli expression and fungal expression are driven by codon usage, which mRNA-FM, CaLM and RiNALMo were pretrained on; CoV-Vac degradation is the folding of an 81-nucleotide fragment, which nucleotide-level RNA-FM was pretrained on. Match the encoder's pretraining to the task's biology, which is what the mRFP control (slide 8) predicted before any of this ran.
+THE RNA SLOT IS WHERE IT MOVES. On fungal, RiNALMo, mRNA-FM and CaLM alone score 0.844, 0.852 and 0.851 against RNA-FM's 0.722: the single biggest effect anywhere in Stage 4. They also pass NT v2 100M (0.813), the best original encoder, and the paper's best fused model on that benchmark (0.824). So one frozen encoder read alone beats the paper's best fusion. On E. coli the same three lift the single encoder from 50.7 to 57.3, 58.7 and 57.6; mRNA-FM alone is +8.0 points over RNA-FM alone [+4.0, +11.8] and CaLM +6.9 [+2.8, +10.8], both resolved.
+THE OTHER TWO SLOTS MOVE LESS. The DNA swaps are worse than NT v2 100M on fungal (0.740 and 0.737 against 0.813) and on CoV-Vac (0.727 and 0.755 against 0.779). Among the protein swaps, ESM-2 35M stays near ESM-2 8M everywhere; ESM-2 150M is better on fungal (0.729 against 0.698) and E. coli (53.9 against 50.1); ProtBERT is better on fungal (0.761) but worse on CoV-Vac (0.776 against 0.816). None comes near the RNA swaps' gains of 0.12 to 0.13 on fungal and 6.6 to 8.0 points on E. coli. The brackets are the seed-0 reference runs the sweep compares against, so NT v2 on fungal reads 0.813 here against slide 4's seed mean of 0.807.
+WHY THE BENCHMARKS DISAGREE ABOUT WHICH RNA ENCODER WINS. On CoV-Vac the RNA swaps do not help: mRNA-FM alone is 0.812 against RNA-FM's 0.833 and CaLM 0.844, both ties. CoV-Vac degradation is the folding of an 81-nucleotide fragment, which nucleotide-level RNA-FM, pretrained on structured non-coding RNA, already reads well. On fungal and E. coli expression, mRNA-FM and CaLM, pretrained on coding sequences with codon tokens, are the two best single encoders, which fits what the mRFP control (slide 8) showed. But RiNALMo, pretrained on non-coding RNA at nucleotide level like RNA-FM, gains almost as much, so pretraining domain is not the whole explanation.
 CAVEAT. One seed per configuration. The intervals quoted are paired bootstraps over test rows, not over training runs.</a:t>
             </a:r>
             <a:endParaRPr lang="en-US" dirty="0"/>
@@ -2131,7 +2129,7 @@
                 <a:ea typeface="Inter" pitchFamily="34" charset="-122"/>
                 <a:cs typeface="Inter" pitchFamily="34" charset="-120"/>
               </a:rPr>
-              <a:t>multimodal-bio-fusion  ·  Meeting with Mina Basirat  ·  October 22, 2026  ·  refined after the meeting</a:t>
+              <a:t>multimodal-bio-fusion  ·  Meeting with Mina Basirat  ·  October 22, 2026  ·  results through October 27</a:t>
             </a:r>
             <a:endParaRPr lang="en-US" sz="1200" dirty="0"/>
           </a:p>
@@ -2209,7 +2207,7 @@
                 <a:ea typeface="Inter" pitchFamily="34" charset="-122"/>
                 <a:cs typeface="Inter" pitchFamily="34" charset="-120"/>
               </a:rPr>
-              <a:t>We rebuilt BioLangFusion and it gives the paper's numbers where it should. Its fusion gains hold on fewer tasks than the paper suggests, because a better single encoder closes the largest of them. Fusion still wins when the inputs are physically different molecules.</a:t>
+              <a:t>We rebuilt BioLangFusion and it gives the paper's numbers where it should. Its fusion gains hold on fewer tasks than the paper suggests, because a better single encoder closes the largest of them. Fusion still wins when the second input is a different molecule or region.</a:t>
             </a:r>
             <a:endParaRPr lang="en-US" sz="1600" dirty="0"/>
           </a:p>
@@ -2607,7 +2605,7 @@
                 <a:ea typeface="Inter" pitchFamily="34" charset="-122"/>
                 <a:cs typeface="Inter" pitchFamily="34" charset="-120"/>
               </a:rPr>
-              <a:t>Once the single encoder is good, fusion adds nothing resolved; three gains survive that test and need seeds</a:t>
+              <a:t>Most resolved fusion gains trace to a weak reference or a weak RNA slot; four remain, each on one seed</a:t>
             </a:r>
             <a:endParaRPr lang="en-US" sz="2400" dirty="0"/>
           </a:p>
@@ -2629,8 +2627,8 @@
         </p:blipFill>
         <p:spPr>
           <a:xfrm>
-            <a:off x="1600200" y="1920240"/>
-            <a:ext cx="8988552" cy="3438144"/>
+            <a:off x="1856232" y="1901952"/>
+            <a:ext cx="8485632" cy="3246120"/>
           </a:xfrm>
           <a:prstGeom prst="rect">
             <a:avLst/>
@@ -2652,7 +2650,7 @@
           </p:nvPr>
         </p:nvGraphicFramePr>
         <p:xfrm>
-          <a:off x="813816" y="5449824"/>
+          <a:off x="813816" y="5212080"/>
           <a:ext cx="10881360" cy="914400"/>
         </p:xfrm>
         <a:graphic>
@@ -2684,7 +2682,7 @@
                           <a:ea typeface="Inter" pitchFamily="34" charset="-122"/>
                           <a:cs typeface="Inter" pitchFamily="34" charset="-120"/>
                         </a:rPr>
-                        <a:t>The three gains no weak reference explains</a:t>
+                        <a:t>The four gains neither artifact explains</a:t>
                       </a:r>
                       <a:endParaRPr lang="en-US" sz="950" dirty="0">
                         <a:latin typeface="Inter" charset="0"/>
@@ -3983,6 +3981,348 @@
                           <a:cs typeface="Inter" pitchFamily="34" charset="-120"/>
                         </a:rPr>
                         <a:t>62.5%, the project's best</a:t>
+                      </a:r>
+                      <a:endParaRPr lang="en-US" sz="950" dirty="0">
+                        <a:latin typeface="Inter" charset="0"/>
+                        <a:ea typeface="Inter" charset="0"/>
+                        <a:cs typeface="Inter" charset="0"/>
+                      </a:endParaRPr>
+                    </a:p>
+                  </a:txBody>
+                  <a:tcPr marL="63500" marR="63500" marT="38100" marB="38100" anchor="ctr">
+                    <a:lnL w="6350" cap="flat" cmpd="sng" algn="ctr">
+                      <a:solidFill>
+                        <a:srgbClr val="E6E6E6"/>
+                      </a:solidFill>
+                      <a:prstDash val="solid"/>
+                      <a:round/>
+                      <a:headEnd type="none" w="med" len="med"/>
+                      <a:tailEnd type="none" w="med" len="med"/>
+                    </a:lnL>
+                    <a:lnR w="6350" cap="flat" cmpd="sng" algn="ctr">
+                      <a:solidFill>
+                        <a:srgbClr val="E6E6E6"/>
+                      </a:solidFill>
+                      <a:prstDash val="solid"/>
+                      <a:round/>
+                      <a:headEnd type="none" w="med" len="med"/>
+                      <a:tailEnd type="none" w="med" len="med"/>
+                    </a:lnR>
+                    <a:lnT w="6350" cap="flat" cmpd="sng" algn="ctr">
+                      <a:solidFill>
+                        <a:srgbClr val="E6E6E6"/>
+                      </a:solidFill>
+                      <a:prstDash val="solid"/>
+                      <a:round/>
+                      <a:headEnd type="none" w="med" len="med"/>
+                      <a:tailEnd type="none" w="med" len="med"/>
+                    </a:lnT>
+                    <a:lnB w="6350" cap="flat" cmpd="sng" algn="ctr">
+                      <a:solidFill>
+                        <a:srgbClr val="E6E6E6"/>
+                      </a:solidFill>
+                      <a:prstDash val="solid"/>
+                      <a:round/>
+                      <a:headEnd type="none" w="med" len="med"/>
+                      <a:tailEnd type="none" w="med" len="med"/>
+                    </a:lnB>
+                    <a:solidFill>
+                      <a:srgbClr val="FBF1D6"/>
+                    </a:solidFill>
+                  </a:tcPr>
+                </a:tc>
+              </a:tr>
+              <a:tr h="192024">
+                <a:tc>
+                  <a:txBody>
+                    <a:bodyPr/>
+                    <a:lstStyle/>
+                    <a:p>
+                      <a:pPr indent="0" marL="0">
+                        <a:buNone/>
+                      </a:pPr>
+                      <a:r>
+                        <a:rPr lang="en-US" sz="950" dirty="0">
+                          <a:solidFill>
+                            <a:srgbClr val="31302E"/>
+                          </a:solidFill>
+                          <a:latin typeface="Inter" pitchFamily="34" charset="0"/>
+                          <a:ea typeface="Inter" pitchFamily="34" charset="-122"/>
+                          <a:cs typeface="Inter" pitchFamily="34" charset="-120"/>
+                        </a:rPr>
+                        <a:t>RiNALMo in the RNA slot</a:t>
+                      </a:r>
+                      <a:endParaRPr lang="en-US" sz="950" dirty="0">
+                        <a:latin typeface="Inter" charset="0"/>
+                        <a:ea typeface="Inter" charset="0"/>
+                        <a:cs typeface="Inter" charset="0"/>
+                      </a:endParaRPr>
+                    </a:p>
+                  </a:txBody>
+                  <a:tcPr marL="63500" marR="63500" marT="38100" marB="38100" anchor="ctr">
+                    <a:lnL w="6350" cap="flat" cmpd="sng" algn="ctr">
+                      <a:solidFill>
+                        <a:srgbClr val="E6E6E6"/>
+                      </a:solidFill>
+                      <a:prstDash val="solid"/>
+                      <a:round/>
+                      <a:headEnd type="none" w="med" len="med"/>
+                      <a:tailEnd type="none" w="med" len="med"/>
+                    </a:lnL>
+                    <a:lnR w="6350" cap="flat" cmpd="sng" algn="ctr">
+                      <a:solidFill>
+                        <a:srgbClr val="E6E6E6"/>
+                      </a:solidFill>
+                      <a:prstDash val="solid"/>
+                      <a:round/>
+                      <a:headEnd type="none" w="med" len="med"/>
+                      <a:tailEnd type="none" w="med" len="med"/>
+                    </a:lnR>
+                    <a:lnT w="6350" cap="flat" cmpd="sng" algn="ctr">
+                      <a:solidFill>
+                        <a:srgbClr val="E6E6E6"/>
+                      </a:solidFill>
+                      <a:prstDash val="solid"/>
+                      <a:round/>
+                      <a:headEnd type="none" w="med" len="med"/>
+                      <a:tailEnd type="none" w="med" len="med"/>
+                    </a:lnT>
+                    <a:lnB w="6350" cap="flat" cmpd="sng" algn="ctr">
+                      <a:solidFill>
+                        <a:srgbClr val="E6E6E6"/>
+                      </a:solidFill>
+                      <a:prstDash val="solid"/>
+                      <a:round/>
+                      <a:headEnd type="none" w="med" len="med"/>
+                      <a:tailEnd type="none" w="med" len="med"/>
+                    </a:lnB>
+                    <a:solidFill>
+                      <a:srgbClr val="FFFFFF"/>
+                    </a:solidFill>
+                  </a:tcPr>
+                </a:tc>
+                <a:tc>
+                  <a:txBody>
+                    <a:bodyPr/>
+                    <a:lstStyle/>
+                    <a:p>
+                      <a:pPr algn="ctr" indent="0" marL="0">
+                        <a:buNone/>
+                      </a:pPr>
+                      <a:r>
+                        <a:rPr lang="en-US" sz="950" dirty="0">
+                          <a:solidFill>
+                            <a:srgbClr val="31302E"/>
+                          </a:solidFill>
+                          <a:latin typeface="Inter" pitchFamily="34" charset="0"/>
+                          <a:ea typeface="Inter" pitchFamily="34" charset="-122"/>
+                          <a:cs typeface="Inter" pitchFamily="34" charset="-120"/>
+                        </a:rPr>
+                        <a:t>E. coli</a:t>
+                      </a:r>
+                      <a:endParaRPr lang="en-US" sz="950" dirty="0">
+                        <a:latin typeface="Inter" charset="0"/>
+                        <a:ea typeface="Inter" charset="0"/>
+                        <a:cs typeface="Inter" charset="0"/>
+                      </a:endParaRPr>
+                    </a:p>
+                  </a:txBody>
+                  <a:tcPr marL="63500" marR="63500" marT="38100" marB="38100" anchor="ctr">
+                    <a:lnL w="6350" cap="flat" cmpd="sng" algn="ctr">
+                      <a:solidFill>
+                        <a:srgbClr val="E6E6E6"/>
+                      </a:solidFill>
+                      <a:prstDash val="solid"/>
+                      <a:round/>
+                      <a:headEnd type="none" w="med" len="med"/>
+                      <a:tailEnd type="none" w="med" len="med"/>
+                    </a:lnL>
+                    <a:lnR w="6350" cap="flat" cmpd="sng" algn="ctr">
+                      <a:solidFill>
+                        <a:srgbClr val="E6E6E6"/>
+                      </a:solidFill>
+                      <a:prstDash val="solid"/>
+                      <a:round/>
+                      <a:headEnd type="none" w="med" len="med"/>
+                      <a:tailEnd type="none" w="med" len="med"/>
+                    </a:lnR>
+                    <a:lnT w="6350" cap="flat" cmpd="sng" algn="ctr">
+                      <a:solidFill>
+                        <a:srgbClr val="E6E6E6"/>
+                      </a:solidFill>
+                      <a:prstDash val="solid"/>
+                      <a:round/>
+                      <a:headEnd type="none" w="med" len="med"/>
+                      <a:tailEnd type="none" w="med" len="med"/>
+                    </a:lnT>
+                    <a:lnB w="6350" cap="flat" cmpd="sng" algn="ctr">
+                      <a:solidFill>
+                        <a:srgbClr val="E6E6E6"/>
+                      </a:solidFill>
+                      <a:prstDash val="solid"/>
+                      <a:round/>
+                      <a:headEnd type="none" w="med" len="med"/>
+                      <a:tailEnd type="none" w="med" len="med"/>
+                    </a:lnB>
+                    <a:solidFill>
+                      <a:srgbClr val="FFFFFF"/>
+                    </a:solidFill>
+                  </a:tcPr>
+                </a:tc>
+                <a:tc>
+                  <a:txBody>
+                    <a:bodyPr/>
+                    <a:lstStyle/>
+                    <a:p>
+                      <a:pPr algn="ctr" indent="0" marL="0">
+                        <a:buNone/>
+                      </a:pPr>
+                      <a:r>
+                        <a:rPr lang="en-US" sz="950" dirty="0">
+                          <a:solidFill>
+                            <a:srgbClr val="31302E"/>
+                          </a:solidFill>
+                          <a:latin typeface="Inter" pitchFamily="34" charset="0"/>
+                          <a:ea typeface="Inter" pitchFamily="34" charset="-122"/>
+                          <a:cs typeface="Inter" pitchFamily="34" charset="-120"/>
+                        </a:rPr>
+                        <a:t>concatenation</a:t>
+                      </a:r>
+                      <a:endParaRPr lang="en-US" sz="950" dirty="0">
+                        <a:latin typeface="Inter" charset="0"/>
+                        <a:ea typeface="Inter" charset="0"/>
+                        <a:cs typeface="Inter" charset="0"/>
+                      </a:endParaRPr>
+                    </a:p>
+                  </a:txBody>
+                  <a:tcPr marL="63500" marR="63500" marT="38100" marB="38100" anchor="ctr">
+                    <a:lnL w="6350" cap="flat" cmpd="sng" algn="ctr">
+                      <a:solidFill>
+                        <a:srgbClr val="E6E6E6"/>
+                      </a:solidFill>
+                      <a:prstDash val="solid"/>
+                      <a:round/>
+                      <a:headEnd type="none" w="med" len="med"/>
+                      <a:tailEnd type="none" w="med" len="med"/>
+                    </a:lnL>
+                    <a:lnR w="6350" cap="flat" cmpd="sng" algn="ctr">
+                      <a:solidFill>
+                        <a:srgbClr val="E6E6E6"/>
+                      </a:solidFill>
+                      <a:prstDash val="solid"/>
+                      <a:round/>
+                      <a:headEnd type="none" w="med" len="med"/>
+                      <a:tailEnd type="none" w="med" len="med"/>
+                    </a:lnR>
+                    <a:lnT w="6350" cap="flat" cmpd="sng" algn="ctr">
+                      <a:solidFill>
+                        <a:srgbClr val="E6E6E6"/>
+                      </a:solidFill>
+                      <a:prstDash val="solid"/>
+                      <a:round/>
+                      <a:headEnd type="none" w="med" len="med"/>
+                      <a:tailEnd type="none" w="med" len="med"/>
+                    </a:lnT>
+                    <a:lnB w="6350" cap="flat" cmpd="sng" algn="ctr">
+                      <a:solidFill>
+                        <a:srgbClr val="E6E6E6"/>
+                      </a:solidFill>
+                      <a:prstDash val="solid"/>
+                      <a:round/>
+                      <a:headEnd type="none" w="med" len="med"/>
+                      <a:tailEnd type="none" w="med" len="med"/>
+                    </a:lnB>
+                    <a:solidFill>
+                      <a:srgbClr val="FFFFFF"/>
+                    </a:solidFill>
+                  </a:tcPr>
+                </a:tc>
+                <a:tc>
+                  <a:txBody>
+                    <a:bodyPr/>
+                    <a:lstStyle/>
+                    <a:p>
+                      <a:pPr algn="ctr" indent="0" marL="0">
+                        <a:buNone/>
+                      </a:pPr>
+                      <a:r>
+                        <a:rPr lang="en-US" sz="950" dirty="0">
+                          <a:solidFill>
+                            <a:srgbClr val="31302E"/>
+                          </a:solidFill>
+                          <a:latin typeface="Inter" pitchFamily="34" charset="0"/>
+                          <a:ea typeface="Inter" pitchFamily="34" charset="-122"/>
+                          <a:cs typeface="Inter" pitchFamily="34" charset="-120"/>
+                        </a:rPr>
+                        <a:t>+3.9 points  [+0.8, +7.2]</a:t>
+                      </a:r>
+                      <a:endParaRPr lang="en-US" sz="950" dirty="0">
+                        <a:latin typeface="Inter" charset="0"/>
+                        <a:ea typeface="Inter" charset="0"/>
+                        <a:cs typeface="Inter" charset="0"/>
+                      </a:endParaRPr>
+                    </a:p>
+                  </a:txBody>
+                  <a:tcPr marL="63500" marR="63500" marT="38100" marB="38100" anchor="ctr">
+                    <a:lnL w="6350" cap="flat" cmpd="sng" algn="ctr">
+                      <a:solidFill>
+                        <a:srgbClr val="E6E6E6"/>
+                      </a:solidFill>
+                      <a:prstDash val="solid"/>
+                      <a:round/>
+                      <a:headEnd type="none" w="med" len="med"/>
+                      <a:tailEnd type="none" w="med" len="med"/>
+                    </a:lnL>
+                    <a:lnR w="6350" cap="flat" cmpd="sng" algn="ctr">
+                      <a:solidFill>
+                        <a:srgbClr val="E6E6E6"/>
+                      </a:solidFill>
+                      <a:prstDash val="solid"/>
+                      <a:round/>
+                      <a:headEnd type="none" w="med" len="med"/>
+                      <a:tailEnd type="none" w="med" len="med"/>
+                    </a:lnR>
+                    <a:lnT w="6350" cap="flat" cmpd="sng" algn="ctr">
+                      <a:solidFill>
+                        <a:srgbClr val="E6E6E6"/>
+                      </a:solidFill>
+                      <a:prstDash val="solid"/>
+                      <a:round/>
+                      <a:headEnd type="none" w="med" len="med"/>
+                      <a:tailEnd type="none" w="med" len="med"/>
+                    </a:lnT>
+                    <a:lnB w="6350" cap="flat" cmpd="sng" algn="ctr">
+                      <a:solidFill>
+                        <a:srgbClr val="E6E6E6"/>
+                      </a:solidFill>
+                      <a:prstDash val="solid"/>
+                      <a:round/>
+                      <a:headEnd type="none" w="med" len="med"/>
+                      <a:tailEnd type="none" w="med" len="med"/>
+                    </a:lnB>
+                    <a:solidFill>
+                      <a:srgbClr val="FBF1D6"/>
+                    </a:solidFill>
+                  </a:tcPr>
+                </a:tc>
+                <a:tc>
+                  <a:txBody>
+                    <a:bodyPr/>
+                    <a:lstStyle/>
+                    <a:p>
+                      <a:pPr algn="ctr" indent="0" marL="0">
+                        <a:buNone/>
+                      </a:pPr>
+                      <a:r>
+                        <a:rPr lang="en-US" sz="950" dirty="0">
+                          <a:solidFill>
+                            <a:srgbClr val="31302E"/>
+                          </a:solidFill>
+                          <a:latin typeface="Inter" pitchFamily="34" charset="0"/>
+                          <a:ea typeface="Inter" pitchFamily="34" charset="-122"/>
+                          <a:cs typeface="Inter" pitchFamily="34" charset="-120"/>
+                        </a:rPr>
+                        <a:t>60.0%</a:t>
                       </a:r>
                       <a:endParaRPr lang="en-US" sz="950" dirty="0">
                         <a:latin typeface="Inter" charset="0"/>
@@ -4046,8 +4386,8 @@
         </p:nvSpPr>
         <p:spPr>
           <a:xfrm>
-            <a:off x="813816" y="6528816"/>
-            <a:ext cx="10881360" cy="274320"/>
+            <a:off x="813816" y="6382512"/>
+            <a:ext cx="10881360" cy="365760"/>
           </a:xfrm>
           <a:prstGeom prst="rect">
             <a:avLst/>
@@ -4071,7 +4411,7 @@
                 <a:ea typeface="Inter" pitchFamily="34" charset="-122"/>
                 <a:cs typeface="Inter" pitchFamily="34" charset="-120"/>
               </a:rPr>
-              <a:t>Grid: each head minus the best single encoder validation chose, one seed, 95% paired interval; shaded cells resolve. Of 81 comparisons, 15 resolve ahead, 14 behind. Three of the 15 are fungal with ProtBERT (†), where validation picked a weak reference; eight more are E. coli runs still carrying the weak RNA-FM, Phase A's compensation again. That leaves the three below, one seed each.</a:t>
+              <a:t>Grid: each head minus the best single encoder validation chose, one seed, 95% paired interval; shaded cells resolve. Of 81 comparisons, 15 resolve ahead and 14 behind. Three of the 15 are fungal with ProtBERT (†), where validation picked a weak reference; eight are E. coli runs still carrying the weak RNA-FM. Four remain. The two E. coli rows are measured against RiNALMo on the codon grid (56.0), the reference validation chose; RiNALMo read natively scores 57.3.</a:t>
             </a:r>
             <a:endParaRPr lang="en-US" sz="850" dirty="0"/>
           </a:p>
@@ -4244,7 +4584,7 @@
                 <a:ea typeface="Inter" pitchFamily="34" charset="-122"/>
                 <a:cs typeface="Inter" pitchFamily="34" charset="-120"/>
               </a:rPr>
-              <a:t>LucaOne's two streams are +0.092 over the three BioLangFusion encoders concatenated, interval [+0.066, +0.120], resolved, and +0.170 over the best single encoder. "BLF three fused" is the pooled vectors of NT v2, RNA-FM and ESM-2 glued into one 1,472-wide vector and read by the same ridge probe: the probe-level version of concatenation, not the trained head. Ridge probe on frozen pooled vectors, identical for every row, on the published split, which is the leaky one (slide 7). LucaOne is 1.8B parameters against 108M for the three combined. Next, Mina Oct 22: the same comparison on E. coli, CoV-Vac and fungal; GTEx does not fit LucaOne's 1,280-token context.</a:t>
+              <a:t>LucaOne's two streams are +0.092 over the three BioLangFusion encoders concatenated, interval [+0.066, +0.120], resolved, and +0.170 over the best single encoder. "BLF three fused" is the pooled vectors of NT v2, RNA-FM and ESM-2 glued into one 1,472-wide vector and read by the same ridge probe: the probe-level version of concatenation, not the trained head. Ridge probe on frozen pooled vectors, identical for every row, on the published split, which is the leaky one (slide 7). LucaOne is 1.57B parameters as loaded, against about 205M for the three combined. Next, Mina Oct 22: the same comparison on E. coli, CoV-Vac and fungal; GTEx does not fit LucaOne's 1,280-token context.</a:t>
             </a:r>
             <a:endParaRPr lang="en-US" sz="1000" dirty="0"/>
           </a:p>
@@ -4354,7 +4694,7 @@
                 <a:ea typeface="Inter" pitchFamily="34" charset="-122"/>
                 <a:cs typeface="Inter" pitchFamily="34" charset="-120"/>
               </a:rPr>
-              <a:t>Outside the coding sequence there is real signal, and fusing a full transcript with its protein helps on both tasks</a:t>
+              <a:t>Outside the coding sequence there is real signal, and a full transcript fused with its protein leads the best single encoder on both tasks</a:t>
             </a:r>
             <a:endParaRPr lang="en-US" sz="2400" dirty="0"/>
           </a:p>
@@ -6467,8 +6807,8 @@
         </p:blipFill>
         <p:spPr>
           <a:xfrm>
-            <a:off x="813816" y="4407408"/>
-            <a:ext cx="6711696" cy="2267712"/>
+            <a:off x="813816" y="4553712"/>
+            <a:ext cx="6492240" cy="2139696"/>
           </a:xfrm>
           <a:prstGeom prst="rect">
             <a:avLst/>
@@ -6483,8 +6823,8 @@
         </p:nvSpPr>
         <p:spPr>
           <a:xfrm>
-            <a:off x="7818120" y="4407408"/>
-            <a:ext cx="3886200" cy="1920240"/>
+            <a:off x="7818120" y="4553712"/>
+            <a:ext cx="3886200" cy="1828800"/>
           </a:xfrm>
           <a:prstGeom prst="rect">
             <a:avLst/>
@@ -6500,7 +6840,7 @@
               <a:buNone/>
             </a:pPr>
             <a:r>
-              <a:rPr lang="en-US" sz="1050" b="1" dirty="0">
+              <a:rPr lang="en-US" sz="1000" b="1" dirty="0">
                 <a:solidFill>
                   <a:srgbClr val="31302E"/>
                 </a:solidFill>
@@ -6517,7 +6857,7 @@
               <a:buNone/>
             </a:pPr>
             <a:r>
-              <a:rPr lang="en-US" sz="1050" dirty="0">
+              <a:rPr lang="en-US" sz="1000" dirty="0">
                 <a:solidFill>
                   <a:srgbClr val="615D59"/>
                 </a:solidFill>
@@ -6527,14 +6867,14 @@
               </a:rPr>
               <a:t>Full transcript with protein over the best single encoder, on half-life and on translation efficiency. Means over nine gene-grouped splits; no paired interval yet, so not proof.</a:t>
             </a:r>
-            <a:endParaRPr lang="en-US" sz="1050" dirty="0"/>
+            <a:endParaRPr lang="en-US" sz="1000" dirty="0"/>
           </a:p>
           <a:p>
             <a:pPr indent="0" marL="0">
               <a:buNone/>
             </a:pPr>
             <a:r>
-              <a:rPr lang="en-US" sz="1050" b="1" dirty="0">
+              <a:rPr lang="en-US" sz="1000" b="1" dirty="0">
                 <a:solidFill>
                   <a:srgbClr val="31302E"/>
                 </a:solidFill>
@@ -6548,7 +6888,7 @@
               <a:buNone/>
             </a:pPr>
             <a:r>
-              <a:rPr lang="en-US" sz="1050" dirty="0">
+              <a:rPr lang="en-US" sz="1000" dirty="0">
                 <a:solidFill>
                   <a:srgbClr val="615D59"/>
                 </a:solidFill>
@@ -6556,9 +6896,9 @@
                 <a:ea typeface="Inter" pitchFamily="34" charset="-122"/>
                 <a:cs typeface="Inter" pitchFamily="34" charset="-120"/>
               </a:rPr>
-              <a:t>Counted composition of the whole transcript, no foundation model (the dashed line in each panel). An encoder has to clear that, not zero, and only the fused rows clearly do. Protein is the best single representation because both tasks track codon optimality and ORF length.</a:t>
+              <a:t>Counted composition of the whole transcript, no foundation model (the dashed line in each panel). An encoder has to clear that, not zero. On half-life the fused rows clear it by +0.064; on translation efficiency only by +0.010. Protein is the best single representation, plausibly because both tasks track codon optimality and ORF length.</a:t>
             </a:r>
-            <a:endParaRPr lang="en-US" sz="1050" dirty="0"/>
+            <a:endParaRPr lang="en-US" sz="1000" dirty="0"/>
           </a:p>
         </p:txBody>
       </p:sp>
@@ -6570,7 +6910,7 @@
         </p:nvSpPr>
         <p:spPr>
           <a:xfrm>
-            <a:off x="7818120" y="6355080"/>
+            <a:off x="7818120" y="6400800"/>
             <a:ext cx="3886200" cy="320040"/>
           </a:xfrm>
           <a:prstGeom prst="rect">
@@ -6587,7 +6927,7 @@
               <a:buNone/>
             </a:pPr>
             <a:r>
-              <a:rPr lang="en-US" sz="900" dirty="0">
+              <a:rPr lang="en-US" sz="850" dirty="0">
                 <a:solidFill>
                   <a:srgbClr val="615D59"/>
                 </a:solidFill>
@@ -6595,9 +6935,9 @@
                 <a:ea typeface="Inter" pitchFamily="34" charset="-122"/>
                 <a:cs typeface="Inter" pitchFamily="34" charset="-120"/>
               </a:rPr>
-              <a:t>Human only; mouse is embedded and not yet scored. Frozen encoders, windowed pooling, ridge probes, nine gene-grouped splits.</a:t>
+              <a:t>Human only; mouse is embedded, not yet scored. Frozen encoders, windowed pooling, ridge probes.</a:t>
             </a:r>
-            <a:endParaRPr lang="en-US" sz="900" dirty="0"/>
+            <a:endParaRPr lang="en-US" sz="850" dirty="0"/>
           </a:p>
         </p:txBody>
       </p:sp>
@@ -8474,7 +8814,7 @@
                 <a:ea typeface="Inter" pitchFamily="34" charset="-122"/>
                 <a:cs typeface="Inter" pitchFamily="34" charset="-120"/>
               </a:rPr>
-              <a:t>The build is right. Single encoders within 0.01 of the paper; cross-attention within 0.01 on all four benchmarks.</a:t>
+              <a:t>The build is right. Single encoders within 0.01 of the paper, RNA-FM on fungal aside; cross-attention nowhere more than 0.01 below it.</a:t>
             </a:r>
             <a:endParaRPr lang="en-US" sz="1150" dirty="0"/>
           </a:p>
@@ -8495,7 +8835,7 @@
                 <a:ea typeface="Inter" pitchFamily="34" charset="-122"/>
                 <a:cs typeface="Inter" pitchFamily="34" charset="-120"/>
               </a:rPr>
-              <a:t>The encoder matters more than the fusion head. Across all eight swaps, better RNA encoders lift fungal and E. coli alone, and fusion on top of them adds nothing resolved (slides 9 and 10).</a:t>
+              <a:t>The encoder matters more than the fusion head. Better RNA encoders lift fungal and E. coli alone; with mRNA-FM or CaLM in place fusion adds nothing resolved, and four one-seed gains remain (slides 9 and 10).</a:t>
             </a:r>
             <a:endParaRPr lang="en-US" sz="1150" dirty="0"/>
           </a:p>
@@ -8516,7 +8856,7 @@
                 <a:ea typeface="Inter" pitchFamily="34" charset="-122"/>
                 <a:cs typeface="Inter" pitchFamily="34" charset="-120"/>
               </a:rPr>
-              <a:t>Fusion still wins where the modalities are different molecules: GTEx +0.047 resolved; full transcript + protein +0.053 and +0.030.</a:t>
+              <a:t>Fusion helps where the second input is a different molecule or region: GTEx +0.047 resolved; full transcript + protein +0.053 and +0.030, no interval yet.</a:t>
             </a:r>
             <a:endParaRPr lang="en-US" sz="1150" dirty="0"/>
           </a:p>
@@ -8558,7 +8898,7 @@
                 <a:ea typeface="Inter" pitchFamily="34" charset="-122"/>
                 <a:cs typeface="Inter" pitchFamily="34" charset="-120"/>
               </a:rPr>
-              <a:t>The gated head is a selector, not a mixer, and the paper reports no error bars that would show which of its gains resolve.</a:t>
+              <a:t>With the paper's encoders the gated head mostly keeps one modality instead of mixing them, and the paper reports no error bars that would show which of its gains resolve.</a:t>
             </a:r>
             <a:endParaRPr lang="en-US" sz="1150" dirty="0"/>
           </a:p>
@@ -8667,7 +9007,7 @@
                 <a:ea typeface="Inter" pitchFamily="34" charset="-122"/>
                 <a:cs typeface="Inter" pitchFamily="34" charset="-120"/>
               </a:rPr>
-              <a:t>Seeds on the three surviving Phase B gains: cross-attention with HyenaDNA and with RiNALMo on CoV-Vac, the gated head with RiNALMo on E. coli. One seed each today.</a:t>
+              <a:t>Seeds on the four surviving Phase B gains: cross-attention with HyenaDNA and with RiNALMo on CoV-Vac, the gated head and concatenation with RiNALMo on E. coli. One seed each today.</a:t>
             </a:r>
             <a:endParaRPr lang="en-US" sz="1150" dirty="0"/>
           </a:p>
@@ -8861,7 +9201,7 @@
                 <a:ea typeface="Inter" pitchFamily="34" charset="-122"/>
                 <a:cs typeface="Inter" pitchFamily="34" charset="-120"/>
               </a:rPr>
-              <a:t>Since the last meeting · October 7 to 22</a:t>
+              <a:t>Since the last meeting · October 7 to 27</a:t>
             </a:r>
             <a:endParaRPr lang="en-US" sz="1200" dirty="0"/>
           </a:p>
@@ -8900,7 +9240,7 @@
                 <a:ea typeface="Inter" pitchFamily="34" charset="-122"/>
                 <a:cs typeface="Inter" pitchFamily="34" charset="-120"/>
               </a:rPr>
-              <a:t>Seven steps in two weeks, in the research plan's order: reproduce first, then change one thing at a time</a:t>
+              <a:t>Eight steps in three weeks, in the research plan's order: reproduce first, then change one thing at a time</a:t>
             </a:r>
             <a:endParaRPr lang="en-US" sz="2400" dirty="0"/>
           </a:p>
@@ -9031,7 +9371,7 @@
         </p:nvSpPr>
         <p:spPr>
           <a:xfrm>
-            <a:off x="877824" y="2734056"/>
+            <a:off x="877824" y="2670048"/>
             <a:ext cx="128016" cy="128016"/>
           </a:xfrm>
           <a:prstGeom prst="ellipse">
@@ -9056,7 +9396,7 @@
         </p:nvSpPr>
         <p:spPr>
           <a:xfrm>
-            <a:off x="1143000" y="2578608"/>
+            <a:off x="1143000" y="2514600"/>
             <a:ext cx="1234440" cy="548640"/>
           </a:xfrm>
           <a:prstGeom prst="rect">
@@ -9095,7 +9435,7 @@
         </p:nvSpPr>
         <p:spPr>
           <a:xfrm>
-            <a:off x="2423160" y="2578608"/>
+            <a:off x="2423160" y="2514600"/>
             <a:ext cx="9052560" cy="548640"/>
           </a:xfrm>
           <a:prstGeom prst="rect">
@@ -9148,7 +9488,7 @@
         </p:nvSpPr>
         <p:spPr>
           <a:xfrm>
-            <a:off x="877824" y="3282696"/>
+            <a:off x="877824" y="3154680"/>
             <a:ext cx="128016" cy="128016"/>
           </a:xfrm>
           <a:prstGeom prst="ellipse">
@@ -9173,7 +9513,7 @@
         </p:nvSpPr>
         <p:spPr>
           <a:xfrm>
-            <a:off x="1143000" y="3127248"/>
+            <a:off x="1143000" y="2999232"/>
             <a:ext cx="1234440" cy="548640"/>
           </a:xfrm>
           <a:prstGeom prst="rect">
@@ -9212,7 +9552,7 @@
         </p:nvSpPr>
         <p:spPr>
           <a:xfrm>
-            <a:off x="2423160" y="3127248"/>
+            <a:off x="2423160" y="2999232"/>
             <a:ext cx="9052560" cy="548640"/>
           </a:xfrm>
           <a:prstGeom prst="rect">
@@ -9251,7 +9591,7 @@
                 <a:ea typeface="Inter" pitchFamily="34" charset="-122"/>
                 <a:cs typeface="Inter" pitchFamily="34" charset="-120"/>
               </a:rPr>
-              <a:t>Single encoders reproduce; no fusion head beats the best single encoder; the paper's appendix version of the DNA upsampling is two codons out of register.</a:t>
+              <a:t>NT and ESM-2 reproduce, RNA-FM reads low; no fusion head beats the best single encoder; the appendix DNA upsampling is two codons out of register.</a:t>
             </a:r>
             <a:endParaRPr lang="en-US" sz="1150" dirty="0"/>
           </a:p>
@@ -9265,7 +9605,7 @@
         </p:nvSpPr>
         <p:spPr>
           <a:xfrm>
-            <a:off x="877824" y="3831336"/>
+            <a:off x="877824" y="3639312"/>
             <a:ext cx="128016" cy="128016"/>
           </a:xfrm>
           <a:prstGeom prst="ellipse">
@@ -9290,7 +9630,7 @@
         </p:nvSpPr>
         <p:spPr>
           <a:xfrm>
-            <a:off x="1143000" y="3675888"/>
+            <a:off x="1143000" y="3483864"/>
             <a:ext cx="1234440" cy="548640"/>
           </a:xfrm>
           <a:prstGeom prst="rect">
@@ -9329,7 +9669,7 @@
         </p:nvSpPr>
         <p:spPr>
           <a:xfrm>
-            <a:off x="2423160" y="3675888"/>
+            <a:off x="2423160" y="3483864"/>
             <a:ext cx="9052560" cy="548640"/>
           </a:xfrm>
           <a:prstGeom prst="rect">
@@ -9382,7 +9722,7 @@
         </p:nvSpPr>
         <p:spPr>
           <a:xfrm>
-            <a:off x="877824" y="4379976"/>
+            <a:off x="877824" y="4123944"/>
             <a:ext cx="128016" cy="128016"/>
           </a:xfrm>
           <a:prstGeom prst="ellipse">
@@ -9407,7 +9747,7 @@
         </p:nvSpPr>
         <p:spPr>
           <a:xfrm>
-            <a:off x="1143000" y="4224528"/>
+            <a:off x="1143000" y="3968496"/>
             <a:ext cx="1234440" cy="548640"/>
           </a:xfrm>
           <a:prstGeom prst="rect">
@@ -9446,7 +9786,7 @@
         </p:nvSpPr>
         <p:spPr>
           <a:xfrm>
-            <a:off x="2423160" y="4224528"/>
+            <a:off x="2423160" y="3968496"/>
             <a:ext cx="9052560" cy="548640"/>
           </a:xfrm>
           <a:prstGeom prst="rect">
@@ -9499,7 +9839,7 @@
         </p:nvSpPr>
         <p:spPr>
           <a:xfrm>
-            <a:off x="877824" y="4928616"/>
+            <a:off x="877824" y="4608576"/>
             <a:ext cx="128016" cy="128016"/>
           </a:xfrm>
           <a:prstGeom prst="ellipse">
@@ -9524,7 +9864,7 @@
         </p:nvSpPr>
         <p:spPr>
           <a:xfrm>
-            <a:off x="1143000" y="4773168"/>
+            <a:off x="1143000" y="4453128"/>
             <a:ext cx="1234440" cy="548640"/>
           </a:xfrm>
           <a:prstGeom prst="rect">
@@ -9563,7 +9903,7 @@
         </p:nvSpPr>
         <p:spPr>
           <a:xfrm>
-            <a:off x="2423160" y="4773168"/>
+            <a:off x="2423160" y="4453128"/>
             <a:ext cx="9052560" cy="548640"/>
           </a:xfrm>
           <a:prstGeom prst="rect">
@@ -9602,7 +9942,7 @@
                 <a:ea typeface="Inter" pitchFamily="34" charset="-122"/>
                 <a:cs typeface="Inter" pitchFamily="34" charset="-120"/>
               </a:rPr>
-              <a:t>Single encoders and cross-attention reproduce; the gated head does not; fusion appeared to win on E. coli.</a:t>
+              <a:t>Single encoders and cross-attention reproduce; the gated head misses on CoV-Vac and stability, concatenation on CoV-Vac; with the paper's encoders, fusion wins on E. coli.</a:t>
             </a:r>
             <a:endParaRPr lang="en-US" sz="1150" dirty="0"/>
           </a:p>
@@ -9616,7 +9956,7 @@
         </p:nvSpPr>
         <p:spPr>
           <a:xfrm>
-            <a:off x="877824" y="5477256"/>
+            <a:off x="877824" y="5093208"/>
             <a:ext cx="128016" cy="128016"/>
           </a:xfrm>
           <a:prstGeom prst="ellipse">
@@ -9641,7 +9981,7 @@
         </p:nvSpPr>
         <p:spPr>
           <a:xfrm>
-            <a:off x="1143000" y="5321808"/>
+            <a:off x="1143000" y="4937760"/>
             <a:ext cx="1234440" cy="548640"/>
           </a:xfrm>
           <a:prstGeom prst="rect">
@@ -9680,7 +10020,7 @@
         </p:nvSpPr>
         <p:spPr>
           <a:xfrm>
-            <a:off x="2423160" y="5321808"/>
+            <a:off x="2423160" y="4937760"/>
             <a:ext cx="9052560" cy="548640"/>
           </a:xfrm>
           <a:prstGeom prst="rect">
@@ -9705,7 +10045,7 @@
                 <a:ea typeface="Inter" pitchFamily="34" charset="-122"/>
                 <a:cs typeface="Inter" pitchFamily="34" charset="-120"/>
               </a:rPr>
-              <a:t>Phase B, LucaOne, half-life and TE on Chase's GPU. </a:t>
+              <a:t>Phase B begins, LucaOne, half-life and TE on Chase's GPU. </a:t>
             </a:r>
             <a:pPr indent="0" marL="0">
               <a:buNone/>
@@ -9719,7 +10059,7 @@
                 <a:ea typeface="Inter" pitchFamily="34" charset="-122"/>
                 <a:cs typeface="Inter" pitchFamily="34" charset="-120"/>
               </a:rPr>
-              <a:t>Swapping the RNA encoder erased the E. coli fusion gain; LucaOne beats the three fused on stability; full transcript + protein helps on both new tasks.</a:t>
+              <a:t>With mRNA-FM or CaLM in the RNA slot, the encoder alone matches fusion on E. coli; LucaOne beats the three fused on stability; full transcript + protein helps on both new tasks.</a:t>
             </a:r>
             <a:endParaRPr lang="en-US" sz="1150" dirty="0"/>
           </a:p>
@@ -9727,7 +10067,124 @@
       </p:sp>
       <p:sp>
         <p:nvSpPr>
-          <p:cNvPr id="25" name="Text 23"/>
+          <p:cNvPr id="25" name="Shape 23"/>
+          <p:cNvSpPr/>
+          <p:nvPr/>
+        </p:nvSpPr>
+        <p:spPr>
+          <a:xfrm>
+            <a:off x="877824" y="5577840"/>
+            <a:ext cx="128016" cy="128016"/>
+          </a:xfrm>
+          <a:prstGeom prst="ellipse">
+            <a:avLst/>
+          </a:prstGeom>
+          <a:solidFill>
+            <a:srgbClr val="DCA323"/>
+          </a:solidFill>
+          <a:ln w="12700">
+            <a:solidFill>
+              <a:srgbClr val="DCA323"/>
+            </a:solidFill>
+            <a:prstDash val="solid"/>
+          </a:ln>
+        </p:spPr>
+      </p:sp>
+      <p:sp>
+        <p:nvSpPr>
+          <p:cNvPr id="26" name="Text 24"/>
+          <p:cNvSpPr txBox="1"/>
+          <p:nvPr/>
+        </p:nvSpPr>
+        <p:spPr>
+          <a:xfrm>
+            <a:off x="1143000" y="5422392"/>
+            <a:ext cx="1234440" cy="548640"/>
+          </a:xfrm>
+          <a:prstGeom prst="rect">
+            <a:avLst/>
+          </a:prstGeom>
+          <a:noFill/>
+          <a:ln/>
+        </p:spPr>
+        <p:txBody>
+          <a:bodyPr wrap="square" lIns="0" tIns="0" rIns="0" bIns="0" rtlCol="0" anchor="t"/>
+          <a:lstStyle/>
+          <a:p>
+            <a:pPr indent="0" marL="0">
+              <a:buNone/>
+            </a:pPr>
+            <a:r>
+              <a:rPr lang="en-US" sz="1150" b="1" dirty="0">
+                <a:solidFill>
+                  <a:srgbClr val="31302E"/>
+                </a:solidFill>
+                <a:latin typeface="Inter" pitchFamily="34" charset="0"/>
+                <a:ea typeface="Inter" pitchFamily="34" charset="-122"/>
+                <a:cs typeface="Inter" pitchFamily="34" charset="-120"/>
+              </a:rPr>
+              <a:t>Oct 25 to 27</a:t>
+            </a:r>
+            <a:endParaRPr lang="en-US" sz="1150" dirty="0"/>
+          </a:p>
+        </p:txBody>
+      </p:sp>
+      <p:sp>
+        <p:nvSpPr>
+          <p:cNvPr id="27" name="Text 25"/>
+          <p:cNvSpPr txBox="1"/>
+          <p:nvPr/>
+        </p:nvSpPr>
+        <p:spPr>
+          <a:xfrm>
+            <a:off x="2423160" y="5422392"/>
+            <a:ext cx="9052560" cy="548640"/>
+          </a:xfrm>
+          <a:prstGeom prst="rect">
+            <a:avLst/>
+          </a:prstGeom>
+          <a:noFill/>
+          <a:ln/>
+        </p:spPr>
+        <p:txBody>
+          <a:bodyPr wrap="square" lIns="0" tIns="0" rIns="0" bIns="0" rtlCol="0" anchor="t"/>
+          <a:lstStyle/>
+          <a:p>
+            <a:pPr indent="0" marL="0">
+              <a:buNone/>
+            </a:pPr>
+            <a:r>
+              <a:rPr lang="en-US" sz="1150" b="1" dirty="0">
+                <a:solidFill>
+                  <a:srgbClr val="31302E"/>
+                </a:solidFill>
+                <a:latin typeface="Inter" pitchFamily="34" charset="0"/>
+                <a:ea typeface="Inter" pitchFamily="34" charset="-122"/>
+                <a:cs typeface="Inter" pitchFamily="34" charset="-120"/>
+              </a:rPr>
+              <a:t>Phase B completed on Chase's GPU. </a:t>
+            </a:r>
+            <a:pPr indent="0" marL="0">
+              <a:buNone/>
+            </a:pPr>
+            <a:r>
+              <a:rPr lang="en-US" sz="1150" dirty="0">
+                <a:solidFill>
+                  <a:srgbClr val="615D59"/>
+                </a:solidFill>
+                <a:latin typeface="Inter" pitchFamily="34" charset="0"/>
+                <a:ea typeface="Inter" pitchFamily="34" charset="-122"/>
+                <a:cs typeface="Inter" pitchFamily="34" charset="-120"/>
+              </a:rPr>
+              <a:t>The other six swaps (two DNA, RiNALMo, three protein): 81 head-versus-single comparisons, four one-seed fusion gains no artifact explains.</a:t>
+            </a:r>
+            <a:endParaRPr lang="en-US" sz="1150" dirty="0"/>
+          </a:p>
+        </p:txBody>
+      </p:sp>
+      <p:sp>
+        <p:nvSpPr>
+          <p:cNvPr id="28" name="Text 26"/>
           <p:cNvSpPr txBox="1"/>
           <p:nvPr/>
         </p:nvSpPr>
@@ -10227,7 +10684,7 @@
                 <a:ea typeface="Inter" pitchFamily="34" charset="-122"/>
                 <a:cs typeface="Inter" pitchFamily="34" charset="-120"/>
               </a:rPr>
-              <a:t>The single encoders and cross-attention reproduce; the gated head does not</a:t>
+              <a:t>Cross-attention and the single encoders reproduce, RNA-FM on fungal aside; concatenation and the gated head do not</a:t>
             </a:r>
             <a:endParaRPr lang="en-US" sz="2400" dirty="0"/>
           </a:p>
@@ -11079,7 +11536,7 @@
                       <a:tailEnd type="none" w="med" len="med"/>
                     </a:lnB>
                     <a:solidFill>
-                      <a:srgbClr val="FFFFFF"/>
+                      <a:srgbClr val="FBF1D6"/>
                     </a:solidFill>
                   </a:tcPr>
                 </a:tc>
@@ -12105,7 +12562,7 @@
                       <a:tailEnd type="none" w="med" len="med"/>
                     </a:lnB>
                     <a:solidFill>
-                      <a:srgbClr val="FFFFFF"/>
+                      <a:srgbClr val="FBF1D6"/>
                     </a:solidFill>
                   </a:tcPr>
                 </a:tc>
@@ -12173,7 +12630,7 @@
                       <a:tailEnd type="none" w="med" len="med"/>
                     </a:lnB>
                     <a:solidFill>
-                      <a:srgbClr val="FFFFFF"/>
+                      <a:srgbClr val="FBF1D6"/>
                     </a:solidFill>
                   </a:tcPr>
                 </a:tc>
@@ -15103,7 +15560,7 @@
                 <a:ea typeface="Inter" pitchFamily="34" charset="-122"/>
                 <a:cs typeface="Inter" pitchFamily="34" charset="-120"/>
               </a:rPr>
-              <a:t>Nine wins and six losses in fifteen comparisons, with no interval anywhere in the paper. The claim "fusion consistently outperforms unimodal baselines" holds only by taking the best head per task after seeing the test scores, and a different head wins on different tasks. E. coli in accuracy points. Ab1 is the one task where all three heads win, and it is the one not in the public release.</a:t>
+              <a:t>Nine wins and six losses in fifteen comparisons, with no interval anywhere in the paper. The claim "fusion consistently outperforms unimodal baselines" holds only by taking the best head per task after seeing the test scores, and a different head wins on different tasks. E. coli in accuracy points. All three heads are ahead only on fungal, by +0.001 to +0.020, and on Ab1, the one task not in the public release.</a:t>
             </a:r>
             <a:endParaRPr lang="en-US" sz="850" dirty="0"/>
           </a:p>
@@ -15142,7 +15599,7 @@
                 <a:ea typeface="Inter" pitchFamily="34" charset="-122"/>
                 <a:cs typeface="Inter" pitchFamily="34" charset="-120"/>
               </a:rPr>
-              <a:t>Ours (paper). Shaded: below the paper by more than 0.01. Within 0.01 counts as reproduced; Spearman carries ±0.03 of noise on these splits and E. coli accuracy ±3.7 points. The figure is the same numbers: filled ours, open published.</a:t>
+              <a:t>Ours (paper), seed means where three seeds exist. Shaded: more than 0.01 below the paper; no E. coli score is below by more than its ±3.7 points of noise. Figure: filled ours, open published.</a:t>
             </a:r>
             <a:endParaRPr lang="en-US" sz="800" dirty="0"/>
           </a:p>
@@ -15252,7 +15709,7 @@
                 <a:ea typeface="Inter" pitchFamily="34" charset="-122"/>
                 <a:cs typeface="Inter" pitchFamily="34" charset="-120"/>
               </a:rPr>
-              <a:t>Fusion against the best single encoder: three resolved wins in fourteen comparisons, and two resolved losses</a:t>
+              <a:t>Fusion against the best single encoder: two resolved wins and two resolved losses in twelve comparisons</a:t>
             </a:r>
             <a:endParaRPr lang="en-US" sz="2400" dirty="0"/>
           </a:p>
@@ -16716,7 +17173,7 @@
                 <a:ea typeface="Inter" pitchFamily="34" charset="-122"/>
                 <a:cs typeface="Inter" pitchFamily="34" charset="-120"/>
               </a:rPr>
-              <a:t>Read the interval before the number. It is the 95% paired bootstrap over the published test rows: the range the difference falls in across 4,000 resamples of that test set. If it crosses zero the benchmark cannot tell the two apart, whichever way the point estimate leans. Shaded cells are the four differences that resolve, two wins and two losses. In the figure the same thing is the line through each dot, and filled markers are the resolved ones. Cross-attention minus gated MIL resolves on fungal (+0.022) and CoV-Vac (+0.052), so the paper's ordering of the heads is reversed.</a:t>
+              <a:t>Read the interval before the number. It is the 95% paired bootstrap over the published test rows: the range the difference falls in across 4,000 resamples of that test set. If it crosses zero the benchmark cannot tell the two apart, whichever way the point estimate leans. Shaded cells are the four differences that resolve, two wins and two losses. In the figure the same thing is the line through each dot, and filled markers are the resolved ones; it adds stability's unseen rows and GTEx for contrast. Cross-attention minus gated MIL resolves on fungal (+0.022) and CoV-Vac (+0.052), the reverse of the paper's ordering of those two heads.</a:t>
             </a:r>
             <a:endParaRPr lang="en-US" sz="950" dirty="0"/>
           </a:p>
@@ -16787,7 +17244,7 @@
                 <a:ea typeface="Inter" pitchFamily="34" charset="-122"/>
                 <a:cs typeface="Inter" pitchFamily="34" charset="-120"/>
               </a:rPr>
-              <a:t>Phase A · how the three fusion heads work, and why the gated one collapses onto one modality</a:t>
+              <a:t>Phase A · how the three fusion heads work, and why the gated one mostly keeps one modality</a:t>
             </a:r>
             <a:endParaRPr lang="en-US" sz="1200" dirty="0"/>
           </a:p>
@@ -16826,7 +17283,7 @@
                 <a:ea typeface="Inter" pitchFamily="34" charset="-122"/>
                 <a:cs typeface="Inter" pitchFamily="34" charset="-120"/>
               </a:rPr>
-              <a:t>Concatenation keeps everything, the gated head keeps one modality, cross-attention lets any position read any modality</a:t>
+              <a:t>Concatenation keeps everything, the gated head mostly keeps one modality, cross-attention lets any position read any modality</a:t>
             </a:r>
             <a:endParaRPr lang="en-US" sz="2400" dirty="0"/>
           </a:p>
@@ -18613,7 +19070,7 @@
                           <a:ea typeface="Inter" pitchFamily="34" charset="-122"/>
                           <a:cs typeface="Inter" pitchFamily="34" charset="-120"/>
                         </a:rPr>
-                        <a:t>Any benchmark</a:t>
+                        <a:t>Higher entropy weight</a:t>
                       </a:r>
                       <a:endParaRPr lang="en-US" sz="1100" dirty="0">
                         <a:latin typeface="Inter" charset="0"/>
@@ -18749,7 +19206,7 @@
                           <a:ea typeface="Inter" pitchFamily="34" charset="-122"/>
                           <a:cs typeface="Inter" pitchFamily="34" charset="-120"/>
                         </a:rPr>
-                        <a:t>one modality takes 1.00, the other two 0.00</a:t>
+                        <a:t>one modality takes 1.00, others 0.00 (except fungal at 0.5: 0.00 / 0.28 / 0.72)</a:t>
                       </a:r>
                       <a:endParaRPr lang="en-US" sz="1100" dirty="0">
                         <a:latin typeface="Inter" charset="0"/>
@@ -18844,7 +19301,7 @@
                 <a:ea typeface="Inter" pitchFamily="34" charset="-122"/>
                 <a:cs typeface="Inter" pitchFamily="34" charset="-120"/>
               </a:rPr>
-              <a:t>Weights averaged over each test split; three values are seeds 0, 1 and 2. RNA is at zero everywhere. On CoV-Vac the head keeps DNA and scores 0.783, the DNA-only score, while RNA-FM alone is the best encoder at 0.838.</a:t>
+              <a:t>Weights averaged over each test split; three values are seeds 0, 1 and 2 (stability, one seed). RNA gets almost nothing on CoV-Vac, E. coli and stability; only fungal gives it a share. On CoV-Vac the head keeps DNA and scores 0.783, near DNA alone (0.779), while RNA-FM alone is the best encoder at 0.838.</a:t>
             </a:r>
             <a:endParaRPr lang="en-US" sz="850" dirty="0"/>
           </a:p>
@@ -19083,7 +19540,7 @@
                 <a:ea typeface="Inter" pitchFamily="34" charset="-122"/>
                 <a:cs typeface="Inter" pitchFamily="34" charset="-120"/>
               </a:rPr>
-              <a:t>The published test split. The paper's stability numbers are on this split (ours match within 0.01). 2,444 of its rows repeat a training sequence, usually with a different label.</a:t>
+              <a:t>The published test split. The paper's stability numbers are on this split (our single encoders and cross-attention match within 0.01). 2,444 of its rows repeat a training sequence, usually with a different label.</a:t>
             </a:r>
             <a:endParaRPr lang="en-US" sz="1050" dirty="0"/>
           </a:p>
@@ -19510,7 +19967,7 @@
                 <a:ea typeface="Inter" pitchFamily="34" charset="-122"/>
                 <a:cs typeface="Inter" pitchFamily="34" charset="-120"/>
               </a:rPr>
-              <a:t>Changing the RNA encoder moves the score by a lot; changing the DNA or protein encoder barely moves it</a:t>
+              <a:t>The RNA slot is where the encoder matters: better RNA encoders lift fungal and E. coli far more than any DNA or protein swap</a:t>
             </a:r>
             <a:endParaRPr lang="en-US" sz="2400" dirty="0"/>
           </a:p>
@@ -19532,8 +19989,8 @@
         </p:blipFill>
         <p:spPr>
           <a:xfrm>
-            <a:off x="658368" y="1956816"/>
-            <a:ext cx="10881360" cy="3355848"/>
+            <a:off x="832104" y="1920240"/>
+            <a:ext cx="10524744" cy="3246120"/>
           </a:xfrm>
           <a:prstGeom prst="rect">
             <a:avLst/>
@@ -19555,7 +20012,7 @@
           </p:nvPr>
         </p:nvGraphicFramePr>
         <p:xfrm>
-          <a:off x="813816" y="5340096"/>
+          <a:off x="813816" y="5230368"/>
           <a:ext cx="10881360" cy="914400"/>
         </p:xfrm>
         <a:graphic>
@@ -22523,7 +22980,7 @@
                           <a:ea typeface="Inter" pitchFamily="34" charset="-122"/>
                           <a:cs typeface="Inter" pitchFamily="34" charset="-120"/>
                         </a:rPr>
-                        <a:t>0.537 (0.531)</a:t>
+                        <a:t>0.536 (0.531)</a:t>
                       </a:r>
                       <a:endParaRPr lang="en-US" sz="950" dirty="0">
                         <a:latin typeface="Inter" charset="0"/>
@@ -22655,7 +23112,7 @@
         </p:nvSpPr>
         <p:spPr>
           <a:xfrm>
-            <a:off x="813816" y="6528816"/>
+            <a:off x="813816" y="6400800"/>
             <a:ext cx="10881360" cy="274320"/>
           </a:xfrm>
           <a:prstGeom prst="rect">
@@ -22680,7 +23137,7 @@
                 <a:ea typeface="Inter" pitchFamily="34" charset="-122"/>
                 <a:cs typeface="Inter" pitchFamily="34" charset="-120"/>
               </a:rPr>
-              <a:t>Each swapped encoder alone through the same TextCNN, test split, seed 0; the encoder it replaces in brackets. The three RNA swaps lift fungal from 0.722 past NT v2 (0.813) and past the paper's best fused model (0.824), and E. coli from 50.7 to 58.7: mRNA-FM alone is +8.0 points over RNA-FM alone [+3.9, +11.9], CaLM +6.8 [+2.5, +10.8], both resolved.</a:t>
+              <a:t>Each swapped encoder alone through the same TextCNN, test split, seed 0; brackets: the replaced encoder's seed-0 reference run (slide 4 shows seed means). The RNA swaps lift fungal from 0.722 past NT v2 (0.813) and the paper's best fused model (0.824), and E. coli from 50.7 to 58.7: mRNA-FM alone +8.0 points over RNA-FM alone [+4.0, +11.8], CaLM +6.9 [+2.8, +10.8], both resolved.</a:t>
             </a:r>
             <a:endParaRPr lang="en-US" sz="850" dirty="0"/>
           </a:p>
